--- a/presentation/Phase_Disaggregation_LLM_Inference.pptx
+++ b/presentation/Phase_Disaggregation_LLM_Inference.pptx
@@ -37,6 +37,7 @@
     <p:sldId id="285" r:id="rId36"/>
     <p:sldId id="286" r:id="rId37"/>
     <p:sldId id="287" r:id="rId38"/>
+    <p:sldId id="288" r:id="rId39"/>
   </p:sldIdLst>
   <p:sldSz cx="12191695" cy="6858000" type="screen4x3"/>
   <p:notesSz cx="6858000" cy="9144000"/>
@@ -3389,7 +3390,7 @@
         <p:spPr>
           <a:xfrm>
             <a:off x="1737360" y="1097280"/>
-            <a:ext cx="8686800" cy="4885215"/>
+            <a:ext cx="8686800" cy="3926753"/>
           </a:xfrm>
           <a:prstGeom prst="rect">
             <a:avLst/>
@@ -3404,7 +3405,7 @@
         </p:nvSpPr>
         <p:spPr>
           <a:xfrm>
-            <a:off x="1737360" y="6119655"/>
+            <a:off x="1737360" y="5161193"/>
             <a:ext cx="8686800" cy="365760"/>
           </a:xfrm>
           <a:prstGeom prst="rect">
@@ -3427,7 +3428,7 @@
               </a:defRPr>
             </a:pPr>
             <a:r>
-              <a:t>Splitwise Figure 3: Input/output token length distributions from two Azure LLM services</a:t>
+              <a:t>Source: Patel et al., ISCA 2024, Figure 3</a:t>
             </a:r>
           </a:p>
         </p:txBody>
@@ -4804,7 +4805,7 @@
         <p:spPr>
           <a:xfrm>
             <a:off x="1737360" y="1097280"/>
-            <a:ext cx="8686800" cy="8319062"/>
+            <a:ext cx="8686800" cy="8883668"/>
           </a:xfrm>
           <a:prstGeom prst="rect">
             <a:avLst/>
@@ -4819,7 +4820,7 @@
         </p:nvSpPr>
         <p:spPr>
           <a:xfrm>
-            <a:off x="1737360" y="9553502"/>
+            <a:off x="1737360" y="10118108"/>
             <a:ext cx="8686800" cy="365760"/>
           </a:xfrm>
           <a:prstGeom prst="rect">
@@ -4842,7 +4843,7 @@
               </a:defRPr>
             </a:pPr>
             <a:r>
-              <a:t>Splitwise Figure 10: Three-pool architecture with cluster-level scheduling</a:t>
+              <a:t>Source: Patel et al., ISCA 2024, Figure 10</a:t>
             </a:r>
           </a:p>
         </p:txBody>
@@ -6395,7 +6396,7 @@
         <p:spPr>
           <a:xfrm>
             <a:off x="1737360" y="1097280"/>
-            <a:ext cx="8686800" cy="12213037"/>
+            <a:ext cx="8686800" cy="7088147"/>
           </a:xfrm>
           <a:prstGeom prst="rect">
             <a:avLst/>
@@ -6410,7 +6411,7 @@
         </p:nvSpPr>
         <p:spPr>
           <a:xfrm>
-            <a:off x="1737360" y="13447477"/>
+            <a:off x="1737360" y="8322587"/>
             <a:ext cx="8686800" cy="365760"/>
           </a:xfrm>
           <a:prstGeom prst="rect">
@@ -6433,7 +6434,7 @@
               </a:defRPr>
             </a:pPr>
             <a:r>
-              <a:t>Splitwise Figure 16: Throughput vs latency across cluster configurations</a:t>
+              <a:t>Source: Patel et al., ISCA 2024, Figure 16</a:t>
             </a:r>
           </a:p>
         </p:txBody>
@@ -8018,7 +8019,7 @@
         <p:spPr>
           <a:xfrm>
             <a:off x="1737360" y="1097280"/>
-            <a:ext cx="8686800" cy="6350779"/>
+            <a:ext cx="8686800" cy="4711219"/>
           </a:xfrm>
           <a:prstGeom prst="rect">
             <a:avLst/>
@@ -8033,7 +8034,7 @@
         </p:nvSpPr>
         <p:spPr>
           <a:xfrm>
-            <a:off x="1737360" y="7585219"/>
+            <a:off x="1737360" y="5945659"/>
             <a:ext cx="8686800" cy="365760"/>
           </a:xfrm>
           <a:prstGeom prst="rect">
@@ -8056,7 +8057,7 @@
               </a:defRPr>
             </a:pPr>
             <a:r>
-              <a:t>DistServe Figure 6: Disaggregated prefill and decoding with pull-based KV-cache transfer</a:t>
+              <a:t>Source: Zhong et al., OSDI 2024, Figure 6</a:t>
             </a:r>
           </a:p>
         </p:txBody>
@@ -9496,7 +9497,7 @@
         <p:spPr>
           <a:xfrm>
             <a:off x="1737360" y="1097280"/>
-            <a:ext cx="8686800" cy="3511323"/>
+            <a:ext cx="8686800" cy="4175268"/>
           </a:xfrm>
           <a:prstGeom prst="rect">
             <a:avLst/>
@@ -9511,7 +9512,7 @@
         </p:nvSpPr>
         <p:spPr>
           <a:xfrm>
-            <a:off x="1737360" y="4745763"/>
+            <a:off x="1737360" y="5409708"/>
             <a:ext cx="8686800" cy="365760"/>
           </a:xfrm>
           <a:prstGeom prst="rect">
@@ -9534,7 +9535,7 @@
               </a:defRPr>
             </a:pPr>
             <a:r>
-              <a:t>DistServe Figure 8: Goodput comparison on ShareGPT workload across OPT model sizes</a:t>
+              <a:t>Source: Zhong et al., OSDI 2024, Figure 8</a:t>
             </a:r>
           </a:p>
         </p:txBody>
@@ -9618,7 +9619,7 @@
         <p:spPr>
           <a:xfrm>
             <a:off x="1737360" y="1097280"/>
-            <a:ext cx="8686800" cy="1872706"/>
+            <a:ext cx="8686800" cy="2705004"/>
           </a:xfrm>
           <a:prstGeom prst="rect">
             <a:avLst/>
@@ -9633,7 +9634,7 @@
         </p:nvSpPr>
         <p:spPr>
           <a:xfrm>
-            <a:off x="1737360" y="3107146"/>
+            <a:off x="1737360" y="3939444"/>
             <a:ext cx="8686800" cy="365760"/>
           </a:xfrm>
           <a:prstGeom prst="rect">
@@ -9656,7 +9657,7 @@
               </a:defRPr>
             </a:pPr>
             <a:r>
-              <a:t>DistServe Figure 9: HumanEval (code completion) and LongBench (summarization) results</a:t>
+              <a:t>Source: Zhong et al., OSDI 2024, Figure 9</a:t>
             </a:r>
           </a:p>
         </p:txBody>
@@ -10088,7 +10089,7 @@
         <p:spPr>
           <a:xfrm>
             <a:off x="1737360" y="1097280"/>
-            <a:ext cx="8686800" cy="6110960"/>
+            <a:ext cx="8686800" cy="5376920"/>
           </a:xfrm>
           <a:prstGeom prst="rect">
             <a:avLst/>
@@ -10103,7 +10104,7 @@
         </p:nvSpPr>
         <p:spPr>
           <a:xfrm>
-            <a:off x="1737360" y="7345400"/>
+            <a:off x="1737360" y="6611360"/>
             <a:ext cx="8686800" cy="365760"/>
           </a:xfrm>
           <a:prstGeom prst="rect">
@@ -10126,7 +10127,7 @@
               </a:defRPr>
             </a:pPr>
             <a:r>
-              <a:t>DistServe Figure 10: CDF of TTFT and TPOT, disaggregated vs colocated serving</a:t>
+              <a:t>Source: Zhong et al., OSDI 2024, Figure 10</a:t>
             </a:r>
           </a:p>
         </p:txBody>
@@ -12256,6 +12257,332 @@
     <p:bg>
       <p:bgPr>
         <a:solidFill>
+          <a:srgbClr val="FFFFFF"/>
+        </a:solidFill>
+        <a:effectLst/>
+      </p:bgPr>
+    </p:bg>
+    <p:spTree>
+      <p:nvGrpSpPr>
+        <p:cNvPr id="1" name=""/>
+        <p:cNvGrpSpPr/>
+        <p:nvPr/>
+      </p:nvGrpSpPr>
+      <p:grpSpPr/>
+      <p:sp>
+        <p:nvSpPr>
+          <p:cNvPr id="2" name="TextBox 1"/>
+          <p:cNvSpPr txBox="1"/>
+          <p:nvPr/>
+        </p:nvSpPr>
+        <p:spPr>
+          <a:xfrm>
+            <a:off x="1097280" y="457200"/>
+            <a:ext cx="10058400" cy="640080"/>
+          </a:xfrm>
+          <a:prstGeom prst="rect">
+            <a:avLst/>
+          </a:prstGeom>
+          <a:noFill/>
+        </p:spPr>
+        <p:txBody>
+          <a:bodyPr wrap="square">
+            <a:spAutoFit/>
+          </a:bodyPr>
+          <a:lstStyle/>
+          <a:p>
+            <a:pPr algn="l">
+              <a:defRPr sz="3400" b="1">
+                <a:solidFill>
+                  <a:srgbClr val="1A1A1A"/>
+                </a:solidFill>
+                <a:latin typeface="Palatino Linotype"/>
+              </a:defRPr>
+            </a:pPr>
+            <a:r>
+              <a:t>References</a:t>
+            </a:r>
+          </a:p>
+        </p:txBody>
+      </p:sp>
+      <p:sp>
+        <p:nvSpPr>
+          <p:cNvPr id="3" name="TextBox 2"/>
+          <p:cNvSpPr txBox="1"/>
+          <p:nvPr/>
+        </p:nvSpPr>
+        <p:spPr>
+          <a:xfrm>
+            <a:off x="1097280" y="1371600"/>
+            <a:ext cx="9601200" cy="5029200"/>
+          </a:xfrm>
+          <a:prstGeom prst="rect">
+            <a:avLst/>
+          </a:prstGeom>
+          <a:noFill/>
+        </p:spPr>
+        <p:txBody>
+          <a:bodyPr wrap="square">
+            <a:spAutoFit/>
+          </a:bodyPr>
+          <a:lstStyle/>
+          <a:p>
+            <a:pPr algn="l">
+              <a:defRPr sz="1300" b="0">
+                <a:solidFill>
+                  <a:srgbClr val="333333"/>
+                </a:solidFill>
+                <a:latin typeface="Palatino Linotype"/>
+              </a:defRPr>
+            </a:pPr>
+            <a:r>
+              <a:t>[1]  P. Patel, E. Choukse, C. Zhang, A. Shah, I. Goiri, S. Maleki, R. Bianchini.</a:t>
+            </a:r>
+          </a:p>
+          <a:p>
+            <a:pPr algn="l">
+              <a:spcBef>
+                <a:spcPts val="100"/>
+              </a:spcBef>
+              <a:defRPr sz="1300" b="0">
+                <a:solidFill>
+                  <a:srgbClr val="333333"/>
+                </a:solidFill>
+                <a:latin typeface="Palatino Linotype"/>
+              </a:defRPr>
+            </a:pPr>
+            <a:r>
+              <a:t>     "Splitwise: Efficient Generative LLM Inference Using Phase Splitting."</a:t>
+            </a:r>
+          </a:p>
+          <a:p>
+            <a:pPr algn="l">
+              <a:spcBef>
+                <a:spcPts val="100"/>
+              </a:spcBef>
+              <a:defRPr sz="1300" b="0">
+                <a:solidFill>
+                  <a:srgbClr val="333333"/>
+                </a:solidFill>
+                <a:latin typeface="Palatino Linotype"/>
+              </a:defRPr>
+            </a:pPr>
+            <a:r>
+              <a:t>     ISCA 2024. arXiv:2311.18677</a:t>
+            </a:r>
+          </a:p>
+          <a:p>
+            <a:pPr algn="l">
+              <a:spcBef>
+                <a:spcPts val="100"/>
+              </a:spcBef>
+              <a:defRPr sz="1300" b="0">
+                <a:solidFill>
+                  <a:srgbClr val="333333"/>
+                </a:solidFill>
+                <a:latin typeface="Palatino Linotype"/>
+              </a:defRPr>
+            </a:pPr>
+          </a:p>
+          <a:p>
+            <a:pPr algn="l">
+              <a:spcBef>
+                <a:spcPts val="100"/>
+              </a:spcBef>
+              <a:defRPr sz="1300" b="0">
+                <a:solidFill>
+                  <a:srgbClr val="333333"/>
+                </a:solidFill>
+                <a:latin typeface="Palatino Linotype"/>
+              </a:defRPr>
+            </a:pPr>
+            <a:r>
+              <a:t>[2]  Y. Zhong, S. Liu, J. Chen, J. Hu, Y. Zhu, X. Liu, X. Jin, H. Zhang.</a:t>
+            </a:r>
+          </a:p>
+          <a:p>
+            <a:pPr algn="l">
+              <a:spcBef>
+                <a:spcPts val="100"/>
+              </a:spcBef>
+              <a:defRPr sz="1300" b="0">
+                <a:solidFill>
+                  <a:srgbClr val="333333"/>
+                </a:solidFill>
+                <a:latin typeface="Palatino Linotype"/>
+              </a:defRPr>
+            </a:pPr>
+            <a:r>
+              <a:t>     "DistServe: Disaggregating Prefill and Decoding for Goodput-optimized</a:t>
+            </a:r>
+          </a:p>
+          <a:p>
+            <a:pPr algn="l">
+              <a:spcBef>
+                <a:spcPts val="100"/>
+              </a:spcBef>
+              <a:defRPr sz="1300" b="0">
+                <a:solidFill>
+                  <a:srgbClr val="333333"/>
+                </a:solidFill>
+                <a:latin typeface="Palatino Linotype"/>
+              </a:defRPr>
+            </a:pPr>
+            <a:r>
+              <a:t>     Large Language Model Serving."  OSDI 2024. arXiv:2401.09670</a:t>
+            </a:r>
+          </a:p>
+          <a:p>
+            <a:pPr algn="l">
+              <a:spcBef>
+                <a:spcPts val="100"/>
+              </a:spcBef>
+              <a:defRPr sz="1300" b="0">
+                <a:solidFill>
+                  <a:srgbClr val="333333"/>
+                </a:solidFill>
+                <a:latin typeface="Palatino Linotype"/>
+              </a:defRPr>
+            </a:pPr>
+          </a:p>
+          <a:p>
+            <a:pPr algn="l">
+              <a:spcBef>
+                <a:spcPts val="100"/>
+              </a:spcBef>
+              <a:defRPr sz="1300" b="0">
+                <a:solidFill>
+                  <a:srgbClr val="333333"/>
+                </a:solidFill>
+                <a:latin typeface="Palatino Linotype"/>
+              </a:defRPr>
+            </a:pPr>
+            <a:r>
+              <a:t>[3]  A. Agrawal et al. Sarathi: Efficient LLM Inference by Piggybacking Decodes</a:t>
+            </a:r>
+          </a:p>
+          <a:p>
+            <a:pPr algn="l">
+              <a:spcBef>
+                <a:spcPts val="100"/>
+              </a:spcBef>
+              <a:defRPr sz="1300" b="0">
+                <a:solidFill>
+                  <a:srgbClr val="333333"/>
+                </a:solidFill>
+                <a:latin typeface="Palatino Linotype"/>
+              </a:defRPr>
+            </a:pPr>
+            <a:r>
+              <a:t>     with Chunked Prefills. arXiv:2308.16369, 2023.</a:t>
+            </a:r>
+          </a:p>
+          <a:p>
+            <a:pPr algn="l">
+              <a:spcBef>
+                <a:spcPts val="100"/>
+              </a:spcBef>
+              <a:defRPr sz="1300" b="0">
+                <a:solidFill>
+                  <a:srgbClr val="333333"/>
+                </a:solidFill>
+                <a:latin typeface="Palatino Linotype"/>
+              </a:defRPr>
+            </a:pPr>
+          </a:p>
+          <a:p>
+            <a:pPr algn="l">
+              <a:spcBef>
+                <a:spcPts val="100"/>
+              </a:spcBef>
+              <a:defRPr sz="1300" b="0">
+                <a:solidFill>
+                  <a:srgbClr val="333333"/>
+                </a:solidFill>
+                <a:latin typeface="Palatino Linotype"/>
+              </a:defRPr>
+            </a:pPr>
+            <a:r>
+              <a:t>[4]  W. Kwon et al. Efficient Memory Management for Large Language Model Serving</a:t>
+            </a:r>
+          </a:p>
+          <a:p>
+            <a:pPr algn="l">
+              <a:spcBef>
+                <a:spcPts val="100"/>
+              </a:spcBef>
+              <a:defRPr sz="1300" b="0">
+                <a:solidFill>
+                  <a:srgbClr val="333333"/>
+                </a:solidFill>
+                <a:latin typeface="Palatino Linotype"/>
+              </a:defRPr>
+            </a:pPr>
+            <a:r>
+              <a:t>     with PagedAttention (vLLM). SOSP 2023.</a:t>
+            </a:r>
+          </a:p>
+          <a:p>
+            <a:pPr algn="l">
+              <a:spcBef>
+                <a:spcPts val="100"/>
+              </a:spcBef>
+              <a:defRPr sz="1300" b="0">
+                <a:solidFill>
+                  <a:srgbClr val="333333"/>
+                </a:solidFill>
+                <a:latin typeface="Palatino Linotype"/>
+              </a:defRPr>
+            </a:pPr>
+          </a:p>
+          <a:p>
+            <a:pPr algn="l">
+              <a:spcBef>
+                <a:spcPts val="100"/>
+              </a:spcBef>
+              <a:defRPr sz="1300" b="0">
+                <a:solidFill>
+                  <a:srgbClr val="333333"/>
+                </a:solidFill>
+                <a:latin typeface="Palatino Linotype"/>
+              </a:defRPr>
+            </a:pPr>
+            <a:r>
+              <a:t>[5]  Y. Sheng et al. FlexGen: High-Throughput Generative Inference of Large Language</a:t>
+            </a:r>
+          </a:p>
+          <a:p>
+            <a:pPr algn="l">
+              <a:spcBef>
+                <a:spcPts val="100"/>
+              </a:spcBef>
+              <a:defRPr sz="1300" b="0">
+                <a:solidFill>
+                  <a:srgbClr val="333333"/>
+                </a:solidFill>
+                <a:latin typeface="Palatino Linotype"/>
+              </a:defRPr>
+            </a:pPr>
+            <a:r>
+              <a:t>     Models with a Single GPU. ICML 2023.</a:t>
+            </a:r>
+          </a:p>
+        </p:txBody>
+      </p:sp>
+    </p:spTree>
+  </p:cSld>
+  <p:clrMapOvr>
+    <a:masterClrMapping/>
+  </p:clrMapOvr>
+</p:sld>
+</file>
+
+<file path=ppt/slides/slide33.xml><?xml version="1.0" encoding="utf-8"?>
+<p:sld xmlns:a="http://schemas.openxmlformats.org/drawingml/2006/main" xmlns:p="http://schemas.openxmlformats.org/presentationml/2006/main" xmlns:r="http://schemas.openxmlformats.org/officeDocument/2006/relationships">
+  <p:cSld>
+    <p:bg>
+      <p:bgPr>
+        <a:solidFill>
           <a:srgbClr val="0F172A"/>
         </a:solidFill>
         <a:effectLst/>
@@ -14529,7 +14856,7 @@
         <p:spPr>
           <a:xfrm>
             <a:off x="1737360" y="1097280"/>
-            <a:ext cx="8686800" cy="4494581"/>
+            <a:ext cx="8686800" cy="4454101"/>
           </a:xfrm>
           <a:prstGeom prst="rect">
             <a:avLst/>
@@ -14544,7 +14871,7 @@
         </p:nvSpPr>
         <p:spPr>
           <a:xfrm>
-            <a:off x="1737360" y="5729021"/>
+            <a:off x="1737360" y="5688541"/>
             <a:ext cx="8686800" cy="365760"/>
           </a:xfrm>
           <a:prstGeom prst="rect">
@@ -14567,7 +14894,7 @@
               </a:defRPr>
             </a:pPr>
             <a:r>
-              <a:t>DistServe Figure 2: Decoding latency degrades up to 3-5x when colocated with prefill</a:t>
+              <a:t>Source: Zhong et al., OSDI 2024, Figure 2</a:t>
             </a:r>
           </a:p>
         </p:txBody>

--- a/presentation/Phase_Disaggregation_LLM_Inference.pptx
+++ b/presentation/Phase_Disaggregation_LLM_Inference.pptx
@@ -3429,6 +3429,42 @@
             </a:pPr>
             <a:r>
               <a:t>Source: Patel et al., ISCA 2024, Figure 3</a:t>
+            </a:r>
+          </a:p>
+        </p:txBody>
+      </p:sp>
+      <p:sp>
+        <p:nvSpPr>
+          <p:cNvPr id="5" name="TextBox 4"/>
+          <p:cNvSpPr txBox="1"/>
+          <p:nvPr/>
+        </p:nvSpPr>
+        <p:spPr>
+          <a:xfrm>
+            <a:off x="11338560" y="6446520"/>
+            <a:ext cx="640080" cy="320040"/>
+          </a:xfrm>
+          <a:prstGeom prst="rect">
+            <a:avLst/>
+          </a:prstGeom>
+          <a:noFill/>
+        </p:spPr>
+        <p:txBody>
+          <a:bodyPr wrap="square">
+            <a:spAutoFit/>
+          </a:bodyPr>
+          <a:lstStyle/>
+          <a:p>
+            <a:pPr algn="r">
+              <a:defRPr sz="1000" b="0">
+                <a:solidFill>
+                  <a:srgbClr val="AAAAAA"/>
+                </a:solidFill>
+                <a:latin typeface="Palatino Linotype"/>
+              </a:defRPr>
+            </a:pPr>
+            <a:r>
+              <a:t>10</a:t>
             </a:r>
           </a:p>
         </p:txBody>
@@ -4157,6 +4193,42 @@
           </a:p>
         </p:txBody>
       </p:sp>
+      <p:sp>
+        <p:nvSpPr>
+          <p:cNvPr id="7" name="TextBox 6"/>
+          <p:cNvSpPr txBox="1"/>
+          <p:nvPr/>
+        </p:nvSpPr>
+        <p:spPr>
+          <a:xfrm>
+            <a:off x="11338560" y="6446520"/>
+            <a:ext cx="640080" cy="320040"/>
+          </a:xfrm>
+          <a:prstGeom prst="rect">
+            <a:avLst/>
+          </a:prstGeom>
+          <a:noFill/>
+        </p:spPr>
+        <p:txBody>
+          <a:bodyPr wrap="square">
+            <a:spAutoFit/>
+          </a:bodyPr>
+          <a:lstStyle/>
+          <a:p>
+            <a:pPr algn="r">
+              <a:defRPr sz="1000" b="0">
+                <a:solidFill>
+                  <a:srgbClr val="AAAAAA"/>
+                </a:solidFill>
+                <a:latin typeface="Palatino Linotype"/>
+              </a:defRPr>
+            </a:pPr>
+            <a:r>
+              <a:t>11</a:t>
+            </a:r>
+          </a:p>
+        </p:txBody>
+      </p:sp>
     </p:spTree>
   </p:cSld>
   <p:clrMapOvr>
@@ -4726,6 +4798,42 @@
           </a:p>
         </p:txBody>
       </p:sp>
+      <p:sp>
+        <p:nvSpPr>
+          <p:cNvPr id="13" name="TextBox 12"/>
+          <p:cNvSpPr txBox="1"/>
+          <p:nvPr/>
+        </p:nvSpPr>
+        <p:spPr>
+          <a:xfrm>
+            <a:off x="11338560" y="6446520"/>
+            <a:ext cx="640080" cy="320040"/>
+          </a:xfrm>
+          <a:prstGeom prst="rect">
+            <a:avLst/>
+          </a:prstGeom>
+          <a:noFill/>
+        </p:spPr>
+        <p:txBody>
+          <a:bodyPr wrap="square">
+            <a:spAutoFit/>
+          </a:bodyPr>
+          <a:lstStyle/>
+          <a:p>
+            <a:pPr algn="r">
+              <a:defRPr sz="1000" b="0">
+                <a:solidFill>
+                  <a:srgbClr val="AAAAAA"/>
+                </a:solidFill>
+                <a:latin typeface="Palatino Linotype"/>
+              </a:defRPr>
+            </a:pPr>
+            <a:r>
+              <a:t>12</a:t>
+            </a:r>
+          </a:p>
+        </p:txBody>
+      </p:sp>
     </p:spTree>
   </p:cSld>
   <p:clrMapOvr>
@@ -4848,6 +4956,42 @@
           </a:p>
         </p:txBody>
       </p:sp>
+      <p:sp>
+        <p:nvSpPr>
+          <p:cNvPr id="5" name="TextBox 4"/>
+          <p:cNvSpPr txBox="1"/>
+          <p:nvPr/>
+        </p:nvSpPr>
+        <p:spPr>
+          <a:xfrm>
+            <a:off x="11338560" y="6446520"/>
+            <a:ext cx="640080" cy="320040"/>
+          </a:xfrm>
+          <a:prstGeom prst="rect">
+            <a:avLst/>
+          </a:prstGeom>
+          <a:noFill/>
+        </p:spPr>
+        <p:txBody>
+          <a:bodyPr wrap="square">
+            <a:spAutoFit/>
+          </a:bodyPr>
+          <a:lstStyle/>
+          <a:p>
+            <a:pPr algn="r">
+              <a:defRPr sz="1000" b="0">
+                <a:solidFill>
+                  <a:srgbClr val="AAAAAA"/>
+                </a:solidFill>
+                <a:latin typeface="Palatino Linotype"/>
+              </a:defRPr>
+            </a:pPr>
+            <a:r>
+              <a:t>13</a:t>
+            </a:r>
+          </a:p>
+        </p:txBody>
+      </p:sp>
     </p:spTree>
   </p:cSld>
   <p:clrMapOvr>
@@ -5271,6 +5415,42 @@
             </a:pPr>
             <a:r>
               <a:t>Both papers confirm: KV-cache transfer is not the bottleneck.</a:t>
+            </a:r>
+          </a:p>
+        </p:txBody>
+      </p:sp>
+      <p:sp>
+        <p:nvSpPr>
+          <p:cNvPr id="9" name="TextBox 8"/>
+          <p:cNvSpPr txBox="1"/>
+          <p:nvPr/>
+        </p:nvSpPr>
+        <p:spPr>
+          <a:xfrm>
+            <a:off x="11338560" y="6446520"/>
+            <a:ext cx="640080" cy="320040"/>
+          </a:xfrm>
+          <a:prstGeom prst="rect">
+            <a:avLst/>
+          </a:prstGeom>
+          <a:noFill/>
+        </p:spPr>
+        <p:txBody>
+          <a:bodyPr wrap="square">
+            <a:spAutoFit/>
+          </a:bodyPr>
+          <a:lstStyle/>
+          <a:p>
+            <a:pPr algn="r">
+              <a:defRPr sz="1000" b="0">
+                <a:solidFill>
+                  <a:srgbClr val="AAAAAA"/>
+                </a:solidFill>
+                <a:latin typeface="Palatino Linotype"/>
+              </a:defRPr>
+            </a:pPr>
+            <a:r>
+              <a:t>14</a:t>
             </a:r>
           </a:p>
         </p:txBody>
@@ -5855,6 +6035,42 @@
           </a:graphicData>
         </a:graphic>
       </p:graphicFrame>
+      <p:sp>
+        <p:nvSpPr>
+          <p:cNvPr id="4" name="TextBox 3"/>
+          <p:cNvSpPr txBox="1"/>
+          <p:nvPr/>
+        </p:nvSpPr>
+        <p:spPr>
+          <a:xfrm>
+            <a:off x="11338560" y="6446520"/>
+            <a:ext cx="640080" cy="320040"/>
+          </a:xfrm>
+          <a:prstGeom prst="rect">
+            <a:avLst/>
+          </a:prstGeom>
+          <a:noFill/>
+        </p:spPr>
+        <p:txBody>
+          <a:bodyPr wrap="square">
+            <a:spAutoFit/>
+          </a:bodyPr>
+          <a:lstStyle/>
+          <a:p>
+            <a:pPr algn="r">
+              <a:defRPr sz="1000" b="0">
+                <a:solidFill>
+                  <a:srgbClr val="AAAAAA"/>
+                </a:solidFill>
+                <a:latin typeface="Palatino Linotype"/>
+              </a:defRPr>
+            </a:pPr>
+            <a:r>
+              <a:t>15</a:t>
+            </a:r>
+          </a:p>
+        </p:txBody>
+      </p:sp>
     </p:spTree>
   </p:cSld>
   <p:clrMapOvr>
@@ -6317,6 +6533,42 @@
           </a:p>
         </p:txBody>
       </p:sp>
+      <p:sp>
+        <p:nvSpPr>
+          <p:cNvPr id="12" name="TextBox 11"/>
+          <p:cNvSpPr txBox="1"/>
+          <p:nvPr/>
+        </p:nvSpPr>
+        <p:spPr>
+          <a:xfrm>
+            <a:off x="11338560" y="6446520"/>
+            <a:ext cx="640080" cy="320040"/>
+          </a:xfrm>
+          <a:prstGeom prst="rect">
+            <a:avLst/>
+          </a:prstGeom>
+          <a:noFill/>
+        </p:spPr>
+        <p:txBody>
+          <a:bodyPr wrap="square">
+            <a:spAutoFit/>
+          </a:bodyPr>
+          <a:lstStyle/>
+          <a:p>
+            <a:pPr algn="r">
+              <a:defRPr sz="1000" b="0">
+                <a:solidFill>
+                  <a:srgbClr val="AAAAAA"/>
+                </a:solidFill>
+                <a:latin typeface="Palatino Linotype"/>
+              </a:defRPr>
+            </a:pPr>
+            <a:r>
+              <a:t>16</a:t>
+            </a:r>
+          </a:p>
+        </p:txBody>
+      </p:sp>
     </p:spTree>
   </p:cSld>
   <p:clrMapOvr>
@@ -6439,6 +6691,42 @@
           </a:p>
         </p:txBody>
       </p:sp>
+      <p:sp>
+        <p:nvSpPr>
+          <p:cNvPr id="5" name="TextBox 4"/>
+          <p:cNvSpPr txBox="1"/>
+          <p:nvPr/>
+        </p:nvSpPr>
+        <p:spPr>
+          <a:xfrm>
+            <a:off x="11338560" y="6446520"/>
+            <a:ext cx="640080" cy="320040"/>
+          </a:xfrm>
+          <a:prstGeom prst="rect">
+            <a:avLst/>
+          </a:prstGeom>
+          <a:noFill/>
+        </p:spPr>
+        <p:txBody>
+          <a:bodyPr wrap="square">
+            <a:spAutoFit/>
+          </a:bodyPr>
+          <a:lstStyle/>
+          <a:p>
+            <a:pPr algn="r">
+              <a:defRPr sz="1000" b="0">
+                <a:solidFill>
+                  <a:srgbClr val="AAAAAA"/>
+                </a:solidFill>
+                <a:latin typeface="Palatino Linotype"/>
+              </a:defRPr>
+            </a:pPr>
+            <a:r>
+              <a:t>17</a:t>
+            </a:r>
+          </a:p>
+        </p:txBody>
+      </p:sp>
     </p:spTree>
   </p:cSld>
   <p:clrMapOvr>
@@ -6693,6 +6981,42 @@
           </a:p>
         </p:txBody>
       </p:sp>
+      <p:sp>
+        <p:nvSpPr>
+          <p:cNvPr id="6" name="TextBox 5"/>
+          <p:cNvSpPr txBox="1"/>
+          <p:nvPr/>
+        </p:nvSpPr>
+        <p:spPr>
+          <a:xfrm>
+            <a:off x="11338560" y="6446520"/>
+            <a:ext cx="640080" cy="320040"/>
+          </a:xfrm>
+          <a:prstGeom prst="rect">
+            <a:avLst/>
+          </a:prstGeom>
+          <a:noFill/>
+        </p:spPr>
+        <p:txBody>
+          <a:bodyPr wrap="square">
+            <a:spAutoFit/>
+          </a:bodyPr>
+          <a:lstStyle/>
+          <a:p>
+            <a:pPr algn="r">
+              <a:defRPr sz="1000" b="0">
+                <a:solidFill>
+                  <a:srgbClr val="AAAAAA"/>
+                </a:solidFill>
+                <a:latin typeface="Palatino Linotype"/>
+              </a:defRPr>
+            </a:pPr>
+            <a:r>
+              <a:t>18</a:t>
+            </a:r>
+          </a:p>
+        </p:txBody>
+      </p:sp>
     </p:spTree>
   </p:cSld>
   <p:clrMapOvr>
@@ -6850,6 +7174,42 @@
           </a:p>
         </p:txBody>
       </p:sp>
+      <p:sp>
+        <p:nvSpPr>
+          <p:cNvPr id="5" name="TextBox 4"/>
+          <p:cNvSpPr txBox="1"/>
+          <p:nvPr/>
+        </p:nvSpPr>
+        <p:spPr>
+          <a:xfrm>
+            <a:off x="11338560" y="6446520"/>
+            <a:ext cx="640080" cy="320040"/>
+          </a:xfrm>
+          <a:prstGeom prst="rect">
+            <a:avLst/>
+          </a:prstGeom>
+          <a:noFill/>
+        </p:spPr>
+        <p:txBody>
+          <a:bodyPr wrap="square">
+            <a:spAutoFit/>
+          </a:bodyPr>
+          <a:lstStyle/>
+          <a:p>
+            <a:pPr algn="r">
+              <a:defRPr sz="1000" b="0">
+                <a:solidFill>
+                  <a:srgbClr val="556688"/>
+                </a:solidFill>
+                <a:latin typeface="Palatino Linotype"/>
+              </a:defRPr>
+            </a:pPr>
+            <a:r>
+              <a:t>19</a:t>
+            </a:r>
+          </a:p>
+        </p:txBody>
+      </p:sp>
     </p:spTree>
   </p:cSld>
   <p:clrMapOvr>
@@ -7192,6 +7552,42 @@
           </a:p>
         </p:txBody>
       </p:sp>
+      <p:sp>
+        <p:nvSpPr>
+          <p:cNvPr id="5" name="TextBox 4"/>
+          <p:cNvSpPr txBox="1"/>
+          <p:nvPr/>
+        </p:nvSpPr>
+        <p:spPr>
+          <a:xfrm>
+            <a:off x="11338560" y="6446520"/>
+            <a:ext cx="640080" cy="320040"/>
+          </a:xfrm>
+          <a:prstGeom prst="rect">
+            <a:avLst/>
+          </a:prstGeom>
+          <a:noFill/>
+        </p:spPr>
+        <p:txBody>
+          <a:bodyPr wrap="square">
+            <a:spAutoFit/>
+          </a:bodyPr>
+          <a:lstStyle/>
+          <a:p>
+            <a:pPr algn="r">
+              <a:defRPr sz="1000" b="0">
+                <a:solidFill>
+                  <a:srgbClr val="AAAAAA"/>
+                </a:solidFill>
+                <a:latin typeface="Palatino Linotype"/>
+              </a:defRPr>
+            </a:pPr>
+            <a:r>
+              <a:t>2</a:t>
+            </a:r>
+          </a:p>
+        </p:txBody>
+      </p:sp>
     </p:spTree>
   </p:cSld>
   <p:clrMapOvr>
@@ -7449,6 +7845,42 @@
           </a:p>
         </p:txBody>
       </p:sp>
+      <p:sp>
+        <p:nvSpPr>
+          <p:cNvPr id="6" name="TextBox 5"/>
+          <p:cNvSpPr txBox="1"/>
+          <p:nvPr/>
+        </p:nvSpPr>
+        <p:spPr>
+          <a:xfrm>
+            <a:off x="11338560" y="6446520"/>
+            <a:ext cx="640080" cy="320040"/>
+          </a:xfrm>
+          <a:prstGeom prst="rect">
+            <a:avLst/>
+          </a:prstGeom>
+          <a:noFill/>
+        </p:spPr>
+        <p:txBody>
+          <a:bodyPr wrap="square">
+            <a:spAutoFit/>
+          </a:bodyPr>
+          <a:lstStyle/>
+          <a:p>
+            <a:pPr algn="r">
+              <a:defRPr sz="1000" b="0">
+                <a:solidFill>
+                  <a:srgbClr val="AAAAAA"/>
+                </a:solidFill>
+                <a:latin typeface="Palatino Linotype"/>
+              </a:defRPr>
+            </a:pPr>
+            <a:r>
+              <a:t>20</a:t>
+            </a:r>
+          </a:p>
+        </p:txBody>
+      </p:sp>
     </p:spTree>
   </p:cSld>
   <p:clrMapOvr>
@@ -7940,6 +8372,42 @@
           </a:p>
         </p:txBody>
       </p:sp>
+      <p:sp>
+        <p:nvSpPr>
+          <p:cNvPr id="9" name="TextBox 8"/>
+          <p:cNvSpPr txBox="1"/>
+          <p:nvPr/>
+        </p:nvSpPr>
+        <p:spPr>
+          <a:xfrm>
+            <a:off x="11338560" y="6446520"/>
+            <a:ext cx="640080" cy="320040"/>
+          </a:xfrm>
+          <a:prstGeom prst="rect">
+            <a:avLst/>
+          </a:prstGeom>
+          <a:noFill/>
+        </p:spPr>
+        <p:txBody>
+          <a:bodyPr wrap="square">
+            <a:spAutoFit/>
+          </a:bodyPr>
+          <a:lstStyle/>
+          <a:p>
+            <a:pPr algn="r">
+              <a:defRPr sz="1000" b="0">
+                <a:solidFill>
+                  <a:srgbClr val="AAAAAA"/>
+                </a:solidFill>
+                <a:latin typeface="Palatino Linotype"/>
+              </a:defRPr>
+            </a:pPr>
+            <a:r>
+              <a:t>21</a:t>
+            </a:r>
+          </a:p>
+        </p:txBody>
+      </p:sp>
     </p:spTree>
   </p:cSld>
   <p:clrMapOvr>
@@ -8062,6 +8530,42 @@
           </a:p>
         </p:txBody>
       </p:sp>
+      <p:sp>
+        <p:nvSpPr>
+          <p:cNvPr id="5" name="TextBox 4"/>
+          <p:cNvSpPr txBox="1"/>
+          <p:nvPr/>
+        </p:nvSpPr>
+        <p:spPr>
+          <a:xfrm>
+            <a:off x="11338560" y="6446520"/>
+            <a:ext cx="640080" cy="320040"/>
+          </a:xfrm>
+          <a:prstGeom prst="rect">
+            <a:avLst/>
+          </a:prstGeom>
+          <a:noFill/>
+        </p:spPr>
+        <p:txBody>
+          <a:bodyPr wrap="square">
+            <a:spAutoFit/>
+          </a:bodyPr>
+          <a:lstStyle/>
+          <a:p>
+            <a:pPr algn="r">
+              <a:defRPr sz="1000" b="0">
+                <a:solidFill>
+                  <a:srgbClr val="AAAAAA"/>
+                </a:solidFill>
+                <a:latin typeface="Palatino Linotype"/>
+              </a:defRPr>
+            </a:pPr>
+            <a:r>
+              <a:t>22</a:t>
+            </a:r>
+          </a:p>
+        </p:txBody>
+      </p:sp>
     </p:spTree>
   </p:cSld>
   <p:clrMapOvr>
@@ -8537,6 +9041,42 @@
             </a:pPr>
             <a:r>
               <a:t>Simulator accuracy: under 2% error compared to real hardware runs</a:t>
+            </a:r>
+          </a:p>
+        </p:txBody>
+      </p:sp>
+      <p:sp>
+        <p:nvSpPr>
+          <p:cNvPr id="10" name="TextBox 9"/>
+          <p:cNvSpPr txBox="1"/>
+          <p:nvPr/>
+        </p:nvSpPr>
+        <p:spPr>
+          <a:xfrm>
+            <a:off x="11338560" y="6446520"/>
+            <a:ext cx="640080" cy="320040"/>
+          </a:xfrm>
+          <a:prstGeom prst="rect">
+            <a:avLst/>
+          </a:prstGeom>
+          <a:noFill/>
+        </p:spPr>
+        <p:txBody>
+          <a:bodyPr wrap="square">
+            <a:spAutoFit/>
+          </a:bodyPr>
+          <a:lstStyle/>
+          <a:p>
+            <a:pPr algn="r">
+              <a:defRPr sz="1000" b="0">
+                <a:solidFill>
+                  <a:srgbClr val="AAAAAA"/>
+                </a:solidFill>
+                <a:latin typeface="Palatino Linotype"/>
+              </a:defRPr>
+            </a:pPr>
+            <a:r>
+              <a:t>23</a:t>
             </a:r>
           </a:p>
         </p:txBody>
@@ -9418,6 +9958,42 @@
           </a:graphicData>
         </a:graphic>
       </p:graphicFrame>
+      <p:sp>
+        <p:nvSpPr>
+          <p:cNvPr id="7" name="TextBox 6"/>
+          <p:cNvSpPr txBox="1"/>
+          <p:nvPr/>
+        </p:nvSpPr>
+        <p:spPr>
+          <a:xfrm>
+            <a:off x="11338560" y="6446520"/>
+            <a:ext cx="640080" cy="320040"/>
+          </a:xfrm>
+          <a:prstGeom prst="rect">
+            <a:avLst/>
+          </a:prstGeom>
+          <a:noFill/>
+        </p:spPr>
+        <p:txBody>
+          <a:bodyPr wrap="square">
+            <a:spAutoFit/>
+          </a:bodyPr>
+          <a:lstStyle/>
+          <a:p>
+            <a:pPr algn="r">
+              <a:defRPr sz="1000" b="0">
+                <a:solidFill>
+                  <a:srgbClr val="AAAAAA"/>
+                </a:solidFill>
+                <a:latin typeface="Palatino Linotype"/>
+              </a:defRPr>
+            </a:pPr>
+            <a:r>
+              <a:t>24</a:t>
+            </a:r>
+          </a:p>
+        </p:txBody>
+      </p:sp>
     </p:spTree>
   </p:cSld>
   <p:clrMapOvr>
@@ -9540,6 +10116,42 @@
           </a:p>
         </p:txBody>
       </p:sp>
+      <p:sp>
+        <p:nvSpPr>
+          <p:cNvPr id="5" name="TextBox 4"/>
+          <p:cNvSpPr txBox="1"/>
+          <p:nvPr/>
+        </p:nvSpPr>
+        <p:spPr>
+          <a:xfrm>
+            <a:off x="11338560" y="6446520"/>
+            <a:ext cx="640080" cy="320040"/>
+          </a:xfrm>
+          <a:prstGeom prst="rect">
+            <a:avLst/>
+          </a:prstGeom>
+          <a:noFill/>
+        </p:spPr>
+        <p:txBody>
+          <a:bodyPr wrap="square">
+            <a:spAutoFit/>
+          </a:bodyPr>
+          <a:lstStyle/>
+          <a:p>
+            <a:pPr algn="r">
+              <a:defRPr sz="1000" b="0">
+                <a:solidFill>
+                  <a:srgbClr val="AAAAAA"/>
+                </a:solidFill>
+                <a:latin typeface="Palatino Linotype"/>
+              </a:defRPr>
+            </a:pPr>
+            <a:r>
+              <a:t>25</a:t>
+            </a:r>
+          </a:p>
+        </p:txBody>
+      </p:sp>
     </p:spTree>
   </p:cSld>
   <p:clrMapOvr>
@@ -9662,6 +10274,42 @@
           </a:p>
         </p:txBody>
       </p:sp>
+      <p:sp>
+        <p:nvSpPr>
+          <p:cNvPr id="5" name="TextBox 4"/>
+          <p:cNvSpPr txBox="1"/>
+          <p:nvPr/>
+        </p:nvSpPr>
+        <p:spPr>
+          <a:xfrm>
+            <a:off x="11338560" y="6446520"/>
+            <a:ext cx="640080" cy="320040"/>
+          </a:xfrm>
+          <a:prstGeom prst="rect">
+            <a:avLst/>
+          </a:prstGeom>
+          <a:noFill/>
+        </p:spPr>
+        <p:txBody>
+          <a:bodyPr wrap="square">
+            <a:spAutoFit/>
+          </a:bodyPr>
+          <a:lstStyle/>
+          <a:p>
+            <a:pPr algn="r">
+              <a:defRPr sz="1000" b="0">
+                <a:solidFill>
+                  <a:srgbClr val="AAAAAA"/>
+                </a:solidFill>
+                <a:latin typeface="Palatino Linotype"/>
+              </a:defRPr>
+            </a:pPr>
+            <a:r>
+              <a:t>26</a:t>
+            </a:r>
+          </a:p>
+        </p:txBody>
+      </p:sp>
     </p:spTree>
   </p:cSld>
   <p:clrMapOvr>
@@ -10010,6 +10658,42 @@
           </a:p>
         </p:txBody>
       </p:sp>
+      <p:sp>
+        <p:nvSpPr>
+          <p:cNvPr id="7" name="TextBox 6"/>
+          <p:cNvSpPr txBox="1"/>
+          <p:nvPr/>
+        </p:nvSpPr>
+        <p:spPr>
+          <a:xfrm>
+            <a:off x="11338560" y="6446520"/>
+            <a:ext cx="640080" cy="320040"/>
+          </a:xfrm>
+          <a:prstGeom prst="rect">
+            <a:avLst/>
+          </a:prstGeom>
+          <a:noFill/>
+        </p:spPr>
+        <p:txBody>
+          <a:bodyPr wrap="square">
+            <a:spAutoFit/>
+          </a:bodyPr>
+          <a:lstStyle/>
+          <a:p>
+            <a:pPr algn="r">
+              <a:defRPr sz="1000" b="0">
+                <a:solidFill>
+                  <a:srgbClr val="AAAAAA"/>
+                </a:solidFill>
+                <a:latin typeface="Palatino Linotype"/>
+              </a:defRPr>
+            </a:pPr>
+            <a:r>
+              <a:t>27</a:t>
+            </a:r>
+          </a:p>
+        </p:txBody>
+      </p:sp>
     </p:spTree>
   </p:cSld>
   <p:clrMapOvr>
@@ -10128,6 +10812,42 @@
             </a:pPr>
             <a:r>
               <a:t>Source: Zhong et al., OSDI 2024, Figure 10</a:t>
+            </a:r>
+          </a:p>
+        </p:txBody>
+      </p:sp>
+      <p:sp>
+        <p:nvSpPr>
+          <p:cNvPr id="5" name="TextBox 4"/>
+          <p:cNvSpPr txBox="1"/>
+          <p:nvPr/>
+        </p:nvSpPr>
+        <p:spPr>
+          <a:xfrm>
+            <a:off x="11338560" y="6446520"/>
+            <a:ext cx="640080" cy="320040"/>
+          </a:xfrm>
+          <a:prstGeom prst="rect">
+            <a:avLst/>
+          </a:prstGeom>
+          <a:noFill/>
+        </p:spPr>
+        <p:txBody>
+          <a:bodyPr wrap="square">
+            <a:spAutoFit/>
+          </a:bodyPr>
+          <a:lstStyle/>
+          <a:p>
+            <a:pPr algn="r">
+              <a:defRPr sz="1000" b="0">
+                <a:solidFill>
+                  <a:srgbClr val="AAAAAA"/>
+                </a:solidFill>
+                <a:latin typeface="Palatino Linotype"/>
+              </a:defRPr>
+            </a:pPr>
+            <a:r>
+              <a:t>28</a:t>
             </a:r>
           </a:p>
         </p:txBody>
@@ -10846,6 +11566,42 @@
           </a:p>
         </p:txBody>
       </p:sp>
+      <p:sp>
+        <p:nvSpPr>
+          <p:cNvPr id="5" name="TextBox 4"/>
+          <p:cNvSpPr txBox="1"/>
+          <p:nvPr/>
+        </p:nvSpPr>
+        <p:spPr>
+          <a:xfrm>
+            <a:off x="11338560" y="6446520"/>
+            <a:ext cx="640080" cy="320040"/>
+          </a:xfrm>
+          <a:prstGeom prst="rect">
+            <a:avLst/>
+          </a:prstGeom>
+          <a:noFill/>
+        </p:spPr>
+        <p:txBody>
+          <a:bodyPr wrap="square">
+            <a:spAutoFit/>
+          </a:bodyPr>
+          <a:lstStyle/>
+          <a:p>
+            <a:pPr algn="r">
+              <a:defRPr sz="1000" b="0">
+                <a:solidFill>
+                  <a:srgbClr val="AAAAAA"/>
+                </a:solidFill>
+                <a:latin typeface="Palatino Linotype"/>
+              </a:defRPr>
+            </a:pPr>
+            <a:r>
+              <a:t>29</a:t>
+            </a:r>
+          </a:p>
+        </p:txBody>
+      </p:sp>
     </p:spTree>
   </p:cSld>
   <p:clrMapOvr>
@@ -11357,6 +12113,42 @@
           </a:p>
         </p:txBody>
       </p:sp>
+      <p:sp>
+        <p:nvSpPr>
+          <p:cNvPr id="10" name="TextBox 9"/>
+          <p:cNvSpPr txBox="1"/>
+          <p:nvPr/>
+        </p:nvSpPr>
+        <p:spPr>
+          <a:xfrm>
+            <a:off x="11338560" y="6446520"/>
+            <a:ext cx="640080" cy="320040"/>
+          </a:xfrm>
+          <a:prstGeom prst="rect">
+            <a:avLst/>
+          </a:prstGeom>
+          <a:noFill/>
+        </p:spPr>
+        <p:txBody>
+          <a:bodyPr wrap="square">
+            <a:spAutoFit/>
+          </a:bodyPr>
+          <a:lstStyle/>
+          <a:p>
+            <a:pPr algn="r">
+              <a:defRPr sz="1000" b="0">
+                <a:solidFill>
+                  <a:srgbClr val="AAAAAA"/>
+                </a:solidFill>
+                <a:latin typeface="Palatino Linotype"/>
+              </a:defRPr>
+            </a:pPr>
+            <a:r>
+              <a:t>3</a:t>
+            </a:r>
+          </a:p>
+        </p:txBody>
+      </p:sp>
     </p:spTree>
   </p:cSld>
   <p:clrMapOvr>
@@ -11800,6 +12592,42 @@
           </a:p>
         </p:txBody>
       </p:sp>
+      <p:sp>
+        <p:nvSpPr>
+          <p:cNvPr id="9" name="TextBox 8"/>
+          <p:cNvSpPr txBox="1"/>
+          <p:nvPr/>
+        </p:nvSpPr>
+        <p:spPr>
+          <a:xfrm>
+            <a:off x="11338560" y="6446520"/>
+            <a:ext cx="640080" cy="320040"/>
+          </a:xfrm>
+          <a:prstGeom prst="rect">
+            <a:avLst/>
+          </a:prstGeom>
+          <a:noFill/>
+        </p:spPr>
+        <p:txBody>
+          <a:bodyPr wrap="square">
+            <a:spAutoFit/>
+          </a:bodyPr>
+          <a:lstStyle/>
+          <a:p>
+            <a:pPr algn="r">
+              <a:defRPr sz="1000" b="0">
+                <a:solidFill>
+                  <a:srgbClr val="AAAAAA"/>
+                </a:solidFill>
+                <a:latin typeface="Palatino Linotype"/>
+              </a:defRPr>
+            </a:pPr>
+            <a:r>
+              <a:t>30</a:t>
+            </a:r>
+          </a:p>
+        </p:txBody>
+      </p:sp>
     </p:spTree>
   </p:cSld>
   <p:clrMapOvr>
@@ -12243,6 +13071,42 @@
           </a:p>
         </p:txBody>
       </p:sp>
+      <p:sp>
+        <p:nvSpPr>
+          <p:cNvPr id="9" name="TextBox 8"/>
+          <p:cNvSpPr txBox="1"/>
+          <p:nvPr/>
+        </p:nvSpPr>
+        <p:spPr>
+          <a:xfrm>
+            <a:off x="11338560" y="6446520"/>
+            <a:ext cx="640080" cy="320040"/>
+          </a:xfrm>
+          <a:prstGeom prst="rect">
+            <a:avLst/>
+          </a:prstGeom>
+          <a:noFill/>
+        </p:spPr>
+        <p:txBody>
+          <a:bodyPr wrap="square">
+            <a:spAutoFit/>
+          </a:bodyPr>
+          <a:lstStyle/>
+          <a:p>
+            <a:pPr algn="r">
+              <a:defRPr sz="1000" b="0">
+                <a:solidFill>
+                  <a:srgbClr val="AAAAAA"/>
+                </a:solidFill>
+                <a:latin typeface="Palatino Linotype"/>
+              </a:defRPr>
+            </a:pPr>
+            <a:r>
+              <a:t>31</a:t>
+            </a:r>
+          </a:p>
+        </p:txBody>
+      </p:sp>
     </p:spTree>
   </p:cSld>
   <p:clrMapOvr>
@@ -12569,6 +13433,42 @@
           </a:p>
         </p:txBody>
       </p:sp>
+      <p:sp>
+        <p:nvSpPr>
+          <p:cNvPr id="4" name="TextBox 3"/>
+          <p:cNvSpPr txBox="1"/>
+          <p:nvPr/>
+        </p:nvSpPr>
+        <p:spPr>
+          <a:xfrm>
+            <a:off x="11338560" y="6446520"/>
+            <a:ext cx="640080" cy="320040"/>
+          </a:xfrm>
+          <a:prstGeom prst="rect">
+            <a:avLst/>
+          </a:prstGeom>
+          <a:noFill/>
+        </p:spPr>
+        <p:txBody>
+          <a:bodyPr wrap="square">
+            <a:spAutoFit/>
+          </a:bodyPr>
+          <a:lstStyle/>
+          <a:p>
+            <a:pPr algn="r">
+              <a:defRPr sz="1000" b="0">
+                <a:solidFill>
+                  <a:srgbClr val="AAAAAA"/>
+                </a:solidFill>
+                <a:latin typeface="Palatino Linotype"/>
+              </a:defRPr>
+            </a:pPr>
+            <a:r>
+              <a:t>32</a:t>
+            </a:r>
+          </a:p>
+        </p:txBody>
+      </p:sp>
     </p:spTree>
   </p:cSld>
   <p:clrMapOvr>
@@ -12803,6 +13703,42 @@
             </a:pPr>
             <a:r>
               <a:t>ECE 5545  |  Spring 2026</a:t>
+            </a:r>
+          </a:p>
+        </p:txBody>
+      </p:sp>
+      <p:sp>
+        <p:nvSpPr>
+          <p:cNvPr id="6" name="TextBox 5"/>
+          <p:cNvSpPr txBox="1"/>
+          <p:nvPr/>
+        </p:nvSpPr>
+        <p:spPr>
+          <a:xfrm>
+            <a:off x="11338560" y="6446520"/>
+            <a:ext cx="640080" cy="320040"/>
+          </a:xfrm>
+          <a:prstGeom prst="rect">
+            <a:avLst/>
+          </a:prstGeom>
+          <a:noFill/>
+        </p:spPr>
+        <p:txBody>
+          <a:bodyPr wrap="square">
+            <a:spAutoFit/>
+          </a:bodyPr>
+          <a:lstStyle/>
+          <a:p>
+            <a:pPr algn="r">
+              <a:defRPr sz="1000" b="0">
+                <a:solidFill>
+                  <a:srgbClr val="556688"/>
+                </a:solidFill>
+                <a:latin typeface="Palatino Linotype"/>
+              </a:defRPr>
+            </a:pPr>
+            <a:r>
+              <a:t>33</a:t>
             </a:r>
           </a:p>
         </p:txBody>
@@ -13521,6 +14457,42 @@
           </a:p>
         </p:txBody>
       </p:sp>
+      <p:sp>
+        <p:nvSpPr>
+          <p:cNvPr id="5" name="TextBox 4"/>
+          <p:cNvSpPr txBox="1"/>
+          <p:nvPr/>
+        </p:nvSpPr>
+        <p:spPr>
+          <a:xfrm>
+            <a:off x="11338560" y="6446520"/>
+            <a:ext cx="640080" cy="320040"/>
+          </a:xfrm>
+          <a:prstGeom prst="rect">
+            <a:avLst/>
+          </a:prstGeom>
+          <a:noFill/>
+        </p:spPr>
+        <p:txBody>
+          <a:bodyPr wrap="square">
+            <a:spAutoFit/>
+          </a:bodyPr>
+          <a:lstStyle/>
+          <a:p>
+            <a:pPr algn="r">
+              <a:defRPr sz="1000" b="0">
+                <a:solidFill>
+                  <a:srgbClr val="AAAAAA"/>
+                </a:solidFill>
+                <a:latin typeface="Palatino Linotype"/>
+              </a:defRPr>
+            </a:pPr>
+            <a:r>
+              <a:t>4</a:t>
+            </a:r>
+          </a:p>
+        </p:txBody>
+      </p:sp>
     </p:spTree>
   </p:cSld>
   <p:clrMapOvr>
@@ -14207,6 +15179,42 @@
           </a:p>
         </p:txBody>
       </p:sp>
+      <p:sp>
+        <p:nvSpPr>
+          <p:cNvPr id="6" name="TextBox 5"/>
+          <p:cNvSpPr txBox="1"/>
+          <p:nvPr/>
+        </p:nvSpPr>
+        <p:spPr>
+          <a:xfrm>
+            <a:off x="11338560" y="6446520"/>
+            <a:ext cx="640080" cy="320040"/>
+          </a:xfrm>
+          <a:prstGeom prst="rect">
+            <a:avLst/>
+          </a:prstGeom>
+          <a:noFill/>
+        </p:spPr>
+        <p:txBody>
+          <a:bodyPr wrap="square">
+            <a:spAutoFit/>
+          </a:bodyPr>
+          <a:lstStyle/>
+          <a:p>
+            <a:pPr algn="r">
+              <a:defRPr sz="1000" b="0">
+                <a:solidFill>
+                  <a:srgbClr val="AAAAAA"/>
+                </a:solidFill>
+                <a:latin typeface="Palatino Linotype"/>
+              </a:defRPr>
+            </a:pPr>
+            <a:r>
+              <a:t>5</a:t>
+            </a:r>
+          </a:p>
+        </p:txBody>
+      </p:sp>
     </p:spTree>
   </p:cSld>
   <p:clrMapOvr>
@@ -14777,6 +15785,42 @@
           </a:p>
         </p:txBody>
       </p:sp>
+      <p:sp>
+        <p:nvSpPr>
+          <p:cNvPr id="11" name="TextBox 10"/>
+          <p:cNvSpPr txBox="1"/>
+          <p:nvPr/>
+        </p:nvSpPr>
+        <p:spPr>
+          <a:xfrm>
+            <a:off x="11338560" y="6446520"/>
+            <a:ext cx="640080" cy="320040"/>
+          </a:xfrm>
+          <a:prstGeom prst="rect">
+            <a:avLst/>
+          </a:prstGeom>
+          <a:noFill/>
+        </p:spPr>
+        <p:txBody>
+          <a:bodyPr wrap="square">
+            <a:spAutoFit/>
+          </a:bodyPr>
+          <a:lstStyle/>
+          <a:p>
+            <a:pPr algn="r">
+              <a:defRPr sz="1000" b="0">
+                <a:solidFill>
+                  <a:srgbClr val="AAAAAA"/>
+                </a:solidFill>
+                <a:latin typeface="Palatino Linotype"/>
+              </a:defRPr>
+            </a:pPr>
+            <a:r>
+              <a:t>6</a:t>
+            </a:r>
+          </a:p>
+        </p:txBody>
+      </p:sp>
     </p:spTree>
   </p:cSld>
   <p:clrMapOvr>
@@ -14899,6 +15943,42 @@
           </a:p>
         </p:txBody>
       </p:sp>
+      <p:sp>
+        <p:nvSpPr>
+          <p:cNvPr id="5" name="TextBox 4"/>
+          <p:cNvSpPr txBox="1"/>
+          <p:nvPr/>
+        </p:nvSpPr>
+        <p:spPr>
+          <a:xfrm>
+            <a:off x="11338560" y="6446520"/>
+            <a:ext cx="640080" cy="320040"/>
+          </a:xfrm>
+          <a:prstGeom prst="rect">
+            <a:avLst/>
+          </a:prstGeom>
+          <a:noFill/>
+        </p:spPr>
+        <p:txBody>
+          <a:bodyPr wrap="square">
+            <a:spAutoFit/>
+          </a:bodyPr>
+          <a:lstStyle/>
+          <a:p>
+            <a:pPr algn="r">
+              <a:defRPr sz="1000" b="0">
+                <a:solidFill>
+                  <a:srgbClr val="AAAAAA"/>
+                </a:solidFill>
+                <a:latin typeface="Palatino Linotype"/>
+              </a:defRPr>
+            </a:pPr>
+            <a:r>
+              <a:t>7</a:t>
+            </a:r>
+          </a:p>
+        </p:txBody>
+      </p:sp>
     </p:spTree>
   </p:cSld>
   <p:clrMapOvr>
@@ -15056,6 +16136,42 @@
           </a:p>
         </p:txBody>
       </p:sp>
+      <p:sp>
+        <p:nvSpPr>
+          <p:cNvPr id="5" name="TextBox 4"/>
+          <p:cNvSpPr txBox="1"/>
+          <p:nvPr/>
+        </p:nvSpPr>
+        <p:spPr>
+          <a:xfrm>
+            <a:off x="11338560" y="6446520"/>
+            <a:ext cx="640080" cy="320040"/>
+          </a:xfrm>
+          <a:prstGeom prst="rect">
+            <a:avLst/>
+          </a:prstGeom>
+          <a:noFill/>
+        </p:spPr>
+        <p:txBody>
+          <a:bodyPr wrap="square">
+            <a:spAutoFit/>
+          </a:bodyPr>
+          <a:lstStyle/>
+          <a:p>
+            <a:pPr algn="r">
+              <a:defRPr sz="1000" b="0">
+                <a:solidFill>
+                  <a:srgbClr val="556688"/>
+                </a:solidFill>
+                <a:latin typeface="Palatino Linotype"/>
+              </a:defRPr>
+            </a:pPr>
+            <a:r>
+              <a:t>8</a:t>
+            </a:r>
+          </a:p>
+        </p:txBody>
+      </p:sp>
     </p:spTree>
   </p:cSld>
   <p:clrMapOvr>
@@ -15694,6 +16810,42 @@
             </a:pPr>
             <a:r>
               <a:t>Splitwise Figure 3-4, Table IV</a:t>
+            </a:r>
+          </a:p>
+        </p:txBody>
+      </p:sp>
+      <p:sp>
+        <p:nvSpPr>
+          <p:cNvPr id="13" name="TextBox 12"/>
+          <p:cNvSpPr txBox="1"/>
+          <p:nvPr/>
+        </p:nvSpPr>
+        <p:spPr>
+          <a:xfrm>
+            <a:off x="11338560" y="6446520"/>
+            <a:ext cx="640080" cy="320040"/>
+          </a:xfrm>
+          <a:prstGeom prst="rect">
+            <a:avLst/>
+          </a:prstGeom>
+          <a:noFill/>
+        </p:spPr>
+        <p:txBody>
+          <a:bodyPr wrap="square">
+            <a:spAutoFit/>
+          </a:bodyPr>
+          <a:lstStyle/>
+          <a:p>
+            <a:pPr algn="r">
+              <a:defRPr sz="1000" b="0">
+                <a:solidFill>
+                  <a:srgbClr val="AAAAAA"/>
+                </a:solidFill>
+                <a:latin typeface="Palatino Linotype"/>
+              </a:defRPr>
+            </a:pPr>
+            <a:r>
+              <a:t>9</a:t>
             </a:r>
           </a:p>
         </p:txBody>

--- a/presentation/Phase_Disaggregation_LLM_Inference.pptx
+++ b/presentation/Phase_Disaggregation_LLM_Inference.pptx
@@ -5,40 +5,41 @@
     <p:sldMasterId id="2147483648" r:id="rId1"/>
   </p:sldMasterIdLst>
   <p:sldIdLst>
-    <p:sldId id="256" r:id="rId7"/>
-    <p:sldId id="257" r:id="rId8"/>
-    <p:sldId id="258" r:id="rId9"/>
-    <p:sldId id="259" r:id="rId10"/>
-    <p:sldId id="260" r:id="rId11"/>
-    <p:sldId id="261" r:id="rId12"/>
-    <p:sldId id="262" r:id="rId13"/>
-    <p:sldId id="263" r:id="rId14"/>
-    <p:sldId id="264" r:id="rId15"/>
-    <p:sldId id="265" r:id="rId16"/>
-    <p:sldId id="266" r:id="rId17"/>
-    <p:sldId id="267" r:id="rId18"/>
-    <p:sldId id="268" r:id="rId19"/>
-    <p:sldId id="269" r:id="rId20"/>
-    <p:sldId id="270" r:id="rId21"/>
-    <p:sldId id="271" r:id="rId22"/>
-    <p:sldId id="272" r:id="rId23"/>
-    <p:sldId id="273" r:id="rId24"/>
-    <p:sldId id="274" r:id="rId25"/>
-    <p:sldId id="275" r:id="rId26"/>
-    <p:sldId id="276" r:id="rId27"/>
-    <p:sldId id="277" r:id="rId28"/>
-    <p:sldId id="278" r:id="rId29"/>
-    <p:sldId id="279" r:id="rId30"/>
-    <p:sldId id="280" r:id="rId31"/>
-    <p:sldId id="281" r:id="rId32"/>
-    <p:sldId id="282" r:id="rId33"/>
-    <p:sldId id="283" r:id="rId34"/>
-    <p:sldId id="284" r:id="rId35"/>
-    <p:sldId id="285" r:id="rId36"/>
-    <p:sldId id="286" r:id="rId37"/>
-    <p:sldId id="287" r:id="rId38"/>
+    <p:sldId id="256" r:id="rId2"/>
+    <p:sldId id="257" r:id="rId3"/>
+    <p:sldId id="258" r:id="rId4"/>
+    <p:sldId id="259" r:id="rId5"/>
+    <p:sldId id="260" r:id="rId6"/>
+    <p:sldId id="261" r:id="rId7"/>
+    <p:sldId id="262" r:id="rId8"/>
+    <p:sldId id="263" r:id="rId9"/>
+    <p:sldId id="264" r:id="rId10"/>
+    <p:sldId id="265" r:id="rId11"/>
+    <p:sldId id="266" r:id="rId12"/>
+    <p:sldId id="267" r:id="rId13"/>
+    <p:sldId id="268" r:id="rId14"/>
+    <p:sldId id="269" r:id="rId15"/>
+    <p:sldId id="270" r:id="rId16"/>
+    <p:sldId id="271" r:id="rId17"/>
+    <p:sldId id="272" r:id="rId18"/>
+    <p:sldId id="273" r:id="rId19"/>
+    <p:sldId id="274" r:id="rId20"/>
+    <p:sldId id="275" r:id="rId21"/>
+    <p:sldId id="276" r:id="rId22"/>
+    <p:sldId id="277" r:id="rId23"/>
+    <p:sldId id="278" r:id="rId24"/>
+    <p:sldId id="279" r:id="rId25"/>
+    <p:sldId id="280" r:id="rId26"/>
+    <p:sldId id="281" r:id="rId27"/>
+    <p:sldId id="282" r:id="rId28"/>
+    <p:sldId id="283" r:id="rId29"/>
+    <p:sldId id="284" r:id="rId30"/>
+    <p:sldId id="285" r:id="rId31"/>
+    <p:sldId id="286" r:id="rId32"/>
+    <p:sldId id="287" r:id="rId33"/>
+    <p:sldId id="288" r:id="rId34"/>
   </p:sldIdLst>
-  <p:sldSz cx="12191695" cy="6858000" type="screen4x3"/>
+  <p:sldSz cx="12192000" cy="6858000"/>
   <p:notesSz cx="6858000" cy="9144000"/>
   <p:defaultTextStyle>
     <a:defPPr>
@@ -135,6 +136,22 @@
       </a:defRPr>
     </a:lvl9pPr>
   </p:defaultTextStyle>
+  <p:extLst>
+    <p:ext uri="{EFAFB233-063F-42B5-8137-9DF3F51BA10A}">
+      <p15:sldGuideLst xmlns:p15="http://schemas.microsoft.com/office/powerpoint/2012/main">
+        <p15:guide id="1" orient="horz" pos="2160">
+          <p15:clr>
+            <a:srgbClr val="A4A3A4"/>
+          </p15:clr>
+        </p15:guide>
+        <p15:guide id="2" pos="2880">
+          <p15:clr>
+            <a:srgbClr val="A4A3A4"/>
+          </p15:clr>
+        </p15:guide>
+      </p15:sldGuideLst>
+    </p:ext>
+  </p:extLst>
 </p:presentation>
 </file>
 
@@ -176,10 +193,9 @@
           <a:lstStyle/>
           <a:p>
             <a:r>
-              <a:rPr lang="en-US" smtClean="0"/>
+              <a:rPr lang="en-US"/>
               <a:t>Click to edit Master title style</a:t>
             </a:r>
-            <a:endParaRPr lang="en-US"/>
           </a:p>
         </p:txBody>
       </p:sp>
@@ -295,10 +311,9 @@
           </a:lstStyle>
           <a:p>
             <a:r>
-              <a:rPr lang="en-US" smtClean="0"/>
+              <a:rPr lang="en-US"/>
               <a:t>Click to edit Master subtitle style</a:t>
             </a:r>
-            <a:endParaRPr lang="en-US"/>
           </a:p>
         </p:txBody>
       </p:sp>
@@ -319,7 +334,7 @@
           <a:p>
             <a:fld id="{5BCAD085-E8A6-8845-BD4E-CB4CCA059FC4}" type="datetimeFigureOut">
               <a:rPr lang="en-US" smtClean="0"/>
-              <a:t>1/27/13</a:t>
+              <a:t>4/5/26</a:t>
             </a:fld>
             <a:endParaRPr lang="en-US"/>
           </a:p>
@@ -413,10 +428,9 @@
           <a:lstStyle/>
           <a:p>
             <a:r>
-              <a:rPr lang="en-US" smtClean="0"/>
+              <a:rPr lang="en-US"/>
               <a:t>Click to edit Master title style</a:t>
             </a:r>
-            <a:endParaRPr lang="en-US"/>
           </a:p>
         </p:txBody>
       </p:sp>
@@ -437,38 +451,37 @@
           <a:p>
             <a:pPr lvl="0"/>
             <a:r>
-              <a:rPr lang="en-US" smtClean="0"/>
+              <a:rPr lang="en-US"/>
               <a:t>Click to edit Master text styles</a:t>
             </a:r>
           </a:p>
           <a:p>
             <a:pPr lvl="1"/>
             <a:r>
-              <a:rPr lang="en-US" smtClean="0"/>
+              <a:rPr lang="en-US"/>
               <a:t>Second level</a:t>
             </a:r>
           </a:p>
           <a:p>
             <a:pPr lvl="2"/>
             <a:r>
-              <a:rPr lang="en-US" smtClean="0"/>
+              <a:rPr lang="en-US"/>
               <a:t>Third level</a:t>
             </a:r>
           </a:p>
           <a:p>
             <a:pPr lvl="3"/>
             <a:r>
-              <a:rPr lang="en-US" smtClean="0"/>
+              <a:rPr lang="en-US"/>
               <a:t>Fourth level</a:t>
             </a:r>
           </a:p>
           <a:p>
             <a:pPr lvl="4"/>
             <a:r>
-              <a:rPr lang="en-US" smtClean="0"/>
+              <a:rPr lang="en-US"/>
               <a:t>Fifth level</a:t>
             </a:r>
-            <a:endParaRPr lang="en-US"/>
           </a:p>
         </p:txBody>
       </p:sp>
@@ -489,7 +502,7 @@
           <a:p>
             <a:fld id="{5BCAD085-E8A6-8845-BD4E-CB4CCA059FC4}" type="datetimeFigureOut">
               <a:rPr lang="en-US" smtClean="0"/>
-              <a:t>1/27/13</a:t>
+              <a:t>4/5/26</a:t>
             </a:fld>
             <a:endParaRPr lang="en-US"/>
           </a:p>
@@ -588,10 +601,9 @@
           <a:lstStyle/>
           <a:p>
             <a:r>
-              <a:rPr lang="en-US" smtClean="0"/>
+              <a:rPr lang="en-US"/>
               <a:t>Click to edit Master title style</a:t>
             </a:r>
-            <a:endParaRPr lang="en-US"/>
           </a:p>
         </p:txBody>
       </p:sp>
@@ -617,38 +629,37 @@
           <a:p>
             <a:pPr lvl="0"/>
             <a:r>
-              <a:rPr lang="en-US" smtClean="0"/>
+              <a:rPr lang="en-US"/>
               <a:t>Click to edit Master text styles</a:t>
             </a:r>
           </a:p>
           <a:p>
             <a:pPr lvl="1"/>
             <a:r>
-              <a:rPr lang="en-US" smtClean="0"/>
+              <a:rPr lang="en-US"/>
               <a:t>Second level</a:t>
             </a:r>
           </a:p>
           <a:p>
             <a:pPr lvl="2"/>
             <a:r>
-              <a:rPr lang="en-US" smtClean="0"/>
+              <a:rPr lang="en-US"/>
               <a:t>Third level</a:t>
             </a:r>
           </a:p>
           <a:p>
             <a:pPr lvl="3"/>
             <a:r>
-              <a:rPr lang="en-US" smtClean="0"/>
+              <a:rPr lang="en-US"/>
               <a:t>Fourth level</a:t>
             </a:r>
           </a:p>
           <a:p>
             <a:pPr lvl="4"/>
             <a:r>
-              <a:rPr lang="en-US" smtClean="0"/>
+              <a:rPr lang="en-US"/>
               <a:t>Fifth level</a:t>
             </a:r>
-            <a:endParaRPr lang="en-US"/>
           </a:p>
         </p:txBody>
       </p:sp>
@@ -669,7 +680,7 @@
           <a:p>
             <a:fld id="{5BCAD085-E8A6-8845-BD4E-CB4CCA059FC4}" type="datetimeFigureOut">
               <a:rPr lang="en-US" smtClean="0"/>
-              <a:t>1/27/13</a:t>
+              <a:t>4/5/26</a:t>
             </a:fld>
             <a:endParaRPr lang="en-US"/>
           </a:p>
@@ -763,10 +774,9 @@
           <a:lstStyle/>
           <a:p>
             <a:r>
-              <a:rPr lang="en-US" smtClean="0"/>
+              <a:rPr lang="en-US"/>
               <a:t>Click to edit Master title style</a:t>
             </a:r>
-            <a:endParaRPr lang="en-US"/>
           </a:p>
         </p:txBody>
       </p:sp>
@@ -787,38 +797,37 @@
           <a:p>
             <a:pPr lvl="0"/>
             <a:r>
-              <a:rPr lang="en-US" smtClean="0"/>
+              <a:rPr lang="en-US"/>
               <a:t>Click to edit Master text styles</a:t>
             </a:r>
           </a:p>
           <a:p>
             <a:pPr lvl="1"/>
             <a:r>
-              <a:rPr lang="en-US" smtClean="0"/>
+              <a:rPr lang="en-US"/>
               <a:t>Second level</a:t>
             </a:r>
           </a:p>
           <a:p>
             <a:pPr lvl="2"/>
             <a:r>
-              <a:rPr lang="en-US" smtClean="0"/>
+              <a:rPr lang="en-US"/>
               <a:t>Third level</a:t>
             </a:r>
           </a:p>
           <a:p>
             <a:pPr lvl="3"/>
             <a:r>
-              <a:rPr lang="en-US" smtClean="0"/>
+              <a:rPr lang="en-US"/>
               <a:t>Fourth level</a:t>
             </a:r>
           </a:p>
           <a:p>
             <a:pPr lvl="4"/>
             <a:r>
-              <a:rPr lang="en-US" smtClean="0"/>
+              <a:rPr lang="en-US"/>
               <a:t>Fifth level</a:t>
             </a:r>
-            <a:endParaRPr lang="en-US"/>
           </a:p>
         </p:txBody>
       </p:sp>
@@ -839,7 +848,7 @@
           <a:p>
             <a:fld id="{5BCAD085-E8A6-8845-BD4E-CB4CCA059FC4}" type="datetimeFigureOut">
               <a:rPr lang="en-US" smtClean="0"/>
-              <a:t>1/27/13</a:t>
+              <a:t>4/5/26</a:t>
             </a:fld>
             <a:endParaRPr lang="en-US"/>
           </a:p>
@@ -942,10 +951,9 @@
           </a:lstStyle>
           <a:p>
             <a:r>
-              <a:rPr lang="en-US" smtClean="0"/>
+              <a:rPr lang="en-US"/>
               <a:t>Click to edit Master title style</a:t>
             </a:r>
-            <a:endParaRPr lang="en-US"/>
           </a:p>
         </p:txBody>
       </p:sp>
@@ -1062,7 +1070,7 @@
           <a:p>
             <a:pPr lvl="0"/>
             <a:r>
-              <a:rPr lang="en-US" smtClean="0"/>
+              <a:rPr lang="en-US"/>
               <a:t>Click to edit Master text styles</a:t>
             </a:r>
           </a:p>
@@ -1085,7 +1093,7 @@
           <a:p>
             <a:fld id="{5BCAD085-E8A6-8845-BD4E-CB4CCA059FC4}" type="datetimeFigureOut">
               <a:rPr lang="en-US" smtClean="0"/>
-              <a:t>1/27/13</a:t>
+              <a:t>4/5/26</a:t>
             </a:fld>
             <a:endParaRPr lang="en-US"/>
           </a:p>
@@ -1179,10 +1187,9 @@
           <a:lstStyle/>
           <a:p>
             <a:r>
-              <a:rPr lang="en-US" smtClean="0"/>
+              <a:rPr lang="en-US"/>
               <a:t>Click to edit Master title style</a:t>
             </a:r>
-            <a:endParaRPr lang="en-US"/>
           </a:p>
         </p:txBody>
       </p:sp>
@@ -1236,38 +1243,37 @@
           <a:p>
             <a:pPr lvl="0"/>
             <a:r>
-              <a:rPr lang="en-US" smtClean="0"/>
+              <a:rPr lang="en-US"/>
               <a:t>Click to edit Master text styles</a:t>
             </a:r>
           </a:p>
           <a:p>
             <a:pPr lvl="1"/>
             <a:r>
-              <a:rPr lang="en-US" smtClean="0"/>
+              <a:rPr lang="en-US"/>
               <a:t>Second level</a:t>
             </a:r>
           </a:p>
           <a:p>
             <a:pPr lvl="2"/>
             <a:r>
-              <a:rPr lang="en-US" smtClean="0"/>
+              <a:rPr lang="en-US"/>
               <a:t>Third level</a:t>
             </a:r>
           </a:p>
           <a:p>
             <a:pPr lvl="3"/>
             <a:r>
-              <a:rPr lang="en-US" smtClean="0"/>
+              <a:rPr lang="en-US"/>
               <a:t>Fourth level</a:t>
             </a:r>
           </a:p>
           <a:p>
             <a:pPr lvl="4"/>
             <a:r>
-              <a:rPr lang="en-US" smtClean="0"/>
+              <a:rPr lang="en-US"/>
               <a:t>Fifth level</a:t>
             </a:r>
-            <a:endParaRPr lang="en-US"/>
           </a:p>
         </p:txBody>
       </p:sp>
@@ -1321,38 +1327,37 @@
           <a:p>
             <a:pPr lvl="0"/>
             <a:r>
-              <a:rPr lang="en-US" smtClean="0"/>
+              <a:rPr lang="en-US"/>
               <a:t>Click to edit Master text styles</a:t>
             </a:r>
           </a:p>
           <a:p>
             <a:pPr lvl="1"/>
             <a:r>
-              <a:rPr lang="en-US" smtClean="0"/>
+              <a:rPr lang="en-US"/>
               <a:t>Second level</a:t>
             </a:r>
           </a:p>
           <a:p>
             <a:pPr lvl="2"/>
             <a:r>
-              <a:rPr lang="en-US" smtClean="0"/>
+              <a:rPr lang="en-US"/>
               <a:t>Third level</a:t>
             </a:r>
           </a:p>
           <a:p>
             <a:pPr lvl="3"/>
             <a:r>
-              <a:rPr lang="en-US" smtClean="0"/>
+              <a:rPr lang="en-US"/>
               <a:t>Fourth level</a:t>
             </a:r>
           </a:p>
           <a:p>
             <a:pPr lvl="4"/>
             <a:r>
-              <a:rPr lang="en-US" smtClean="0"/>
+              <a:rPr lang="en-US"/>
               <a:t>Fifth level</a:t>
             </a:r>
-            <a:endParaRPr lang="en-US"/>
           </a:p>
         </p:txBody>
       </p:sp>
@@ -1373,7 +1378,7 @@
           <a:p>
             <a:fld id="{5BCAD085-E8A6-8845-BD4E-CB4CCA059FC4}" type="datetimeFigureOut">
               <a:rPr lang="en-US" smtClean="0"/>
-              <a:t>1/27/13</a:t>
+              <a:t>4/5/26</a:t>
             </a:fld>
             <a:endParaRPr lang="en-US"/>
           </a:p>
@@ -1471,10 +1476,9 @@
           </a:lstStyle>
           <a:p>
             <a:r>
-              <a:rPr lang="en-US" smtClean="0"/>
+              <a:rPr lang="en-US"/>
               <a:t>Click to edit Master title style</a:t>
             </a:r>
-            <a:endParaRPr lang="en-US"/>
           </a:p>
         </p:txBody>
       </p:sp>
@@ -1537,7 +1541,7 @@
           <a:p>
             <a:pPr lvl="0"/>
             <a:r>
-              <a:rPr lang="en-US" smtClean="0"/>
+              <a:rPr lang="en-US"/>
               <a:t>Click to edit Master text styles</a:t>
             </a:r>
           </a:p>
@@ -1593,38 +1597,37 @@
           <a:p>
             <a:pPr lvl="0"/>
             <a:r>
-              <a:rPr lang="en-US" smtClean="0"/>
+              <a:rPr lang="en-US"/>
               <a:t>Click to edit Master text styles</a:t>
             </a:r>
           </a:p>
           <a:p>
             <a:pPr lvl="1"/>
             <a:r>
-              <a:rPr lang="en-US" smtClean="0"/>
+              <a:rPr lang="en-US"/>
               <a:t>Second level</a:t>
             </a:r>
           </a:p>
           <a:p>
             <a:pPr lvl="2"/>
             <a:r>
-              <a:rPr lang="en-US" smtClean="0"/>
+              <a:rPr lang="en-US"/>
               <a:t>Third level</a:t>
             </a:r>
           </a:p>
           <a:p>
             <a:pPr lvl="3"/>
             <a:r>
-              <a:rPr lang="en-US" smtClean="0"/>
+              <a:rPr lang="en-US"/>
               <a:t>Fourth level</a:t>
             </a:r>
           </a:p>
           <a:p>
             <a:pPr lvl="4"/>
             <a:r>
-              <a:rPr lang="en-US" smtClean="0"/>
+              <a:rPr lang="en-US"/>
               <a:t>Fifth level</a:t>
             </a:r>
-            <a:endParaRPr lang="en-US"/>
           </a:p>
         </p:txBody>
       </p:sp>
@@ -1687,7 +1690,7 @@
           <a:p>
             <a:pPr lvl="0"/>
             <a:r>
-              <a:rPr lang="en-US" smtClean="0"/>
+              <a:rPr lang="en-US"/>
               <a:t>Click to edit Master text styles</a:t>
             </a:r>
           </a:p>
@@ -1743,38 +1746,37 @@
           <a:p>
             <a:pPr lvl="0"/>
             <a:r>
-              <a:rPr lang="en-US" smtClean="0"/>
+              <a:rPr lang="en-US"/>
               <a:t>Click to edit Master text styles</a:t>
             </a:r>
           </a:p>
           <a:p>
             <a:pPr lvl="1"/>
             <a:r>
-              <a:rPr lang="en-US" smtClean="0"/>
+              <a:rPr lang="en-US"/>
               <a:t>Second level</a:t>
             </a:r>
           </a:p>
           <a:p>
             <a:pPr lvl="2"/>
             <a:r>
-              <a:rPr lang="en-US" smtClean="0"/>
+              <a:rPr lang="en-US"/>
               <a:t>Third level</a:t>
             </a:r>
           </a:p>
           <a:p>
             <a:pPr lvl="3"/>
             <a:r>
-              <a:rPr lang="en-US" smtClean="0"/>
+              <a:rPr lang="en-US"/>
               <a:t>Fourth level</a:t>
             </a:r>
           </a:p>
           <a:p>
             <a:pPr lvl="4"/>
             <a:r>
-              <a:rPr lang="en-US" smtClean="0"/>
+              <a:rPr lang="en-US"/>
               <a:t>Fifth level</a:t>
             </a:r>
-            <a:endParaRPr lang="en-US"/>
           </a:p>
         </p:txBody>
       </p:sp>
@@ -1795,7 +1797,7 @@
           <a:p>
             <a:fld id="{5BCAD085-E8A6-8845-BD4E-CB4CCA059FC4}" type="datetimeFigureOut">
               <a:rPr lang="en-US" smtClean="0"/>
-              <a:t>1/27/13</a:t>
+              <a:t>4/5/26</a:t>
             </a:fld>
             <a:endParaRPr lang="en-US"/>
           </a:p>
@@ -1889,10 +1891,9 @@
           <a:lstStyle/>
           <a:p>
             <a:r>
-              <a:rPr lang="en-US" smtClean="0"/>
+              <a:rPr lang="en-US"/>
               <a:t>Click to edit Master title style</a:t>
             </a:r>
-            <a:endParaRPr lang="en-US"/>
           </a:p>
         </p:txBody>
       </p:sp>
@@ -1913,7 +1914,7 @@
           <a:p>
             <a:fld id="{5BCAD085-E8A6-8845-BD4E-CB4CCA059FC4}" type="datetimeFigureOut">
               <a:rPr lang="en-US" smtClean="0"/>
-              <a:t>1/27/13</a:t>
+              <a:t>4/5/26</a:t>
             </a:fld>
             <a:endParaRPr lang="en-US"/>
           </a:p>
@@ -2008,7 +2009,7 @@
           <a:p>
             <a:fld id="{5BCAD085-E8A6-8845-BD4E-CB4CCA059FC4}" type="datetimeFigureOut">
               <a:rPr lang="en-US" smtClean="0"/>
-              <a:t>1/27/13</a:t>
+              <a:t>4/5/26</a:t>
             </a:fld>
             <a:endParaRPr lang="en-US"/>
           </a:p>
@@ -2111,10 +2112,9 @@
           </a:lstStyle>
           <a:p>
             <a:r>
-              <a:rPr lang="en-US" smtClean="0"/>
+              <a:rPr lang="en-US"/>
               <a:t>Click to edit Master title style</a:t>
             </a:r>
-            <a:endParaRPr lang="en-US"/>
           </a:p>
         </p:txBody>
       </p:sp>
@@ -2168,38 +2168,37 @@
           <a:p>
             <a:pPr lvl="0"/>
             <a:r>
-              <a:rPr lang="en-US" smtClean="0"/>
+              <a:rPr lang="en-US"/>
               <a:t>Click to edit Master text styles</a:t>
             </a:r>
           </a:p>
           <a:p>
             <a:pPr lvl="1"/>
             <a:r>
-              <a:rPr lang="en-US" smtClean="0"/>
+              <a:rPr lang="en-US"/>
               <a:t>Second level</a:t>
             </a:r>
           </a:p>
           <a:p>
             <a:pPr lvl="2"/>
             <a:r>
-              <a:rPr lang="en-US" smtClean="0"/>
+              <a:rPr lang="en-US"/>
               <a:t>Third level</a:t>
             </a:r>
           </a:p>
           <a:p>
             <a:pPr lvl="3"/>
             <a:r>
-              <a:rPr lang="en-US" smtClean="0"/>
+              <a:rPr lang="en-US"/>
               <a:t>Fourth level</a:t>
             </a:r>
           </a:p>
           <a:p>
             <a:pPr lvl="4"/>
             <a:r>
-              <a:rPr lang="en-US" smtClean="0"/>
+              <a:rPr lang="en-US"/>
               <a:t>Fifth level</a:t>
             </a:r>
-            <a:endParaRPr lang="en-US"/>
           </a:p>
         </p:txBody>
       </p:sp>
@@ -2262,7 +2261,7 @@
           <a:p>
             <a:pPr lvl="0"/>
             <a:r>
-              <a:rPr lang="en-US" smtClean="0"/>
+              <a:rPr lang="en-US"/>
               <a:t>Click to edit Master text styles</a:t>
             </a:r>
           </a:p>
@@ -2285,7 +2284,7 @@
           <a:p>
             <a:fld id="{5BCAD085-E8A6-8845-BD4E-CB4CCA059FC4}" type="datetimeFigureOut">
               <a:rPr lang="en-US" smtClean="0"/>
-              <a:t>1/27/13</a:t>
+              <a:t>4/5/26</a:t>
             </a:fld>
             <a:endParaRPr lang="en-US"/>
           </a:p>
@@ -2388,10 +2387,9 @@
           </a:lstStyle>
           <a:p>
             <a:r>
-              <a:rPr lang="en-US" smtClean="0"/>
+              <a:rPr lang="en-US"/>
               <a:t>Click to edit Master title style</a:t>
             </a:r>
-            <a:endParaRPr lang="en-US"/>
           </a:p>
         </p:txBody>
       </p:sp>
@@ -2515,7 +2513,7 @@
           <a:p>
             <a:pPr lvl="0"/>
             <a:r>
-              <a:rPr lang="en-US" smtClean="0"/>
+              <a:rPr lang="en-US"/>
               <a:t>Click to edit Master text styles</a:t>
             </a:r>
           </a:p>
@@ -2538,7 +2536,7 @@
           <a:p>
             <a:fld id="{5BCAD085-E8A6-8845-BD4E-CB4CCA059FC4}" type="datetimeFigureOut">
               <a:rPr lang="en-US" smtClean="0"/>
-              <a:t>1/27/13</a:t>
+              <a:t>4/5/26</a:t>
             </a:fld>
             <a:endParaRPr lang="en-US"/>
           </a:p>
@@ -2647,10 +2645,9 @@
           <a:lstStyle/>
           <a:p>
             <a:r>
-              <a:rPr lang="en-US" smtClean="0"/>
+              <a:rPr lang="en-US"/>
               <a:t>Click to edit Master title style</a:t>
             </a:r>
-            <a:endParaRPr lang="en-US"/>
           </a:p>
         </p:txBody>
       </p:sp>
@@ -2681,38 +2678,37 @@
           <a:p>
             <a:pPr lvl="0"/>
             <a:r>
-              <a:rPr lang="en-US" smtClean="0"/>
+              <a:rPr lang="en-US"/>
               <a:t>Click to edit Master text styles</a:t>
             </a:r>
           </a:p>
           <a:p>
             <a:pPr lvl="1"/>
             <a:r>
-              <a:rPr lang="en-US" smtClean="0"/>
+              <a:rPr lang="en-US"/>
               <a:t>Second level</a:t>
             </a:r>
           </a:p>
           <a:p>
             <a:pPr lvl="2"/>
             <a:r>
-              <a:rPr lang="en-US" smtClean="0"/>
+              <a:rPr lang="en-US"/>
               <a:t>Third level</a:t>
             </a:r>
           </a:p>
           <a:p>
             <a:pPr lvl="3"/>
             <a:r>
-              <a:rPr lang="en-US" smtClean="0"/>
+              <a:rPr lang="en-US"/>
               <a:t>Fourth level</a:t>
             </a:r>
           </a:p>
           <a:p>
             <a:pPr lvl="4"/>
             <a:r>
-              <a:rPr lang="en-US" smtClean="0"/>
+              <a:rPr lang="en-US"/>
               <a:t>Fifth level</a:t>
             </a:r>
-            <a:endParaRPr lang="en-US"/>
           </a:p>
         </p:txBody>
       </p:sp>
@@ -2751,7 +2747,7 @@
           <a:p>
             <a:fld id="{5BCAD085-E8A6-8845-BD4E-CB4CCA059FC4}" type="datetimeFigureOut">
               <a:rPr lang="en-US" smtClean="0"/>
-              <a:t>1/27/13</a:t>
+              <a:t>4/5/26</a:t>
             </a:fld>
             <a:endParaRPr lang="en-US"/>
           </a:p>
@@ -3110,7 +3106,7 @@
 </file>
 
 <file path=ppt/slides/slide1.xml><?xml version="1.0" encoding="utf-8"?>
-<p:sld xmlns:a="http://schemas.openxmlformats.org/drawingml/2006/main" xmlns:p="http://schemas.openxmlformats.org/presentationml/2006/main" xmlns:r="http://schemas.openxmlformats.org/officeDocument/2006/relationships">
+<p:sld xmlns:a="http://schemas.openxmlformats.org/drawingml/2006/main" xmlns:r="http://schemas.openxmlformats.org/officeDocument/2006/relationships" xmlns:p="http://schemas.openxmlformats.org/presentationml/2006/main">
   <p:cSld>
     <p:bg>
       <p:bgPr>
@@ -3126,7 +3122,14 @@
         <p:cNvGrpSpPr/>
         <p:nvPr/>
       </p:nvGrpSpPr>
-      <p:grpSpPr/>
+      <p:grpSpPr>
+        <a:xfrm>
+          <a:off x="0" y="0"/>
+          <a:ext cx="0" cy="0"/>
+          <a:chOff x="0" y="0"/>
+          <a:chExt cx="0" cy="0"/>
+        </a:xfrm>
+      </p:grpSpPr>
       <p:sp>
         <p:nvSpPr>
           <p:cNvPr id="2" name="Rectangle 1"/>
@@ -3167,6 +3170,7 @@
           <a:lstStyle/>
           <a:p>
             <a:pPr algn="ctr"/>
+            <a:endParaRPr/>
           </a:p>
         </p:txBody>
       </p:sp>
@@ -3319,7 +3323,7 @@
 </file>
 
 <file path=ppt/slides/slide10.xml><?xml version="1.0" encoding="utf-8"?>
-<p:sld xmlns:a="http://schemas.openxmlformats.org/drawingml/2006/main" xmlns:p="http://schemas.openxmlformats.org/presentationml/2006/main" xmlns:r="http://schemas.openxmlformats.org/officeDocument/2006/relationships">
+<p:sld xmlns:a="http://schemas.openxmlformats.org/drawingml/2006/main" xmlns:r="http://schemas.openxmlformats.org/officeDocument/2006/relationships" xmlns:p="http://schemas.openxmlformats.org/presentationml/2006/main">
   <p:cSld>
     <p:bg>
       <p:bgPr>
@@ -3335,7 +3339,179 @@
         <p:cNvGrpSpPr/>
         <p:nvPr/>
       </p:nvGrpSpPr>
-      <p:grpSpPr/>
+      <p:grpSpPr>
+        <a:xfrm>
+          <a:off x="0" y="0"/>
+          <a:ext cx="0" cy="0"/>
+          <a:chOff x="0" y="0"/>
+          <a:chExt cx="0" cy="0"/>
+        </a:xfrm>
+      </p:grpSpPr>
+      <p:sp>
+        <p:nvSpPr>
+          <p:cNvPr id="2" name="TextBox 1"/>
+          <p:cNvSpPr txBox="1"/>
+          <p:nvPr/>
+        </p:nvSpPr>
+        <p:spPr>
+          <a:xfrm>
+            <a:off x="1097280" y="274320"/>
+            <a:ext cx="10058400" cy="548640"/>
+          </a:xfrm>
+          <a:prstGeom prst="rect">
+            <a:avLst/>
+          </a:prstGeom>
+          <a:noFill/>
+        </p:spPr>
+        <p:txBody>
+          <a:bodyPr wrap="square">
+            <a:spAutoFit/>
+          </a:bodyPr>
+          <a:lstStyle/>
+          <a:p>
+            <a:pPr algn="l">
+              <a:defRPr sz="2400" b="1">
+                <a:solidFill>
+                  <a:srgbClr val="1A1A1A"/>
+                </a:solidFill>
+                <a:latin typeface="Palatino Linotype"/>
+              </a:defRPr>
+            </a:pPr>
+            <a:r>
+              <a:t>Azure Production Trace Distributions</a:t>
+            </a:r>
+          </a:p>
+        </p:txBody>
+      </p:sp>
+      <p:pic>
+        <p:nvPicPr>
+          <p:cNvPr id="3" name="Picture 2" descr="sw_fig3_distributions.png"/>
+          <p:cNvPicPr>
+            <a:picLocks noChangeAspect="1"/>
+          </p:cNvPicPr>
+          <p:nvPr/>
+        </p:nvPicPr>
+        <p:blipFill>
+          <a:blip r:embed="rId2"/>
+          <a:stretch>
+            <a:fillRect/>
+          </a:stretch>
+        </p:blipFill>
+        <p:spPr>
+          <a:xfrm>
+            <a:off x="1737360" y="1097280"/>
+            <a:ext cx="8686800" cy="3926753"/>
+          </a:xfrm>
+          <a:prstGeom prst="rect">
+            <a:avLst/>
+          </a:prstGeom>
+        </p:spPr>
+      </p:pic>
+      <p:sp>
+        <p:nvSpPr>
+          <p:cNvPr id="4" name="TextBox 3"/>
+          <p:cNvSpPr txBox="1"/>
+          <p:nvPr/>
+        </p:nvSpPr>
+        <p:spPr>
+          <a:xfrm>
+            <a:off x="1737360" y="5161193"/>
+            <a:ext cx="8686800" cy="365760"/>
+          </a:xfrm>
+          <a:prstGeom prst="rect">
+            <a:avLst/>
+          </a:prstGeom>
+          <a:noFill/>
+        </p:spPr>
+        <p:txBody>
+          <a:bodyPr wrap="square">
+            <a:spAutoFit/>
+          </a:bodyPr>
+          <a:lstStyle/>
+          <a:p>
+            <a:pPr algn="ctr">
+              <a:defRPr sz="1100" b="0">
+                <a:solidFill>
+                  <a:srgbClr val="AAAAAA"/>
+                </a:solidFill>
+                <a:latin typeface="Palatino Linotype"/>
+              </a:defRPr>
+            </a:pPr>
+            <a:r>
+              <a:t>Source: Patel et al., ISCA 2024, Figure 3</a:t>
+            </a:r>
+          </a:p>
+        </p:txBody>
+      </p:sp>
+      <p:sp>
+        <p:nvSpPr>
+          <p:cNvPr id="5" name="TextBox 4"/>
+          <p:cNvSpPr txBox="1"/>
+          <p:nvPr/>
+        </p:nvSpPr>
+        <p:spPr>
+          <a:xfrm>
+            <a:off x="11338560" y="6446520"/>
+            <a:ext cx="640080" cy="320040"/>
+          </a:xfrm>
+          <a:prstGeom prst="rect">
+            <a:avLst/>
+          </a:prstGeom>
+          <a:noFill/>
+        </p:spPr>
+        <p:txBody>
+          <a:bodyPr wrap="square">
+            <a:spAutoFit/>
+          </a:bodyPr>
+          <a:lstStyle/>
+          <a:p>
+            <a:pPr algn="r">
+              <a:defRPr sz="1000" b="0">
+                <a:solidFill>
+                  <a:srgbClr val="AAAAAA"/>
+                </a:solidFill>
+                <a:latin typeface="Palatino Linotype"/>
+              </a:defRPr>
+            </a:pPr>
+            <a:r>
+              <a:t>10</a:t>
+            </a:r>
+          </a:p>
+        </p:txBody>
+      </p:sp>
+    </p:spTree>
+  </p:cSld>
+  <p:clrMapOvr>
+    <a:masterClrMapping/>
+  </p:clrMapOvr>
+</p:sld>
+</file>
+
+<file path=ppt/slides/slide11.xml><?xml version="1.0" encoding="utf-8"?>
+<p:sld xmlns:a="http://schemas.openxmlformats.org/drawingml/2006/main" xmlns:r="http://schemas.openxmlformats.org/officeDocument/2006/relationships" xmlns:p="http://schemas.openxmlformats.org/presentationml/2006/main">
+  <p:cSld>
+    <p:bg>
+      <p:bgPr>
+        <a:solidFill>
+          <a:srgbClr val="FFFFFF"/>
+        </a:solidFill>
+        <a:effectLst/>
+      </p:bgPr>
+    </p:bg>
+    <p:spTree>
+      <p:nvGrpSpPr>
+        <p:cNvPr id="1" name=""/>
+        <p:cNvGrpSpPr/>
+        <p:nvPr/>
+      </p:nvGrpSpPr>
+      <p:grpSpPr>
+        <a:xfrm>
+          <a:off x="0" y="0"/>
+          <a:ext cx="0" cy="0"/>
+          <a:chOff x="0" y="0"/>
+          <a:chExt cx="0" cy="0"/>
+        </a:xfrm>
+      </p:grpSpPr>
       <p:sp>
         <p:nvSpPr>
           <p:cNvPr id="2" name="TextBox 1"/>
@@ -3391,10 +3567,34 @@
                 <a:tableStyleId>{5C22544A-7EE6-4342-B048-85BDC9FD1C3A}</a:tableStyleId>
               </a:tblPr>
               <a:tblGrid>
-                <a:gridCol w="1485900"/>
-                <a:gridCol w="1485900"/>
-                <a:gridCol w="1485900"/>
-                <a:gridCol w="1485900"/>
+                <a:gridCol w="1485900">
+                  <a:extLst>
+                    <a:ext uri="{9D8B030D-6E8A-4147-A177-3AD203B41FA5}">
+                      <a16:colId xmlns:a16="http://schemas.microsoft.com/office/drawing/2014/main" val="20000"/>
+                    </a:ext>
+                  </a:extLst>
+                </a:gridCol>
+                <a:gridCol w="1485900">
+                  <a:extLst>
+                    <a:ext uri="{9D8B030D-6E8A-4147-A177-3AD203B41FA5}">
+                      <a16:colId xmlns:a16="http://schemas.microsoft.com/office/drawing/2014/main" val="20001"/>
+                    </a:ext>
+                  </a:extLst>
+                </a:gridCol>
+                <a:gridCol w="1485900">
+                  <a:extLst>
+                    <a:ext uri="{9D8B030D-6E8A-4147-A177-3AD203B41FA5}">
+                      <a16:colId xmlns:a16="http://schemas.microsoft.com/office/drawing/2014/main" val="20002"/>
+                    </a:ext>
+                  </a:extLst>
+                </a:gridCol>
+                <a:gridCol w="1485900">
+                  <a:extLst>
+                    <a:ext uri="{9D8B030D-6E8A-4147-A177-3AD203B41FA5}">
+                      <a16:colId xmlns:a16="http://schemas.microsoft.com/office/drawing/2014/main" val="20003"/>
+                    </a:ext>
+                  </a:extLst>
+                </a:gridCol>
               </a:tblGrid>
               <a:tr h="457200">
                 <a:tc>
@@ -3410,6 +3610,7 @@
                           <a:latin typeface="Palatino Linotype"/>
                         </a:defRPr>
                       </a:pPr>
+                      <a:endParaRPr/>
                     </a:p>
                   </a:txBody>
                   <a:tcPr>
@@ -3490,6 +3691,11 @@
                     </a:solidFill>
                   </a:tcPr>
                 </a:tc>
+                <a:extLst>
+                  <a:ext uri="{0D108BD9-81ED-4DB2-BD59-A6C34878D82A}">
+                    <a16:rowId xmlns:a16="http://schemas.microsoft.com/office/drawing/2014/main" val="10000"/>
+                  </a:ext>
+                </a:extLst>
               </a:tr>
               <a:tr h="457200">
                 <a:tc>
@@ -3588,6 +3794,11 @@
                     </a:solidFill>
                   </a:tcPr>
                 </a:tc>
+                <a:extLst>
+                  <a:ext uri="{0D108BD9-81ED-4DB2-BD59-A6C34878D82A}">
+                    <a16:rowId xmlns:a16="http://schemas.microsoft.com/office/drawing/2014/main" val="10001"/>
+                  </a:ext>
+                </a:extLst>
               </a:tr>
               <a:tr h="457200">
                 <a:tc>
@@ -3686,6 +3897,11 @@
                     </a:solidFill>
                   </a:tcPr>
                 </a:tc>
+                <a:extLst>
+                  <a:ext uri="{0D108BD9-81ED-4DB2-BD59-A6C34878D82A}">
+                    <a16:rowId xmlns:a16="http://schemas.microsoft.com/office/drawing/2014/main" val="10002"/>
+                  </a:ext>
+                </a:extLst>
               </a:tr>
               <a:tr h="457200">
                 <a:tc>
@@ -3784,6 +4000,11 @@
                     </a:solidFill>
                   </a:tcPr>
                 </a:tc>
+                <a:extLst>
+                  <a:ext uri="{0D108BD9-81ED-4DB2-BD59-A6C34878D82A}">
+                    <a16:rowId xmlns:a16="http://schemas.microsoft.com/office/drawing/2014/main" val="10003"/>
+                  </a:ext>
+                </a:extLst>
               </a:tr>
               <a:tr h="457200">
                 <a:tc>
@@ -3882,6 +4103,11 @@
                     </a:solidFill>
                   </a:tcPr>
                 </a:tc>
+                <a:extLst>
+                  <a:ext uri="{0D108BD9-81ED-4DB2-BD59-A6C34878D82A}">
+                    <a16:rowId xmlns:a16="http://schemas.microsoft.com/office/drawing/2014/main" val="10004"/>
+                  </a:ext>
+                </a:extLst>
               </a:tr>
             </a:tbl>
           </a:graphicData>
@@ -3927,6 +4153,7 @@
           <a:lstStyle/>
           <a:p>
             <a:pPr algn="ctr"/>
+            <a:endParaRPr/>
           </a:p>
         </p:txBody>
       </p:sp>
@@ -4065,7 +4292,7 @@
               </a:defRPr>
             </a:pPr>
             <a:r>
-              <a:t>10</a:t>
+              <a:t>11</a:t>
             </a:r>
           </a:p>
         </p:txBody>
@@ -4078,8 +4305,8 @@
 </p:sld>
 </file>
 
-<file path=ppt/slides/slide11.xml><?xml version="1.0" encoding="utf-8"?>
-<p:sld xmlns:a="http://schemas.openxmlformats.org/drawingml/2006/main" xmlns:p="http://schemas.openxmlformats.org/presentationml/2006/main" xmlns:r="http://schemas.openxmlformats.org/officeDocument/2006/relationships">
+<file path=ppt/slides/slide12.xml><?xml version="1.0" encoding="utf-8"?>
+<p:sld xmlns:a="http://schemas.openxmlformats.org/drawingml/2006/main" xmlns:r="http://schemas.openxmlformats.org/officeDocument/2006/relationships" xmlns:p="http://schemas.openxmlformats.org/presentationml/2006/main">
   <p:cSld>
     <p:bg>
       <p:bgPr>
@@ -4095,7 +4322,14 @@
         <p:cNvGrpSpPr/>
         <p:nvPr/>
       </p:nvGrpSpPr>
-      <p:grpSpPr/>
+      <p:grpSpPr>
+        <a:xfrm>
+          <a:off x="0" y="0"/>
+          <a:ext cx="0" cy="0"/>
+          <a:chOff x="0" y="0"/>
+          <a:chExt cx="0" cy="0"/>
+        </a:xfrm>
+      </p:grpSpPr>
       <p:sp>
         <p:nvSpPr>
           <p:cNvPr id="2" name="TextBox 1"/>
@@ -4172,6 +4406,7 @@
           <a:lstStyle/>
           <a:p>
             <a:pPr algn="ctr"/>
+            <a:endParaRPr/>
           </a:p>
         </p:txBody>
       </p:sp>
@@ -4251,6 +4486,7 @@
           <a:lstStyle/>
           <a:p>
             <a:pPr algn="ctr"/>
+            <a:endParaRPr/>
           </a:p>
         </p:txBody>
       </p:sp>
@@ -4378,6 +4614,7 @@
           <a:lstStyle/>
           <a:p>
             <a:pPr algn="ctr"/>
+            <a:endParaRPr/>
           </a:p>
         </p:txBody>
       </p:sp>
@@ -4457,6 +4694,7 @@
           <a:lstStyle/>
           <a:p>
             <a:pPr algn="ctr"/>
+            <a:endParaRPr/>
           </a:p>
         </p:txBody>
       </p:sp>
@@ -4584,6 +4822,7 @@
           <a:lstStyle/>
           <a:p>
             <a:pPr algn="ctr"/>
+            <a:endParaRPr/>
           </a:p>
         </p:txBody>
       </p:sp>
@@ -4670,7 +4909,7 @@
               </a:defRPr>
             </a:pPr>
             <a:r>
-              <a:t>11</a:t>
+              <a:t>12</a:t>
             </a:r>
           </a:p>
         </p:txBody>
@@ -4683,8 +4922,8 @@
 </p:sld>
 </file>
 
-<file path=ppt/slides/slide12.xml><?xml version="1.0" encoding="utf-8"?>
-<p:sld xmlns:a="http://schemas.openxmlformats.org/drawingml/2006/main" xmlns:p="http://schemas.openxmlformats.org/presentationml/2006/main" xmlns:r="http://schemas.openxmlformats.org/officeDocument/2006/relationships">
+<file path=ppt/slides/slide13.xml><?xml version="1.0" encoding="utf-8"?>
+<p:sld xmlns:a="http://schemas.openxmlformats.org/drawingml/2006/main" xmlns:r="http://schemas.openxmlformats.org/officeDocument/2006/relationships" xmlns:p="http://schemas.openxmlformats.org/presentationml/2006/main">
   <p:cSld>
     <p:bg>
       <p:bgPr>
@@ -4700,7 +4939,14 @@
         <p:cNvGrpSpPr/>
         <p:nvPr/>
       </p:nvGrpSpPr>
-      <p:grpSpPr/>
+      <p:grpSpPr>
+        <a:xfrm>
+          <a:off x="0" y="0"/>
+          <a:ext cx="0" cy="0"/>
+          <a:chOff x="0" y="0"/>
+          <a:chExt cx="0" cy="0"/>
+        </a:xfrm>
+      </p:grpSpPr>
       <p:sp>
         <p:nvSpPr>
           <p:cNvPr id="2" name="TextBox 1"/>
@@ -4753,8 +4999,8 @@
         </p:blipFill>
         <p:spPr>
           <a:xfrm>
-            <a:off x="1737360" y="1097280"/>
-            <a:ext cx="8686800" cy="8883668"/>
+            <a:off x="3619901" y="1011085"/>
+            <a:ext cx="4952197" cy="5064429"/>
           </a:xfrm>
           <a:prstGeom prst="rect">
             <a:avLst/>
@@ -4769,7 +5015,7 @@
         </p:nvSpPr>
         <p:spPr>
           <a:xfrm>
-            <a:off x="1737360" y="10118108"/>
+            <a:off x="1304223" y="6263640"/>
             <a:ext cx="8686800" cy="365760"/>
           </a:xfrm>
           <a:prstGeom prst="rect">
@@ -4792,6 +5038,7 @@
               </a:defRPr>
             </a:pPr>
             <a:r>
+              <a:rPr dirty="0"/>
               <a:t>Source: Patel et al., ISCA 2024, Figure 10</a:t>
             </a:r>
           </a:p>
@@ -4828,7 +5075,7 @@
               </a:defRPr>
             </a:pPr>
             <a:r>
-              <a:t>12</a:t>
+              <a:t>13</a:t>
             </a:r>
           </a:p>
         </p:txBody>
@@ -4841,8 +5088,8 @@
 </p:sld>
 </file>
 
-<file path=ppt/slides/slide13.xml><?xml version="1.0" encoding="utf-8"?>
-<p:sld xmlns:a="http://schemas.openxmlformats.org/drawingml/2006/main" xmlns:p="http://schemas.openxmlformats.org/presentationml/2006/main" xmlns:r="http://schemas.openxmlformats.org/officeDocument/2006/relationships">
+<file path=ppt/slides/slide14.xml><?xml version="1.0" encoding="utf-8"?>
+<p:sld xmlns:a="http://schemas.openxmlformats.org/drawingml/2006/main" xmlns:r="http://schemas.openxmlformats.org/officeDocument/2006/relationships" xmlns:p="http://schemas.openxmlformats.org/presentationml/2006/main">
   <p:cSld>
     <p:bg>
       <p:bgPr>
@@ -4858,7 +5105,14 @@
         <p:cNvGrpSpPr/>
         <p:nvPr/>
       </p:nvGrpSpPr>
-      <p:grpSpPr/>
+      <p:grpSpPr>
+        <a:xfrm>
+          <a:off x="0" y="0"/>
+          <a:ext cx="0" cy="0"/>
+          <a:chOff x="0" y="0"/>
+          <a:chExt cx="0" cy="0"/>
+        </a:xfrm>
+      </p:grpSpPr>
       <p:sp>
         <p:nvSpPr>
           <p:cNvPr id="2" name="TextBox 1"/>
@@ -4935,6 +5189,7 @@
           <a:lstStyle/>
           <a:p>
             <a:pPr algn="ctr"/>
+            <a:endParaRPr/>
           </a:p>
         </p:txBody>
       </p:sp>
@@ -5062,6 +5317,7 @@
           <a:lstStyle/>
           <a:p>
             <a:pPr algn="ctr"/>
+            <a:endParaRPr/>
           </a:p>
         </p:txBody>
       </p:sp>
@@ -5189,6 +5445,7 @@
           <a:lstStyle/>
           <a:p>
             <a:pPr algn="ctr"/>
+            <a:endParaRPr/>
           </a:p>
         </p:txBody>
       </p:sp>
@@ -5291,7 +5548,7 @@
               </a:defRPr>
             </a:pPr>
             <a:r>
-              <a:t>13</a:t>
+              <a:t>14</a:t>
             </a:r>
           </a:p>
         </p:txBody>
@@ -5304,8 +5561,8 @@
 </p:sld>
 </file>
 
-<file path=ppt/slides/slide14.xml><?xml version="1.0" encoding="utf-8"?>
-<p:sld xmlns:a="http://schemas.openxmlformats.org/drawingml/2006/main" xmlns:p="http://schemas.openxmlformats.org/presentationml/2006/main" xmlns:r="http://schemas.openxmlformats.org/officeDocument/2006/relationships">
+<file path=ppt/slides/slide15.xml><?xml version="1.0" encoding="utf-8"?>
+<p:sld xmlns:a="http://schemas.openxmlformats.org/drawingml/2006/main" xmlns:r="http://schemas.openxmlformats.org/officeDocument/2006/relationships" xmlns:p="http://schemas.openxmlformats.org/presentationml/2006/main">
   <p:cSld>
     <p:bg>
       <p:bgPr>
@@ -5321,7 +5578,14 @@
         <p:cNvGrpSpPr/>
         <p:nvPr/>
       </p:nvGrpSpPr>
-      <p:grpSpPr/>
+      <p:grpSpPr>
+        <a:xfrm>
+          <a:off x="0" y="0"/>
+          <a:ext cx="0" cy="0"/>
+          <a:chOff x="0" y="0"/>
+          <a:chExt cx="0" cy="0"/>
+        </a:xfrm>
+      </p:grpSpPr>
       <p:sp>
         <p:nvSpPr>
           <p:cNvPr id="2" name="TextBox 1"/>
@@ -5377,10 +5641,34 @@
                 <a:tableStyleId>{5C22544A-7EE6-4342-B048-85BDC9FD1C3A}</a:tableStyleId>
               </a:tblPr>
               <a:tblGrid>
-                <a:gridCol w="2354580"/>
-                <a:gridCol w="2354580"/>
-                <a:gridCol w="2354580"/>
-                <a:gridCol w="2354580"/>
+                <a:gridCol w="2354580">
+                  <a:extLst>
+                    <a:ext uri="{9D8B030D-6E8A-4147-A177-3AD203B41FA5}">
+                      <a16:colId xmlns:a16="http://schemas.microsoft.com/office/drawing/2014/main" val="20000"/>
+                    </a:ext>
+                  </a:extLst>
+                </a:gridCol>
+                <a:gridCol w="2354580">
+                  <a:extLst>
+                    <a:ext uri="{9D8B030D-6E8A-4147-A177-3AD203B41FA5}">
+                      <a16:colId xmlns:a16="http://schemas.microsoft.com/office/drawing/2014/main" val="20001"/>
+                    </a:ext>
+                  </a:extLst>
+                </a:gridCol>
+                <a:gridCol w="2354580">
+                  <a:extLst>
+                    <a:ext uri="{9D8B030D-6E8A-4147-A177-3AD203B41FA5}">
+                      <a16:colId xmlns:a16="http://schemas.microsoft.com/office/drawing/2014/main" val="20002"/>
+                    </a:ext>
+                  </a:extLst>
+                </a:gridCol>
+                <a:gridCol w="2354580">
+                  <a:extLst>
+                    <a:ext uri="{9D8B030D-6E8A-4147-A177-3AD203B41FA5}">
+                      <a16:colId xmlns:a16="http://schemas.microsoft.com/office/drawing/2014/main" val="20003"/>
+                    </a:ext>
+                  </a:extLst>
+                </a:gridCol>
               </a:tblGrid>
               <a:tr h="457200">
                 <a:tc>
@@ -5479,6 +5767,11 @@
                     </a:solidFill>
                   </a:tcPr>
                 </a:tc>
+                <a:extLst>
+                  <a:ext uri="{0D108BD9-81ED-4DB2-BD59-A6C34878D82A}">
+                    <a16:rowId xmlns:a16="http://schemas.microsoft.com/office/drawing/2014/main" val="10000"/>
+                  </a:ext>
+                </a:extLst>
               </a:tr>
               <a:tr h="457200">
                 <a:tc>
@@ -5577,6 +5870,11 @@
                     </a:solidFill>
                   </a:tcPr>
                 </a:tc>
+                <a:extLst>
+                  <a:ext uri="{0D108BD9-81ED-4DB2-BD59-A6C34878D82A}">
+                    <a16:rowId xmlns:a16="http://schemas.microsoft.com/office/drawing/2014/main" val="10001"/>
+                  </a:ext>
+                </a:extLst>
               </a:tr>
               <a:tr h="457200">
                 <a:tc>
@@ -5675,6 +5973,11 @@
                     </a:solidFill>
                   </a:tcPr>
                 </a:tc>
+                <a:extLst>
+                  <a:ext uri="{0D108BD9-81ED-4DB2-BD59-A6C34878D82A}">
+                    <a16:rowId xmlns:a16="http://schemas.microsoft.com/office/drawing/2014/main" val="10002"/>
+                  </a:ext>
+                </a:extLst>
               </a:tr>
               <a:tr h="457200">
                 <a:tc>
@@ -5773,6 +6076,11 @@
                     </a:solidFill>
                   </a:tcPr>
                 </a:tc>
+                <a:extLst>
+                  <a:ext uri="{0D108BD9-81ED-4DB2-BD59-A6C34878D82A}">
+                    <a16:rowId xmlns:a16="http://schemas.microsoft.com/office/drawing/2014/main" val="10003"/>
+                  </a:ext>
+                </a:extLst>
               </a:tr>
               <a:tr h="457200">
                 <a:tc>
@@ -5871,6 +6179,11 @@
                     </a:solidFill>
                   </a:tcPr>
                 </a:tc>
+                <a:extLst>
+                  <a:ext uri="{0D108BD9-81ED-4DB2-BD59-A6C34878D82A}">
+                    <a16:rowId xmlns:a16="http://schemas.microsoft.com/office/drawing/2014/main" val="10004"/>
+                  </a:ext>
+                </a:extLst>
               </a:tr>
             </a:tbl>
           </a:graphicData>
@@ -5907,7 +6220,7 @@
               </a:defRPr>
             </a:pPr>
             <a:r>
-              <a:t>14</a:t>
+              <a:t>15</a:t>
             </a:r>
           </a:p>
         </p:txBody>
@@ -5920,8 +6233,8 @@
 </p:sld>
 </file>
 
-<file path=ppt/slides/slide15.xml><?xml version="1.0" encoding="utf-8"?>
-<p:sld xmlns:a="http://schemas.openxmlformats.org/drawingml/2006/main" xmlns:p="http://schemas.openxmlformats.org/presentationml/2006/main" xmlns:r="http://schemas.openxmlformats.org/officeDocument/2006/relationships">
+<file path=ppt/slides/slide16.xml><?xml version="1.0" encoding="utf-8"?>
+<p:sld xmlns:a="http://schemas.openxmlformats.org/drawingml/2006/main" xmlns:r="http://schemas.openxmlformats.org/officeDocument/2006/relationships" xmlns:p="http://schemas.openxmlformats.org/presentationml/2006/main">
   <p:cSld>
     <p:bg>
       <p:bgPr>
@@ -5937,7 +6250,14 @@
         <p:cNvGrpSpPr/>
         <p:nvPr/>
       </p:nvGrpSpPr>
-      <p:grpSpPr/>
+      <p:grpSpPr>
+        <a:xfrm>
+          <a:off x="0" y="0"/>
+          <a:ext cx="0" cy="0"/>
+          <a:chOff x="0" y="0"/>
+          <a:chExt cx="0" cy="0"/>
+        </a:xfrm>
+      </p:grpSpPr>
       <p:sp>
         <p:nvSpPr>
           <p:cNvPr id="2" name="TextBox 1"/>
@@ -6014,6 +6334,7 @@
           <a:lstStyle/>
           <a:p>
             <a:pPr algn="ctr"/>
+            <a:endParaRPr/>
           </a:p>
         </p:txBody>
       </p:sp>
@@ -6109,6 +6430,7 @@
           <a:lstStyle/>
           <a:p>
             <a:pPr algn="ctr"/>
+            <a:endParaRPr/>
           </a:p>
         </p:txBody>
       </p:sp>
@@ -6204,6 +6526,7 @@
           <a:lstStyle/>
           <a:p>
             <a:pPr algn="ctr"/>
+            <a:endParaRPr/>
           </a:p>
         </p:txBody>
       </p:sp>
@@ -6299,6 +6622,7 @@
           <a:lstStyle/>
           <a:p>
             <a:pPr algn="ctr"/>
+            <a:endParaRPr/>
           </a:p>
         </p:txBody>
       </p:sp>
@@ -6405,7 +6729,7 @@
               </a:defRPr>
             </a:pPr>
             <a:r>
-              <a:t>15</a:t>
+              <a:t>16</a:t>
             </a:r>
           </a:p>
         </p:txBody>
@@ -6418,8 +6742,8 @@
 </p:sld>
 </file>
 
-<file path=ppt/slides/slide16.xml><?xml version="1.0" encoding="utf-8"?>
-<p:sld xmlns:a="http://schemas.openxmlformats.org/drawingml/2006/main" xmlns:p="http://schemas.openxmlformats.org/presentationml/2006/main" xmlns:r="http://schemas.openxmlformats.org/officeDocument/2006/relationships">
+<file path=ppt/slides/slide17.xml><?xml version="1.0" encoding="utf-8"?>
+<p:sld xmlns:a="http://schemas.openxmlformats.org/drawingml/2006/main" xmlns:r="http://schemas.openxmlformats.org/officeDocument/2006/relationships" xmlns:p="http://schemas.openxmlformats.org/presentationml/2006/main">
   <p:cSld>
     <p:bg>
       <p:bgPr>
@@ -6435,7 +6759,14 @@
         <p:cNvGrpSpPr/>
         <p:nvPr/>
       </p:nvGrpSpPr>
-      <p:grpSpPr/>
+      <p:grpSpPr>
+        <a:xfrm>
+          <a:off x="0" y="0"/>
+          <a:ext cx="0" cy="0"/>
+          <a:chOff x="0" y="0"/>
+          <a:chExt cx="0" cy="0"/>
+        </a:xfrm>
+      </p:grpSpPr>
       <p:sp>
         <p:nvSpPr>
           <p:cNvPr id="2" name="TextBox 1"/>
@@ -6488,8 +6819,8 @@
         </p:blipFill>
         <p:spPr>
           <a:xfrm>
-            <a:off x="1737360" y="1097280"/>
-            <a:ext cx="8686800" cy="7088147"/>
+            <a:off x="3006291" y="974466"/>
+            <a:ext cx="6240378" cy="5091947"/>
           </a:xfrm>
           <a:prstGeom prst="rect">
             <a:avLst/>
@@ -6504,7 +6835,7 @@
         </p:nvSpPr>
         <p:spPr>
           <a:xfrm>
-            <a:off x="1737360" y="8322587"/>
+            <a:off x="1626669" y="6217920"/>
             <a:ext cx="8686800" cy="365760"/>
           </a:xfrm>
           <a:prstGeom prst="rect">
@@ -6527,6 +6858,7 @@
               </a:defRPr>
             </a:pPr>
             <a:r>
+              <a:rPr dirty="0"/>
               <a:t>Source: Patel et al., ISCA 2024, Figure 16</a:t>
             </a:r>
           </a:p>
@@ -6563,7 +6895,7 @@
               </a:defRPr>
             </a:pPr>
             <a:r>
-              <a:t>16</a:t>
+              <a:t>17</a:t>
             </a:r>
           </a:p>
         </p:txBody>
@@ -6576,8 +6908,8 @@
 </p:sld>
 </file>
 
-<file path=ppt/slides/slide17.xml><?xml version="1.0" encoding="utf-8"?>
-<p:sld xmlns:a="http://schemas.openxmlformats.org/drawingml/2006/main" xmlns:p="http://schemas.openxmlformats.org/presentationml/2006/main" xmlns:r="http://schemas.openxmlformats.org/officeDocument/2006/relationships">
+<file path=ppt/slides/slide18.xml><?xml version="1.0" encoding="utf-8"?>
+<p:sld xmlns:a="http://schemas.openxmlformats.org/drawingml/2006/main" xmlns:r="http://schemas.openxmlformats.org/officeDocument/2006/relationships" xmlns:p="http://schemas.openxmlformats.org/presentationml/2006/main">
   <p:cSld>
     <p:bg>
       <p:bgPr>
@@ -6593,7 +6925,14 @@
         <p:cNvGrpSpPr/>
         <p:nvPr/>
       </p:nvGrpSpPr>
-      <p:grpSpPr/>
+      <p:grpSpPr>
+        <a:xfrm>
+          <a:off x="0" y="0"/>
+          <a:ext cx="0" cy="0"/>
+          <a:chOff x="0" y="0"/>
+          <a:chExt cx="0" cy="0"/>
+        </a:xfrm>
+      </p:grpSpPr>
       <p:sp>
         <p:nvSpPr>
           <p:cNvPr id="2" name="TextBox 1"/>
@@ -6660,6 +6999,7 @@
                 <a:latin typeface="Palatino Linotype"/>
               </a:defRPr>
             </a:pPr>
+            <a:endParaRPr/>
           </a:p>
           <a:p>
             <a:pPr>
@@ -6783,6 +7123,7 @@
           <a:lstStyle/>
           <a:p>
             <a:pPr algn="ctr"/>
+            <a:endParaRPr/>
           </a:p>
         </p:txBody>
       </p:sp>
@@ -6853,7 +7194,7 @@
               </a:defRPr>
             </a:pPr>
             <a:r>
-              <a:t>17</a:t>
+              <a:t>18</a:t>
             </a:r>
           </a:p>
         </p:txBody>
@@ -6866,8 +7207,8 @@
 </p:sld>
 </file>
 
-<file path=ppt/slides/slide18.xml><?xml version="1.0" encoding="utf-8"?>
-<p:sld xmlns:a="http://schemas.openxmlformats.org/drawingml/2006/main" xmlns:p="http://schemas.openxmlformats.org/presentationml/2006/main" xmlns:r="http://schemas.openxmlformats.org/officeDocument/2006/relationships">
+<file path=ppt/slides/slide19.xml><?xml version="1.0" encoding="utf-8"?>
+<p:sld xmlns:a="http://schemas.openxmlformats.org/drawingml/2006/main" xmlns:r="http://schemas.openxmlformats.org/officeDocument/2006/relationships" xmlns:p="http://schemas.openxmlformats.org/presentationml/2006/main">
   <p:cSld>
     <p:bg>
       <p:bgPr>
@@ -6883,7 +7224,14 @@
         <p:cNvGrpSpPr/>
         <p:nvPr/>
       </p:nvGrpSpPr>
-      <p:grpSpPr/>
+      <p:grpSpPr>
+        <a:xfrm>
+          <a:off x="0" y="0"/>
+          <a:ext cx="0" cy="0"/>
+          <a:chOff x="0" y="0"/>
+          <a:chExt cx="0" cy="0"/>
+        </a:xfrm>
+      </p:grpSpPr>
       <p:sp>
         <p:nvSpPr>
           <p:cNvPr id="2" name="Rectangle 1"/>
@@ -6924,6 +7272,7 @@
           <a:lstStyle/>
           <a:p>
             <a:pPr algn="ctr"/>
+            <a:endParaRPr/>
           </a:p>
         </p:txBody>
       </p:sp>
@@ -7046,7 +7395,7 @@
               </a:defRPr>
             </a:pPr>
             <a:r>
-              <a:t>18</a:t>
+              <a:t>19</a:t>
             </a:r>
           </a:p>
         </p:txBody>
@@ -7059,8 +7408,8 @@
 </p:sld>
 </file>
 
-<file path=ppt/slides/slide19.xml><?xml version="1.0" encoding="utf-8"?>
-<p:sld xmlns:a="http://schemas.openxmlformats.org/drawingml/2006/main" xmlns:p="http://schemas.openxmlformats.org/presentationml/2006/main" xmlns:r="http://schemas.openxmlformats.org/officeDocument/2006/relationships">
+<file path=ppt/slides/slide2.xml><?xml version="1.0" encoding="utf-8"?>
+<p:sld xmlns:a="http://schemas.openxmlformats.org/drawingml/2006/main" xmlns:r="http://schemas.openxmlformats.org/officeDocument/2006/relationships" xmlns:p="http://schemas.openxmlformats.org/presentationml/2006/main">
   <p:cSld>
     <p:bg>
       <p:bgPr>
@@ -7076,7 +7425,14 @@
         <p:cNvGrpSpPr/>
         <p:nvPr/>
       </p:nvGrpSpPr>
-      <p:grpSpPr/>
+      <p:grpSpPr>
+        <a:xfrm>
+          <a:off x="0" y="0"/>
+          <a:ext cx="0" cy="0"/>
+          <a:chOff x="0" y="0"/>
+          <a:chExt cx="0" cy="0"/>
+        </a:xfrm>
+      </p:grpSpPr>
       <p:sp>
         <p:nvSpPr>
           <p:cNvPr id="2" name="TextBox 1"/>
@@ -7108,64 +7464,21 @@
               </a:defRPr>
             </a:pPr>
             <a:r>
-              <a:t>Goodput: The Right Optimization Target</a:t>
-            </a:r>
-          </a:p>
-        </p:txBody>
-      </p:sp>
-      <p:sp>
-        <p:nvSpPr>
-          <p:cNvPr id="3" name="Rectangle 2"/>
-          <p:cNvSpPr/>
-          <p:nvPr/>
-        </p:nvSpPr>
-        <p:spPr>
-          <a:xfrm>
-            <a:off x="1097280" y="1554480"/>
-            <a:ext cx="10058400" cy="1097280"/>
-          </a:xfrm>
-          <a:prstGeom prst="rect">
-            <a:avLst/>
-          </a:prstGeom>
-          <a:solidFill>
-            <a:srgbClr val="E8EEF8"/>
-          </a:solidFill>
-          <a:ln>
-            <a:noFill/>
-          </a:ln>
-        </p:spPr>
-        <p:style>
-          <a:lnRef idx="1">
-            <a:schemeClr val="accent1"/>
-          </a:lnRef>
-          <a:fillRef idx="3">
-            <a:schemeClr val="accent1"/>
-          </a:fillRef>
-          <a:effectRef idx="2">
-            <a:schemeClr val="accent1"/>
-          </a:effectRef>
-          <a:fontRef idx="minor">
-            <a:schemeClr val="lt1"/>
-          </a:fontRef>
-        </p:style>
-        <p:txBody>
-          <a:bodyPr rtlCol="0" anchor="ctr"/>
-          <a:lstStyle/>
-          <a:p>
-            <a:pPr algn="ctr"/>
-          </a:p>
-        </p:txBody>
-      </p:sp>
-      <p:sp>
-        <p:nvSpPr>
-          <p:cNvPr id="4" name="TextBox 3"/>
+              <a:t>Outline</a:t>
+            </a:r>
+          </a:p>
+        </p:txBody>
+      </p:sp>
+      <p:sp>
+        <p:nvSpPr>
+          <p:cNvPr id="3" name="TextBox 2"/>
           <p:cNvSpPr txBox="1"/>
           <p:nvPr/>
         </p:nvSpPr>
         <p:spPr>
           <a:xfrm>
-            <a:off x="1371600" y="1645920"/>
-            <a:ext cx="9418320" cy="914400"/>
+            <a:off x="1097280" y="1645920"/>
+            <a:ext cx="4754880" cy="3657600"/>
           </a:xfrm>
           <a:prstGeom prst="rect">
             <a:avLst/>
@@ -7178,8 +7491,8 @@
           </a:bodyPr>
           <a:lstStyle/>
           <a:p>
-            <a:pPr algn="ctr">
-              <a:defRPr sz="2000" b="1">
+            <a:pPr algn="l">
+              <a:defRPr sz="2200" b="1">
                 <a:solidFill>
                   <a:srgbClr val="1A56DB"/>
                 </a:solidFill>
@@ -7187,59 +7500,7 @@
               </a:defRPr>
             </a:pPr>
             <a:r>
-              <a:t>Per-GPU Goodput = max request rate while meeting SLO targets</a:t>
-            </a:r>
-          </a:p>
-          <a:p>
-            <a:pPr algn="ctr">
-              <a:spcBef>
-                <a:spcPts val="800"/>
-              </a:spcBef>
-              <a:defRPr sz="1600" b="0">
-                <a:solidFill>
-                  <a:srgbClr val="666666"/>
-                </a:solidFill>
-                <a:latin typeface="Palatino Linotype"/>
-              </a:defRPr>
-            </a:pPr>
-            <a:r>
-              <a:t>Higher goodput = lower cost per query = what production systems actually optimize for</a:t>
-            </a:r>
-          </a:p>
-        </p:txBody>
-      </p:sp>
-      <p:sp>
-        <p:nvSpPr>
-          <p:cNvPr id="5" name="TextBox 4"/>
-          <p:cNvSpPr txBox="1"/>
-          <p:nvPr/>
-        </p:nvSpPr>
-        <p:spPr>
-          <a:xfrm>
-            <a:off x="1097280" y="3017520"/>
-            <a:ext cx="10058400" cy="2743200"/>
-          </a:xfrm>
-          <a:prstGeom prst="rect">
-            <a:avLst/>
-          </a:prstGeom>
-          <a:noFill/>
-        </p:spPr>
-        <p:txBody>
-          <a:bodyPr wrap="square">
-            <a:spAutoFit/>
-          </a:bodyPr>
-          <a:lstStyle/>
-          <a:p>
-            <a:pPr algn="l">
-              <a:defRPr sz="2000" b="1">
-                <a:solidFill>
-                  <a:srgbClr val="1A1A1A"/>
-                </a:solidFill>
-                <a:latin typeface="Palatino Linotype"/>
-              </a:defRPr>
-            </a:pPr>
-            <a:r>
-              <a:t>DistServe's approach:</a:t>
+              <a:t>Part 1: Berat</a:t>
             </a:r>
           </a:p>
           <a:p>
@@ -7255,7 +7516,7 @@
               </a:defRPr>
             </a:pPr>
             <a:r>
-              <a:t>Separate prefill and decoding onto different GPU instances</a:t>
+              <a:t>LLM inference background</a:t>
             </a:r>
           </a:p>
           <a:p>
@@ -7271,7 +7532,7 @@
               </a:defRPr>
             </a:pPr>
             <a:r>
-              <a:t>Optimize parallelism strategy for each phase independently</a:t>
+              <a:t>The two phases and why they differ</a:t>
             </a:r>
           </a:p>
           <a:p>
@@ -7287,7 +7548,7 @@
               </a:defRPr>
             </a:pPr>
             <a:r>
-              <a:t>Automatically find the best placement on the cluster</a:t>
+              <a:t>The colocation problem</a:t>
             </a:r>
           </a:p>
           <a:p>
@@ -7303,21 +7564,69 @@
               </a:defRPr>
             </a:pPr>
             <a:r>
-              <a:t>Use simulation to evaluate configurations (under 2% error)</a:t>
-            </a:r>
-          </a:p>
-        </p:txBody>
-      </p:sp>
-      <p:sp>
-        <p:nvSpPr>
-          <p:cNvPr id="6" name="TextBox 5"/>
+              <a:t>Splitwise: production insights</a:t>
+            </a:r>
+          </a:p>
+          <a:p>
+            <a:pPr>
+              <a:spcBef>
+                <a:spcPts val="600"/>
+              </a:spcBef>
+              <a:defRPr sz="1700" b="0">
+                <a:solidFill>
+                  <a:srgbClr val="333333"/>
+                </a:solidFill>
+                <a:latin typeface="Palatino Linotype"/>
+              </a:defRPr>
+            </a:pPr>
+            <a:r>
+              <a:t>Architecture and KV-cache transfer</a:t>
+            </a:r>
+          </a:p>
+          <a:p>
+            <a:pPr>
+              <a:spcBef>
+                <a:spcPts val="600"/>
+              </a:spcBef>
+              <a:defRPr sz="1700" b="0">
+                <a:solidFill>
+                  <a:srgbClr val="333333"/>
+                </a:solidFill>
+                <a:latin typeface="Palatino Linotype"/>
+              </a:defRPr>
+            </a:pPr>
+            <a:r>
+              <a:t>Heterogeneous cluster designs</a:t>
+            </a:r>
+          </a:p>
+          <a:p>
+            <a:pPr>
+              <a:spcBef>
+                <a:spcPts val="600"/>
+              </a:spcBef>
+              <a:defRPr sz="1700" b="0">
+                <a:solidFill>
+                  <a:srgbClr val="333333"/>
+                </a:solidFill>
+                <a:latin typeface="Palatino Linotype"/>
+              </a:defRPr>
+            </a:pPr>
+            <a:r>
+              <a:t>Evaluation</a:t>
+            </a:r>
+          </a:p>
+        </p:txBody>
+      </p:sp>
+      <p:sp>
+        <p:nvSpPr>
+          <p:cNvPr id="4" name="TextBox 3"/>
           <p:cNvSpPr txBox="1"/>
           <p:nvPr/>
         </p:nvSpPr>
         <p:spPr>
           <a:xfrm>
-            <a:off x="11338560" y="6446520"/>
-            <a:ext cx="640080" cy="320040"/>
+            <a:off x="6400800" y="1645920"/>
+            <a:ext cx="4754880" cy="3657600"/>
           </a:xfrm>
           <a:prstGeom prst="rect">
             <a:avLst/>
@@ -7330,6 +7639,138 @@
           </a:bodyPr>
           <a:lstStyle/>
           <a:p>
+            <a:pPr algn="l">
+              <a:defRPr sz="2200" b="1">
+                <a:solidFill>
+                  <a:srgbClr val="0E6E6E"/>
+                </a:solidFill>
+                <a:latin typeface="Palatino Linotype"/>
+              </a:defRPr>
+            </a:pPr>
+            <a:r>
+              <a:t>Part 2: Ethan</a:t>
+            </a:r>
+          </a:p>
+          <a:p>
+            <a:pPr>
+              <a:spcBef>
+                <a:spcPts val="1400"/>
+              </a:spcBef>
+              <a:defRPr sz="1700" b="0">
+                <a:solidFill>
+                  <a:srgbClr val="333333"/>
+                </a:solidFill>
+                <a:latin typeface="Palatino Linotype"/>
+              </a:defRPr>
+            </a:pPr>
+            <a:r>
+              <a:t>DistServe: goodput optimization</a:t>
+            </a:r>
+          </a:p>
+          <a:p>
+            <a:pPr>
+              <a:spcBef>
+                <a:spcPts val="600"/>
+              </a:spcBef>
+              <a:defRPr sz="1700" b="0">
+                <a:solidFill>
+                  <a:srgbClr val="333333"/>
+                </a:solidFill>
+                <a:latin typeface="Palatino Linotype"/>
+              </a:defRPr>
+            </a:pPr>
+            <a:r>
+              <a:t>Formal tradeoff analysis</a:t>
+            </a:r>
+          </a:p>
+          <a:p>
+            <a:pPr>
+              <a:spcBef>
+                <a:spcPts val="600"/>
+              </a:spcBef>
+              <a:defRPr sz="1700" b="0">
+                <a:solidFill>
+                  <a:srgbClr val="333333"/>
+                </a:solidFill>
+                <a:latin typeface="Palatino Linotype"/>
+              </a:defRPr>
+            </a:pPr>
+            <a:r>
+              <a:t>Placement algorithms</a:t>
+            </a:r>
+          </a:p>
+          <a:p>
+            <a:pPr>
+              <a:spcBef>
+                <a:spcPts val="600"/>
+              </a:spcBef>
+              <a:defRPr sz="1700" b="0">
+                <a:solidFill>
+                  <a:srgbClr val="333333"/>
+                </a:solidFill>
+                <a:latin typeface="Palatino Linotype"/>
+              </a:defRPr>
+            </a:pPr>
+            <a:r>
+              <a:t>Online scheduling</a:t>
+            </a:r>
+          </a:p>
+          <a:p>
+            <a:pPr>
+              <a:spcBef>
+                <a:spcPts val="600"/>
+              </a:spcBef>
+              <a:defRPr sz="1700" b="0">
+                <a:solidFill>
+                  <a:srgbClr val="333333"/>
+                </a:solidFill>
+                <a:latin typeface="Palatino Linotype"/>
+              </a:defRPr>
+            </a:pPr>
+            <a:r>
+              <a:t>Evaluation</a:t>
+            </a:r>
+          </a:p>
+          <a:p>
+            <a:pPr>
+              <a:spcBef>
+                <a:spcPts val="600"/>
+              </a:spcBef>
+              <a:defRPr sz="1700" b="0">
+                <a:solidFill>
+                  <a:srgbClr val="333333"/>
+                </a:solidFill>
+                <a:latin typeface="Palatino Linotype"/>
+              </a:defRPr>
+            </a:pPr>
+            <a:r>
+              <a:t>Comparison and future directions</a:t>
+            </a:r>
+          </a:p>
+        </p:txBody>
+      </p:sp>
+      <p:sp>
+        <p:nvSpPr>
+          <p:cNvPr id="5" name="TextBox 4"/>
+          <p:cNvSpPr txBox="1"/>
+          <p:nvPr/>
+        </p:nvSpPr>
+        <p:spPr>
+          <a:xfrm>
+            <a:off x="11338560" y="6446520"/>
+            <a:ext cx="640080" cy="320040"/>
+          </a:xfrm>
+          <a:prstGeom prst="rect">
+            <a:avLst/>
+          </a:prstGeom>
+          <a:noFill/>
+        </p:spPr>
+        <p:txBody>
+          <a:bodyPr wrap="square">
+            <a:spAutoFit/>
+          </a:bodyPr>
+          <a:lstStyle/>
+          <a:p>
             <a:pPr algn="r">
               <a:defRPr sz="1000" b="0">
                 <a:solidFill>
@@ -7339,7 +7780,7 @@
               </a:defRPr>
             </a:pPr>
             <a:r>
-              <a:t>19</a:t>
+              <a:t>2</a:t>
             </a:r>
           </a:p>
         </p:txBody>
@@ -7352,8 +7793,8 @@
 </p:sld>
 </file>
 
-<file path=ppt/slides/slide2.xml><?xml version="1.0" encoding="utf-8"?>
-<p:sld xmlns:a="http://schemas.openxmlformats.org/drawingml/2006/main" xmlns:p="http://schemas.openxmlformats.org/presentationml/2006/main" xmlns:r="http://schemas.openxmlformats.org/officeDocument/2006/relationships">
+<file path=ppt/slides/slide20.xml><?xml version="1.0" encoding="utf-8"?>
+<p:sld xmlns:a="http://schemas.openxmlformats.org/drawingml/2006/main" xmlns:r="http://schemas.openxmlformats.org/officeDocument/2006/relationships" xmlns:p="http://schemas.openxmlformats.org/presentationml/2006/main">
   <p:cSld>
     <p:bg>
       <p:bgPr>
@@ -7369,7 +7810,14 @@
         <p:cNvGrpSpPr/>
         <p:nvPr/>
       </p:nvGrpSpPr>
-      <p:grpSpPr/>
+      <p:grpSpPr>
+        <a:xfrm>
+          <a:off x="0" y="0"/>
+          <a:ext cx="0" cy="0"/>
+          <a:chOff x="0" y="0"/>
+          <a:chExt cx="0" cy="0"/>
+        </a:xfrm>
+      </p:grpSpPr>
       <p:sp>
         <p:nvSpPr>
           <p:cNvPr id="2" name="TextBox 1"/>
@@ -7401,7 +7849,7 @@
               </a:defRPr>
             </a:pPr>
             <a:r>
-              <a:t>How LLM Inference Works</a:t>
+              <a:t>Goodput: The Right Optimization Target</a:t>
             </a:r>
           </a:p>
         </p:txBody>
@@ -7415,13 +7863,13 @@
         <p:spPr>
           <a:xfrm>
             <a:off x="1097280" y="1554480"/>
-            <a:ext cx="4754880" cy="2560320"/>
+            <a:ext cx="10058400" cy="1097280"/>
           </a:xfrm>
           <a:prstGeom prst="rect">
             <a:avLst/>
           </a:prstGeom>
           <a:solidFill>
-            <a:srgbClr val="F8F9FA"/>
+            <a:srgbClr val="E8EEF8"/>
           </a:solidFill>
           <a:ln>
             <a:noFill/>
@@ -7446,6 +7894,7 @@
           <a:lstStyle/>
           <a:p>
             <a:pPr algn="ctr"/>
+            <a:endParaRPr/>
           </a:p>
         </p:txBody>
       </p:sp>
@@ -7458,7 +7907,7 @@
         <p:spPr>
           <a:xfrm>
             <a:off x="1371600" y="1645920"/>
-            <a:ext cx="4206240" cy="2377440"/>
+            <a:ext cx="9418320" cy="914400"/>
           </a:xfrm>
           <a:prstGeom prst="rect">
             <a:avLst/>
@@ -7471,24 +7920,76 @@
           </a:bodyPr>
           <a:lstStyle/>
           <a:p>
+            <a:pPr algn="ctr">
+              <a:defRPr sz="2000" b="1">
+                <a:solidFill>
+                  <a:srgbClr val="1A56DB"/>
+                </a:solidFill>
+                <a:latin typeface="Palatino Linotype"/>
+              </a:defRPr>
+            </a:pPr>
+            <a:r>
+              <a:t>Per-GPU Goodput = max request rate while meeting SLO targets</a:t>
+            </a:r>
+          </a:p>
+          <a:p>
+            <a:pPr algn="ctr">
+              <a:spcBef>
+                <a:spcPts val="800"/>
+              </a:spcBef>
+              <a:defRPr sz="1600" b="0">
+                <a:solidFill>
+                  <a:srgbClr val="666666"/>
+                </a:solidFill>
+                <a:latin typeface="Palatino Linotype"/>
+              </a:defRPr>
+            </a:pPr>
+            <a:r>
+              <a:t>Higher goodput = lower cost per query = what production systems actually optimize for</a:t>
+            </a:r>
+          </a:p>
+        </p:txBody>
+      </p:sp>
+      <p:sp>
+        <p:nvSpPr>
+          <p:cNvPr id="5" name="TextBox 4"/>
+          <p:cNvSpPr txBox="1"/>
+          <p:nvPr/>
+        </p:nvSpPr>
+        <p:spPr>
+          <a:xfrm>
+            <a:off x="1097280" y="3017520"/>
+            <a:ext cx="10058400" cy="2743200"/>
+          </a:xfrm>
+          <a:prstGeom prst="rect">
+            <a:avLst/>
+          </a:prstGeom>
+          <a:noFill/>
+        </p:spPr>
+        <p:txBody>
+          <a:bodyPr wrap="square">
+            <a:spAutoFit/>
+          </a:bodyPr>
+          <a:lstStyle/>
+          <a:p>
             <a:pPr algn="l">
-              <a:defRPr sz="2200" b="1">
-                <a:solidFill>
-                  <a:srgbClr val="1A56DB"/>
-                </a:solidFill>
-                <a:latin typeface="Palatino Linotype"/>
-              </a:defRPr>
-            </a:pPr>
-            <a:r>
-              <a:t>Phase 1: Prefill</a:t>
+              <a:defRPr sz="2000" b="1">
+                <a:solidFill>
+                  <a:srgbClr val="1A1A1A"/>
+                </a:solidFill>
+                <a:latin typeface="Palatino Linotype"/>
+              </a:defRPr>
+            </a:pPr>
+            <a:r>
+              <a:t>DistServe's approach:</a:t>
             </a:r>
           </a:p>
           <a:p>
             <a:pPr>
               <a:spcBef>
-                <a:spcPts val="1000"/>
+                <a:spcPts val="1400"/>
               </a:spcBef>
-              <a:defRPr sz="1600" b="0">
+              <a:defRPr sz="1700" b="0">
                 <a:solidFill>
                   <a:srgbClr val="333333"/>
                 </a:solidFill>
@@ -7496,7 +7997,7 @@
               </a:defRPr>
             </a:pPr>
             <a:r>
-              <a:t>Processes all input tokens in parallel</a:t>
+              <a:t>Separate prefill and decoding onto different GPU instances</a:t>
             </a:r>
           </a:p>
           <a:p>
@@ -7504,7 +8005,7 @@
               <a:spcBef>
                 <a:spcPts val="600"/>
               </a:spcBef>
-              <a:defRPr sz="1600" b="0">
+              <a:defRPr sz="1700" b="0">
                 <a:solidFill>
                   <a:srgbClr val="333333"/>
                 </a:solidFill>
@@ -7512,7 +8013,7 @@
               </a:defRPr>
             </a:pPr>
             <a:r>
-              <a:t>One forward pass through the model</a:t>
+              <a:t>Optimize parallelism strategy for each phase independently</a:t>
             </a:r>
           </a:p>
           <a:p>
@@ -7520,7 +8021,7 @@
               <a:spcBef>
                 <a:spcPts val="600"/>
               </a:spcBef>
-              <a:defRPr sz="1600" b="0">
+              <a:defRPr sz="1700" b="0">
                 <a:solidFill>
                   <a:srgbClr val="333333"/>
                 </a:solidFill>
@@ -7528,7 +8029,7 @@
               </a:defRPr>
             </a:pPr>
             <a:r>
-              <a:t>Produces the first output token</a:t>
+              <a:t>Automatically find the best placement on the cluster</a:t>
             </a:r>
           </a:p>
           <a:p>
@@ -7536,7 +8037,7 @@
               <a:spcBef>
                 <a:spcPts val="600"/>
               </a:spcBef>
-              <a:defRPr sz="1600" b="0">
+              <a:defRPr sz="1700" b="0">
                 <a:solidFill>
                   <a:srgbClr val="333333"/>
                 </a:solidFill>
@@ -7544,67 +8045,8 @@
               </a:defRPr>
             </a:pPr>
             <a:r>
-              <a:t>Generates the KV-cache (stored context)</a:t>
-            </a:r>
-          </a:p>
-          <a:p>
-            <a:pPr>
-              <a:spcBef>
-                <a:spcPts val="600"/>
-              </a:spcBef>
-              <a:defRPr sz="1600" b="1">
-                <a:solidFill>
-                  <a:srgbClr val="1A56DB"/>
-                </a:solidFill>
-                <a:latin typeface="Palatino Linotype"/>
-              </a:defRPr>
-            </a:pPr>
-            <a:r>
-              <a:t>Compute-bound</a:t>
-            </a:r>
-          </a:p>
-        </p:txBody>
-      </p:sp>
-      <p:sp>
-        <p:nvSpPr>
-          <p:cNvPr id="5" name="Rectangle 4"/>
-          <p:cNvSpPr/>
-          <p:nvPr/>
-        </p:nvSpPr>
-        <p:spPr>
-          <a:xfrm>
-            <a:off x="6309360" y="1554480"/>
-            <a:ext cx="4754880" cy="2560320"/>
-          </a:xfrm>
-          <a:prstGeom prst="rect">
-            <a:avLst/>
-          </a:prstGeom>
-          <a:solidFill>
-            <a:srgbClr val="F8F9FA"/>
-          </a:solidFill>
-          <a:ln>
-            <a:noFill/>
-          </a:ln>
-        </p:spPr>
-        <p:style>
-          <a:lnRef idx="1">
-            <a:schemeClr val="accent1"/>
-          </a:lnRef>
-          <a:fillRef idx="3">
-            <a:schemeClr val="accent1"/>
-          </a:fillRef>
-          <a:effectRef idx="2">
-            <a:schemeClr val="accent1"/>
-          </a:effectRef>
-          <a:fontRef idx="minor">
-            <a:schemeClr val="lt1"/>
-          </a:fontRef>
-        </p:style>
-        <p:txBody>
-          <a:bodyPr rtlCol="0" anchor="ctr"/>
-          <a:lstStyle/>
-          <a:p>
-            <a:pPr algn="ctr"/>
+              <a:t>Use simulation to evaluate configurations (under 2% error)</a:t>
+            </a:r>
           </a:p>
         </p:txBody>
       </p:sp>
@@ -7616,8 +8058,8 @@
         </p:nvSpPr>
         <p:spPr>
           <a:xfrm>
-            <a:off x="6583680" y="1645920"/>
-            <a:ext cx="4206240" cy="2377440"/>
+            <a:off x="11338560" y="6446520"/>
+            <a:ext cx="640080" cy="320040"/>
           </a:xfrm>
           <a:prstGeom prst="rect">
             <a:avLst/>
@@ -7630,253 +8072,6 @@
           </a:bodyPr>
           <a:lstStyle/>
           <a:p>
-            <a:pPr algn="l">
-              <a:defRPr sz="2200" b="1">
-                <a:solidFill>
-                  <a:srgbClr val="0E6E6E"/>
-                </a:solidFill>
-                <a:latin typeface="Palatino Linotype"/>
-              </a:defRPr>
-            </a:pPr>
-            <a:r>
-              <a:t>Phase 2: Decoding</a:t>
-            </a:r>
-          </a:p>
-          <a:p>
-            <a:pPr>
-              <a:spcBef>
-                <a:spcPts val="1000"/>
-              </a:spcBef>
-              <a:defRPr sz="1600" b="0">
-                <a:solidFill>
-                  <a:srgbClr val="333333"/>
-                </a:solidFill>
-                <a:latin typeface="Palatino Linotype"/>
-              </a:defRPr>
-            </a:pPr>
-            <a:r>
-              <a:t>Generates tokens one at a time</a:t>
-            </a:r>
-          </a:p>
-          <a:p>
-            <a:pPr>
-              <a:spcBef>
-                <a:spcPts val="600"/>
-              </a:spcBef>
-              <a:defRPr sz="1600" b="0">
-                <a:solidFill>
-                  <a:srgbClr val="333333"/>
-                </a:solidFill>
-                <a:latin typeface="Palatino Linotype"/>
-              </a:defRPr>
-            </a:pPr>
-            <a:r>
-              <a:t>Each step reads the full KV-cache</a:t>
-            </a:r>
-          </a:p>
-          <a:p>
-            <a:pPr>
-              <a:spcBef>
-                <a:spcPts val="600"/>
-              </a:spcBef>
-              <a:defRPr sz="1600" b="0">
-                <a:solidFill>
-                  <a:srgbClr val="333333"/>
-                </a:solidFill>
-                <a:latin typeface="Palatino Linotype"/>
-              </a:defRPr>
-            </a:pPr>
-            <a:r>
-              <a:t>Repeats until end of sequence</a:t>
-            </a:r>
-          </a:p>
-          <a:p>
-            <a:pPr>
-              <a:spcBef>
-                <a:spcPts val="600"/>
-              </a:spcBef>
-              <a:defRPr sz="1600" b="0">
-                <a:solidFill>
-                  <a:srgbClr val="333333"/>
-                </a:solidFill>
-                <a:latin typeface="Palatino Linotype"/>
-              </a:defRPr>
-            </a:pPr>
-            <a:r>
-              <a:t>Sequential, autoregressive</a:t>
-            </a:r>
-          </a:p>
-          <a:p>
-            <a:pPr>
-              <a:spcBef>
-                <a:spcPts val="600"/>
-              </a:spcBef>
-              <a:defRPr sz="1600" b="1">
-                <a:solidFill>
-                  <a:srgbClr val="0E6E6E"/>
-                </a:solidFill>
-                <a:latin typeface="Palatino Linotype"/>
-              </a:defRPr>
-            </a:pPr>
-            <a:r>
-              <a:t>Memory-bandwidth-bound</a:t>
-            </a:r>
-          </a:p>
-        </p:txBody>
-      </p:sp>
-      <p:sp>
-        <p:nvSpPr>
-          <p:cNvPr id="7" name="Rectangle 6"/>
-          <p:cNvSpPr/>
-          <p:nvPr/>
-        </p:nvSpPr>
-        <p:spPr>
-          <a:xfrm>
-            <a:off x="1097280" y="4480560"/>
-            <a:ext cx="10058400" cy="914400"/>
-          </a:xfrm>
-          <a:prstGeom prst="rect">
-            <a:avLst/>
-          </a:prstGeom>
-          <a:solidFill>
-            <a:srgbClr val="F8F9FA"/>
-          </a:solidFill>
-          <a:ln>
-            <a:noFill/>
-          </a:ln>
-        </p:spPr>
-        <p:style>
-          <a:lnRef idx="1">
-            <a:schemeClr val="accent1"/>
-          </a:lnRef>
-          <a:fillRef idx="3">
-            <a:schemeClr val="accent1"/>
-          </a:fillRef>
-          <a:effectRef idx="2">
-            <a:schemeClr val="accent1"/>
-          </a:effectRef>
-          <a:fontRef idx="minor">
-            <a:schemeClr val="lt1"/>
-          </a:fontRef>
-        </p:style>
-        <p:txBody>
-          <a:bodyPr rtlCol="0" anchor="ctr"/>
-          <a:lstStyle/>
-          <a:p>
-            <a:pPr algn="ctr"/>
-          </a:p>
-        </p:txBody>
-      </p:sp>
-      <p:sp>
-        <p:nvSpPr>
-          <p:cNvPr id="8" name="TextBox 7"/>
-          <p:cNvSpPr txBox="1"/>
-          <p:nvPr/>
-        </p:nvSpPr>
-        <p:spPr>
-          <a:xfrm>
-            <a:off x="1371600" y="4572000"/>
-            <a:ext cx="9326880" cy="731520"/>
-          </a:xfrm>
-          <a:prstGeom prst="rect">
-            <a:avLst/>
-          </a:prstGeom>
-          <a:noFill/>
-        </p:spPr>
-        <p:txBody>
-          <a:bodyPr wrap="square">
-            <a:spAutoFit/>
-          </a:bodyPr>
-          <a:lstStyle/>
-          <a:p>
-            <a:pPr algn="l">
-              <a:defRPr sz="1700" b="1">
-                <a:solidFill>
-                  <a:srgbClr val="333333"/>
-                </a:solidFill>
-                <a:latin typeface="Palatino Linotype"/>
-              </a:defRPr>
-            </a:pPr>
-            <a:r>
-              <a:t>"Is tomato a fruit?"</a:t>
-            </a:r>
-          </a:p>
-          <a:p>
-            <a:pPr algn="l">
-              <a:spcBef>
-                <a:spcPts val="400"/>
-              </a:spcBef>
-              <a:defRPr sz="1500" b="0">
-                <a:solidFill>
-                  <a:srgbClr val="666666"/>
-                </a:solidFill>
-                <a:latin typeface="Palatino Linotype"/>
-              </a:defRPr>
-            </a:pPr>
-            <a:r>
-              <a:t>Prefill: process 5 tokens at once, output "Yes"    Decode: generate  ","  "it"  "is"  "."  one by one</a:t>
-            </a:r>
-          </a:p>
-        </p:txBody>
-      </p:sp>
-      <p:sp>
-        <p:nvSpPr>
-          <p:cNvPr id="9" name="TextBox 8"/>
-          <p:cNvSpPr txBox="1"/>
-          <p:nvPr/>
-        </p:nvSpPr>
-        <p:spPr>
-          <a:xfrm>
-            <a:off x="1097280" y="5669280"/>
-            <a:ext cx="10058400" cy="731520"/>
-          </a:xfrm>
-          <a:prstGeom prst="rect">
-            <a:avLst/>
-          </a:prstGeom>
-          <a:noFill/>
-        </p:spPr>
-        <p:txBody>
-          <a:bodyPr wrap="square">
-            <a:spAutoFit/>
-          </a:bodyPr>
-          <a:lstStyle/>
-          <a:p>
-            <a:pPr algn="l">
-              <a:defRPr sz="1400" b="0">
-                <a:solidFill>
-                  <a:srgbClr val="AAAAAA"/>
-                </a:solidFill>
-                <a:latin typeface="Palatino Linotype"/>
-              </a:defRPr>
-            </a:pPr>
-            <a:r>
-              <a:t>KV-Cache: key/value tensors stored during prefill, read at every decode step. This is what gets transferred when phases are on different machines.</a:t>
-            </a:r>
-          </a:p>
-        </p:txBody>
-      </p:sp>
-      <p:sp>
-        <p:nvSpPr>
-          <p:cNvPr id="10" name="TextBox 9"/>
-          <p:cNvSpPr txBox="1"/>
-          <p:nvPr/>
-        </p:nvSpPr>
-        <p:spPr>
-          <a:xfrm>
-            <a:off x="11338560" y="6446520"/>
-            <a:ext cx="640080" cy="320040"/>
-          </a:xfrm>
-          <a:prstGeom prst="rect">
-            <a:avLst/>
-          </a:prstGeom>
-          <a:noFill/>
-        </p:spPr>
-        <p:txBody>
-          <a:bodyPr wrap="square">
-            <a:spAutoFit/>
-          </a:bodyPr>
-          <a:lstStyle/>
-          <a:p>
             <a:pPr algn="r">
               <a:defRPr sz="1000" b="0">
                 <a:solidFill>
@@ -7886,7 +8081,7 @@
               </a:defRPr>
             </a:pPr>
             <a:r>
-              <a:t>2</a:t>
+              <a:t>20</a:t>
             </a:r>
           </a:p>
         </p:txBody>
@@ -7899,8 +8094,8 @@
 </p:sld>
 </file>
 
-<file path=ppt/slides/slide20.xml><?xml version="1.0" encoding="utf-8"?>
-<p:sld xmlns:a="http://schemas.openxmlformats.org/drawingml/2006/main" xmlns:p="http://schemas.openxmlformats.org/presentationml/2006/main" xmlns:r="http://schemas.openxmlformats.org/officeDocument/2006/relationships">
+<file path=ppt/slides/slide21.xml><?xml version="1.0" encoding="utf-8"?>
+<p:sld xmlns:a="http://schemas.openxmlformats.org/drawingml/2006/main" xmlns:r="http://schemas.openxmlformats.org/officeDocument/2006/relationships" xmlns:p="http://schemas.openxmlformats.org/presentationml/2006/main">
   <p:cSld>
     <p:bg>
       <p:bgPr>
@@ -7916,7 +8111,14 @@
         <p:cNvGrpSpPr/>
         <p:nvPr/>
       </p:nvGrpSpPr>
-      <p:grpSpPr/>
+      <p:grpSpPr>
+        <a:xfrm>
+          <a:off x="0" y="0"/>
+          <a:ext cx="0" cy="0"/>
+          <a:chOff x="0" y="0"/>
+          <a:chExt cx="0" cy="0"/>
+        </a:xfrm>
+      </p:grpSpPr>
       <p:sp>
         <p:nvSpPr>
           <p:cNvPr id="2" name="TextBox 1"/>
@@ -7993,6 +8195,7 @@
           <a:lstStyle/>
           <a:p>
             <a:pPr algn="ctr"/>
+            <a:endParaRPr/>
           </a:p>
         </p:txBody>
       </p:sp>
@@ -8168,6 +8371,7 @@
           <a:lstStyle/>
           <a:p>
             <a:pPr algn="ctr"/>
+            <a:endParaRPr/>
           </a:p>
         </p:txBody>
       </p:sp>
@@ -8343,6 +8547,7 @@
           <a:lstStyle/>
           <a:p>
             <a:pPr algn="ctr"/>
+            <a:endParaRPr/>
           </a:p>
         </p:txBody>
       </p:sp>
@@ -8413,7 +8618,7 @@
               </a:defRPr>
             </a:pPr>
             <a:r>
-              <a:t>20</a:t>
+              <a:t>21</a:t>
             </a:r>
           </a:p>
         </p:txBody>
@@ -8426,8 +8631,8 @@
 </p:sld>
 </file>
 
-<file path=ppt/slides/slide21.xml><?xml version="1.0" encoding="utf-8"?>
-<p:sld xmlns:a="http://schemas.openxmlformats.org/drawingml/2006/main" xmlns:p="http://schemas.openxmlformats.org/presentationml/2006/main" xmlns:r="http://schemas.openxmlformats.org/officeDocument/2006/relationships">
+<file path=ppt/slides/slide22.xml><?xml version="1.0" encoding="utf-8"?>
+<p:sld xmlns:a="http://schemas.openxmlformats.org/drawingml/2006/main" xmlns:r="http://schemas.openxmlformats.org/officeDocument/2006/relationships" xmlns:p="http://schemas.openxmlformats.org/presentationml/2006/main">
   <p:cSld>
     <p:bg>
       <p:bgPr>
@@ -8443,7 +8648,14 @@
         <p:cNvGrpSpPr/>
         <p:nvPr/>
       </p:nvGrpSpPr>
-      <p:grpSpPr/>
+      <p:grpSpPr>
+        <a:xfrm>
+          <a:off x="0" y="0"/>
+          <a:ext cx="0" cy="0"/>
+          <a:chOff x="0" y="0"/>
+          <a:chExt cx="0" cy="0"/>
+        </a:xfrm>
+      </p:grpSpPr>
       <p:sp>
         <p:nvSpPr>
           <p:cNvPr id="2" name="TextBox 1"/>
@@ -8571,7 +8783,7 @@
               </a:defRPr>
             </a:pPr>
             <a:r>
-              <a:t>21</a:t>
+              <a:t>22</a:t>
             </a:r>
           </a:p>
         </p:txBody>
@@ -8584,8 +8796,8 @@
 </p:sld>
 </file>
 
-<file path=ppt/slides/slide22.xml><?xml version="1.0" encoding="utf-8"?>
-<p:sld xmlns:a="http://schemas.openxmlformats.org/drawingml/2006/main" xmlns:p="http://schemas.openxmlformats.org/presentationml/2006/main" xmlns:r="http://schemas.openxmlformats.org/officeDocument/2006/relationships">
+<file path=ppt/slides/slide23.xml><?xml version="1.0" encoding="utf-8"?>
+<p:sld xmlns:a="http://schemas.openxmlformats.org/drawingml/2006/main" xmlns:r="http://schemas.openxmlformats.org/officeDocument/2006/relationships" xmlns:p="http://schemas.openxmlformats.org/presentationml/2006/main">
   <p:cSld>
     <p:bg>
       <p:bgPr>
@@ -8601,7 +8813,14 @@
         <p:cNvGrpSpPr/>
         <p:nvPr/>
       </p:nvGrpSpPr>
-      <p:grpSpPr/>
+      <p:grpSpPr>
+        <a:xfrm>
+          <a:off x="0" y="0"/>
+          <a:ext cx="0" cy="0"/>
+          <a:chOff x="0" y="0"/>
+          <a:chExt cx="0" cy="0"/>
+        </a:xfrm>
+      </p:grpSpPr>
       <p:sp>
         <p:nvSpPr>
           <p:cNvPr id="2" name="TextBox 1"/>
@@ -8714,6 +8933,7 @@
           <a:lstStyle/>
           <a:p>
             <a:pPr algn="ctr"/>
+            <a:endParaRPr/>
           </a:p>
         </p:txBody>
       </p:sp>
@@ -8873,6 +9093,7 @@
           <a:lstStyle/>
           <a:p>
             <a:pPr algn="ctr"/>
+            <a:endParaRPr/>
           </a:p>
         </p:txBody>
       </p:sp>
@@ -9016,6 +9237,7 @@
           <a:lstStyle/>
           <a:p>
             <a:pPr algn="ctr"/>
+            <a:endParaRPr/>
           </a:p>
         </p:txBody>
       </p:sp>
@@ -9086,7 +9308,7 @@
               </a:defRPr>
             </a:pPr>
             <a:r>
-              <a:t>22</a:t>
+              <a:t>23</a:t>
             </a:r>
           </a:p>
         </p:txBody>
@@ -9099,8 +9321,8 @@
 </p:sld>
 </file>
 
-<file path=ppt/slides/slide23.xml><?xml version="1.0" encoding="utf-8"?>
-<p:sld xmlns:a="http://schemas.openxmlformats.org/drawingml/2006/main" xmlns:p="http://schemas.openxmlformats.org/presentationml/2006/main" xmlns:r="http://schemas.openxmlformats.org/officeDocument/2006/relationships">
+<file path=ppt/slides/slide24.xml><?xml version="1.0" encoding="utf-8"?>
+<p:sld xmlns:a="http://schemas.openxmlformats.org/drawingml/2006/main" xmlns:r="http://schemas.openxmlformats.org/officeDocument/2006/relationships" xmlns:p="http://schemas.openxmlformats.org/presentationml/2006/main">
   <p:cSld>
     <p:bg>
       <p:bgPr>
@@ -9116,7 +9338,14 @@
         <p:cNvGrpSpPr/>
         <p:nvPr/>
       </p:nvGrpSpPr>
-      <p:grpSpPr/>
+      <p:grpSpPr>
+        <a:xfrm>
+          <a:off x="0" y="0"/>
+          <a:ext cx="0" cy="0"/>
+          <a:chOff x="0" y="0"/>
+          <a:chExt cx="0" cy="0"/>
+        </a:xfrm>
+      </p:grpSpPr>
       <p:sp>
         <p:nvSpPr>
           <p:cNvPr id="2" name="TextBox 1"/>
@@ -9208,10 +9437,34 @@
                 <a:tableStyleId>{5C22544A-7EE6-4342-B048-85BDC9FD1C3A}</a:tableStyleId>
               </a:tblPr>
               <a:tblGrid>
-                <a:gridCol w="2491740"/>
-                <a:gridCol w="2491740"/>
-                <a:gridCol w="2491740"/>
-                <a:gridCol w="2491740"/>
+                <a:gridCol w="2491740">
+                  <a:extLst>
+                    <a:ext uri="{9D8B030D-6E8A-4147-A177-3AD203B41FA5}">
+                      <a16:colId xmlns:a16="http://schemas.microsoft.com/office/drawing/2014/main" val="20000"/>
+                    </a:ext>
+                  </a:extLst>
+                </a:gridCol>
+                <a:gridCol w="2491740">
+                  <a:extLst>
+                    <a:ext uri="{9D8B030D-6E8A-4147-A177-3AD203B41FA5}">
+                      <a16:colId xmlns:a16="http://schemas.microsoft.com/office/drawing/2014/main" val="20001"/>
+                    </a:ext>
+                  </a:extLst>
+                </a:gridCol>
+                <a:gridCol w="2491740">
+                  <a:extLst>
+                    <a:ext uri="{9D8B030D-6E8A-4147-A177-3AD203B41FA5}">
+                      <a16:colId xmlns:a16="http://schemas.microsoft.com/office/drawing/2014/main" val="20002"/>
+                    </a:ext>
+                  </a:extLst>
+                </a:gridCol>
+                <a:gridCol w="2491740">
+                  <a:extLst>
+                    <a:ext uri="{9D8B030D-6E8A-4147-A177-3AD203B41FA5}">
+                      <a16:colId xmlns:a16="http://schemas.microsoft.com/office/drawing/2014/main" val="20003"/>
+                    </a:ext>
+                  </a:extLst>
+                </a:gridCol>
               </a:tblGrid>
               <a:tr h="571500">
                 <a:tc>
@@ -9310,6 +9563,11 @@
                     </a:solidFill>
                   </a:tcPr>
                 </a:tc>
+                <a:extLst>
+                  <a:ext uri="{0D108BD9-81ED-4DB2-BD59-A6C34878D82A}">
+                    <a16:rowId xmlns:a16="http://schemas.microsoft.com/office/drawing/2014/main" val="10000"/>
+                  </a:ext>
+                </a:extLst>
               </a:tr>
               <a:tr h="571500">
                 <a:tc>
@@ -9408,6 +9666,11 @@
                     </a:solidFill>
                   </a:tcPr>
                 </a:tc>
+                <a:extLst>
+                  <a:ext uri="{0D108BD9-81ED-4DB2-BD59-A6C34878D82A}">
+                    <a16:rowId xmlns:a16="http://schemas.microsoft.com/office/drawing/2014/main" val="10001"/>
+                  </a:ext>
+                </a:extLst>
               </a:tr>
               <a:tr h="571500">
                 <a:tc>
@@ -9506,6 +9769,11 @@
                     </a:solidFill>
                   </a:tcPr>
                 </a:tc>
+                <a:extLst>
+                  <a:ext uri="{0D108BD9-81ED-4DB2-BD59-A6C34878D82A}">
+                    <a16:rowId xmlns:a16="http://schemas.microsoft.com/office/drawing/2014/main" val="10002"/>
+                  </a:ext>
+                </a:extLst>
               </a:tr>
               <a:tr h="571500">
                 <a:tc>
@@ -9604,6 +9872,11 @@
                     </a:solidFill>
                   </a:tcPr>
                 </a:tc>
+                <a:extLst>
+                  <a:ext uri="{0D108BD9-81ED-4DB2-BD59-A6C34878D82A}">
+                    <a16:rowId xmlns:a16="http://schemas.microsoft.com/office/drawing/2014/main" val="10003"/>
+                  </a:ext>
+                </a:extLst>
               </a:tr>
             </a:tbl>
           </a:graphicData>
@@ -9664,9 +9937,27 @@
                 <a:tableStyleId>{5C22544A-7EE6-4342-B048-85BDC9FD1C3A}</a:tableStyleId>
               </a:tblPr>
               <a:tblGrid>
-                <a:gridCol w="1920240"/>
-                <a:gridCol w="1920240"/>
-                <a:gridCol w="1920240"/>
+                <a:gridCol w="1920240">
+                  <a:extLst>
+                    <a:ext uri="{9D8B030D-6E8A-4147-A177-3AD203B41FA5}">
+                      <a16:colId xmlns:a16="http://schemas.microsoft.com/office/drawing/2014/main" val="20000"/>
+                    </a:ext>
+                  </a:extLst>
+                </a:gridCol>
+                <a:gridCol w="1920240">
+                  <a:extLst>
+                    <a:ext uri="{9D8B030D-6E8A-4147-A177-3AD203B41FA5}">
+                      <a16:colId xmlns:a16="http://schemas.microsoft.com/office/drawing/2014/main" val="20001"/>
+                    </a:ext>
+                  </a:extLst>
+                </a:gridCol>
+                <a:gridCol w="1920240">
+                  <a:extLst>
+                    <a:ext uri="{9D8B030D-6E8A-4147-A177-3AD203B41FA5}">
+                      <a16:colId xmlns:a16="http://schemas.microsoft.com/office/drawing/2014/main" val="20002"/>
+                    </a:ext>
+                  </a:extLst>
+                </a:gridCol>
               </a:tblGrid>
               <a:tr h="365760">
                 <a:tc>
@@ -9741,6 +10032,11 @@
                     </a:solidFill>
                   </a:tcPr>
                 </a:tc>
+                <a:extLst>
+                  <a:ext uri="{0D108BD9-81ED-4DB2-BD59-A6C34878D82A}">
+                    <a16:rowId xmlns:a16="http://schemas.microsoft.com/office/drawing/2014/main" val="10000"/>
+                  </a:ext>
+                </a:extLst>
               </a:tr>
               <a:tr h="365760">
                 <a:tc>
@@ -9815,6 +10111,11 @@
                     </a:solidFill>
                   </a:tcPr>
                 </a:tc>
+                <a:extLst>
+                  <a:ext uri="{0D108BD9-81ED-4DB2-BD59-A6C34878D82A}">
+                    <a16:rowId xmlns:a16="http://schemas.microsoft.com/office/drawing/2014/main" val="10001"/>
+                  </a:ext>
+                </a:extLst>
               </a:tr>
               <a:tr h="365760">
                 <a:tc>
@@ -9889,6 +10190,11 @@
                     </a:solidFill>
                   </a:tcPr>
                 </a:tc>
+                <a:extLst>
+                  <a:ext uri="{0D108BD9-81ED-4DB2-BD59-A6C34878D82A}">
+                    <a16:rowId xmlns:a16="http://schemas.microsoft.com/office/drawing/2014/main" val="10002"/>
+                  </a:ext>
+                </a:extLst>
               </a:tr>
               <a:tr h="365760">
                 <a:tc>
@@ -9963,6 +10269,11 @@
                     </a:solidFill>
                   </a:tcPr>
                 </a:tc>
+                <a:extLst>
+                  <a:ext uri="{0D108BD9-81ED-4DB2-BD59-A6C34878D82A}">
+                    <a16:rowId xmlns:a16="http://schemas.microsoft.com/office/drawing/2014/main" val="10003"/>
+                  </a:ext>
+                </a:extLst>
               </a:tr>
             </a:tbl>
           </a:graphicData>
@@ -9999,7 +10310,7 @@
               </a:defRPr>
             </a:pPr>
             <a:r>
-              <a:t>23</a:t>
+              <a:t>24</a:t>
             </a:r>
           </a:p>
         </p:txBody>
@@ -10012,8 +10323,8 @@
 </p:sld>
 </file>
 
-<file path=ppt/slides/slide24.xml><?xml version="1.0" encoding="utf-8"?>
-<p:sld xmlns:a="http://schemas.openxmlformats.org/drawingml/2006/main" xmlns:p="http://schemas.openxmlformats.org/presentationml/2006/main" xmlns:r="http://schemas.openxmlformats.org/officeDocument/2006/relationships">
+<file path=ppt/slides/slide25.xml><?xml version="1.0" encoding="utf-8"?>
+<p:sld xmlns:a="http://schemas.openxmlformats.org/drawingml/2006/main" xmlns:r="http://schemas.openxmlformats.org/officeDocument/2006/relationships" xmlns:p="http://schemas.openxmlformats.org/presentationml/2006/main">
   <p:cSld>
     <p:bg>
       <p:bgPr>
@@ -10029,7 +10340,14 @@
         <p:cNvGrpSpPr/>
         <p:nvPr/>
       </p:nvGrpSpPr>
-      <p:grpSpPr/>
+      <p:grpSpPr>
+        <a:xfrm>
+          <a:off x="0" y="0"/>
+          <a:ext cx="0" cy="0"/>
+          <a:chOff x="0" y="0"/>
+          <a:chExt cx="0" cy="0"/>
+        </a:xfrm>
+      </p:grpSpPr>
       <p:sp>
         <p:nvSpPr>
           <p:cNvPr id="2" name="TextBox 1"/>
@@ -10157,7 +10475,7 @@
               </a:defRPr>
             </a:pPr>
             <a:r>
-              <a:t>24</a:t>
+              <a:t>25</a:t>
             </a:r>
           </a:p>
         </p:txBody>
@@ -10170,8 +10488,8 @@
 </p:sld>
 </file>
 
-<file path=ppt/slides/slide25.xml><?xml version="1.0" encoding="utf-8"?>
-<p:sld xmlns:a="http://schemas.openxmlformats.org/drawingml/2006/main" xmlns:p="http://schemas.openxmlformats.org/presentationml/2006/main" xmlns:r="http://schemas.openxmlformats.org/officeDocument/2006/relationships">
+<file path=ppt/slides/slide26.xml><?xml version="1.0" encoding="utf-8"?>
+<p:sld xmlns:a="http://schemas.openxmlformats.org/drawingml/2006/main" xmlns:r="http://schemas.openxmlformats.org/officeDocument/2006/relationships" xmlns:p="http://schemas.openxmlformats.org/presentationml/2006/main">
   <p:cSld>
     <p:bg>
       <p:bgPr>
@@ -10187,7 +10505,14 @@
         <p:cNvGrpSpPr/>
         <p:nvPr/>
       </p:nvGrpSpPr>
-      <p:grpSpPr/>
+      <p:grpSpPr>
+        <a:xfrm>
+          <a:off x="0" y="0"/>
+          <a:ext cx="0" cy="0"/>
+          <a:chOff x="0" y="0"/>
+          <a:chExt cx="0" cy="0"/>
+        </a:xfrm>
+      </p:grpSpPr>
       <p:sp>
         <p:nvSpPr>
           <p:cNvPr id="2" name="TextBox 1"/>
@@ -10315,7 +10640,7 @@
               </a:defRPr>
             </a:pPr>
             <a:r>
-              <a:t>25</a:t>
+              <a:t>26</a:t>
             </a:r>
           </a:p>
         </p:txBody>
@@ -10328,8 +10653,8 @@
 </p:sld>
 </file>
 
-<file path=ppt/slides/slide26.xml><?xml version="1.0" encoding="utf-8"?>
-<p:sld xmlns:a="http://schemas.openxmlformats.org/drawingml/2006/main" xmlns:p="http://schemas.openxmlformats.org/presentationml/2006/main" xmlns:r="http://schemas.openxmlformats.org/officeDocument/2006/relationships">
+<file path=ppt/slides/slide27.xml><?xml version="1.0" encoding="utf-8"?>
+<p:sld xmlns:a="http://schemas.openxmlformats.org/drawingml/2006/main" xmlns:r="http://schemas.openxmlformats.org/officeDocument/2006/relationships" xmlns:p="http://schemas.openxmlformats.org/presentationml/2006/main">
   <p:cSld>
     <p:bg>
       <p:bgPr>
@@ -10345,7 +10670,14 @@
         <p:cNvGrpSpPr/>
         <p:nvPr/>
       </p:nvGrpSpPr>
-      <p:grpSpPr/>
+      <p:grpSpPr>
+        <a:xfrm>
+          <a:off x="0" y="0"/>
+          <a:ext cx="0" cy="0"/>
+          <a:chOff x="0" y="0"/>
+          <a:chExt cx="0" cy="0"/>
+        </a:xfrm>
+      </p:grpSpPr>
       <p:sp>
         <p:nvSpPr>
           <p:cNvPr id="2" name="TextBox 1"/>
@@ -10422,6 +10754,7 @@
           <a:lstStyle/>
           <a:p>
             <a:pPr algn="ctr"/>
+            <a:endParaRPr/>
           </a:p>
         </p:txBody>
       </p:sp>
@@ -10565,6 +10898,7 @@
           <a:lstStyle/>
           <a:p>
             <a:pPr algn="ctr"/>
+            <a:endParaRPr/>
           </a:p>
         </p:txBody>
       </p:sp>
@@ -10699,7 +11033,7 @@
               </a:defRPr>
             </a:pPr>
             <a:r>
-              <a:t>26</a:t>
+              <a:t>27</a:t>
             </a:r>
           </a:p>
         </p:txBody>
@@ -10712,8 +11046,8 @@
 </p:sld>
 </file>
 
-<file path=ppt/slides/slide27.xml><?xml version="1.0" encoding="utf-8"?>
-<p:sld xmlns:a="http://schemas.openxmlformats.org/drawingml/2006/main" xmlns:p="http://schemas.openxmlformats.org/presentationml/2006/main" xmlns:r="http://schemas.openxmlformats.org/officeDocument/2006/relationships">
+<file path=ppt/slides/slide28.xml><?xml version="1.0" encoding="utf-8"?>
+<p:sld xmlns:a="http://schemas.openxmlformats.org/drawingml/2006/main" xmlns:r="http://schemas.openxmlformats.org/officeDocument/2006/relationships" xmlns:p="http://schemas.openxmlformats.org/presentationml/2006/main">
   <p:cSld>
     <p:bg>
       <p:bgPr>
@@ -10729,7 +11063,14 @@
         <p:cNvGrpSpPr/>
         <p:nvPr/>
       </p:nvGrpSpPr>
-      <p:grpSpPr/>
+      <p:grpSpPr>
+        <a:xfrm>
+          <a:off x="0" y="0"/>
+          <a:ext cx="0" cy="0"/>
+          <a:chOff x="0" y="0"/>
+          <a:chExt cx="0" cy="0"/>
+        </a:xfrm>
+      </p:grpSpPr>
       <p:sp>
         <p:nvSpPr>
           <p:cNvPr id="2" name="TextBox 1"/>
@@ -10857,7 +11198,7 @@
               </a:defRPr>
             </a:pPr>
             <a:r>
-              <a:t>27</a:t>
+              <a:t>28</a:t>
             </a:r>
           </a:p>
         </p:txBody>
@@ -10870,8 +11211,8 @@
 </p:sld>
 </file>
 
-<file path=ppt/slides/slide28.xml><?xml version="1.0" encoding="utf-8"?>
-<p:sld xmlns:a="http://schemas.openxmlformats.org/drawingml/2006/main" xmlns:p="http://schemas.openxmlformats.org/presentationml/2006/main" xmlns:r="http://schemas.openxmlformats.org/officeDocument/2006/relationships">
+<file path=ppt/slides/slide29.xml><?xml version="1.0" encoding="utf-8"?>
+<p:sld xmlns:a="http://schemas.openxmlformats.org/drawingml/2006/main" xmlns:r="http://schemas.openxmlformats.org/officeDocument/2006/relationships" xmlns:p="http://schemas.openxmlformats.org/presentationml/2006/main">
   <p:cSld>
     <p:bg>
       <p:bgPr>
@@ -10887,7 +11228,14 @@
         <p:cNvGrpSpPr/>
         <p:nvPr/>
       </p:nvGrpSpPr>
-      <p:grpSpPr/>
+      <p:grpSpPr>
+        <a:xfrm>
+          <a:off x="0" y="0"/>
+          <a:ext cx="0" cy="0"/>
+          <a:chOff x="0" y="0"/>
+          <a:chExt cx="0" cy="0"/>
+        </a:xfrm>
+      </p:grpSpPr>
       <p:sp>
         <p:nvSpPr>
           <p:cNvPr id="2" name="TextBox 1"/>
@@ -10943,9 +11291,27 @@
                 <a:tableStyleId>{5C22544A-7EE6-4342-B048-85BDC9FD1C3A}</a:tableStyleId>
               </a:tblPr>
               <a:tblGrid>
-                <a:gridCol w="3322320"/>
-                <a:gridCol w="3322320"/>
-                <a:gridCol w="3322320"/>
+                <a:gridCol w="3322320">
+                  <a:extLst>
+                    <a:ext uri="{9D8B030D-6E8A-4147-A177-3AD203B41FA5}">
+                      <a16:colId xmlns:a16="http://schemas.microsoft.com/office/drawing/2014/main" val="20000"/>
+                    </a:ext>
+                  </a:extLst>
+                </a:gridCol>
+                <a:gridCol w="3322320">
+                  <a:extLst>
+                    <a:ext uri="{9D8B030D-6E8A-4147-A177-3AD203B41FA5}">
+                      <a16:colId xmlns:a16="http://schemas.microsoft.com/office/drawing/2014/main" val="20001"/>
+                    </a:ext>
+                  </a:extLst>
+                </a:gridCol>
+                <a:gridCol w="3322320">
+                  <a:extLst>
+                    <a:ext uri="{9D8B030D-6E8A-4147-A177-3AD203B41FA5}">
+                      <a16:colId xmlns:a16="http://schemas.microsoft.com/office/drawing/2014/main" val="20002"/>
+                    </a:ext>
+                  </a:extLst>
+                </a:gridCol>
               </a:tblGrid>
               <a:tr h="514350">
                 <a:tc>
@@ -10961,6 +11327,7 @@
                           <a:latin typeface="Palatino Linotype"/>
                         </a:defRPr>
                       </a:pPr>
+                      <a:endParaRPr/>
                     </a:p>
                   </a:txBody>
                   <a:tcPr>
@@ -11017,6 +11384,11 @@
                     </a:solidFill>
                   </a:tcPr>
                 </a:tc>
+                <a:extLst>
+                  <a:ext uri="{0D108BD9-81ED-4DB2-BD59-A6C34878D82A}">
+                    <a16:rowId xmlns:a16="http://schemas.microsoft.com/office/drawing/2014/main" val="10000"/>
+                  </a:ext>
+                </a:extLst>
               </a:tr>
               <a:tr h="514350">
                 <a:tc>
@@ -11091,6 +11463,11 @@
                     </a:solidFill>
                   </a:tcPr>
                 </a:tc>
+                <a:extLst>
+                  <a:ext uri="{0D108BD9-81ED-4DB2-BD59-A6C34878D82A}">
+                    <a16:rowId xmlns:a16="http://schemas.microsoft.com/office/drawing/2014/main" val="10001"/>
+                  </a:ext>
+                </a:extLst>
               </a:tr>
               <a:tr h="514350">
                 <a:tc>
@@ -11165,6 +11542,11 @@
                     </a:solidFill>
                   </a:tcPr>
                 </a:tc>
+                <a:extLst>
+                  <a:ext uri="{0D108BD9-81ED-4DB2-BD59-A6C34878D82A}">
+                    <a16:rowId xmlns:a16="http://schemas.microsoft.com/office/drawing/2014/main" val="10002"/>
+                  </a:ext>
+                </a:extLst>
               </a:tr>
               <a:tr h="514350">
                 <a:tc>
@@ -11239,6 +11621,11 @@
                     </a:solidFill>
                   </a:tcPr>
                 </a:tc>
+                <a:extLst>
+                  <a:ext uri="{0D108BD9-81ED-4DB2-BD59-A6C34878D82A}">
+                    <a16:rowId xmlns:a16="http://schemas.microsoft.com/office/drawing/2014/main" val="10003"/>
+                  </a:ext>
+                </a:extLst>
               </a:tr>
               <a:tr h="514350">
                 <a:tc>
@@ -11313,6 +11700,11 @@
                     </a:solidFill>
                   </a:tcPr>
                 </a:tc>
+                <a:extLst>
+                  <a:ext uri="{0D108BD9-81ED-4DB2-BD59-A6C34878D82A}">
+                    <a16:rowId xmlns:a16="http://schemas.microsoft.com/office/drawing/2014/main" val="10004"/>
+                  </a:ext>
+                </a:extLst>
               </a:tr>
               <a:tr h="514350">
                 <a:tc>
@@ -11387,6 +11779,11 @@
                     </a:solidFill>
                   </a:tcPr>
                 </a:tc>
+                <a:extLst>
+                  <a:ext uri="{0D108BD9-81ED-4DB2-BD59-A6C34878D82A}">
+                    <a16:rowId xmlns:a16="http://schemas.microsoft.com/office/drawing/2014/main" val="10005"/>
+                  </a:ext>
+                </a:extLst>
               </a:tr>
               <a:tr h="514350">
                 <a:tc>
@@ -11461,6 +11858,11 @@
                     </a:solidFill>
                   </a:tcPr>
                 </a:tc>
+                <a:extLst>
+                  <a:ext uri="{0D108BD9-81ED-4DB2-BD59-A6C34878D82A}">
+                    <a16:rowId xmlns:a16="http://schemas.microsoft.com/office/drawing/2014/main" val="10006"/>
+                  </a:ext>
+                </a:extLst>
               </a:tr>
               <a:tr h="514350">
                 <a:tc>
@@ -11535,6 +11937,11 @@
                     </a:solidFill>
                   </a:tcPr>
                 </a:tc>
+                <a:extLst>
+                  <a:ext uri="{0D108BD9-81ED-4DB2-BD59-A6C34878D82A}">
+                    <a16:rowId xmlns:a16="http://schemas.microsoft.com/office/drawing/2014/main" val="10007"/>
+                  </a:ext>
+                </a:extLst>
               </a:tr>
             </a:tbl>
           </a:graphicData>
@@ -11607,7 +12014,7 @@
               </a:defRPr>
             </a:pPr>
             <a:r>
-              <a:t>28</a:t>
+              <a:t>29</a:t>
             </a:r>
           </a:p>
         </p:txBody>
@@ -11620,8 +12027,8 @@
 </p:sld>
 </file>
 
-<file path=ppt/slides/slide29.xml><?xml version="1.0" encoding="utf-8"?>
-<p:sld xmlns:a="http://schemas.openxmlformats.org/drawingml/2006/main" xmlns:p="http://schemas.openxmlformats.org/presentationml/2006/main" xmlns:r="http://schemas.openxmlformats.org/officeDocument/2006/relationships">
+<file path=ppt/slides/slide3.xml><?xml version="1.0" encoding="utf-8"?>
+<p:sld xmlns:a="http://schemas.openxmlformats.org/drawingml/2006/main" xmlns:r="http://schemas.openxmlformats.org/officeDocument/2006/relationships" xmlns:p="http://schemas.openxmlformats.org/presentationml/2006/main">
   <p:cSld>
     <p:bg>
       <p:bgPr>
@@ -11637,7 +12044,14 @@
         <p:cNvGrpSpPr/>
         <p:nvPr/>
       </p:nvGrpSpPr>
-      <p:grpSpPr/>
+      <p:grpSpPr>
+        <a:xfrm>
+          <a:off x="0" y="0"/>
+          <a:ext cx="0" cy="0"/>
+          <a:chOff x="0" y="0"/>
+          <a:chExt cx="0" cy="0"/>
+        </a:xfrm>
+      </p:grpSpPr>
       <p:sp>
         <p:nvSpPr>
           <p:cNvPr id="2" name="TextBox 1"/>
@@ -11669,7 +12083,7 @@
               </a:defRPr>
             </a:pPr>
             <a:r>
-              <a:t>Limitations and Open Questions</a:t>
+              <a:t>How LLM Inference Works</a:t>
             </a:r>
           </a:p>
         </p:txBody>
@@ -11689,7 +12103,7 @@
             <a:avLst/>
           </a:prstGeom>
           <a:solidFill>
-            <a:srgbClr val="FDF0EF"/>
+            <a:srgbClr val="F8F9FA"/>
           </a:solidFill>
           <a:ln>
             <a:noFill/>
@@ -11714,6 +12128,7 @@
           <a:lstStyle/>
           <a:p>
             <a:pPr algn="ctr"/>
+            <a:endParaRPr/>
           </a:p>
         </p:txBody>
       </p:sp>
@@ -11740,15 +12155,15 @@
           <a:lstStyle/>
           <a:p>
             <a:pPr algn="l">
-              <a:defRPr sz="1800" b="1">
-                <a:solidFill>
-                  <a:srgbClr val="C0392B"/>
-                </a:solidFill>
-                <a:latin typeface="Palatino Linotype"/>
-              </a:defRPr>
-            </a:pPr>
-            <a:r>
-              <a:t>Shared limitations</a:t>
+              <a:defRPr sz="2200" b="1">
+                <a:solidFill>
+                  <a:srgbClr val="1A56DB"/>
+                </a:solidFill>
+                <a:latin typeface="Palatino Linotype"/>
+              </a:defRPr>
+            </a:pPr>
+            <a:r>
+              <a:t>Phase 1: Prefill</a:t>
             </a:r>
           </a:p>
           <a:p>
@@ -11756,7 +12171,7 @@
               <a:spcBef>
                 <a:spcPts val="1000"/>
               </a:spcBef>
-              <a:defRPr sz="1500" b="0">
+              <a:defRPr sz="1600" b="0">
                 <a:solidFill>
                   <a:srgbClr val="333333"/>
                 </a:solidFill>
@@ -11764,7 +12179,7 @@
               </a:defRPr>
             </a:pPr>
             <a:r>
-              <a:t>Less beneficial with few GPUs</a:t>
+              <a:t>Processes all input tokens in parallel</a:t>
             </a:r>
           </a:p>
           <a:p>
@@ -11772,7 +12187,7 @@
               <a:spcBef>
                 <a:spcPts val="600"/>
               </a:spcBef>
-              <a:defRPr sz="1500" b="0">
+              <a:defRPr sz="1600" b="0">
                 <a:solidFill>
                   <a:srgbClr val="333333"/>
                 </a:solidFill>
@@ -11780,7 +12195,7 @@
               </a:defRPr>
             </a:pPr>
             <a:r>
-              <a:t>Basic fault tolerance</a:t>
+              <a:t>One forward pass through the model</a:t>
             </a:r>
           </a:p>
           <a:p>
@@ -11788,7 +12203,7 @@
               <a:spcBef>
                 <a:spcPts val="600"/>
               </a:spcBef>
-              <a:defRPr sz="1500" b="0">
+              <a:defRPr sz="1600" b="0">
                 <a:solidFill>
                   <a:srgbClr val="333333"/>
                 </a:solidFill>
@@ -11796,7 +12211,7 @@
               </a:defRPr>
             </a:pPr>
             <a:r>
-              <a:t>FCFS can cause convoy effects</a:t>
+              <a:t>Produces the first output token</a:t>
             </a:r>
           </a:p>
           <a:p>
@@ -11804,7 +12219,7 @@
               <a:spcBef>
                 <a:spcPts val="600"/>
               </a:spcBef>
-              <a:defRPr sz="1500" b="0">
+              <a:defRPr sz="1600" b="0">
                 <a:solidFill>
                   <a:srgbClr val="333333"/>
                 </a:solidFill>
@@ -11812,7 +12227,23 @@
               </a:defRPr>
             </a:pPr>
             <a:r>
-              <a:t>Batch workloads may prefer colocation</a:t>
+              <a:t>Generates the KV-cache (stored context)</a:t>
+            </a:r>
+          </a:p>
+          <a:p>
+            <a:pPr>
+              <a:spcBef>
+                <a:spcPts val="600"/>
+              </a:spcBef>
+              <a:defRPr sz="1600" b="1">
+                <a:solidFill>
+                  <a:srgbClr val="1A56DB"/>
+                </a:solidFill>
+                <a:latin typeface="Palatino Linotype"/>
+              </a:defRPr>
+            </a:pPr>
+            <a:r>
+              <a:t>Compute-bound</a:t>
             </a:r>
           </a:p>
         </p:txBody>
@@ -11832,7 +12263,7 @@
             <a:avLst/>
           </a:prstGeom>
           <a:solidFill>
-            <a:srgbClr val="E8EEF8"/>
+            <a:srgbClr val="F8F9FA"/>
           </a:solidFill>
           <a:ln>
             <a:noFill/>
@@ -11857,6 +12288,7 @@
           <a:lstStyle/>
           <a:p>
             <a:pPr algn="ctr"/>
+            <a:endParaRPr/>
           </a:p>
         </p:txBody>
       </p:sp>
@@ -11883,15 +12315,15 @@
           <a:lstStyle/>
           <a:p>
             <a:pPr algn="l">
-              <a:defRPr sz="1800" b="1">
-                <a:solidFill>
-                  <a:srgbClr val="1A56DB"/>
-                </a:solidFill>
-                <a:latin typeface="Palatino Linotype"/>
-              </a:defRPr>
-            </a:pPr>
-            <a:r>
-              <a:t>Open questions</a:t>
+              <a:defRPr sz="2200" b="1">
+                <a:solidFill>
+                  <a:srgbClr val="0E6E6E"/>
+                </a:solidFill>
+                <a:latin typeface="Palatino Linotype"/>
+              </a:defRPr>
+            </a:pPr>
+            <a:r>
+              <a:t>Phase 2: Decoding</a:t>
             </a:r>
           </a:p>
           <a:p>
@@ -11899,7 +12331,7 @@
               <a:spcBef>
                 <a:spcPts val="1000"/>
               </a:spcBef>
-              <a:defRPr sz="1500" b="0">
+              <a:defRPr sz="1600" b="0">
                 <a:solidFill>
                   <a:srgbClr val="333333"/>
                 </a:solidFill>
@@ -11907,7 +12339,7 @@
               </a:defRPr>
             </a:pPr>
             <a:r>
-              <a:t>Preemptive scheduling</a:t>
+              <a:t>Generates tokens one at a time</a:t>
             </a:r>
           </a:p>
           <a:p>
@@ -11915,7 +12347,7 @@
               <a:spcBef>
                 <a:spcPts val="600"/>
               </a:spcBef>
-              <a:defRPr sz="1500" b="0">
+              <a:defRPr sz="1600" b="0">
                 <a:solidFill>
                   <a:srgbClr val="333333"/>
                 </a:solidFill>
@@ -11923,7 +12355,7 @@
               </a:defRPr>
             </a:pPr>
             <a:r>
-              <a:t>Combining heterogeneous HW + placement</a:t>
+              <a:t>Each step reads the full KV-cache</a:t>
             </a:r>
           </a:p>
           <a:p>
@@ -11931,7 +12363,7 @@
               <a:spcBef>
                 <a:spcPts val="600"/>
               </a:spcBef>
-              <a:defRPr sz="1500" b="0">
+              <a:defRPr sz="1600" b="0">
                 <a:solidFill>
                   <a:srgbClr val="333333"/>
                 </a:solidFill>
@@ -11939,7 +12371,7 @@
               </a:defRPr>
             </a:pPr>
             <a:r>
-              <a:t>Million-token contexts</a:t>
+              <a:t>Repeats until end of sequence</a:t>
             </a:r>
           </a:p>
           <a:p>
@@ -11947,7 +12379,7 @@
               <a:spcBef>
                 <a:spcPts val="600"/>
               </a:spcBef>
-              <a:defRPr sz="1500" b="0">
+              <a:defRPr sz="1600" b="0">
                 <a:solidFill>
                   <a:srgbClr val="333333"/>
                 </a:solidFill>
@@ -11955,7 +12387,23 @@
               </a:defRPr>
             </a:pPr>
             <a:r>
-              <a:t>Interaction with MoE models</a:t>
+              <a:t>Sequential, autoregressive</a:t>
+            </a:r>
+          </a:p>
+          <a:p>
+            <a:pPr>
+              <a:spcBef>
+                <a:spcPts val="600"/>
+              </a:spcBef>
+              <a:defRPr sz="1600" b="1">
+                <a:solidFill>
+                  <a:srgbClr val="0E6E6E"/>
+                </a:solidFill>
+                <a:latin typeface="Palatino Linotype"/>
+              </a:defRPr>
+            </a:pPr>
+            <a:r>
+              <a:t>Memory-bandwidth-bound</a:t>
             </a:r>
           </a:p>
         </p:txBody>
@@ -12000,6 +12448,7 @@
           <a:lstStyle/>
           <a:p>
             <a:pPr algn="ctr"/>
+            <a:endParaRPr/>
           </a:p>
         </p:txBody>
       </p:sp>
@@ -12012,7 +12461,7 @@
         <p:spPr>
           <a:xfrm>
             <a:off x="1371600" y="4572000"/>
-            <a:ext cx="9418320" cy="731520"/>
+            <a:ext cx="9326880" cy="731520"/>
           </a:xfrm>
           <a:prstGeom prst="rect">
             <a:avLst/>
@@ -12025,24 +12474,24 @@
           </a:bodyPr>
           <a:lstStyle/>
           <a:p>
-            <a:pPr algn="ctr">
+            <a:pPr algn="l">
               <a:defRPr sz="1700" b="1">
                 <a:solidFill>
-                  <a:srgbClr val="1A1A1A"/>
-                </a:solidFill>
-                <a:latin typeface="Palatino Linotype"/>
-              </a:defRPr>
-            </a:pPr>
-            <a:r>
-              <a:t>Already adopted by SGLang, vLLM, and Mooncake.</a:t>
-            </a:r>
-          </a:p>
-          <a:p>
-            <a:pPr algn="ctr">
+                  <a:srgbClr val="333333"/>
+                </a:solidFill>
+                <a:latin typeface="Palatino Linotype"/>
+              </a:defRPr>
+            </a:pPr>
+            <a:r>
+              <a:t>"Is tomato a fruit?"</a:t>
+            </a:r>
+          </a:p>
+          <a:p>
+            <a:pPr algn="l">
               <a:spcBef>
                 <a:spcPts val="400"/>
               </a:spcBef>
-              <a:defRPr sz="1600" b="0">
+              <a:defRPr sz="1500" b="0">
                 <a:solidFill>
                   <a:srgbClr val="666666"/>
                 </a:solidFill>
@@ -12050,7 +12499,7 @@
               </a:defRPr>
             </a:pPr>
             <a:r>
-              <a:t>Phase disaggregation is becoming the standard for production LLM serving.</a:t>
+              <a:t>Prefill: process 5 tokens at once, output "Yes"    Decode: generate  ","  "it"  "is"  "."  one by one</a:t>
             </a:r>
           </a:p>
         </p:txBody>
@@ -12063,8 +12512,8 @@
         </p:nvSpPr>
         <p:spPr>
           <a:xfrm>
-            <a:off x="11338560" y="6446520"/>
-            <a:ext cx="640080" cy="320040"/>
+            <a:off x="1097280" y="5669280"/>
+            <a:ext cx="10058400" cy="731520"/>
           </a:xfrm>
           <a:prstGeom prst="rect">
             <a:avLst/>
@@ -12077,6 +12526,42 @@
           </a:bodyPr>
           <a:lstStyle/>
           <a:p>
+            <a:pPr algn="l">
+              <a:defRPr sz="1400" b="0">
+                <a:solidFill>
+                  <a:srgbClr val="AAAAAA"/>
+                </a:solidFill>
+                <a:latin typeface="Palatino Linotype"/>
+              </a:defRPr>
+            </a:pPr>
+            <a:r>
+              <a:t>KV-Cache: key/value tensors stored during prefill, read at every decode step. This is what gets transferred when phases are on different machines.</a:t>
+            </a:r>
+          </a:p>
+        </p:txBody>
+      </p:sp>
+      <p:sp>
+        <p:nvSpPr>
+          <p:cNvPr id="10" name="TextBox 9"/>
+          <p:cNvSpPr txBox="1"/>
+          <p:nvPr/>
+        </p:nvSpPr>
+        <p:spPr>
+          <a:xfrm>
+            <a:off x="11338560" y="6446520"/>
+            <a:ext cx="640080" cy="320040"/>
+          </a:xfrm>
+          <a:prstGeom prst="rect">
+            <a:avLst/>
+          </a:prstGeom>
+          <a:noFill/>
+        </p:spPr>
+        <p:txBody>
+          <a:bodyPr wrap="square">
+            <a:spAutoFit/>
+          </a:bodyPr>
+          <a:lstStyle/>
+          <a:p>
             <a:pPr algn="r">
               <a:defRPr sz="1000" b="0">
                 <a:solidFill>
@@ -12086,7 +12571,7 @@
               </a:defRPr>
             </a:pPr>
             <a:r>
-              <a:t>29</a:t>
+              <a:t>3</a:t>
             </a:r>
           </a:p>
         </p:txBody>
@@ -12099,8 +12584,8 @@
 </p:sld>
 </file>
 
-<file path=ppt/slides/slide3.xml><?xml version="1.0" encoding="utf-8"?>
-<p:sld xmlns:a="http://schemas.openxmlformats.org/drawingml/2006/main" xmlns:p="http://schemas.openxmlformats.org/presentationml/2006/main" xmlns:r="http://schemas.openxmlformats.org/officeDocument/2006/relationships">
+<file path=ppt/slides/slide30.xml><?xml version="1.0" encoding="utf-8"?>
+<p:sld xmlns:a="http://schemas.openxmlformats.org/drawingml/2006/main" xmlns:r="http://schemas.openxmlformats.org/officeDocument/2006/relationships" xmlns:p="http://schemas.openxmlformats.org/presentationml/2006/main">
   <p:cSld>
     <p:bg>
       <p:bgPr>
@@ -12116,7 +12601,1648 @@
         <p:cNvGrpSpPr/>
         <p:nvPr/>
       </p:nvGrpSpPr>
-      <p:grpSpPr/>
+      <p:grpSpPr>
+        <a:xfrm>
+          <a:off x="0" y="0"/>
+          <a:ext cx="0" cy="0"/>
+          <a:chOff x="0" y="0"/>
+          <a:chExt cx="0" cy="0"/>
+        </a:xfrm>
+      </p:grpSpPr>
+      <p:sp>
+        <p:nvSpPr>
+          <p:cNvPr id="2" name="TextBox 1"/>
+          <p:cNvSpPr txBox="1"/>
+          <p:nvPr/>
+        </p:nvSpPr>
+        <p:spPr>
+          <a:xfrm>
+            <a:off x="1097280" y="457200"/>
+            <a:ext cx="10058400" cy="640080"/>
+          </a:xfrm>
+          <a:prstGeom prst="rect">
+            <a:avLst/>
+          </a:prstGeom>
+          <a:noFill/>
+        </p:spPr>
+        <p:txBody>
+          <a:bodyPr wrap="square">
+            <a:spAutoFit/>
+          </a:bodyPr>
+          <a:lstStyle/>
+          <a:p>
+            <a:pPr algn="l">
+              <a:defRPr sz="3400" b="1">
+                <a:solidFill>
+                  <a:srgbClr val="1A1A1A"/>
+                </a:solidFill>
+                <a:latin typeface="Palatino Linotype"/>
+              </a:defRPr>
+            </a:pPr>
+            <a:r>
+              <a:t>Limitations and Open Questions</a:t>
+            </a:r>
+          </a:p>
+        </p:txBody>
+      </p:sp>
+      <p:sp>
+        <p:nvSpPr>
+          <p:cNvPr id="3" name="Rectangle 2"/>
+          <p:cNvSpPr/>
+          <p:nvPr/>
+        </p:nvSpPr>
+        <p:spPr>
+          <a:xfrm>
+            <a:off x="1097280" y="1554480"/>
+            <a:ext cx="4754880" cy="2560320"/>
+          </a:xfrm>
+          <a:prstGeom prst="rect">
+            <a:avLst/>
+          </a:prstGeom>
+          <a:solidFill>
+            <a:srgbClr val="FDF0EF"/>
+          </a:solidFill>
+          <a:ln>
+            <a:noFill/>
+          </a:ln>
+        </p:spPr>
+        <p:style>
+          <a:lnRef idx="1">
+            <a:schemeClr val="accent1"/>
+          </a:lnRef>
+          <a:fillRef idx="3">
+            <a:schemeClr val="accent1"/>
+          </a:fillRef>
+          <a:effectRef idx="2">
+            <a:schemeClr val="accent1"/>
+          </a:effectRef>
+          <a:fontRef idx="minor">
+            <a:schemeClr val="lt1"/>
+          </a:fontRef>
+        </p:style>
+        <p:txBody>
+          <a:bodyPr rtlCol="0" anchor="ctr"/>
+          <a:lstStyle/>
+          <a:p>
+            <a:pPr algn="ctr"/>
+            <a:endParaRPr/>
+          </a:p>
+        </p:txBody>
+      </p:sp>
+      <p:sp>
+        <p:nvSpPr>
+          <p:cNvPr id="4" name="TextBox 3"/>
+          <p:cNvSpPr txBox="1"/>
+          <p:nvPr/>
+        </p:nvSpPr>
+        <p:spPr>
+          <a:xfrm>
+            <a:off x="1371600" y="1645920"/>
+            <a:ext cx="4206240" cy="2377440"/>
+          </a:xfrm>
+          <a:prstGeom prst="rect">
+            <a:avLst/>
+          </a:prstGeom>
+          <a:noFill/>
+        </p:spPr>
+        <p:txBody>
+          <a:bodyPr wrap="square">
+            <a:spAutoFit/>
+          </a:bodyPr>
+          <a:lstStyle/>
+          <a:p>
+            <a:pPr algn="l">
+              <a:defRPr sz="1800" b="1">
+                <a:solidFill>
+                  <a:srgbClr val="C0392B"/>
+                </a:solidFill>
+                <a:latin typeface="Palatino Linotype"/>
+              </a:defRPr>
+            </a:pPr>
+            <a:r>
+              <a:t>Shared limitations</a:t>
+            </a:r>
+          </a:p>
+          <a:p>
+            <a:pPr>
+              <a:spcBef>
+                <a:spcPts val="1000"/>
+              </a:spcBef>
+              <a:defRPr sz="1500" b="0">
+                <a:solidFill>
+                  <a:srgbClr val="333333"/>
+                </a:solidFill>
+                <a:latin typeface="Palatino Linotype"/>
+              </a:defRPr>
+            </a:pPr>
+            <a:r>
+              <a:t>Less beneficial with few GPUs</a:t>
+            </a:r>
+          </a:p>
+          <a:p>
+            <a:pPr>
+              <a:spcBef>
+                <a:spcPts val="600"/>
+              </a:spcBef>
+              <a:defRPr sz="1500" b="0">
+                <a:solidFill>
+                  <a:srgbClr val="333333"/>
+                </a:solidFill>
+                <a:latin typeface="Palatino Linotype"/>
+              </a:defRPr>
+            </a:pPr>
+            <a:r>
+              <a:t>Basic fault tolerance</a:t>
+            </a:r>
+          </a:p>
+          <a:p>
+            <a:pPr>
+              <a:spcBef>
+                <a:spcPts val="600"/>
+              </a:spcBef>
+              <a:defRPr sz="1500" b="0">
+                <a:solidFill>
+                  <a:srgbClr val="333333"/>
+                </a:solidFill>
+                <a:latin typeface="Palatino Linotype"/>
+              </a:defRPr>
+            </a:pPr>
+            <a:r>
+              <a:t>FCFS can cause convoy effects</a:t>
+            </a:r>
+          </a:p>
+          <a:p>
+            <a:pPr>
+              <a:spcBef>
+                <a:spcPts val="600"/>
+              </a:spcBef>
+              <a:defRPr sz="1500" b="0">
+                <a:solidFill>
+                  <a:srgbClr val="333333"/>
+                </a:solidFill>
+                <a:latin typeface="Palatino Linotype"/>
+              </a:defRPr>
+            </a:pPr>
+            <a:r>
+              <a:t>Batch workloads may prefer colocation</a:t>
+            </a:r>
+          </a:p>
+        </p:txBody>
+      </p:sp>
+      <p:sp>
+        <p:nvSpPr>
+          <p:cNvPr id="5" name="Rectangle 4"/>
+          <p:cNvSpPr/>
+          <p:nvPr/>
+        </p:nvSpPr>
+        <p:spPr>
+          <a:xfrm>
+            <a:off x="6309360" y="1554480"/>
+            <a:ext cx="4754880" cy="2560320"/>
+          </a:xfrm>
+          <a:prstGeom prst="rect">
+            <a:avLst/>
+          </a:prstGeom>
+          <a:solidFill>
+            <a:srgbClr val="E8EEF8"/>
+          </a:solidFill>
+          <a:ln>
+            <a:noFill/>
+          </a:ln>
+        </p:spPr>
+        <p:style>
+          <a:lnRef idx="1">
+            <a:schemeClr val="accent1"/>
+          </a:lnRef>
+          <a:fillRef idx="3">
+            <a:schemeClr val="accent1"/>
+          </a:fillRef>
+          <a:effectRef idx="2">
+            <a:schemeClr val="accent1"/>
+          </a:effectRef>
+          <a:fontRef idx="minor">
+            <a:schemeClr val="lt1"/>
+          </a:fontRef>
+        </p:style>
+        <p:txBody>
+          <a:bodyPr rtlCol="0" anchor="ctr"/>
+          <a:lstStyle/>
+          <a:p>
+            <a:pPr algn="ctr"/>
+            <a:endParaRPr/>
+          </a:p>
+        </p:txBody>
+      </p:sp>
+      <p:sp>
+        <p:nvSpPr>
+          <p:cNvPr id="6" name="TextBox 5"/>
+          <p:cNvSpPr txBox="1"/>
+          <p:nvPr/>
+        </p:nvSpPr>
+        <p:spPr>
+          <a:xfrm>
+            <a:off x="6583680" y="1645920"/>
+            <a:ext cx="4206240" cy="2377440"/>
+          </a:xfrm>
+          <a:prstGeom prst="rect">
+            <a:avLst/>
+          </a:prstGeom>
+          <a:noFill/>
+        </p:spPr>
+        <p:txBody>
+          <a:bodyPr wrap="square">
+            <a:spAutoFit/>
+          </a:bodyPr>
+          <a:lstStyle/>
+          <a:p>
+            <a:pPr algn="l">
+              <a:defRPr sz="1800" b="1">
+                <a:solidFill>
+                  <a:srgbClr val="1A56DB"/>
+                </a:solidFill>
+                <a:latin typeface="Palatino Linotype"/>
+              </a:defRPr>
+            </a:pPr>
+            <a:r>
+              <a:t>Open questions</a:t>
+            </a:r>
+          </a:p>
+          <a:p>
+            <a:pPr>
+              <a:spcBef>
+                <a:spcPts val="1000"/>
+              </a:spcBef>
+              <a:defRPr sz="1500" b="0">
+                <a:solidFill>
+                  <a:srgbClr val="333333"/>
+                </a:solidFill>
+                <a:latin typeface="Palatino Linotype"/>
+              </a:defRPr>
+            </a:pPr>
+            <a:r>
+              <a:t>Preemptive scheduling</a:t>
+            </a:r>
+          </a:p>
+          <a:p>
+            <a:pPr>
+              <a:spcBef>
+                <a:spcPts val="600"/>
+              </a:spcBef>
+              <a:defRPr sz="1500" b="0">
+                <a:solidFill>
+                  <a:srgbClr val="333333"/>
+                </a:solidFill>
+                <a:latin typeface="Palatino Linotype"/>
+              </a:defRPr>
+            </a:pPr>
+            <a:r>
+              <a:t>Combining heterogeneous HW + placement</a:t>
+            </a:r>
+          </a:p>
+          <a:p>
+            <a:pPr>
+              <a:spcBef>
+                <a:spcPts val="600"/>
+              </a:spcBef>
+              <a:defRPr sz="1500" b="0">
+                <a:solidFill>
+                  <a:srgbClr val="333333"/>
+                </a:solidFill>
+                <a:latin typeface="Palatino Linotype"/>
+              </a:defRPr>
+            </a:pPr>
+            <a:r>
+              <a:t>Million-token contexts</a:t>
+            </a:r>
+          </a:p>
+          <a:p>
+            <a:pPr>
+              <a:spcBef>
+                <a:spcPts val="600"/>
+              </a:spcBef>
+              <a:defRPr sz="1500" b="0">
+                <a:solidFill>
+                  <a:srgbClr val="333333"/>
+                </a:solidFill>
+                <a:latin typeface="Palatino Linotype"/>
+              </a:defRPr>
+            </a:pPr>
+            <a:r>
+              <a:t>Interaction with MoE models</a:t>
+            </a:r>
+          </a:p>
+        </p:txBody>
+      </p:sp>
+      <p:sp>
+        <p:nvSpPr>
+          <p:cNvPr id="7" name="Rectangle 6"/>
+          <p:cNvSpPr/>
+          <p:nvPr/>
+        </p:nvSpPr>
+        <p:spPr>
+          <a:xfrm>
+            <a:off x="1097280" y="4480560"/>
+            <a:ext cx="10058400" cy="914400"/>
+          </a:xfrm>
+          <a:prstGeom prst="rect">
+            <a:avLst/>
+          </a:prstGeom>
+          <a:solidFill>
+            <a:srgbClr val="F8F9FA"/>
+          </a:solidFill>
+          <a:ln>
+            <a:noFill/>
+          </a:ln>
+        </p:spPr>
+        <p:style>
+          <a:lnRef idx="1">
+            <a:schemeClr val="accent1"/>
+          </a:lnRef>
+          <a:fillRef idx="3">
+            <a:schemeClr val="accent1"/>
+          </a:fillRef>
+          <a:effectRef idx="2">
+            <a:schemeClr val="accent1"/>
+          </a:effectRef>
+          <a:fontRef idx="minor">
+            <a:schemeClr val="lt1"/>
+          </a:fontRef>
+        </p:style>
+        <p:txBody>
+          <a:bodyPr rtlCol="0" anchor="ctr"/>
+          <a:lstStyle/>
+          <a:p>
+            <a:pPr algn="ctr"/>
+            <a:endParaRPr/>
+          </a:p>
+        </p:txBody>
+      </p:sp>
+      <p:sp>
+        <p:nvSpPr>
+          <p:cNvPr id="8" name="TextBox 7"/>
+          <p:cNvSpPr txBox="1"/>
+          <p:nvPr/>
+        </p:nvSpPr>
+        <p:spPr>
+          <a:xfrm>
+            <a:off x="1371600" y="4572000"/>
+            <a:ext cx="9418320" cy="731520"/>
+          </a:xfrm>
+          <a:prstGeom prst="rect">
+            <a:avLst/>
+          </a:prstGeom>
+          <a:noFill/>
+        </p:spPr>
+        <p:txBody>
+          <a:bodyPr wrap="square">
+            <a:spAutoFit/>
+          </a:bodyPr>
+          <a:lstStyle/>
+          <a:p>
+            <a:pPr algn="ctr">
+              <a:defRPr sz="1700" b="1">
+                <a:solidFill>
+                  <a:srgbClr val="1A1A1A"/>
+                </a:solidFill>
+                <a:latin typeface="Palatino Linotype"/>
+              </a:defRPr>
+            </a:pPr>
+            <a:r>
+              <a:t>Already adopted by SGLang, vLLM, and Mooncake.</a:t>
+            </a:r>
+          </a:p>
+          <a:p>
+            <a:pPr algn="ctr">
+              <a:spcBef>
+                <a:spcPts val="400"/>
+              </a:spcBef>
+              <a:defRPr sz="1600" b="0">
+                <a:solidFill>
+                  <a:srgbClr val="666666"/>
+                </a:solidFill>
+                <a:latin typeface="Palatino Linotype"/>
+              </a:defRPr>
+            </a:pPr>
+            <a:r>
+              <a:t>Phase disaggregation is becoming the standard for production LLM serving.</a:t>
+            </a:r>
+          </a:p>
+        </p:txBody>
+      </p:sp>
+      <p:sp>
+        <p:nvSpPr>
+          <p:cNvPr id="9" name="TextBox 8"/>
+          <p:cNvSpPr txBox="1"/>
+          <p:nvPr/>
+        </p:nvSpPr>
+        <p:spPr>
+          <a:xfrm>
+            <a:off x="11338560" y="6446520"/>
+            <a:ext cx="640080" cy="320040"/>
+          </a:xfrm>
+          <a:prstGeom prst="rect">
+            <a:avLst/>
+          </a:prstGeom>
+          <a:noFill/>
+        </p:spPr>
+        <p:txBody>
+          <a:bodyPr wrap="square">
+            <a:spAutoFit/>
+          </a:bodyPr>
+          <a:lstStyle/>
+          <a:p>
+            <a:pPr algn="r">
+              <a:defRPr sz="1000" b="0">
+                <a:solidFill>
+                  <a:srgbClr val="AAAAAA"/>
+                </a:solidFill>
+                <a:latin typeface="Palatino Linotype"/>
+              </a:defRPr>
+            </a:pPr>
+            <a:r>
+              <a:t>30</a:t>
+            </a:r>
+          </a:p>
+        </p:txBody>
+      </p:sp>
+    </p:spTree>
+  </p:cSld>
+  <p:clrMapOvr>
+    <a:masterClrMapping/>
+  </p:clrMapOvr>
+</p:sld>
+</file>
+
+<file path=ppt/slides/slide31.xml><?xml version="1.0" encoding="utf-8"?>
+<p:sld xmlns:a="http://schemas.openxmlformats.org/drawingml/2006/main" xmlns:r="http://schemas.openxmlformats.org/officeDocument/2006/relationships" xmlns:p="http://schemas.openxmlformats.org/presentationml/2006/main">
+  <p:cSld>
+    <p:bg>
+      <p:bgPr>
+        <a:solidFill>
+          <a:srgbClr val="FFFFFF"/>
+        </a:solidFill>
+        <a:effectLst/>
+      </p:bgPr>
+    </p:bg>
+    <p:spTree>
+      <p:nvGrpSpPr>
+        <p:cNvPr id="1" name=""/>
+        <p:cNvGrpSpPr/>
+        <p:nvPr/>
+      </p:nvGrpSpPr>
+      <p:grpSpPr>
+        <a:xfrm>
+          <a:off x="0" y="0"/>
+          <a:ext cx="0" cy="0"/>
+          <a:chOff x="0" y="0"/>
+          <a:chExt cx="0" cy="0"/>
+        </a:xfrm>
+      </p:grpSpPr>
+      <p:sp>
+        <p:nvSpPr>
+          <p:cNvPr id="2" name="TextBox 1"/>
+          <p:cNvSpPr txBox="1"/>
+          <p:nvPr/>
+        </p:nvSpPr>
+        <p:spPr>
+          <a:xfrm>
+            <a:off x="1097280" y="457200"/>
+            <a:ext cx="10058400" cy="640080"/>
+          </a:xfrm>
+          <a:prstGeom prst="rect">
+            <a:avLst/>
+          </a:prstGeom>
+          <a:noFill/>
+        </p:spPr>
+        <p:txBody>
+          <a:bodyPr wrap="square">
+            <a:spAutoFit/>
+          </a:bodyPr>
+          <a:lstStyle/>
+          <a:p>
+            <a:pPr algn="l">
+              <a:defRPr sz="3600" b="1">
+                <a:solidFill>
+                  <a:srgbClr val="1A1A1A"/>
+                </a:solidFill>
+                <a:latin typeface="Palatino Linotype"/>
+              </a:defRPr>
+            </a:pPr>
+            <a:r>
+              <a:t>Summary</a:t>
+            </a:r>
+          </a:p>
+        </p:txBody>
+      </p:sp>
+      <p:sp>
+        <p:nvSpPr>
+          <p:cNvPr id="3" name="Rectangle 2"/>
+          <p:cNvSpPr/>
+          <p:nvPr/>
+        </p:nvSpPr>
+        <p:spPr>
+          <a:xfrm>
+            <a:off x="1097280" y="1554480"/>
+            <a:ext cx="4754880" cy="2286000"/>
+          </a:xfrm>
+          <a:prstGeom prst="rect">
+            <a:avLst/>
+          </a:prstGeom>
+          <a:solidFill>
+            <a:srgbClr val="E8EEF8"/>
+          </a:solidFill>
+          <a:ln>
+            <a:noFill/>
+          </a:ln>
+        </p:spPr>
+        <p:style>
+          <a:lnRef idx="1">
+            <a:schemeClr val="accent1"/>
+          </a:lnRef>
+          <a:fillRef idx="3">
+            <a:schemeClr val="accent1"/>
+          </a:fillRef>
+          <a:effectRef idx="2">
+            <a:schemeClr val="accent1"/>
+          </a:effectRef>
+          <a:fontRef idx="minor">
+            <a:schemeClr val="lt1"/>
+          </a:fontRef>
+        </p:style>
+        <p:txBody>
+          <a:bodyPr rtlCol="0" anchor="ctr"/>
+          <a:lstStyle/>
+          <a:p>
+            <a:pPr algn="ctr"/>
+            <a:endParaRPr/>
+          </a:p>
+        </p:txBody>
+      </p:sp>
+      <p:sp>
+        <p:nvSpPr>
+          <p:cNvPr id="4" name="TextBox 3"/>
+          <p:cNvSpPr txBox="1"/>
+          <p:nvPr/>
+        </p:nvSpPr>
+        <p:spPr>
+          <a:xfrm>
+            <a:off x="1371600" y="1645920"/>
+            <a:ext cx="4206240" cy="2103120"/>
+          </a:xfrm>
+          <a:prstGeom prst="rect">
+            <a:avLst/>
+          </a:prstGeom>
+          <a:noFill/>
+        </p:spPr>
+        <p:txBody>
+          <a:bodyPr wrap="square">
+            <a:spAutoFit/>
+          </a:bodyPr>
+          <a:lstStyle/>
+          <a:p>
+            <a:pPr algn="l">
+              <a:defRPr sz="2000" b="1">
+                <a:solidFill>
+                  <a:srgbClr val="1A56DB"/>
+                </a:solidFill>
+                <a:latin typeface="Palatino Linotype"/>
+              </a:defRPr>
+            </a:pPr>
+            <a:r>
+              <a:t>Splitwise (ISCA 2024)</a:t>
+            </a:r>
+          </a:p>
+          <a:p>
+            <a:pPr>
+              <a:spcBef>
+                <a:spcPts val="800"/>
+              </a:spcBef>
+              <a:defRPr sz="1500" b="0">
+                <a:solidFill>
+                  <a:srgbClr val="333333"/>
+                </a:solidFill>
+                <a:latin typeface="Palatino Linotype"/>
+              </a:defRPr>
+            </a:pPr>
+            <a:r>
+              <a:t>Production workload characterization</a:t>
+            </a:r>
+          </a:p>
+          <a:p>
+            <a:pPr>
+              <a:spcBef>
+                <a:spcPts val="600"/>
+              </a:spcBef>
+              <a:defRPr sz="1500" b="0">
+                <a:solidFill>
+                  <a:srgbClr val="333333"/>
+                </a:solidFill>
+                <a:latin typeface="Palatino Linotype"/>
+              </a:defRPr>
+            </a:pPr>
+            <a:r>
+              <a:t>Heterogeneous hardware per phase</a:t>
+            </a:r>
+          </a:p>
+          <a:p>
+            <a:pPr>
+              <a:spcBef>
+                <a:spcPts val="600"/>
+              </a:spcBef>
+              <a:defRPr sz="1500" b="1">
+                <a:solidFill>
+                  <a:srgbClr val="1E8A4C"/>
+                </a:solidFill>
+                <a:latin typeface="Palatino Linotype"/>
+              </a:defRPr>
+            </a:pPr>
+            <a:r>
+              <a:t>1.4x throughput at 20% lower cost</a:t>
+            </a:r>
+          </a:p>
+          <a:p>
+            <a:pPr>
+              <a:spcBef>
+                <a:spcPts val="600"/>
+              </a:spcBef>
+              <a:defRPr sz="1500" b="1">
+                <a:solidFill>
+                  <a:srgbClr val="1E8A4C"/>
+                </a:solidFill>
+                <a:latin typeface="Palatino Linotype"/>
+              </a:defRPr>
+            </a:pPr>
+            <a:r>
+              <a:t>or 2.35x throughput, same budget</a:t>
+            </a:r>
+          </a:p>
+        </p:txBody>
+      </p:sp>
+      <p:sp>
+        <p:nvSpPr>
+          <p:cNvPr id="5" name="Rectangle 4"/>
+          <p:cNvSpPr/>
+          <p:nvPr/>
+        </p:nvSpPr>
+        <p:spPr>
+          <a:xfrm>
+            <a:off x="6309360" y="1554480"/>
+            <a:ext cx="4754880" cy="2286000"/>
+          </a:xfrm>
+          <a:prstGeom prst="rect">
+            <a:avLst/>
+          </a:prstGeom>
+          <a:solidFill>
+            <a:srgbClr val="E8F5F0"/>
+          </a:solidFill>
+          <a:ln>
+            <a:noFill/>
+          </a:ln>
+        </p:spPr>
+        <p:style>
+          <a:lnRef idx="1">
+            <a:schemeClr val="accent1"/>
+          </a:lnRef>
+          <a:fillRef idx="3">
+            <a:schemeClr val="accent1"/>
+          </a:fillRef>
+          <a:effectRef idx="2">
+            <a:schemeClr val="accent1"/>
+          </a:effectRef>
+          <a:fontRef idx="minor">
+            <a:schemeClr val="lt1"/>
+          </a:fontRef>
+        </p:style>
+        <p:txBody>
+          <a:bodyPr rtlCol="0" anchor="ctr"/>
+          <a:lstStyle/>
+          <a:p>
+            <a:pPr algn="ctr"/>
+            <a:endParaRPr/>
+          </a:p>
+        </p:txBody>
+      </p:sp>
+      <p:sp>
+        <p:nvSpPr>
+          <p:cNvPr id="6" name="TextBox 5"/>
+          <p:cNvSpPr txBox="1"/>
+          <p:nvPr/>
+        </p:nvSpPr>
+        <p:spPr>
+          <a:xfrm>
+            <a:off x="6583680" y="1645920"/>
+            <a:ext cx="4206240" cy="2103120"/>
+          </a:xfrm>
+          <a:prstGeom prst="rect">
+            <a:avLst/>
+          </a:prstGeom>
+          <a:noFill/>
+        </p:spPr>
+        <p:txBody>
+          <a:bodyPr wrap="square">
+            <a:spAutoFit/>
+          </a:bodyPr>
+          <a:lstStyle/>
+          <a:p>
+            <a:pPr algn="l">
+              <a:defRPr sz="2000" b="1">
+                <a:solidFill>
+                  <a:srgbClr val="0E6E6E"/>
+                </a:solidFill>
+                <a:latin typeface="Palatino Linotype"/>
+              </a:defRPr>
+            </a:pPr>
+            <a:r>
+              <a:t>DistServe (OSDI 2024)</a:t>
+            </a:r>
+          </a:p>
+          <a:p>
+            <a:pPr>
+              <a:spcBef>
+                <a:spcPts val="800"/>
+              </a:spcBef>
+              <a:defRPr sz="1500" b="0">
+                <a:solidFill>
+                  <a:srgbClr val="333333"/>
+                </a:solidFill>
+                <a:latin typeface="Palatino Linotype"/>
+              </a:defRPr>
+            </a:pPr>
+            <a:r>
+              <a:t>Goodput-optimal placement</a:t>
+            </a:r>
+          </a:p>
+          <a:p>
+            <a:pPr>
+              <a:spcBef>
+                <a:spcPts val="600"/>
+              </a:spcBef>
+              <a:defRPr sz="1500" b="0">
+                <a:solidFill>
+                  <a:srgbClr val="333333"/>
+                </a:solidFill>
+                <a:latin typeface="Palatino Linotype"/>
+              </a:defRPr>
+            </a:pPr>
+            <a:r>
+              <a:t>Automatic parallelism optimization</a:t>
+            </a:r>
+          </a:p>
+          <a:p>
+            <a:pPr>
+              <a:spcBef>
+                <a:spcPts val="600"/>
+              </a:spcBef>
+              <a:defRPr sz="1500" b="1">
+                <a:solidFill>
+                  <a:srgbClr val="1E8A4C"/>
+                </a:solidFill>
+                <a:latin typeface="Palatino Linotype"/>
+              </a:defRPr>
+            </a:pPr>
+            <a:r>
+              <a:t>Up to 7.4x higher request rate</a:t>
+            </a:r>
+          </a:p>
+          <a:p>
+            <a:pPr>
+              <a:spcBef>
+                <a:spcPts val="600"/>
+              </a:spcBef>
+              <a:defRPr sz="1500" b="1">
+                <a:solidFill>
+                  <a:srgbClr val="1E8A4C"/>
+                </a:solidFill>
+                <a:latin typeface="Palatino Linotype"/>
+              </a:defRPr>
+            </a:pPr>
+            <a:r>
+              <a:t>Up to 12.6x tighter SLO</a:t>
+            </a:r>
+          </a:p>
+        </p:txBody>
+      </p:sp>
+      <p:sp>
+        <p:nvSpPr>
+          <p:cNvPr id="7" name="Rectangle 6"/>
+          <p:cNvSpPr/>
+          <p:nvPr/>
+        </p:nvSpPr>
+        <p:spPr>
+          <a:xfrm>
+            <a:off x="1097280" y="4206240"/>
+            <a:ext cx="10058400" cy="1097280"/>
+          </a:xfrm>
+          <a:prstGeom prst="rect">
+            <a:avLst/>
+          </a:prstGeom>
+          <a:solidFill>
+            <a:srgbClr val="F8F9FA"/>
+          </a:solidFill>
+          <a:ln>
+            <a:noFill/>
+          </a:ln>
+        </p:spPr>
+        <p:style>
+          <a:lnRef idx="1">
+            <a:schemeClr val="accent1"/>
+          </a:lnRef>
+          <a:fillRef idx="3">
+            <a:schemeClr val="accent1"/>
+          </a:fillRef>
+          <a:effectRef idx="2">
+            <a:schemeClr val="accent1"/>
+          </a:effectRef>
+          <a:fontRef idx="minor">
+            <a:schemeClr val="lt1"/>
+          </a:fontRef>
+        </p:style>
+        <p:txBody>
+          <a:bodyPr rtlCol="0" anchor="ctr"/>
+          <a:lstStyle/>
+          <a:p>
+            <a:pPr algn="ctr"/>
+            <a:endParaRPr/>
+          </a:p>
+        </p:txBody>
+      </p:sp>
+      <p:sp>
+        <p:nvSpPr>
+          <p:cNvPr id="8" name="TextBox 7"/>
+          <p:cNvSpPr txBox="1"/>
+          <p:nvPr/>
+        </p:nvSpPr>
+        <p:spPr>
+          <a:xfrm>
+            <a:off x="1371600" y="4297680"/>
+            <a:ext cx="9418320" cy="914400"/>
+          </a:xfrm>
+          <a:prstGeom prst="rect">
+            <a:avLst/>
+          </a:prstGeom>
+          <a:noFill/>
+        </p:spPr>
+        <p:txBody>
+          <a:bodyPr wrap="square">
+            <a:spAutoFit/>
+          </a:bodyPr>
+          <a:lstStyle/>
+          <a:p>
+            <a:pPr algn="ctr">
+              <a:defRPr sz="2000" b="0">
+                <a:solidFill>
+                  <a:srgbClr val="1A1A1A"/>
+                </a:solidFill>
+                <a:latin typeface="Palatino Linotype"/>
+              </a:defRPr>
+            </a:pPr>
+            <a:r>
+              <a:t>Prefill and decoding are different workloads.</a:t>
+            </a:r>
+          </a:p>
+          <a:p>
+            <a:pPr algn="ctr">
+              <a:spcBef>
+                <a:spcPts val="400"/>
+              </a:spcBef>
+              <a:defRPr sz="2000" b="1">
+                <a:solidFill>
+                  <a:srgbClr val="1A56DB"/>
+                </a:solidFill>
+                <a:latin typeface="Palatino Linotype"/>
+              </a:defRPr>
+            </a:pPr>
+            <a:r>
+              <a:t>Treating them as one wastes hardware, power, and money.</a:t>
+            </a:r>
+          </a:p>
+        </p:txBody>
+      </p:sp>
+      <p:sp>
+        <p:nvSpPr>
+          <p:cNvPr id="9" name="TextBox 8"/>
+          <p:cNvSpPr txBox="1"/>
+          <p:nvPr/>
+        </p:nvSpPr>
+        <p:spPr>
+          <a:xfrm>
+            <a:off x="11338560" y="6446520"/>
+            <a:ext cx="640080" cy="320040"/>
+          </a:xfrm>
+          <a:prstGeom prst="rect">
+            <a:avLst/>
+          </a:prstGeom>
+          <a:noFill/>
+        </p:spPr>
+        <p:txBody>
+          <a:bodyPr wrap="square">
+            <a:spAutoFit/>
+          </a:bodyPr>
+          <a:lstStyle/>
+          <a:p>
+            <a:pPr algn="r">
+              <a:defRPr sz="1000" b="0">
+                <a:solidFill>
+                  <a:srgbClr val="AAAAAA"/>
+                </a:solidFill>
+                <a:latin typeface="Palatino Linotype"/>
+              </a:defRPr>
+            </a:pPr>
+            <a:r>
+              <a:t>31</a:t>
+            </a:r>
+          </a:p>
+        </p:txBody>
+      </p:sp>
+    </p:spTree>
+  </p:cSld>
+  <p:clrMapOvr>
+    <a:masterClrMapping/>
+  </p:clrMapOvr>
+</p:sld>
+</file>
+
+<file path=ppt/slides/slide32.xml><?xml version="1.0" encoding="utf-8"?>
+<p:sld xmlns:a="http://schemas.openxmlformats.org/drawingml/2006/main" xmlns:r="http://schemas.openxmlformats.org/officeDocument/2006/relationships" xmlns:p="http://schemas.openxmlformats.org/presentationml/2006/main">
+  <p:cSld>
+    <p:bg>
+      <p:bgPr>
+        <a:solidFill>
+          <a:srgbClr val="FFFFFF"/>
+        </a:solidFill>
+        <a:effectLst/>
+      </p:bgPr>
+    </p:bg>
+    <p:spTree>
+      <p:nvGrpSpPr>
+        <p:cNvPr id="1" name=""/>
+        <p:cNvGrpSpPr/>
+        <p:nvPr/>
+      </p:nvGrpSpPr>
+      <p:grpSpPr>
+        <a:xfrm>
+          <a:off x="0" y="0"/>
+          <a:ext cx="0" cy="0"/>
+          <a:chOff x="0" y="0"/>
+          <a:chExt cx="0" cy="0"/>
+        </a:xfrm>
+      </p:grpSpPr>
+      <p:sp>
+        <p:nvSpPr>
+          <p:cNvPr id="2" name="TextBox 1"/>
+          <p:cNvSpPr txBox="1"/>
+          <p:nvPr/>
+        </p:nvSpPr>
+        <p:spPr>
+          <a:xfrm>
+            <a:off x="1097280" y="457200"/>
+            <a:ext cx="10058400" cy="640080"/>
+          </a:xfrm>
+          <a:prstGeom prst="rect">
+            <a:avLst/>
+          </a:prstGeom>
+          <a:noFill/>
+        </p:spPr>
+        <p:txBody>
+          <a:bodyPr wrap="square">
+            <a:spAutoFit/>
+          </a:bodyPr>
+          <a:lstStyle/>
+          <a:p>
+            <a:pPr algn="l">
+              <a:defRPr sz="3400" b="1">
+                <a:solidFill>
+                  <a:srgbClr val="1A1A1A"/>
+                </a:solidFill>
+                <a:latin typeface="Palatino Linotype"/>
+              </a:defRPr>
+            </a:pPr>
+            <a:r>
+              <a:t>References</a:t>
+            </a:r>
+          </a:p>
+        </p:txBody>
+      </p:sp>
+      <p:sp>
+        <p:nvSpPr>
+          <p:cNvPr id="3" name="TextBox 2"/>
+          <p:cNvSpPr txBox="1"/>
+          <p:nvPr/>
+        </p:nvSpPr>
+        <p:spPr>
+          <a:xfrm>
+            <a:off x="1097280" y="1371600"/>
+            <a:ext cx="9601200" cy="5029200"/>
+          </a:xfrm>
+          <a:prstGeom prst="rect">
+            <a:avLst/>
+          </a:prstGeom>
+          <a:noFill/>
+        </p:spPr>
+        <p:txBody>
+          <a:bodyPr wrap="square">
+            <a:spAutoFit/>
+          </a:bodyPr>
+          <a:lstStyle/>
+          <a:p>
+            <a:pPr algn="l">
+              <a:defRPr sz="1300" b="0">
+                <a:solidFill>
+                  <a:srgbClr val="333333"/>
+                </a:solidFill>
+                <a:latin typeface="Palatino Linotype"/>
+              </a:defRPr>
+            </a:pPr>
+            <a:r>
+              <a:t>[1]  P. Patel, E. Choukse, C. Zhang, A. Shah, I. Goiri, S. Maleki, R. Bianchini.</a:t>
+            </a:r>
+          </a:p>
+          <a:p>
+            <a:pPr algn="l">
+              <a:spcBef>
+                <a:spcPts val="100"/>
+              </a:spcBef>
+              <a:defRPr sz="1300" b="0">
+                <a:solidFill>
+                  <a:srgbClr val="333333"/>
+                </a:solidFill>
+                <a:latin typeface="Palatino Linotype"/>
+              </a:defRPr>
+            </a:pPr>
+            <a:r>
+              <a:t>     "Splitwise: Efficient Generative LLM Inference Using Phase Splitting."</a:t>
+            </a:r>
+          </a:p>
+          <a:p>
+            <a:pPr algn="l">
+              <a:spcBef>
+                <a:spcPts val="100"/>
+              </a:spcBef>
+              <a:defRPr sz="1300" b="0">
+                <a:solidFill>
+                  <a:srgbClr val="333333"/>
+                </a:solidFill>
+                <a:latin typeface="Palatino Linotype"/>
+              </a:defRPr>
+            </a:pPr>
+            <a:r>
+              <a:t>     ISCA 2024. arXiv:2311.18677</a:t>
+            </a:r>
+          </a:p>
+          <a:p>
+            <a:pPr algn="l">
+              <a:spcBef>
+                <a:spcPts val="100"/>
+              </a:spcBef>
+              <a:defRPr sz="1300" b="0">
+                <a:solidFill>
+                  <a:srgbClr val="333333"/>
+                </a:solidFill>
+                <a:latin typeface="Palatino Linotype"/>
+              </a:defRPr>
+            </a:pPr>
+            <a:endParaRPr/>
+          </a:p>
+          <a:p>
+            <a:pPr algn="l">
+              <a:spcBef>
+                <a:spcPts val="100"/>
+              </a:spcBef>
+              <a:defRPr sz="1300" b="0">
+                <a:solidFill>
+                  <a:srgbClr val="333333"/>
+                </a:solidFill>
+                <a:latin typeface="Palatino Linotype"/>
+              </a:defRPr>
+            </a:pPr>
+            <a:r>
+              <a:t>[2]  Y. Zhong, S. Liu, J. Chen, J. Hu, Y. Zhu, X. Liu, X. Jin, H. Zhang.</a:t>
+            </a:r>
+          </a:p>
+          <a:p>
+            <a:pPr algn="l">
+              <a:spcBef>
+                <a:spcPts val="100"/>
+              </a:spcBef>
+              <a:defRPr sz="1300" b="0">
+                <a:solidFill>
+                  <a:srgbClr val="333333"/>
+                </a:solidFill>
+                <a:latin typeface="Palatino Linotype"/>
+              </a:defRPr>
+            </a:pPr>
+            <a:r>
+              <a:t>     "DistServe: Disaggregating Prefill and Decoding for Goodput-optimized</a:t>
+            </a:r>
+          </a:p>
+          <a:p>
+            <a:pPr algn="l">
+              <a:spcBef>
+                <a:spcPts val="100"/>
+              </a:spcBef>
+              <a:defRPr sz="1300" b="0">
+                <a:solidFill>
+                  <a:srgbClr val="333333"/>
+                </a:solidFill>
+                <a:latin typeface="Palatino Linotype"/>
+              </a:defRPr>
+            </a:pPr>
+            <a:r>
+              <a:t>     Large Language Model Serving."  OSDI 2024. arXiv:2401.09670</a:t>
+            </a:r>
+          </a:p>
+          <a:p>
+            <a:pPr algn="l">
+              <a:spcBef>
+                <a:spcPts val="100"/>
+              </a:spcBef>
+              <a:defRPr sz="1300" b="0">
+                <a:solidFill>
+                  <a:srgbClr val="333333"/>
+                </a:solidFill>
+                <a:latin typeface="Palatino Linotype"/>
+              </a:defRPr>
+            </a:pPr>
+            <a:endParaRPr/>
+          </a:p>
+          <a:p>
+            <a:pPr algn="l">
+              <a:spcBef>
+                <a:spcPts val="100"/>
+              </a:spcBef>
+              <a:defRPr sz="1300" b="0">
+                <a:solidFill>
+                  <a:srgbClr val="333333"/>
+                </a:solidFill>
+                <a:latin typeface="Palatino Linotype"/>
+              </a:defRPr>
+            </a:pPr>
+            <a:r>
+              <a:t>[3]  A. Agrawal et al. Sarathi: Efficient LLM Inference by Piggybacking Decodes</a:t>
+            </a:r>
+          </a:p>
+          <a:p>
+            <a:pPr algn="l">
+              <a:spcBef>
+                <a:spcPts val="100"/>
+              </a:spcBef>
+              <a:defRPr sz="1300" b="0">
+                <a:solidFill>
+                  <a:srgbClr val="333333"/>
+                </a:solidFill>
+                <a:latin typeface="Palatino Linotype"/>
+              </a:defRPr>
+            </a:pPr>
+            <a:r>
+              <a:t>     with Chunked Prefills. arXiv:2308.16369, 2023.</a:t>
+            </a:r>
+          </a:p>
+          <a:p>
+            <a:pPr algn="l">
+              <a:spcBef>
+                <a:spcPts val="100"/>
+              </a:spcBef>
+              <a:defRPr sz="1300" b="0">
+                <a:solidFill>
+                  <a:srgbClr val="333333"/>
+                </a:solidFill>
+                <a:latin typeface="Palatino Linotype"/>
+              </a:defRPr>
+            </a:pPr>
+            <a:endParaRPr/>
+          </a:p>
+          <a:p>
+            <a:pPr algn="l">
+              <a:spcBef>
+                <a:spcPts val="100"/>
+              </a:spcBef>
+              <a:defRPr sz="1300" b="0">
+                <a:solidFill>
+                  <a:srgbClr val="333333"/>
+                </a:solidFill>
+                <a:latin typeface="Palatino Linotype"/>
+              </a:defRPr>
+            </a:pPr>
+            <a:r>
+              <a:t>[4]  W. Kwon et al. Efficient Memory Management for Large Language Model Serving</a:t>
+            </a:r>
+          </a:p>
+          <a:p>
+            <a:pPr algn="l">
+              <a:spcBef>
+                <a:spcPts val="100"/>
+              </a:spcBef>
+              <a:defRPr sz="1300" b="0">
+                <a:solidFill>
+                  <a:srgbClr val="333333"/>
+                </a:solidFill>
+                <a:latin typeface="Palatino Linotype"/>
+              </a:defRPr>
+            </a:pPr>
+            <a:r>
+              <a:t>     with PagedAttention (vLLM). SOSP 2023.</a:t>
+            </a:r>
+          </a:p>
+          <a:p>
+            <a:pPr algn="l">
+              <a:spcBef>
+                <a:spcPts val="100"/>
+              </a:spcBef>
+              <a:defRPr sz="1300" b="0">
+                <a:solidFill>
+                  <a:srgbClr val="333333"/>
+                </a:solidFill>
+                <a:latin typeface="Palatino Linotype"/>
+              </a:defRPr>
+            </a:pPr>
+            <a:endParaRPr/>
+          </a:p>
+          <a:p>
+            <a:pPr algn="l">
+              <a:spcBef>
+                <a:spcPts val="100"/>
+              </a:spcBef>
+              <a:defRPr sz="1300" b="0">
+                <a:solidFill>
+                  <a:srgbClr val="333333"/>
+                </a:solidFill>
+                <a:latin typeface="Palatino Linotype"/>
+              </a:defRPr>
+            </a:pPr>
+            <a:r>
+              <a:t>[5]  Y. Sheng et al. FlexGen: High-Throughput Generative Inference of Large Language</a:t>
+            </a:r>
+          </a:p>
+          <a:p>
+            <a:pPr algn="l">
+              <a:spcBef>
+                <a:spcPts val="100"/>
+              </a:spcBef>
+              <a:defRPr sz="1300" b="0">
+                <a:solidFill>
+                  <a:srgbClr val="333333"/>
+                </a:solidFill>
+                <a:latin typeface="Palatino Linotype"/>
+              </a:defRPr>
+            </a:pPr>
+            <a:r>
+              <a:t>     Models with a Single GPU. ICML 2023.</a:t>
+            </a:r>
+          </a:p>
+        </p:txBody>
+      </p:sp>
+      <p:sp>
+        <p:nvSpPr>
+          <p:cNvPr id="4" name="TextBox 3"/>
+          <p:cNvSpPr txBox="1"/>
+          <p:nvPr/>
+        </p:nvSpPr>
+        <p:spPr>
+          <a:xfrm>
+            <a:off x="11338560" y="6446520"/>
+            <a:ext cx="640080" cy="320040"/>
+          </a:xfrm>
+          <a:prstGeom prst="rect">
+            <a:avLst/>
+          </a:prstGeom>
+          <a:noFill/>
+        </p:spPr>
+        <p:txBody>
+          <a:bodyPr wrap="square">
+            <a:spAutoFit/>
+          </a:bodyPr>
+          <a:lstStyle/>
+          <a:p>
+            <a:pPr algn="r">
+              <a:defRPr sz="1000" b="0">
+                <a:solidFill>
+                  <a:srgbClr val="AAAAAA"/>
+                </a:solidFill>
+                <a:latin typeface="Palatino Linotype"/>
+              </a:defRPr>
+            </a:pPr>
+            <a:r>
+              <a:t>32</a:t>
+            </a:r>
+          </a:p>
+        </p:txBody>
+      </p:sp>
+    </p:spTree>
+  </p:cSld>
+  <p:clrMapOvr>
+    <a:masterClrMapping/>
+  </p:clrMapOvr>
+</p:sld>
+</file>
+
+<file path=ppt/slides/slide33.xml><?xml version="1.0" encoding="utf-8"?>
+<p:sld xmlns:a="http://schemas.openxmlformats.org/drawingml/2006/main" xmlns:r="http://schemas.openxmlformats.org/officeDocument/2006/relationships" xmlns:p="http://schemas.openxmlformats.org/presentationml/2006/main">
+  <p:cSld>
+    <p:bg>
+      <p:bgPr>
+        <a:solidFill>
+          <a:srgbClr val="0F172A"/>
+        </a:solidFill>
+        <a:effectLst/>
+      </p:bgPr>
+    </p:bg>
+    <p:spTree>
+      <p:nvGrpSpPr>
+        <p:cNvPr id="1" name=""/>
+        <p:cNvGrpSpPr/>
+        <p:nvPr/>
+      </p:nvGrpSpPr>
+      <p:grpSpPr>
+        <a:xfrm>
+          <a:off x="0" y="0"/>
+          <a:ext cx="0" cy="0"/>
+          <a:chOff x="0" y="0"/>
+          <a:chExt cx="0" cy="0"/>
+        </a:xfrm>
+      </p:grpSpPr>
+      <p:sp>
+        <p:nvSpPr>
+          <p:cNvPr id="2" name="Rectangle 1"/>
+          <p:cNvSpPr/>
+          <p:nvPr/>
+        </p:nvSpPr>
+        <p:spPr>
+          <a:xfrm>
+            <a:off x="0" y="2926080"/>
+            <a:ext cx="12191695" cy="25400"/>
+          </a:xfrm>
+          <a:prstGeom prst="rect">
+            <a:avLst/>
+          </a:prstGeom>
+          <a:solidFill>
+            <a:srgbClr val="1A56DB"/>
+          </a:solidFill>
+          <a:ln>
+            <a:noFill/>
+          </a:ln>
+        </p:spPr>
+        <p:style>
+          <a:lnRef idx="1">
+            <a:schemeClr val="accent1"/>
+          </a:lnRef>
+          <a:fillRef idx="3">
+            <a:schemeClr val="accent1"/>
+          </a:fillRef>
+          <a:effectRef idx="2">
+            <a:schemeClr val="accent1"/>
+          </a:effectRef>
+          <a:fontRef idx="minor">
+            <a:schemeClr val="lt1"/>
+          </a:fontRef>
+        </p:style>
+        <p:txBody>
+          <a:bodyPr rtlCol="0" anchor="ctr"/>
+          <a:lstStyle/>
+          <a:p>
+            <a:pPr algn="ctr"/>
+            <a:endParaRPr/>
+          </a:p>
+        </p:txBody>
+      </p:sp>
+      <p:sp>
+        <p:nvSpPr>
+          <p:cNvPr id="3" name="TextBox 2"/>
+          <p:cNvSpPr txBox="1"/>
+          <p:nvPr/>
+        </p:nvSpPr>
+        <p:spPr>
+          <a:xfrm>
+            <a:off x="1097280" y="1645920"/>
+            <a:ext cx="10058400" cy="914400"/>
+          </a:xfrm>
+          <a:prstGeom prst="rect">
+            <a:avLst/>
+          </a:prstGeom>
+          <a:noFill/>
+        </p:spPr>
+        <p:txBody>
+          <a:bodyPr wrap="square">
+            <a:spAutoFit/>
+          </a:bodyPr>
+          <a:lstStyle/>
+          <a:p>
+            <a:pPr algn="l">
+              <a:defRPr sz="4800" b="1">
+                <a:solidFill>
+                  <a:srgbClr val="FFFFFF"/>
+                </a:solidFill>
+                <a:latin typeface="Palatino Linotype"/>
+              </a:defRPr>
+            </a:pPr>
+            <a:r>
+              <a:t>Thank You</a:t>
+            </a:r>
+          </a:p>
+        </p:txBody>
+      </p:sp>
+      <p:sp>
+        <p:nvSpPr>
+          <p:cNvPr id="4" name="TextBox 3"/>
+          <p:cNvSpPr txBox="1"/>
+          <p:nvPr/>
+        </p:nvSpPr>
+        <p:spPr>
+          <a:xfrm>
+            <a:off x="1097280" y="3291840"/>
+            <a:ext cx="10058400" cy="640080"/>
+          </a:xfrm>
+          <a:prstGeom prst="rect">
+            <a:avLst/>
+          </a:prstGeom>
+          <a:noFill/>
+        </p:spPr>
+        <p:txBody>
+          <a:bodyPr wrap="square">
+            <a:spAutoFit/>
+          </a:bodyPr>
+          <a:lstStyle/>
+          <a:p>
+            <a:pPr algn="l">
+              <a:defRPr sz="3200" b="0">
+                <a:solidFill>
+                  <a:srgbClr val="88AADD"/>
+                </a:solidFill>
+                <a:latin typeface="Palatino Linotype"/>
+              </a:defRPr>
+            </a:pPr>
+            <a:r>
+              <a:t>Questions?</a:t>
+            </a:r>
+          </a:p>
+        </p:txBody>
+      </p:sp>
+      <p:sp>
+        <p:nvSpPr>
+          <p:cNvPr id="5" name="TextBox 4"/>
+          <p:cNvSpPr txBox="1"/>
+          <p:nvPr/>
+        </p:nvSpPr>
+        <p:spPr>
+          <a:xfrm>
+            <a:off x="1097280" y="4389120"/>
+            <a:ext cx="10058400" cy="1828800"/>
+          </a:xfrm>
+          <a:prstGeom prst="rect">
+            <a:avLst/>
+          </a:prstGeom>
+          <a:noFill/>
+        </p:spPr>
+        <p:txBody>
+          <a:bodyPr wrap="square">
+            <a:spAutoFit/>
+          </a:bodyPr>
+          <a:lstStyle/>
+          <a:p>
+            <a:pPr algn="l">
+              <a:defRPr sz="1600" b="0">
+                <a:solidFill>
+                  <a:srgbClr val="AAAAAA"/>
+                </a:solidFill>
+                <a:latin typeface="Palatino Linotype"/>
+              </a:defRPr>
+            </a:pPr>
+            <a:r>
+              <a:t>Splitwise: arXiv:2311.18677 (ISCA 2024)</a:t>
+            </a:r>
+          </a:p>
+          <a:p>
+            <a:pPr algn="l">
+              <a:spcBef>
+                <a:spcPts val="400"/>
+              </a:spcBef>
+              <a:defRPr sz="1600" b="0">
+                <a:solidFill>
+                  <a:srgbClr val="AAAAAA"/>
+                </a:solidFill>
+                <a:latin typeface="Palatino Linotype"/>
+              </a:defRPr>
+            </a:pPr>
+            <a:r>
+              <a:t>DistServe: arXiv:2401.09670 (OSDI 2024)</a:t>
+            </a:r>
+          </a:p>
+          <a:p>
+            <a:pPr algn="l">
+              <a:spcBef>
+                <a:spcPts val="1600"/>
+              </a:spcBef>
+              <a:defRPr sz="1000" b="0">
+                <a:solidFill>
+                  <a:srgbClr val="AAAAAA"/>
+                </a:solidFill>
+                <a:latin typeface="Palatino Linotype"/>
+              </a:defRPr>
+            </a:pPr>
+            <a:endParaRPr/>
+          </a:p>
+          <a:p>
+            <a:pPr algn="l">
+              <a:spcBef>
+                <a:spcPts val="400"/>
+              </a:spcBef>
+              <a:defRPr sz="2000" b="1">
+                <a:solidFill>
+                  <a:srgbClr val="FFFFFF"/>
+                </a:solidFill>
+                <a:latin typeface="Palatino Linotype"/>
+              </a:defRPr>
+            </a:pPr>
+            <a:r>
+              <a:t>Berat Celik  &amp;  Jiayang (Ethan) Chen</a:t>
+            </a:r>
+          </a:p>
+          <a:p>
+            <a:pPr algn="l">
+              <a:spcBef>
+                <a:spcPts val="400"/>
+              </a:spcBef>
+              <a:defRPr sz="1600" b="0">
+                <a:solidFill>
+                  <a:srgbClr val="AAAAAA"/>
+                </a:solidFill>
+                <a:latin typeface="Palatino Linotype"/>
+              </a:defRPr>
+            </a:pPr>
+            <a:r>
+              <a:t>ECE 5545  |  Spring 2026</a:t>
+            </a:r>
+          </a:p>
+        </p:txBody>
+      </p:sp>
+      <p:sp>
+        <p:nvSpPr>
+          <p:cNvPr id="6" name="TextBox 5"/>
+          <p:cNvSpPr txBox="1"/>
+          <p:nvPr/>
+        </p:nvSpPr>
+        <p:spPr>
+          <a:xfrm>
+            <a:off x="11338560" y="6446520"/>
+            <a:ext cx="640080" cy="320040"/>
+          </a:xfrm>
+          <a:prstGeom prst="rect">
+            <a:avLst/>
+          </a:prstGeom>
+          <a:noFill/>
+        </p:spPr>
+        <p:txBody>
+          <a:bodyPr wrap="square">
+            <a:spAutoFit/>
+          </a:bodyPr>
+          <a:lstStyle/>
+          <a:p>
+            <a:pPr algn="r">
+              <a:defRPr sz="1000" b="0">
+                <a:solidFill>
+                  <a:srgbClr val="556688"/>
+                </a:solidFill>
+                <a:latin typeface="Palatino Linotype"/>
+              </a:defRPr>
+            </a:pPr>
+            <a:r>
+              <a:t>33</a:t>
+            </a:r>
+          </a:p>
+        </p:txBody>
+      </p:sp>
+    </p:spTree>
+  </p:cSld>
+  <p:clrMapOvr>
+    <a:masterClrMapping/>
+  </p:clrMapOvr>
+</p:sld>
+</file>
+
+<file path=ppt/slides/slide4.xml><?xml version="1.0" encoding="utf-8"?>
+<p:sld xmlns:a="http://schemas.openxmlformats.org/drawingml/2006/main" xmlns:r="http://schemas.openxmlformats.org/officeDocument/2006/relationships" xmlns:p="http://schemas.openxmlformats.org/presentationml/2006/main">
+  <p:cSld>
+    <p:bg>
+      <p:bgPr>
+        <a:solidFill>
+          <a:srgbClr val="FFFFFF"/>
+        </a:solidFill>
+        <a:effectLst/>
+      </p:bgPr>
+    </p:bg>
+    <p:spTree>
+      <p:nvGrpSpPr>
+        <p:cNvPr id="1" name=""/>
+        <p:cNvGrpSpPr/>
+        <p:nvPr/>
+      </p:nvGrpSpPr>
+      <p:grpSpPr>
+        <a:xfrm>
+          <a:off x="0" y="0"/>
+          <a:ext cx="0" cy="0"/>
+          <a:chOff x="0" y="0"/>
+          <a:chExt cx="0" cy="0"/>
+        </a:xfrm>
+      </p:grpSpPr>
       <p:sp>
         <p:nvSpPr>
           <p:cNvPr id="2" name="TextBox 1"/>
@@ -12172,9 +14298,27 @@
                 <a:tableStyleId>{5C22544A-7EE6-4342-B048-85BDC9FD1C3A}</a:tableStyleId>
               </a:tblPr>
               <a:tblGrid>
-                <a:gridCol w="3139440"/>
-                <a:gridCol w="3139440"/>
-                <a:gridCol w="3139440"/>
+                <a:gridCol w="3139440">
+                  <a:extLst>
+                    <a:ext uri="{9D8B030D-6E8A-4147-A177-3AD203B41FA5}">
+                      <a16:colId xmlns:a16="http://schemas.microsoft.com/office/drawing/2014/main" val="20000"/>
+                    </a:ext>
+                  </a:extLst>
+                </a:gridCol>
+                <a:gridCol w="3139440">
+                  <a:extLst>
+                    <a:ext uri="{9D8B030D-6E8A-4147-A177-3AD203B41FA5}">
+                      <a16:colId xmlns:a16="http://schemas.microsoft.com/office/drawing/2014/main" val="20001"/>
+                    </a:ext>
+                  </a:extLst>
+                </a:gridCol>
+                <a:gridCol w="3139440">
+                  <a:extLst>
+                    <a:ext uri="{9D8B030D-6E8A-4147-A177-3AD203B41FA5}">
+                      <a16:colId xmlns:a16="http://schemas.microsoft.com/office/drawing/2014/main" val="20002"/>
+                    </a:ext>
+                  </a:extLst>
+                </a:gridCol>
               </a:tblGrid>
               <a:tr h="514350">
                 <a:tc>
@@ -12190,6 +14334,7 @@
                           <a:latin typeface="Palatino Linotype"/>
                         </a:defRPr>
                       </a:pPr>
+                      <a:endParaRPr/>
                     </a:p>
                   </a:txBody>
                   <a:tcPr>
@@ -12246,6 +14391,11 @@
                     </a:solidFill>
                   </a:tcPr>
                 </a:tc>
+                <a:extLst>
+                  <a:ext uri="{0D108BD9-81ED-4DB2-BD59-A6C34878D82A}">
+                    <a16:rowId xmlns:a16="http://schemas.microsoft.com/office/drawing/2014/main" val="10000"/>
+                  </a:ext>
+                </a:extLst>
               </a:tr>
               <a:tr h="514350">
                 <a:tc>
@@ -12320,6 +14470,11 @@
                     </a:solidFill>
                   </a:tcPr>
                 </a:tc>
+                <a:extLst>
+                  <a:ext uri="{0D108BD9-81ED-4DB2-BD59-A6C34878D82A}">
+                    <a16:rowId xmlns:a16="http://schemas.microsoft.com/office/drawing/2014/main" val="10001"/>
+                  </a:ext>
+                </a:extLst>
               </a:tr>
               <a:tr h="514350">
                 <a:tc>
@@ -12394,6 +14549,11 @@
                     </a:solidFill>
                   </a:tcPr>
                 </a:tc>
+                <a:extLst>
+                  <a:ext uri="{0D108BD9-81ED-4DB2-BD59-A6C34878D82A}">
+                    <a16:rowId xmlns:a16="http://schemas.microsoft.com/office/drawing/2014/main" val="10002"/>
+                  </a:ext>
+                </a:extLst>
               </a:tr>
               <a:tr h="514350">
                 <a:tc>
@@ -12468,6 +14628,11 @@
                     </a:solidFill>
                   </a:tcPr>
                 </a:tc>
+                <a:extLst>
+                  <a:ext uri="{0D108BD9-81ED-4DB2-BD59-A6C34878D82A}">
+                    <a16:rowId xmlns:a16="http://schemas.microsoft.com/office/drawing/2014/main" val="10003"/>
+                  </a:ext>
+                </a:extLst>
               </a:tr>
               <a:tr h="514350">
                 <a:tc>
@@ -12542,6 +14707,11 @@
                     </a:solidFill>
                   </a:tcPr>
                 </a:tc>
+                <a:extLst>
+                  <a:ext uri="{0D108BD9-81ED-4DB2-BD59-A6C34878D82A}">
+                    <a16:rowId xmlns:a16="http://schemas.microsoft.com/office/drawing/2014/main" val="10004"/>
+                  </a:ext>
+                </a:extLst>
               </a:tr>
               <a:tr h="514350">
                 <a:tc>
@@ -12616,6 +14786,11 @@
                     </a:solidFill>
                   </a:tcPr>
                 </a:tc>
+                <a:extLst>
+                  <a:ext uri="{0D108BD9-81ED-4DB2-BD59-A6C34878D82A}">
+                    <a16:rowId xmlns:a16="http://schemas.microsoft.com/office/drawing/2014/main" val="10005"/>
+                  </a:ext>
+                </a:extLst>
               </a:tr>
               <a:tr h="514350">
                 <a:tc>
@@ -12690,6 +14865,11 @@
                     </a:solidFill>
                   </a:tcPr>
                 </a:tc>
+                <a:extLst>
+                  <a:ext uri="{0D108BD9-81ED-4DB2-BD59-A6C34878D82A}">
+                    <a16:rowId xmlns:a16="http://schemas.microsoft.com/office/drawing/2014/main" val="10006"/>
+                  </a:ext>
+                </a:extLst>
               </a:tr>
               <a:tr h="514350">
                 <a:tc>
@@ -12764,6 +14944,11 @@
                     </a:solidFill>
                   </a:tcPr>
                 </a:tc>
+                <a:extLst>
+                  <a:ext uri="{0D108BD9-81ED-4DB2-BD59-A6C34878D82A}">
+                    <a16:rowId xmlns:a16="http://schemas.microsoft.com/office/drawing/2014/main" val="10007"/>
+                  </a:ext>
+                </a:extLst>
               </a:tr>
             </a:tbl>
           </a:graphicData>
@@ -12836,7 +15021,7 @@
               </a:defRPr>
             </a:pPr>
             <a:r>
-              <a:t>3</a:t>
+              <a:t>4</a:t>
             </a:r>
           </a:p>
         </p:txBody>
@@ -12849,8 +15034,8 @@
 </p:sld>
 </file>
 
-<file path=ppt/slides/slide30.xml><?xml version="1.0" encoding="utf-8"?>
-<p:sld xmlns:a="http://schemas.openxmlformats.org/drawingml/2006/main" xmlns:p="http://schemas.openxmlformats.org/presentationml/2006/main" xmlns:r="http://schemas.openxmlformats.org/officeDocument/2006/relationships">
+<file path=ppt/slides/slide5.xml><?xml version="1.0" encoding="utf-8"?>
+<p:sld xmlns:a="http://schemas.openxmlformats.org/drawingml/2006/main" xmlns:r="http://schemas.openxmlformats.org/officeDocument/2006/relationships" xmlns:p="http://schemas.openxmlformats.org/presentationml/2006/main">
   <p:cSld>
     <p:bg>
       <p:bgPr>
@@ -12866,1122 +15051,14 @@
         <p:cNvGrpSpPr/>
         <p:nvPr/>
       </p:nvGrpSpPr>
-      <p:grpSpPr/>
-      <p:sp>
-        <p:nvSpPr>
-          <p:cNvPr id="2" name="TextBox 1"/>
-          <p:cNvSpPr txBox="1"/>
-          <p:nvPr/>
-        </p:nvSpPr>
-        <p:spPr>
-          <a:xfrm>
-            <a:off x="1097280" y="457200"/>
-            <a:ext cx="10058400" cy="640080"/>
-          </a:xfrm>
-          <a:prstGeom prst="rect">
-            <a:avLst/>
-          </a:prstGeom>
-          <a:noFill/>
-        </p:spPr>
-        <p:txBody>
-          <a:bodyPr wrap="square">
-            <a:spAutoFit/>
-          </a:bodyPr>
-          <a:lstStyle/>
-          <a:p>
-            <a:pPr algn="l">
-              <a:defRPr sz="3600" b="1">
-                <a:solidFill>
-                  <a:srgbClr val="1A1A1A"/>
-                </a:solidFill>
-                <a:latin typeface="Palatino Linotype"/>
-              </a:defRPr>
-            </a:pPr>
-            <a:r>
-              <a:t>Summary</a:t>
-            </a:r>
-          </a:p>
-        </p:txBody>
-      </p:sp>
-      <p:sp>
-        <p:nvSpPr>
-          <p:cNvPr id="3" name="Rectangle 2"/>
-          <p:cNvSpPr/>
-          <p:nvPr/>
-        </p:nvSpPr>
-        <p:spPr>
-          <a:xfrm>
-            <a:off x="1097280" y="1554480"/>
-            <a:ext cx="4754880" cy="2286000"/>
-          </a:xfrm>
-          <a:prstGeom prst="rect">
-            <a:avLst/>
-          </a:prstGeom>
-          <a:solidFill>
-            <a:srgbClr val="E8EEF8"/>
-          </a:solidFill>
-          <a:ln>
-            <a:noFill/>
-          </a:ln>
-        </p:spPr>
-        <p:style>
-          <a:lnRef idx="1">
-            <a:schemeClr val="accent1"/>
-          </a:lnRef>
-          <a:fillRef idx="3">
-            <a:schemeClr val="accent1"/>
-          </a:fillRef>
-          <a:effectRef idx="2">
-            <a:schemeClr val="accent1"/>
-          </a:effectRef>
-          <a:fontRef idx="minor">
-            <a:schemeClr val="lt1"/>
-          </a:fontRef>
-        </p:style>
-        <p:txBody>
-          <a:bodyPr rtlCol="0" anchor="ctr"/>
-          <a:lstStyle/>
-          <a:p>
-            <a:pPr algn="ctr"/>
-          </a:p>
-        </p:txBody>
-      </p:sp>
-      <p:sp>
-        <p:nvSpPr>
-          <p:cNvPr id="4" name="TextBox 3"/>
-          <p:cNvSpPr txBox="1"/>
-          <p:nvPr/>
-        </p:nvSpPr>
-        <p:spPr>
-          <a:xfrm>
-            <a:off x="1371600" y="1645920"/>
-            <a:ext cx="4206240" cy="2103120"/>
-          </a:xfrm>
-          <a:prstGeom prst="rect">
-            <a:avLst/>
-          </a:prstGeom>
-          <a:noFill/>
-        </p:spPr>
-        <p:txBody>
-          <a:bodyPr wrap="square">
-            <a:spAutoFit/>
-          </a:bodyPr>
-          <a:lstStyle/>
-          <a:p>
-            <a:pPr algn="l">
-              <a:defRPr sz="2000" b="1">
-                <a:solidFill>
-                  <a:srgbClr val="1A56DB"/>
-                </a:solidFill>
-                <a:latin typeface="Palatino Linotype"/>
-              </a:defRPr>
-            </a:pPr>
-            <a:r>
-              <a:t>Splitwise (ISCA 2024)</a:t>
-            </a:r>
-          </a:p>
-          <a:p>
-            <a:pPr>
-              <a:spcBef>
-                <a:spcPts val="800"/>
-              </a:spcBef>
-              <a:defRPr sz="1500" b="0">
-                <a:solidFill>
-                  <a:srgbClr val="333333"/>
-                </a:solidFill>
-                <a:latin typeface="Palatino Linotype"/>
-              </a:defRPr>
-            </a:pPr>
-            <a:r>
-              <a:t>Production workload characterization</a:t>
-            </a:r>
-          </a:p>
-          <a:p>
-            <a:pPr>
-              <a:spcBef>
-                <a:spcPts val="600"/>
-              </a:spcBef>
-              <a:defRPr sz="1500" b="0">
-                <a:solidFill>
-                  <a:srgbClr val="333333"/>
-                </a:solidFill>
-                <a:latin typeface="Palatino Linotype"/>
-              </a:defRPr>
-            </a:pPr>
-            <a:r>
-              <a:t>Heterogeneous hardware per phase</a:t>
-            </a:r>
-          </a:p>
-          <a:p>
-            <a:pPr>
-              <a:spcBef>
-                <a:spcPts val="600"/>
-              </a:spcBef>
-              <a:defRPr sz="1500" b="1">
-                <a:solidFill>
-                  <a:srgbClr val="1E8A4C"/>
-                </a:solidFill>
-                <a:latin typeface="Palatino Linotype"/>
-              </a:defRPr>
-            </a:pPr>
-            <a:r>
-              <a:t>1.4x throughput at 20% lower cost</a:t>
-            </a:r>
-          </a:p>
-          <a:p>
-            <a:pPr>
-              <a:spcBef>
-                <a:spcPts val="600"/>
-              </a:spcBef>
-              <a:defRPr sz="1500" b="1">
-                <a:solidFill>
-                  <a:srgbClr val="1E8A4C"/>
-                </a:solidFill>
-                <a:latin typeface="Palatino Linotype"/>
-              </a:defRPr>
-            </a:pPr>
-            <a:r>
-              <a:t>or 2.35x throughput, same budget</a:t>
-            </a:r>
-          </a:p>
-        </p:txBody>
-      </p:sp>
-      <p:sp>
-        <p:nvSpPr>
-          <p:cNvPr id="5" name="Rectangle 4"/>
-          <p:cNvSpPr/>
-          <p:nvPr/>
-        </p:nvSpPr>
-        <p:spPr>
-          <a:xfrm>
-            <a:off x="6309360" y="1554480"/>
-            <a:ext cx="4754880" cy="2286000"/>
-          </a:xfrm>
-          <a:prstGeom prst="rect">
-            <a:avLst/>
-          </a:prstGeom>
-          <a:solidFill>
-            <a:srgbClr val="E8F5F0"/>
-          </a:solidFill>
-          <a:ln>
-            <a:noFill/>
-          </a:ln>
-        </p:spPr>
-        <p:style>
-          <a:lnRef idx="1">
-            <a:schemeClr val="accent1"/>
-          </a:lnRef>
-          <a:fillRef idx="3">
-            <a:schemeClr val="accent1"/>
-          </a:fillRef>
-          <a:effectRef idx="2">
-            <a:schemeClr val="accent1"/>
-          </a:effectRef>
-          <a:fontRef idx="minor">
-            <a:schemeClr val="lt1"/>
-          </a:fontRef>
-        </p:style>
-        <p:txBody>
-          <a:bodyPr rtlCol="0" anchor="ctr"/>
-          <a:lstStyle/>
-          <a:p>
-            <a:pPr algn="ctr"/>
-          </a:p>
-        </p:txBody>
-      </p:sp>
-      <p:sp>
-        <p:nvSpPr>
-          <p:cNvPr id="6" name="TextBox 5"/>
-          <p:cNvSpPr txBox="1"/>
-          <p:nvPr/>
-        </p:nvSpPr>
-        <p:spPr>
-          <a:xfrm>
-            <a:off x="6583680" y="1645920"/>
-            <a:ext cx="4206240" cy="2103120"/>
-          </a:xfrm>
-          <a:prstGeom prst="rect">
-            <a:avLst/>
-          </a:prstGeom>
-          <a:noFill/>
-        </p:spPr>
-        <p:txBody>
-          <a:bodyPr wrap="square">
-            <a:spAutoFit/>
-          </a:bodyPr>
-          <a:lstStyle/>
-          <a:p>
-            <a:pPr algn="l">
-              <a:defRPr sz="2000" b="1">
-                <a:solidFill>
-                  <a:srgbClr val="0E6E6E"/>
-                </a:solidFill>
-                <a:latin typeface="Palatino Linotype"/>
-              </a:defRPr>
-            </a:pPr>
-            <a:r>
-              <a:t>DistServe (OSDI 2024)</a:t>
-            </a:r>
-          </a:p>
-          <a:p>
-            <a:pPr>
-              <a:spcBef>
-                <a:spcPts val="800"/>
-              </a:spcBef>
-              <a:defRPr sz="1500" b="0">
-                <a:solidFill>
-                  <a:srgbClr val="333333"/>
-                </a:solidFill>
-                <a:latin typeface="Palatino Linotype"/>
-              </a:defRPr>
-            </a:pPr>
-            <a:r>
-              <a:t>Goodput-optimal placement</a:t>
-            </a:r>
-          </a:p>
-          <a:p>
-            <a:pPr>
-              <a:spcBef>
-                <a:spcPts val="600"/>
-              </a:spcBef>
-              <a:defRPr sz="1500" b="0">
-                <a:solidFill>
-                  <a:srgbClr val="333333"/>
-                </a:solidFill>
-                <a:latin typeface="Palatino Linotype"/>
-              </a:defRPr>
-            </a:pPr>
-            <a:r>
-              <a:t>Automatic parallelism optimization</a:t>
-            </a:r>
-          </a:p>
-          <a:p>
-            <a:pPr>
-              <a:spcBef>
-                <a:spcPts val="600"/>
-              </a:spcBef>
-              <a:defRPr sz="1500" b="1">
-                <a:solidFill>
-                  <a:srgbClr val="1E8A4C"/>
-                </a:solidFill>
-                <a:latin typeface="Palatino Linotype"/>
-              </a:defRPr>
-            </a:pPr>
-            <a:r>
-              <a:t>Up to 7.4x higher request rate</a:t>
-            </a:r>
-          </a:p>
-          <a:p>
-            <a:pPr>
-              <a:spcBef>
-                <a:spcPts val="600"/>
-              </a:spcBef>
-              <a:defRPr sz="1500" b="1">
-                <a:solidFill>
-                  <a:srgbClr val="1E8A4C"/>
-                </a:solidFill>
-                <a:latin typeface="Palatino Linotype"/>
-              </a:defRPr>
-            </a:pPr>
-            <a:r>
-              <a:t>Up to 12.6x tighter SLO</a:t>
-            </a:r>
-          </a:p>
-        </p:txBody>
-      </p:sp>
-      <p:sp>
-        <p:nvSpPr>
-          <p:cNvPr id="7" name="Rectangle 6"/>
-          <p:cNvSpPr/>
-          <p:nvPr/>
-        </p:nvSpPr>
-        <p:spPr>
-          <a:xfrm>
-            <a:off x="1097280" y="4206240"/>
-            <a:ext cx="10058400" cy="1097280"/>
-          </a:xfrm>
-          <a:prstGeom prst="rect">
-            <a:avLst/>
-          </a:prstGeom>
-          <a:solidFill>
-            <a:srgbClr val="F8F9FA"/>
-          </a:solidFill>
-          <a:ln>
-            <a:noFill/>
-          </a:ln>
-        </p:spPr>
-        <p:style>
-          <a:lnRef idx="1">
-            <a:schemeClr val="accent1"/>
-          </a:lnRef>
-          <a:fillRef idx="3">
-            <a:schemeClr val="accent1"/>
-          </a:fillRef>
-          <a:effectRef idx="2">
-            <a:schemeClr val="accent1"/>
-          </a:effectRef>
-          <a:fontRef idx="minor">
-            <a:schemeClr val="lt1"/>
-          </a:fontRef>
-        </p:style>
-        <p:txBody>
-          <a:bodyPr rtlCol="0" anchor="ctr"/>
-          <a:lstStyle/>
-          <a:p>
-            <a:pPr algn="ctr"/>
-          </a:p>
-        </p:txBody>
-      </p:sp>
-      <p:sp>
-        <p:nvSpPr>
-          <p:cNvPr id="8" name="TextBox 7"/>
-          <p:cNvSpPr txBox="1"/>
-          <p:nvPr/>
-        </p:nvSpPr>
-        <p:spPr>
-          <a:xfrm>
-            <a:off x="1371600" y="4297680"/>
-            <a:ext cx="9418320" cy="914400"/>
-          </a:xfrm>
-          <a:prstGeom prst="rect">
-            <a:avLst/>
-          </a:prstGeom>
-          <a:noFill/>
-        </p:spPr>
-        <p:txBody>
-          <a:bodyPr wrap="square">
-            <a:spAutoFit/>
-          </a:bodyPr>
-          <a:lstStyle/>
-          <a:p>
-            <a:pPr algn="ctr">
-              <a:defRPr sz="2000" b="0">
-                <a:solidFill>
-                  <a:srgbClr val="1A1A1A"/>
-                </a:solidFill>
-                <a:latin typeface="Palatino Linotype"/>
-              </a:defRPr>
-            </a:pPr>
-            <a:r>
-              <a:t>Prefill and decoding are different workloads.</a:t>
-            </a:r>
-          </a:p>
-          <a:p>
-            <a:pPr algn="ctr">
-              <a:spcBef>
-                <a:spcPts val="400"/>
-              </a:spcBef>
-              <a:defRPr sz="2000" b="1">
-                <a:solidFill>
-                  <a:srgbClr val="1A56DB"/>
-                </a:solidFill>
-                <a:latin typeface="Palatino Linotype"/>
-              </a:defRPr>
-            </a:pPr>
-            <a:r>
-              <a:t>Treating them as one wastes hardware, power, and money.</a:t>
-            </a:r>
-          </a:p>
-        </p:txBody>
-      </p:sp>
-      <p:sp>
-        <p:nvSpPr>
-          <p:cNvPr id="9" name="TextBox 8"/>
-          <p:cNvSpPr txBox="1"/>
-          <p:nvPr/>
-        </p:nvSpPr>
-        <p:spPr>
-          <a:xfrm>
-            <a:off x="11338560" y="6446520"/>
-            <a:ext cx="640080" cy="320040"/>
-          </a:xfrm>
-          <a:prstGeom prst="rect">
-            <a:avLst/>
-          </a:prstGeom>
-          <a:noFill/>
-        </p:spPr>
-        <p:txBody>
-          <a:bodyPr wrap="square">
-            <a:spAutoFit/>
-          </a:bodyPr>
-          <a:lstStyle/>
-          <a:p>
-            <a:pPr algn="r">
-              <a:defRPr sz="1000" b="0">
-                <a:solidFill>
-                  <a:srgbClr val="AAAAAA"/>
-                </a:solidFill>
-                <a:latin typeface="Palatino Linotype"/>
-              </a:defRPr>
-            </a:pPr>
-            <a:r>
-              <a:t>30</a:t>
-            </a:r>
-          </a:p>
-        </p:txBody>
-      </p:sp>
-    </p:spTree>
-  </p:cSld>
-  <p:clrMapOvr>
-    <a:masterClrMapping/>
-  </p:clrMapOvr>
-</p:sld>
-</file>
-
-<file path=ppt/slides/slide31.xml><?xml version="1.0" encoding="utf-8"?>
-<p:sld xmlns:a="http://schemas.openxmlformats.org/drawingml/2006/main" xmlns:p="http://schemas.openxmlformats.org/presentationml/2006/main" xmlns:r="http://schemas.openxmlformats.org/officeDocument/2006/relationships">
-  <p:cSld>
-    <p:bg>
-      <p:bgPr>
-        <a:solidFill>
-          <a:srgbClr val="FFFFFF"/>
-        </a:solidFill>
-        <a:effectLst/>
-      </p:bgPr>
-    </p:bg>
-    <p:spTree>
-      <p:nvGrpSpPr>
-        <p:cNvPr id="1" name=""/>
-        <p:cNvGrpSpPr/>
-        <p:nvPr/>
-      </p:nvGrpSpPr>
-      <p:grpSpPr/>
-      <p:sp>
-        <p:nvSpPr>
-          <p:cNvPr id="2" name="TextBox 1"/>
-          <p:cNvSpPr txBox="1"/>
-          <p:nvPr/>
-        </p:nvSpPr>
-        <p:spPr>
-          <a:xfrm>
-            <a:off x="1097280" y="457200"/>
-            <a:ext cx="10058400" cy="640080"/>
-          </a:xfrm>
-          <a:prstGeom prst="rect">
-            <a:avLst/>
-          </a:prstGeom>
-          <a:noFill/>
-        </p:spPr>
-        <p:txBody>
-          <a:bodyPr wrap="square">
-            <a:spAutoFit/>
-          </a:bodyPr>
-          <a:lstStyle/>
-          <a:p>
-            <a:pPr algn="l">
-              <a:defRPr sz="3400" b="1">
-                <a:solidFill>
-                  <a:srgbClr val="1A1A1A"/>
-                </a:solidFill>
-                <a:latin typeface="Palatino Linotype"/>
-              </a:defRPr>
-            </a:pPr>
-            <a:r>
-              <a:t>References</a:t>
-            </a:r>
-          </a:p>
-        </p:txBody>
-      </p:sp>
-      <p:sp>
-        <p:nvSpPr>
-          <p:cNvPr id="3" name="TextBox 2"/>
-          <p:cNvSpPr txBox="1"/>
-          <p:nvPr/>
-        </p:nvSpPr>
-        <p:spPr>
-          <a:xfrm>
-            <a:off x="1097280" y="1371600"/>
-            <a:ext cx="9601200" cy="5029200"/>
-          </a:xfrm>
-          <a:prstGeom prst="rect">
-            <a:avLst/>
-          </a:prstGeom>
-          <a:noFill/>
-        </p:spPr>
-        <p:txBody>
-          <a:bodyPr wrap="square">
-            <a:spAutoFit/>
-          </a:bodyPr>
-          <a:lstStyle/>
-          <a:p>
-            <a:pPr algn="l">
-              <a:defRPr sz="1300" b="0">
-                <a:solidFill>
-                  <a:srgbClr val="333333"/>
-                </a:solidFill>
-                <a:latin typeface="Palatino Linotype"/>
-              </a:defRPr>
-            </a:pPr>
-            <a:r>
-              <a:t>[1]  P. Patel, E. Choukse, C. Zhang, A. Shah, I. Goiri, S. Maleki, R. Bianchini.</a:t>
-            </a:r>
-          </a:p>
-          <a:p>
-            <a:pPr algn="l">
-              <a:spcBef>
-                <a:spcPts val="100"/>
-              </a:spcBef>
-              <a:defRPr sz="1300" b="0">
-                <a:solidFill>
-                  <a:srgbClr val="333333"/>
-                </a:solidFill>
-                <a:latin typeface="Palatino Linotype"/>
-              </a:defRPr>
-            </a:pPr>
-            <a:r>
-              <a:t>     "Splitwise: Efficient Generative LLM Inference Using Phase Splitting."</a:t>
-            </a:r>
-          </a:p>
-          <a:p>
-            <a:pPr algn="l">
-              <a:spcBef>
-                <a:spcPts val="100"/>
-              </a:spcBef>
-              <a:defRPr sz="1300" b="0">
-                <a:solidFill>
-                  <a:srgbClr val="333333"/>
-                </a:solidFill>
-                <a:latin typeface="Palatino Linotype"/>
-              </a:defRPr>
-            </a:pPr>
-            <a:r>
-              <a:t>     ISCA 2024. arXiv:2311.18677</a:t>
-            </a:r>
-          </a:p>
-          <a:p>
-            <a:pPr algn="l">
-              <a:spcBef>
-                <a:spcPts val="100"/>
-              </a:spcBef>
-              <a:defRPr sz="1300" b="0">
-                <a:solidFill>
-                  <a:srgbClr val="333333"/>
-                </a:solidFill>
-                <a:latin typeface="Palatino Linotype"/>
-              </a:defRPr>
-            </a:pPr>
-          </a:p>
-          <a:p>
-            <a:pPr algn="l">
-              <a:spcBef>
-                <a:spcPts val="100"/>
-              </a:spcBef>
-              <a:defRPr sz="1300" b="0">
-                <a:solidFill>
-                  <a:srgbClr val="333333"/>
-                </a:solidFill>
-                <a:latin typeface="Palatino Linotype"/>
-              </a:defRPr>
-            </a:pPr>
-            <a:r>
-              <a:t>[2]  Y. Zhong, S. Liu, J. Chen, J. Hu, Y. Zhu, X. Liu, X. Jin, H. Zhang.</a:t>
-            </a:r>
-          </a:p>
-          <a:p>
-            <a:pPr algn="l">
-              <a:spcBef>
-                <a:spcPts val="100"/>
-              </a:spcBef>
-              <a:defRPr sz="1300" b="0">
-                <a:solidFill>
-                  <a:srgbClr val="333333"/>
-                </a:solidFill>
-                <a:latin typeface="Palatino Linotype"/>
-              </a:defRPr>
-            </a:pPr>
-            <a:r>
-              <a:t>     "DistServe: Disaggregating Prefill and Decoding for Goodput-optimized</a:t>
-            </a:r>
-          </a:p>
-          <a:p>
-            <a:pPr algn="l">
-              <a:spcBef>
-                <a:spcPts val="100"/>
-              </a:spcBef>
-              <a:defRPr sz="1300" b="0">
-                <a:solidFill>
-                  <a:srgbClr val="333333"/>
-                </a:solidFill>
-                <a:latin typeface="Palatino Linotype"/>
-              </a:defRPr>
-            </a:pPr>
-            <a:r>
-              <a:t>     Large Language Model Serving."  OSDI 2024. arXiv:2401.09670</a:t>
-            </a:r>
-          </a:p>
-          <a:p>
-            <a:pPr algn="l">
-              <a:spcBef>
-                <a:spcPts val="100"/>
-              </a:spcBef>
-              <a:defRPr sz="1300" b="0">
-                <a:solidFill>
-                  <a:srgbClr val="333333"/>
-                </a:solidFill>
-                <a:latin typeface="Palatino Linotype"/>
-              </a:defRPr>
-            </a:pPr>
-          </a:p>
-          <a:p>
-            <a:pPr algn="l">
-              <a:spcBef>
-                <a:spcPts val="100"/>
-              </a:spcBef>
-              <a:defRPr sz="1300" b="0">
-                <a:solidFill>
-                  <a:srgbClr val="333333"/>
-                </a:solidFill>
-                <a:latin typeface="Palatino Linotype"/>
-              </a:defRPr>
-            </a:pPr>
-            <a:r>
-              <a:t>[3]  A. Agrawal et al. Sarathi: Efficient LLM Inference by Piggybacking Decodes</a:t>
-            </a:r>
-          </a:p>
-          <a:p>
-            <a:pPr algn="l">
-              <a:spcBef>
-                <a:spcPts val="100"/>
-              </a:spcBef>
-              <a:defRPr sz="1300" b="0">
-                <a:solidFill>
-                  <a:srgbClr val="333333"/>
-                </a:solidFill>
-                <a:latin typeface="Palatino Linotype"/>
-              </a:defRPr>
-            </a:pPr>
-            <a:r>
-              <a:t>     with Chunked Prefills. arXiv:2308.16369, 2023.</a:t>
-            </a:r>
-          </a:p>
-          <a:p>
-            <a:pPr algn="l">
-              <a:spcBef>
-                <a:spcPts val="100"/>
-              </a:spcBef>
-              <a:defRPr sz="1300" b="0">
-                <a:solidFill>
-                  <a:srgbClr val="333333"/>
-                </a:solidFill>
-                <a:latin typeface="Palatino Linotype"/>
-              </a:defRPr>
-            </a:pPr>
-          </a:p>
-          <a:p>
-            <a:pPr algn="l">
-              <a:spcBef>
-                <a:spcPts val="100"/>
-              </a:spcBef>
-              <a:defRPr sz="1300" b="0">
-                <a:solidFill>
-                  <a:srgbClr val="333333"/>
-                </a:solidFill>
-                <a:latin typeface="Palatino Linotype"/>
-              </a:defRPr>
-            </a:pPr>
-            <a:r>
-              <a:t>[4]  W. Kwon et al. Efficient Memory Management for Large Language Model Serving</a:t>
-            </a:r>
-          </a:p>
-          <a:p>
-            <a:pPr algn="l">
-              <a:spcBef>
-                <a:spcPts val="100"/>
-              </a:spcBef>
-              <a:defRPr sz="1300" b="0">
-                <a:solidFill>
-                  <a:srgbClr val="333333"/>
-                </a:solidFill>
-                <a:latin typeface="Palatino Linotype"/>
-              </a:defRPr>
-            </a:pPr>
-            <a:r>
-              <a:t>     with PagedAttention (vLLM). SOSP 2023.</a:t>
-            </a:r>
-          </a:p>
-          <a:p>
-            <a:pPr algn="l">
-              <a:spcBef>
-                <a:spcPts val="100"/>
-              </a:spcBef>
-              <a:defRPr sz="1300" b="0">
-                <a:solidFill>
-                  <a:srgbClr val="333333"/>
-                </a:solidFill>
-                <a:latin typeface="Palatino Linotype"/>
-              </a:defRPr>
-            </a:pPr>
-          </a:p>
-          <a:p>
-            <a:pPr algn="l">
-              <a:spcBef>
-                <a:spcPts val="100"/>
-              </a:spcBef>
-              <a:defRPr sz="1300" b="0">
-                <a:solidFill>
-                  <a:srgbClr val="333333"/>
-                </a:solidFill>
-                <a:latin typeface="Palatino Linotype"/>
-              </a:defRPr>
-            </a:pPr>
-            <a:r>
-              <a:t>[5]  Y. Sheng et al. FlexGen: High-Throughput Generative Inference of Large Language</a:t>
-            </a:r>
-          </a:p>
-          <a:p>
-            <a:pPr algn="l">
-              <a:spcBef>
-                <a:spcPts val="100"/>
-              </a:spcBef>
-              <a:defRPr sz="1300" b="0">
-                <a:solidFill>
-                  <a:srgbClr val="333333"/>
-                </a:solidFill>
-                <a:latin typeface="Palatino Linotype"/>
-              </a:defRPr>
-            </a:pPr>
-            <a:r>
-              <a:t>     Models with a Single GPU. ICML 2023.</a:t>
-            </a:r>
-          </a:p>
-        </p:txBody>
-      </p:sp>
-      <p:sp>
-        <p:nvSpPr>
-          <p:cNvPr id="4" name="TextBox 3"/>
-          <p:cNvSpPr txBox="1"/>
-          <p:nvPr/>
-        </p:nvSpPr>
-        <p:spPr>
-          <a:xfrm>
-            <a:off x="11338560" y="6446520"/>
-            <a:ext cx="640080" cy="320040"/>
-          </a:xfrm>
-          <a:prstGeom prst="rect">
-            <a:avLst/>
-          </a:prstGeom>
-          <a:noFill/>
-        </p:spPr>
-        <p:txBody>
-          <a:bodyPr wrap="square">
-            <a:spAutoFit/>
-          </a:bodyPr>
-          <a:lstStyle/>
-          <a:p>
-            <a:pPr algn="r">
-              <a:defRPr sz="1000" b="0">
-                <a:solidFill>
-                  <a:srgbClr val="AAAAAA"/>
-                </a:solidFill>
-                <a:latin typeface="Palatino Linotype"/>
-              </a:defRPr>
-            </a:pPr>
-            <a:r>
-              <a:t>31</a:t>
-            </a:r>
-          </a:p>
-        </p:txBody>
-      </p:sp>
-    </p:spTree>
-  </p:cSld>
-  <p:clrMapOvr>
-    <a:masterClrMapping/>
-  </p:clrMapOvr>
-</p:sld>
-</file>
-
-<file path=ppt/slides/slide32.xml><?xml version="1.0" encoding="utf-8"?>
-<p:sld xmlns:a="http://schemas.openxmlformats.org/drawingml/2006/main" xmlns:p="http://schemas.openxmlformats.org/presentationml/2006/main" xmlns:r="http://schemas.openxmlformats.org/officeDocument/2006/relationships">
-  <p:cSld>
-    <p:bg>
-      <p:bgPr>
-        <a:solidFill>
-          <a:srgbClr val="0F172A"/>
-        </a:solidFill>
-        <a:effectLst/>
-      </p:bgPr>
-    </p:bg>
-    <p:spTree>
-      <p:nvGrpSpPr>
-        <p:cNvPr id="1" name=""/>
-        <p:cNvGrpSpPr/>
-        <p:nvPr/>
-      </p:nvGrpSpPr>
-      <p:grpSpPr/>
-      <p:sp>
-        <p:nvSpPr>
-          <p:cNvPr id="2" name="Rectangle 1"/>
-          <p:cNvSpPr/>
-          <p:nvPr/>
-        </p:nvSpPr>
-        <p:spPr>
-          <a:xfrm>
-            <a:off x="0" y="2926080"/>
-            <a:ext cx="12191695" cy="25400"/>
-          </a:xfrm>
-          <a:prstGeom prst="rect">
-            <a:avLst/>
-          </a:prstGeom>
-          <a:solidFill>
-            <a:srgbClr val="1A56DB"/>
-          </a:solidFill>
-          <a:ln>
-            <a:noFill/>
-          </a:ln>
-        </p:spPr>
-        <p:style>
-          <a:lnRef idx="1">
-            <a:schemeClr val="accent1"/>
-          </a:lnRef>
-          <a:fillRef idx="3">
-            <a:schemeClr val="accent1"/>
-          </a:fillRef>
-          <a:effectRef idx="2">
-            <a:schemeClr val="accent1"/>
-          </a:effectRef>
-          <a:fontRef idx="minor">
-            <a:schemeClr val="lt1"/>
-          </a:fontRef>
-        </p:style>
-        <p:txBody>
-          <a:bodyPr rtlCol="0" anchor="ctr"/>
-          <a:lstStyle/>
-          <a:p>
-            <a:pPr algn="ctr"/>
-          </a:p>
-        </p:txBody>
-      </p:sp>
-      <p:sp>
-        <p:nvSpPr>
-          <p:cNvPr id="3" name="TextBox 2"/>
-          <p:cNvSpPr txBox="1"/>
-          <p:nvPr/>
-        </p:nvSpPr>
-        <p:spPr>
-          <a:xfrm>
-            <a:off x="1097280" y="1645920"/>
-            <a:ext cx="10058400" cy="914400"/>
-          </a:xfrm>
-          <a:prstGeom prst="rect">
-            <a:avLst/>
-          </a:prstGeom>
-          <a:noFill/>
-        </p:spPr>
-        <p:txBody>
-          <a:bodyPr wrap="square">
-            <a:spAutoFit/>
-          </a:bodyPr>
-          <a:lstStyle/>
-          <a:p>
-            <a:pPr algn="l">
-              <a:defRPr sz="4800" b="1">
-                <a:solidFill>
-                  <a:srgbClr val="FFFFFF"/>
-                </a:solidFill>
-                <a:latin typeface="Palatino Linotype"/>
-              </a:defRPr>
-            </a:pPr>
-            <a:r>
-              <a:t>Thank You</a:t>
-            </a:r>
-          </a:p>
-        </p:txBody>
-      </p:sp>
-      <p:sp>
-        <p:nvSpPr>
-          <p:cNvPr id="4" name="TextBox 3"/>
-          <p:cNvSpPr txBox="1"/>
-          <p:nvPr/>
-        </p:nvSpPr>
-        <p:spPr>
-          <a:xfrm>
-            <a:off x="1097280" y="3291840"/>
-            <a:ext cx="10058400" cy="640080"/>
-          </a:xfrm>
-          <a:prstGeom prst="rect">
-            <a:avLst/>
-          </a:prstGeom>
-          <a:noFill/>
-        </p:spPr>
-        <p:txBody>
-          <a:bodyPr wrap="square">
-            <a:spAutoFit/>
-          </a:bodyPr>
-          <a:lstStyle/>
-          <a:p>
-            <a:pPr algn="l">
-              <a:defRPr sz="3200" b="0">
-                <a:solidFill>
-                  <a:srgbClr val="88AADD"/>
-                </a:solidFill>
-                <a:latin typeface="Palatino Linotype"/>
-              </a:defRPr>
-            </a:pPr>
-            <a:r>
-              <a:t>Questions?</a:t>
-            </a:r>
-          </a:p>
-        </p:txBody>
-      </p:sp>
-      <p:sp>
-        <p:nvSpPr>
-          <p:cNvPr id="5" name="TextBox 4"/>
-          <p:cNvSpPr txBox="1"/>
-          <p:nvPr/>
-        </p:nvSpPr>
-        <p:spPr>
-          <a:xfrm>
-            <a:off x="1097280" y="4389120"/>
-            <a:ext cx="10058400" cy="1828800"/>
-          </a:xfrm>
-          <a:prstGeom prst="rect">
-            <a:avLst/>
-          </a:prstGeom>
-          <a:noFill/>
-        </p:spPr>
-        <p:txBody>
-          <a:bodyPr wrap="square">
-            <a:spAutoFit/>
-          </a:bodyPr>
-          <a:lstStyle/>
-          <a:p>
-            <a:pPr algn="l">
-              <a:defRPr sz="1600" b="0">
-                <a:solidFill>
-                  <a:srgbClr val="AAAAAA"/>
-                </a:solidFill>
-                <a:latin typeface="Palatino Linotype"/>
-              </a:defRPr>
-            </a:pPr>
-            <a:r>
-              <a:t>Splitwise: arXiv:2311.18677 (ISCA 2024)</a:t>
-            </a:r>
-          </a:p>
-          <a:p>
-            <a:pPr algn="l">
-              <a:spcBef>
-                <a:spcPts val="400"/>
-              </a:spcBef>
-              <a:defRPr sz="1600" b="0">
-                <a:solidFill>
-                  <a:srgbClr val="AAAAAA"/>
-                </a:solidFill>
-                <a:latin typeface="Palatino Linotype"/>
-              </a:defRPr>
-            </a:pPr>
-            <a:r>
-              <a:t>DistServe: arXiv:2401.09670 (OSDI 2024)</a:t>
-            </a:r>
-          </a:p>
-          <a:p>
-            <a:pPr algn="l">
-              <a:spcBef>
-                <a:spcPts val="1600"/>
-              </a:spcBef>
-              <a:defRPr sz="1000" b="0">
-                <a:solidFill>
-                  <a:srgbClr val="AAAAAA"/>
-                </a:solidFill>
-                <a:latin typeface="Palatino Linotype"/>
-              </a:defRPr>
-            </a:pPr>
-          </a:p>
-          <a:p>
-            <a:pPr algn="l">
-              <a:spcBef>
-                <a:spcPts val="400"/>
-              </a:spcBef>
-              <a:defRPr sz="2000" b="1">
-                <a:solidFill>
-                  <a:srgbClr val="FFFFFF"/>
-                </a:solidFill>
-                <a:latin typeface="Palatino Linotype"/>
-              </a:defRPr>
-            </a:pPr>
-            <a:r>
-              <a:t>Berat Celik  &amp;  Jiayang (Ethan) Chen</a:t>
-            </a:r>
-          </a:p>
-          <a:p>
-            <a:pPr algn="l">
-              <a:spcBef>
-                <a:spcPts val="400"/>
-              </a:spcBef>
-              <a:defRPr sz="1600" b="0">
-                <a:solidFill>
-                  <a:srgbClr val="AAAAAA"/>
-                </a:solidFill>
-                <a:latin typeface="Palatino Linotype"/>
-              </a:defRPr>
-            </a:pPr>
-            <a:r>
-              <a:t>ECE 5545  |  Spring 2026</a:t>
-            </a:r>
-          </a:p>
-        </p:txBody>
-      </p:sp>
-      <p:sp>
-        <p:nvSpPr>
-          <p:cNvPr id="6" name="TextBox 5"/>
-          <p:cNvSpPr txBox="1"/>
-          <p:nvPr/>
-        </p:nvSpPr>
-        <p:spPr>
-          <a:xfrm>
-            <a:off x="11338560" y="6446520"/>
-            <a:ext cx="640080" cy="320040"/>
-          </a:xfrm>
-          <a:prstGeom prst="rect">
-            <a:avLst/>
-          </a:prstGeom>
-          <a:noFill/>
-        </p:spPr>
-        <p:txBody>
-          <a:bodyPr wrap="square">
-            <a:spAutoFit/>
-          </a:bodyPr>
-          <a:lstStyle/>
-          <a:p>
-            <a:pPr algn="r">
-              <a:defRPr sz="1000" b="0">
-                <a:solidFill>
-                  <a:srgbClr val="556688"/>
-                </a:solidFill>
-                <a:latin typeface="Palatino Linotype"/>
-              </a:defRPr>
-            </a:pPr>
-            <a:r>
-              <a:t>32</a:t>
-            </a:r>
-          </a:p>
-        </p:txBody>
-      </p:sp>
-    </p:spTree>
-  </p:cSld>
-  <p:clrMapOvr>
-    <a:masterClrMapping/>
-  </p:clrMapOvr>
-</p:sld>
-</file>
-
-<file path=ppt/slides/slide4.xml><?xml version="1.0" encoding="utf-8"?>
-<p:sld xmlns:a="http://schemas.openxmlformats.org/drawingml/2006/main" xmlns:p="http://schemas.openxmlformats.org/presentationml/2006/main" xmlns:r="http://schemas.openxmlformats.org/officeDocument/2006/relationships">
-  <p:cSld>
-    <p:bg>
-      <p:bgPr>
-        <a:solidFill>
-          <a:srgbClr val="FFFFFF"/>
-        </a:solidFill>
-        <a:effectLst/>
-      </p:bgPr>
-    </p:bg>
-    <p:spTree>
-      <p:nvGrpSpPr>
-        <p:cNvPr id="1" name=""/>
-        <p:cNvGrpSpPr/>
-        <p:nvPr/>
-      </p:nvGrpSpPr>
-      <p:grpSpPr/>
+      <p:grpSpPr>
+        <a:xfrm>
+          <a:off x="0" y="0"/>
+          <a:ext cx="0" cy="0"/>
+          <a:chOff x="0" y="0"/>
+          <a:chExt cx="0" cy="0"/>
+        </a:xfrm>
+      </p:grpSpPr>
       <p:sp>
         <p:nvSpPr>
           <p:cNvPr id="2" name="TextBox 1"/>
@@ -14037,9 +15114,27 @@
                 <a:tableStyleId>{5C22544A-7EE6-4342-B048-85BDC9FD1C3A}</a:tableStyleId>
               </a:tblPr>
               <a:tblGrid>
-                <a:gridCol w="3139440"/>
-                <a:gridCol w="3139440"/>
-                <a:gridCol w="3139440"/>
+                <a:gridCol w="3139440">
+                  <a:extLst>
+                    <a:ext uri="{9D8B030D-6E8A-4147-A177-3AD203B41FA5}">
+                      <a16:colId xmlns:a16="http://schemas.microsoft.com/office/drawing/2014/main" val="20000"/>
+                    </a:ext>
+                  </a:extLst>
+                </a:gridCol>
+                <a:gridCol w="3139440">
+                  <a:extLst>
+                    <a:ext uri="{9D8B030D-6E8A-4147-A177-3AD203B41FA5}">
+                      <a16:colId xmlns:a16="http://schemas.microsoft.com/office/drawing/2014/main" val="20001"/>
+                    </a:ext>
+                  </a:extLst>
+                </a:gridCol>
+                <a:gridCol w="3139440">
+                  <a:extLst>
+                    <a:ext uri="{9D8B030D-6E8A-4147-A177-3AD203B41FA5}">
+                      <a16:colId xmlns:a16="http://schemas.microsoft.com/office/drawing/2014/main" val="20002"/>
+                    </a:ext>
+                  </a:extLst>
+                </a:gridCol>
               </a:tblGrid>
               <a:tr h="496388">
                 <a:tc>
@@ -14114,6 +15209,11 @@
                     </a:solidFill>
                   </a:tcPr>
                 </a:tc>
+                <a:extLst>
+                  <a:ext uri="{0D108BD9-81ED-4DB2-BD59-A6C34878D82A}">
+                    <a16:rowId xmlns:a16="http://schemas.microsoft.com/office/drawing/2014/main" val="10000"/>
+                  </a:ext>
+                </a:extLst>
               </a:tr>
               <a:tr h="496388">
                 <a:tc>
@@ -14188,6 +15288,11 @@
                     </a:solidFill>
                   </a:tcPr>
                 </a:tc>
+                <a:extLst>
+                  <a:ext uri="{0D108BD9-81ED-4DB2-BD59-A6C34878D82A}">
+                    <a16:rowId xmlns:a16="http://schemas.microsoft.com/office/drawing/2014/main" val="10001"/>
+                  </a:ext>
+                </a:extLst>
               </a:tr>
               <a:tr h="496388">
                 <a:tc>
@@ -14262,6 +15367,11 @@
                     </a:solidFill>
                   </a:tcPr>
                 </a:tc>
+                <a:extLst>
+                  <a:ext uri="{0D108BD9-81ED-4DB2-BD59-A6C34878D82A}">
+                    <a16:rowId xmlns:a16="http://schemas.microsoft.com/office/drawing/2014/main" val="10002"/>
+                  </a:ext>
+                </a:extLst>
               </a:tr>
               <a:tr h="496388">
                 <a:tc>
@@ -14336,6 +15446,11 @@
                     </a:solidFill>
                   </a:tcPr>
                 </a:tc>
+                <a:extLst>
+                  <a:ext uri="{0D108BD9-81ED-4DB2-BD59-A6C34878D82A}">
+                    <a16:rowId xmlns:a16="http://schemas.microsoft.com/office/drawing/2014/main" val="10003"/>
+                  </a:ext>
+                </a:extLst>
               </a:tr>
               <a:tr h="496388">
                 <a:tc>
@@ -14410,6 +15525,11 @@
                     </a:solidFill>
                   </a:tcPr>
                 </a:tc>
+                <a:extLst>
+                  <a:ext uri="{0D108BD9-81ED-4DB2-BD59-A6C34878D82A}">
+                    <a16:rowId xmlns:a16="http://schemas.microsoft.com/office/drawing/2014/main" val="10004"/>
+                  </a:ext>
+                </a:extLst>
               </a:tr>
               <a:tr h="496388">
                 <a:tc>
@@ -14484,6 +15604,11 @@
                     </a:solidFill>
                   </a:tcPr>
                 </a:tc>
+                <a:extLst>
+                  <a:ext uri="{0D108BD9-81ED-4DB2-BD59-A6C34878D82A}">
+                    <a16:rowId xmlns:a16="http://schemas.microsoft.com/office/drawing/2014/main" val="10005"/>
+                  </a:ext>
+                </a:extLst>
               </a:tr>
               <a:tr h="496392">
                 <a:tc>
@@ -14558,6 +15683,11 @@
                     </a:solidFill>
                   </a:tcPr>
                 </a:tc>
+                <a:extLst>
+                  <a:ext uri="{0D108BD9-81ED-4DB2-BD59-A6C34878D82A}">
+                    <a16:rowId xmlns:a16="http://schemas.microsoft.com/office/drawing/2014/main" val="10006"/>
+                  </a:ext>
+                </a:extLst>
               </a:tr>
             </a:tbl>
           </a:graphicData>
@@ -14603,6 +15733,7 @@
           <a:lstStyle/>
           <a:p>
             <a:pPr algn="ctr"/>
+            <a:endParaRPr/>
           </a:p>
         </p:txBody>
       </p:sp>
@@ -14673,7 +15804,7 @@
               </a:defRPr>
             </a:pPr>
             <a:r>
-              <a:t>4</a:t>
+              <a:t>5</a:t>
             </a:r>
           </a:p>
         </p:txBody>
@@ -14686,8 +15817,8 @@
 </p:sld>
 </file>
 
-<file path=ppt/slides/slide5.xml><?xml version="1.0" encoding="utf-8"?>
-<p:sld xmlns:a="http://schemas.openxmlformats.org/drawingml/2006/main" xmlns:p="http://schemas.openxmlformats.org/presentationml/2006/main" xmlns:r="http://schemas.openxmlformats.org/officeDocument/2006/relationships">
+<file path=ppt/slides/slide6.xml><?xml version="1.0" encoding="utf-8"?>
+<p:sld xmlns:a="http://schemas.openxmlformats.org/drawingml/2006/main" xmlns:r="http://schemas.openxmlformats.org/officeDocument/2006/relationships" xmlns:p="http://schemas.openxmlformats.org/presentationml/2006/main">
   <p:cSld>
     <p:bg>
       <p:bgPr>
@@ -14703,7 +15834,14 @@
         <p:cNvGrpSpPr/>
         <p:nvPr/>
       </p:nvGrpSpPr>
-      <p:grpSpPr/>
+      <p:grpSpPr>
+        <a:xfrm>
+          <a:off x="0" y="0"/>
+          <a:ext cx="0" cy="0"/>
+          <a:chOff x="0" y="0"/>
+          <a:chExt cx="0" cy="0"/>
+        </a:xfrm>
+      </p:grpSpPr>
       <p:sp>
         <p:nvSpPr>
           <p:cNvPr id="2" name="TextBox 1"/>
@@ -14780,6 +15918,7 @@
           <a:lstStyle/>
           <a:p>
             <a:pPr algn="ctr"/>
+            <a:endParaRPr/>
           </a:p>
         </p:txBody>
       </p:sp>
@@ -14923,6 +16062,7 @@
           <a:lstStyle/>
           <a:p>
             <a:pPr algn="ctr"/>
+            <a:endParaRPr/>
           </a:p>
         </p:txBody>
       </p:sp>
@@ -15066,6 +16206,7 @@
           <a:lstStyle/>
           <a:p>
             <a:pPr algn="ctr"/>
+            <a:endParaRPr/>
           </a:p>
         </p:txBody>
       </p:sp>
@@ -15209,6 +16350,7 @@
           <a:lstStyle/>
           <a:p>
             <a:pPr algn="ctr"/>
+            <a:endParaRPr/>
           </a:p>
         </p:txBody>
       </p:sp>
@@ -15279,7 +16421,7 @@
               </a:defRPr>
             </a:pPr>
             <a:r>
-              <a:t>5</a:t>
+              <a:t>6</a:t>
             </a:r>
           </a:p>
         </p:txBody>
@@ -15292,8 +16434,8 @@
 </p:sld>
 </file>
 
-<file path=ppt/slides/slide6.xml><?xml version="1.0" encoding="utf-8"?>
-<p:sld xmlns:a="http://schemas.openxmlformats.org/drawingml/2006/main" xmlns:p="http://schemas.openxmlformats.org/presentationml/2006/main" xmlns:r="http://schemas.openxmlformats.org/officeDocument/2006/relationships">
+<file path=ppt/slides/slide7.xml><?xml version="1.0" encoding="utf-8"?>
+<p:sld xmlns:a="http://schemas.openxmlformats.org/drawingml/2006/main" xmlns:r="http://schemas.openxmlformats.org/officeDocument/2006/relationships" xmlns:p="http://schemas.openxmlformats.org/presentationml/2006/main">
   <p:cSld>
     <p:bg>
       <p:bgPr>
@@ -15309,7 +16451,14 @@
         <p:cNvGrpSpPr/>
         <p:nvPr/>
       </p:nvGrpSpPr>
-      <p:grpSpPr/>
+      <p:grpSpPr>
+        <a:xfrm>
+          <a:off x="0" y="0"/>
+          <a:ext cx="0" cy="0"/>
+          <a:chOff x="0" y="0"/>
+          <a:chExt cx="0" cy="0"/>
+        </a:xfrm>
+      </p:grpSpPr>
       <p:sp>
         <p:nvSpPr>
           <p:cNvPr id="2" name="TextBox 1"/>
@@ -15437,7 +16586,7 @@
               </a:defRPr>
             </a:pPr>
             <a:r>
-              <a:t>6</a:t>
+              <a:t>7</a:t>
             </a:r>
           </a:p>
         </p:txBody>
@@ -15450,8 +16599,8 @@
 </p:sld>
 </file>
 
-<file path=ppt/slides/slide7.xml><?xml version="1.0" encoding="utf-8"?>
-<p:sld xmlns:a="http://schemas.openxmlformats.org/drawingml/2006/main" xmlns:p="http://schemas.openxmlformats.org/presentationml/2006/main" xmlns:r="http://schemas.openxmlformats.org/officeDocument/2006/relationships">
+<file path=ppt/slides/slide8.xml><?xml version="1.0" encoding="utf-8"?>
+<p:sld xmlns:a="http://schemas.openxmlformats.org/drawingml/2006/main" xmlns:r="http://schemas.openxmlformats.org/officeDocument/2006/relationships" xmlns:p="http://schemas.openxmlformats.org/presentationml/2006/main">
   <p:cSld>
     <p:bg>
       <p:bgPr>
@@ -15467,7 +16616,14 @@
         <p:cNvGrpSpPr/>
         <p:nvPr/>
       </p:nvGrpSpPr>
-      <p:grpSpPr/>
+      <p:grpSpPr>
+        <a:xfrm>
+          <a:off x="0" y="0"/>
+          <a:ext cx="0" cy="0"/>
+          <a:chOff x="0" y="0"/>
+          <a:chExt cx="0" cy="0"/>
+        </a:xfrm>
+      </p:grpSpPr>
       <p:sp>
         <p:nvSpPr>
           <p:cNvPr id="2" name="Rectangle 1"/>
@@ -15508,6 +16664,7 @@
           <a:lstStyle/>
           <a:p>
             <a:pPr algn="ctr"/>
+            <a:endParaRPr/>
           </a:p>
         </p:txBody>
       </p:sp>
@@ -15630,7 +16787,7 @@
               </a:defRPr>
             </a:pPr>
             <a:r>
-              <a:t>7</a:t>
+              <a:t>8</a:t>
             </a:r>
           </a:p>
         </p:txBody>
@@ -15643,8 +16800,8 @@
 </p:sld>
 </file>
 
-<file path=ppt/slides/slide8.xml><?xml version="1.0" encoding="utf-8"?>
-<p:sld xmlns:a="http://schemas.openxmlformats.org/drawingml/2006/main" xmlns:p="http://schemas.openxmlformats.org/presentationml/2006/main" xmlns:r="http://schemas.openxmlformats.org/officeDocument/2006/relationships">
+<file path=ppt/slides/slide9.xml><?xml version="1.0" encoding="utf-8"?>
+<p:sld xmlns:a="http://schemas.openxmlformats.org/drawingml/2006/main" xmlns:r="http://schemas.openxmlformats.org/officeDocument/2006/relationships" xmlns:p="http://schemas.openxmlformats.org/presentationml/2006/main">
   <p:cSld>
     <p:bg>
       <p:bgPr>
@@ -15660,7 +16817,14 @@
         <p:cNvGrpSpPr/>
         <p:nvPr/>
       </p:nvGrpSpPr>
-      <p:grpSpPr/>
+      <p:grpSpPr>
+        <a:xfrm>
+          <a:off x="0" y="0"/>
+          <a:ext cx="0" cy="0"/>
+          <a:chOff x="0" y="0"/>
+          <a:chExt cx="0" cy="0"/>
+        </a:xfrm>
+      </p:grpSpPr>
       <p:sp>
         <p:nvSpPr>
           <p:cNvPr id="2" name="TextBox 1"/>
@@ -15773,6 +16937,7 @@
           <a:lstStyle/>
           <a:p>
             <a:pPr algn="ctr"/>
+            <a:endParaRPr/>
           </a:p>
         </p:txBody>
       </p:sp>
@@ -15900,6 +17065,7 @@
           <a:lstStyle/>
           <a:p>
             <a:pPr algn="ctr"/>
+            <a:endParaRPr/>
           </a:p>
         </p:txBody>
       </p:sp>
@@ -16027,6 +17193,7 @@
           <a:lstStyle/>
           <a:p>
             <a:pPr algn="ctr"/>
+            <a:endParaRPr/>
           </a:p>
         </p:txBody>
       </p:sp>
@@ -16154,6 +17321,7 @@
           <a:lstStyle/>
           <a:p>
             <a:pPr algn="ctr"/>
+            <a:endParaRPr/>
           </a:p>
         </p:txBody>
       </p:sp>
@@ -16280,164 +17448,6 @@
       <p:sp>
         <p:nvSpPr>
           <p:cNvPr id="13" name="TextBox 12"/>
-          <p:cNvSpPr txBox="1"/>
-          <p:nvPr/>
-        </p:nvSpPr>
-        <p:spPr>
-          <a:xfrm>
-            <a:off x="11338560" y="6446520"/>
-            <a:ext cx="640080" cy="320040"/>
-          </a:xfrm>
-          <a:prstGeom prst="rect">
-            <a:avLst/>
-          </a:prstGeom>
-          <a:noFill/>
-        </p:spPr>
-        <p:txBody>
-          <a:bodyPr wrap="square">
-            <a:spAutoFit/>
-          </a:bodyPr>
-          <a:lstStyle/>
-          <a:p>
-            <a:pPr algn="r">
-              <a:defRPr sz="1000" b="0">
-                <a:solidFill>
-                  <a:srgbClr val="AAAAAA"/>
-                </a:solidFill>
-                <a:latin typeface="Palatino Linotype"/>
-              </a:defRPr>
-            </a:pPr>
-            <a:r>
-              <a:t>8</a:t>
-            </a:r>
-          </a:p>
-        </p:txBody>
-      </p:sp>
-    </p:spTree>
-  </p:cSld>
-  <p:clrMapOvr>
-    <a:masterClrMapping/>
-  </p:clrMapOvr>
-</p:sld>
-</file>
-
-<file path=ppt/slides/slide9.xml><?xml version="1.0" encoding="utf-8"?>
-<p:sld xmlns:a="http://schemas.openxmlformats.org/drawingml/2006/main" xmlns:p="http://schemas.openxmlformats.org/presentationml/2006/main" xmlns:r="http://schemas.openxmlformats.org/officeDocument/2006/relationships">
-  <p:cSld>
-    <p:bg>
-      <p:bgPr>
-        <a:solidFill>
-          <a:srgbClr val="FFFFFF"/>
-        </a:solidFill>
-        <a:effectLst/>
-      </p:bgPr>
-    </p:bg>
-    <p:spTree>
-      <p:nvGrpSpPr>
-        <p:cNvPr id="1" name=""/>
-        <p:cNvGrpSpPr/>
-        <p:nvPr/>
-      </p:nvGrpSpPr>
-      <p:grpSpPr/>
-      <p:sp>
-        <p:nvSpPr>
-          <p:cNvPr id="2" name="TextBox 1"/>
-          <p:cNvSpPr txBox="1"/>
-          <p:nvPr/>
-        </p:nvSpPr>
-        <p:spPr>
-          <a:xfrm>
-            <a:off x="1097280" y="274320"/>
-            <a:ext cx="10058400" cy="548640"/>
-          </a:xfrm>
-          <a:prstGeom prst="rect">
-            <a:avLst/>
-          </a:prstGeom>
-          <a:noFill/>
-        </p:spPr>
-        <p:txBody>
-          <a:bodyPr wrap="square">
-            <a:spAutoFit/>
-          </a:bodyPr>
-          <a:lstStyle/>
-          <a:p>
-            <a:pPr algn="l">
-              <a:defRPr sz="2400" b="1">
-                <a:solidFill>
-                  <a:srgbClr val="1A1A1A"/>
-                </a:solidFill>
-                <a:latin typeface="Palatino Linotype"/>
-              </a:defRPr>
-            </a:pPr>
-            <a:r>
-              <a:t>Azure Production Trace Distributions</a:t>
-            </a:r>
-          </a:p>
-        </p:txBody>
-      </p:sp>
-      <p:pic>
-        <p:nvPicPr>
-          <p:cNvPr id="3" name="Picture 2" descr="sw_fig3_distributions.png"/>
-          <p:cNvPicPr>
-            <a:picLocks noChangeAspect="1"/>
-          </p:cNvPicPr>
-          <p:nvPr/>
-        </p:nvPicPr>
-        <p:blipFill>
-          <a:blip r:embed="rId2"/>
-          <a:stretch>
-            <a:fillRect/>
-          </a:stretch>
-        </p:blipFill>
-        <p:spPr>
-          <a:xfrm>
-            <a:off x="1737360" y="1097280"/>
-            <a:ext cx="8686800" cy="3926753"/>
-          </a:xfrm>
-          <a:prstGeom prst="rect">
-            <a:avLst/>
-          </a:prstGeom>
-        </p:spPr>
-      </p:pic>
-      <p:sp>
-        <p:nvSpPr>
-          <p:cNvPr id="4" name="TextBox 3"/>
-          <p:cNvSpPr txBox="1"/>
-          <p:nvPr/>
-        </p:nvSpPr>
-        <p:spPr>
-          <a:xfrm>
-            <a:off x="1737360" y="5161193"/>
-            <a:ext cx="8686800" cy="365760"/>
-          </a:xfrm>
-          <a:prstGeom prst="rect">
-            <a:avLst/>
-          </a:prstGeom>
-          <a:noFill/>
-        </p:spPr>
-        <p:txBody>
-          <a:bodyPr wrap="square">
-            <a:spAutoFit/>
-          </a:bodyPr>
-          <a:lstStyle/>
-          <a:p>
-            <a:pPr algn="ctr">
-              <a:defRPr sz="1100" b="0">
-                <a:solidFill>
-                  <a:srgbClr val="AAAAAA"/>
-                </a:solidFill>
-                <a:latin typeface="Palatino Linotype"/>
-              </a:defRPr>
-            </a:pPr>
-            <a:r>
-              <a:t>Source: Patel et al., ISCA 2024, Figure 3</a:t>
-            </a:r>
-          </a:p>
-        </p:txBody>
-      </p:sp>
-      <p:sp>
-        <p:nvSpPr>
-          <p:cNvPr id="5" name="TextBox 4"/>
           <p:cNvSpPr txBox="1"/>
           <p:nvPr/>
         </p:nvSpPr>

--- a/presentation/Phase_Disaggregation_LLM_Inference.pptx
+++ b/presentation/Phase_Disaggregation_LLM_Inference.pptx
@@ -6,7 +6,6 @@
   </p:sldMasterIdLst>
   <p:sldIdLst>
     <p:sldId id="256" r:id="rId2"/>
-    <p:sldId id="257" r:id="rId3"/>
     <p:sldId id="258" r:id="rId4"/>
     <p:sldId id="259" r:id="rId5"/>
     <p:sldId id="260" r:id="rId6"/>
@@ -25,19 +24,16 @@
     <p:sldId id="273" r:id="rId19"/>
     <p:sldId id="274" r:id="rId20"/>
     <p:sldId id="275" r:id="rId21"/>
-    <p:sldId id="276" r:id="rId22"/>
-    <p:sldId id="277" r:id="rId23"/>
-    <p:sldId id="278" r:id="rId24"/>
-    <p:sldId id="279" r:id="rId25"/>
-    <p:sldId id="280" r:id="rId26"/>
-    <p:sldId id="281" r:id="rId27"/>
-    <p:sldId id="282" r:id="rId28"/>
-    <p:sldId id="283" r:id="rId29"/>
-    <p:sldId id="284" r:id="rId30"/>
-    <p:sldId id="285" r:id="rId31"/>
-    <p:sldId id="286" r:id="rId32"/>
-    <p:sldId id="287" r:id="rId33"/>
-    <p:sldId id="288" r:id="rId34"/>
+    <p:sldId id="289" r:id="rId22"/>
+    <p:sldId id="276" r:id="rId23"/>
+    <p:sldId id="277" r:id="rId24"/>
+    <p:sldId id="278" r:id="rId25"/>
+    <p:sldId id="279" r:id="rId26"/>
+    <p:sldId id="280" r:id="rId27"/>
+    <p:sldId id="281" r:id="rId28"/>
+    <p:sldId id="284" r:id="rId29"/>
+    <p:sldId id="287" r:id="rId30"/>
+    <p:sldId id="288" r:id="rId31"/>
   </p:sldIdLst>
   <p:sldSz cx="12192000" cy="6858000"/>
   <p:notesSz cx="6858000" cy="9144000"/>
@@ -334,7 +330,7 @@
           <a:p>
             <a:fld id="{5BCAD085-E8A6-8845-BD4E-CB4CCA059FC4}" type="datetimeFigureOut">
               <a:rPr lang="en-US" smtClean="0"/>
-              <a:t>4/5/26</a:t>
+              <a:t>4/6/26</a:t>
             </a:fld>
             <a:endParaRPr lang="en-US"/>
           </a:p>
@@ -502,7 +498,7 @@
           <a:p>
             <a:fld id="{5BCAD085-E8A6-8845-BD4E-CB4CCA059FC4}" type="datetimeFigureOut">
               <a:rPr lang="en-US" smtClean="0"/>
-              <a:t>4/5/26</a:t>
+              <a:t>4/6/26</a:t>
             </a:fld>
             <a:endParaRPr lang="en-US"/>
           </a:p>
@@ -680,7 +676,7 @@
           <a:p>
             <a:fld id="{5BCAD085-E8A6-8845-BD4E-CB4CCA059FC4}" type="datetimeFigureOut">
               <a:rPr lang="en-US" smtClean="0"/>
-              <a:t>4/5/26</a:t>
+              <a:t>4/6/26</a:t>
             </a:fld>
             <a:endParaRPr lang="en-US"/>
           </a:p>
@@ -848,7 +844,7 @@
           <a:p>
             <a:fld id="{5BCAD085-E8A6-8845-BD4E-CB4CCA059FC4}" type="datetimeFigureOut">
               <a:rPr lang="en-US" smtClean="0"/>
-              <a:t>4/5/26</a:t>
+              <a:t>4/6/26</a:t>
             </a:fld>
             <a:endParaRPr lang="en-US"/>
           </a:p>
@@ -1093,7 +1089,7 @@
           <a:p>
             <a:fld id="{5BCAD085-E8A6-8845-BD4E-CB4CCA059FC4}" type="datetimeFigureOut">
               <a:rPr lang="en-US" smtClean="0"/>
-              <a:t>4/5/26</a:t>
+              <a:t>4/6/26</a:t>
             </a:fld>
             <a:endParaRPr lang="en-US"/>
           </a:p>
@@ -1378,7 +1374,7 @@
           <a:p>
             <a:fld id="{5BCAD085-E8A6-8845-BD4E-CB4CCA059FC4}" type="datetimeFigureOut">
               <a:rPr lang="en-US" smtClean="0"/>
-              <a:t>4/5/26</a:t>
+              <a:t>4/6/26</a:t>
             </a:fld>
             <a:endParaRPr lang="en-US"/>
           </a:p>
@@ -1797,7 +1793,7 @@
           <a:p>
             <a:fld id="{5BCAD085-E8A6-8845-BD4E-CB4CCA059FC4}" type="datetimeFigureOut">
               <a:rPr lang="en-US" smtClean="0"/>
-              <a:t>4/5/26</a:t>
+              <a:t>4/6/26</a:t>
             </a:fld>
             <a:endParaRPr lang="en-US"/>
           </a:p>
@@ -1914,7 +1910,7 @@
           <a:p>
             <a:fld id="{5BCAD085-E8A6-8845-BD4E-CB4CCA059FC4}" type="datetimeFigureOut">
               <a:rPr lang="en-US" smtClean="0"/>
-              <a:t>4/5/26</a:t>
+              <a:t>4/6/26</a:t>
             </a:fld>
             <a:endParaRPr lang="en-US"/>
           </a:p>
@@ -2009,7 +2005,7 @@
           <a:p>
             <a:fld id="{5BCAD085-E8A6-8845-BD4E-CB4CCA059FC4}" type="datetimeFigureOut">
               <a:rPr lang="en-US" smtClean="0"/>
-              <a:t>4/5/26</a:t>
+              <a:t>4/6/26</a:t>
             </a:fld>
             <a:endParaRPr lang="en-US"/>
           </a:p>
@@ -2284,7 +2280,7 @@
           <a:p>
             <a:fld id="{5BCAD085-E8A6-8845-BD4E-CB4CCA059FC4}" type="datetimeFigureOut">
               <a:rPr lang="en-US" smtClean="0"/>
-              <a:t>4/5/26</a:t>
+              <a:t>4/6/26</a:t>
             </a:fld>
             <a:endParaRPr lang="en-US"/>
           </a:p>
@@ -2536,7 +2532,7 @@
           <a:p>
             <a:fld id="{5BCAD085-E8A6-8845-BD4E-CB4CCA059FC4}" type="datetimeFigureOut">
               <a:rPr lang="en-US" smtClean="0"/>
-              <a:t>4/5/26</a:t>
+              <a:t>4/6/26</a:t>
             </a:fld>
             <a:endParaRPr lang="en-US"/>
           </a:p>
@@ -2747,7 +2743,7 @@
           <a:p>
             <a:fld id="{5BCAD085-E8A6-8845-BD4E-CB4CCA059FC4}" type="datetimeFigureOut">
               <a:rPr lang="en-US" smtClean="0"/>
-              <a:t>4/5/26</a:t>
+              <a:t>4/6/26</a:t>
             </a:fld>
             <a:endParaRPr lang="en-US"/>
           </a:p>
@@ -3460,13 +3456,13 @@
           <a:noFill/>
         </p:spPr>
         <p:txBody>
-          <a:bodyPr wrap="square">
+          <a:bodyPr wrap="none">
             <a:spAutoFit/>
           </a:bodyPr>
           <a:lstStyle/>
           <a:p>
             <a:pPr algn="r">
-              <a:defRPr sz="1000" b="0">
+              <a:defRPr sz="1000">
                 <a:solidFill>
                   <a:srgbClr val="AAAAAA"/>
                 </a:solidFill>
@@ -3474,7 +3470,7 @@
               </a:defRPr>
             </a:pPr>
             <a:r>
-              <a:t>10</a:t>
+              <a:t>9</a:t>
             </a:r>
           </a:p>
         </p:txBody>
@@ -4278,13 +4274,13 @@
           <a:noFill/>
         </p:spPr>
         <p:txBody>
-          <a:bodyPr wrap="square">
+          <a:bodyPr wrap="none">
             <a:spAutoFit/>
           </a:bodyPr>
           <a:lstStyle/>
           <a:p>
             <a:pPr algn="r">
-              <a:defRPr sz="1000" b="0">
+              <a:defRPr sz="1000">
                 <a:solidFill>
                   <a:srgbClr val="AAAAAA"/>
                 </a:solidFill>
@@ -4292,7 +4288,7 @@
               </a:defRPr>
             </a:pPr>
             <a:r>
-              <a:t>11</a:t>
+              <a:t>10</a:t>
             </a:r>
           </a:p>
         </p:txBody>
@@ -4895,13 +4891,13 @@
           <a:noFill/>
         </p:spPr>
         <p:txBody>
-          <a:bodyPr wrap="square">
+          <a:bodyPr wrap="none">
             <a:spAutoFit/>
           </a:bodyPr>
           <a:lstStyle/>
           <a:p>
             <a:pPr algn="r">
-              <a:defRPr sz="1000" b="0">
+              <a:defRPr sz="1000">
                 <a:solidFill>
                   <a:srgbClr val="AAAAAA"/>
                 </a:solidFill>
@@ -4909,7 +4905,7 @@
               </a:defRPr>
             </a:pPr>
             <a:r>
-              <a:t>12</a:t>
+              <a:t>11</a:t>
             </a:r>
           </a:p>
         </p:txBody>
@@ -5061,13 +5057,13 @@
           <a:noFill/>
         </p:spPr>
         <p:txBody>
-          <a:bodyPr wrap="square">
+          <a:bodyPr wrap="none">
             <a:spAutoFit/>
           </a:bodyPr>
           <a:lstStyle/>
           <a:p>
             <a:pPr algn="r">
-              <a:defRPr sz="1000" b="0">
+              <a:defRPr sz="1000">
                 <a:solidFill>
                   <a:srgbClr val="AAAAAA"/>
                 </a:solidFill>
@@ -5075,7 +5071,7 @@
               </a:defRPr>
             </a:pPr>
             <a:r>
-              <a:t>13</a:t>
+              <a:t>12</a:t>
             </a:r>
           </a:p>
         </p:txBody>
@@ -5534,13 +5530,13 @@
           <a:noFill/>
         </p:spPr>
         <p:txBody>
-          <a:bodyPr wrap="square">
+          <a:bodyPr wrap="none">
             <a:spAutoFit/>
           </a:bodyPr>
           <a:lstStyle/>
           <a:p>
             <a:pPr algn="r">
-              <a:defRPr sz="1000" b="0">
+              <a:defRPr sz="1000">
                 <a:solidFill>
                   <a:srgbClr val="AAAAAA"/>
                 </a:solidFill>
@@ -5548,7 +5544,7 @@
               </a:defRPr>
             </a:pPr>
             <a:r>
-              <a:t>14</a:t>
+              <a:t>13</a:t>
             </a:r>
           </a:p>
         </p:txBody>
@@ -6206,13 +6202,13 @@
           <a:noFill/>
         </p:spPr>
         <p:txBody>
-          <a:bodyPr wrap="square">
+          <a:bodyPr wrap="none">
             <a:spAutoFit/>
           </a:bodyPr>
           <a:lstStyle/>
           <a:p>
             <a:pPr algn="r">
-              <a:defRPr sz="1000" b="0">
+              <a:defRPr sz="1000">
                 <a:solidFill>
                   <a:srgbClr val="AAAAAA"/>
                 </a:solidFill>
@@ -6220,7 +6216,7 @@
               </a:defRPr>
             </a:pPr>
             <a:r>
-              <a:t>15</a:t>
+              <a:t>14</a:t>
             </a:r>
           </a:p>
         </p:txBody>
@@ -6715,13 +6711,13 @@
           <a:noFill/>
         </p:spPr>
         <p:txBody>
-          <a:bodyPr wrap="square">
+          <a:bodyPr wrap="none">
             <a:spAutoFit/>
           </a:bodyPr>
           <a:lstStyle/>
           <a:p>
             <a:pPr algn="r">
-              <a:defRPr sz="1000" b="0">
+              <a:defRPr sz="1000">
                 <a:solidFill>
                   <a:srgbClr val="AAAAAA"/>
                 </a:solidFill>
@@ -6729,7 +6725,7 @@
               </a:defRPr>
             </a:pPr>
             <a:r>
-              <a:t>16</a:t>
+              <a:t>15</a:t>
             </a:r>
           </a:p>
         </p:txBody>
@@ -6881,13 +6877,13 @@
           <a:noFill/>
         </p:spPr>
         <p:txBody>
-          <a:bodyPr wrap="square">
+          <a:bodyPr wrap="none">
             <a:spAutoFit/>
           </a:bodyPr>
           <a:lstStyle/>
           <a:p>
             <a:pPr algn="r">
-              <a:defRPr sz="1000" b="0">
+              <a:defRPr sz="1000">
                 <a:solidFill>
                   <a:srgbClr val="AAAAAA"/>
                 </a:solidFill>
@@ -6895,7 +6891,7 @@
               </a:defRPr>
             </a:pPr>
             <a:r>
-              <a:t>17</a:t>
+              <a:t>16</a:t>
             </a:r>
           </a:p>
         </p:txBody>
@@ -7180,13 +7176,13 @@
           <a:noFill/>
         </p:spPr>
         <p:txBody>
-          <a:bodyPr wrap="square">
+          <a:bodyPr wrap="none">
             <a:spAutoFit/>
           </a:bodyPr>
           <a:lstStyle/>
           <a:p>
             <a:pPr algn="r">
-              <a:defRPr sz="1000" b="0">
+              <a:defRPr sz="1000">
                 <a:solidFill>
                   <a:srgbClr val="AAAAAA"/>
                 </a:solidFill>
@@ -7194,7 +7190,7 @@
               </a:defRPr>
             </a:pPr>
             <a:r>
-              <a:t>18</a:t>
+              <a:t>17</a:t>
             </a:r>
           </a:p>
         </p:txBody>
@@ -7381,13 +7377,13 @@
           <a:noFill/>
         </p:spPr>
         <p:txBody>
-          <a:bodyPr wrap="square">
+          <a:bodyPr wrap="none">
             <a:spAutoFit/>
           </a:bodyPr>
           <a:lstStyle/>
           <a:p>
             <a:pPr algn="r">
-              <a:defRPr sz="1000" b="0">
+              <a:defRPr sz="1000">
                 <a:solidFill>
                   <a:srgbClr val="556688"/>
                 </a:solidFill>
@@ -7395,392 +7391,7 @@
               </a:defRPr>
             </a:pPr>
             <a:r>
-              <a:t>19</a:t>
-            </a:r>
-          </a:p>
-        </p:txBody>
-      </p:sp>
-    </p:spTree>
-  </p:cSld>
-  <p:clrMapOvr>
-    <a:masterClrMapping/>
-  </p:clrMapOvr>
-</p:sld>
-</file>
-
-<file path=ppt/slides/slide2.xml><?xml version="1.0" encoding="utf-8"?>
-<p:sld xmlns:a="http://schemas.openxmlformats.org/drawingml/2006/main" xmlns:r="http://schemas.openxmlformats.org/officeDocument/2006/relationships" xmlns:p="http://schemas.openxmlformats.org/presentationml/2006/main">
-  <p:cSld>
-    <p:bg>
-      <p:bgPr>
-        <a:solidFill>
-          <a:srgbClr val="FFFFFF"/>
-        </a:solidFill>
-        <a:effectLst/>
-      </p:bgPr>
-    </p:bg>
-    <p:spTree>
-      <p:nvGrpSpPr>
-        <p:cNvPr id="1" name=""/>
-        <p:cNvGrpSpPr/>
-        <p:nvPr/>
-      </p:nvGrpSpPr>
-      <p:grpSpPr>
-        <a:xfrm>
-          <a:off x="0" y="0"/>
-          <a:ext cx="0" cy="0"/>
-          <a:chOff x="0" y="0"/>
-          <a:chExt cx="0" cy="0"/>
-        </a:xfrm>
-      </p:grpSpPr>
-      <p:sp>
-        <p:nvSpPr>
-          <p:cNvPr id="2" name="TextBox 1"/>
-          <p:cNvSpPr txBox="1"/>
-          <p:nvPr/>
-        </p:nvSpPr>
-        <p:spPr>
-          <a:xfrm>
-            <a:off x="1097280" y="457200"/>
-            <a:ext cx="10058400" cy="640080"/>
-          </a:xfrm>
-          <a:prstGeom prst="rect">
-            <a:avLst/>
-          </a:prstGeom>
-          <a:noFill/>
-        </p:spPr>
-        <p:txBody>
-          <a:bodyPr wrap="square">
-            <a:spAutoFit/>
-          </a:bodyPr>
-          <a:lstStyle/>
-          <a:p>
-            <a:pPr algn="l">
-              <a:defRPr sz="3400" b="1">
-                <a:solidFill>
-                  <a:srgbClr val="1A1A1A"/>
-                </a:solidFill>
-                <a:latin typeface="Palatino Linotype"/>
-              </a:defRPr>
-            </a:pPr>
-            <a:r>
-              <a:t>Outline</a:t>
-            </a:r>
-          </a:p>
-        </p:txBody>
-      </p:sp>
-      <p:sp>
-        <p:nvSpPr>
-          <p:cNvPr id="3" name="TextBox 2"/>
-          <p:cNvSpPr txBox="1"/>
-          <p:nvPr/>
-        </p:nvSpPr>
-        <p:spPr>
-          <a:xfrm>
-            <a:off x="1097280" y="1645920"/>
-            <a:ext cx="4754880" cy="3657600"/>
-          </a:xfrm>
-          <a:prstGeom prst="rect">
-            <a:avLst/>
-          </a:prstGeom>
-          <a:noFill/>
-        </p:spPr>
-        <p:txBody>
-          <a:bodyPr wrap="square">
-            <a:spAutoFit/>
-          </a:bodyPr>
-          <a:lstStyle/>
-          <a:p>
-            <a:pPr algn="l">
-              <a:defRPr sz="2200" b="1">
-                <a:solidFill>
-                  <a:srgbClr val="1A56DB"/>
-                </a:solidFill>
-                <a:latin typeface="Palatino Linotype"/>
-              </a:defRPr>
-            </a:pPr>
-            <a:r>
-              <a:t>Part 1: Berat</a:t>
-            </a:r>
-          </a:p>
-          <a:p>
-            <a:pPr>
-              <a:spcBef>
-                <a:spcPts val="1400"/>
-              </a:spcBef>
-              <a:defRPr sz="1700" b="0">
-                <a:solidFill>
-                  <a:srgbClr val="333333"/>
-                </a:solidFill>
-                <a:latin typeface="Palatino Linotype"/>
-              </a:defRPr>
-            </a:pPr>
-            <a:r>
-              <a:t>LLM inference background</a:t>
-            </a:r>
-          </a:p>
-          <a:p>
-            <a:pPr>
-              <a:spcBef>
-                <a:spcPts val="600"/>
-              </a:spcBef>
-              <a:defRPr sz="1700" b="0">
-                <a:solidFill>
-                  <a:srgbClr val="333333"/>
-                </a:solidFill>
-                <a:latin typeface="Palatino Linotype"/>
-              </a:defRPr>
-            </a:pPr>
-            <a:r>
-              <a:t>The two phases and why they differ</a:t>
-            </a:r>
-          </a:p>
-          <a:p>
-            <a:pPr>
-              <a:spcBef>
-                <a:spcPts val="600"/>
-              </a:spcBef>
-              <a:defRPr sz="1700" b="0">
-                <a:solidFill>
-                  <a:srgbClr val="333333"/>
-                </a:solidFill>
-                <a:latin typeface="Palatino Linotype"/>
-              </a:defRPr>
-            </a:pPr>
-            <a:r>
-              <a:t>The colocation problem</a:t>
-            </a:r>
-          </a:p>
-          <a:p>
-            <a:pPr>
-              <a:spcBef>
-                <a:spcPts val="600"/>
-              </a:spcBef>
-              <a:defRPr sz="1700" b="0">
-                <a:solidFill>
-                  <a:srgbClr val="333333"/>
-                </a:solidFill>
-                <a:latin typeface="Palatino Linotype"/>
-              </a:defRPr>
-            </a:pPr>
-            <a:r>
-              <a:t>Splitwise: production insights</a:t>
-            </a:r>
-          </a:p>
-          <a:p>
-            <a:pPr>
-              <a:spcBef>
-                <a:spcPts val="600"/>
-              </a:spcBef>
-              <a:defRPr sz="1700" b="0">
-                <a:solidFill>
-                  <a:srgbClr val="333333"/>
-                </a:solidFill>
-                <a:latin typeface="Palatino Linotype"/>
-              </a:defRPr>
-            </a:pPr>
-            <a:r>
-              <a:t>Architecture and KV-cache transfer</a:t>
-            </a:r>
-          </a:p>
-          <a:p>
-            <a:pPr>
-              <a:spcBef>
-                <a:spcPts val="600"/>
-              </a:spcBef>
-              <a:defRPr sz="1700" b="0">
-                <a:solidFill>
-                  <a:srgbClr val="333333"/>
-                </a:solidFill>
-                <a:latin typeface="Palatino Linotype"/>
-              </a:defRPr>
-            </a:pPr>
-            <a:r>
-              <a:t>Heterogeneous cluster designs</a:t>
-            </a:r>
-          </a:p>
-          <a:p>
-            <a:pPr>
-              <a:spcBef>
-                <a:spcPts val="600"/>
-              </a:spcBef>
-              <a:defRPr sz="1700" b="0">
-                <a:solidFill>
-                  <a:srgbClr val="333333"/>
-                </a:solidFill>
-                <a:latin typeface="Palatino Linotype"/>
-              </a:defRPr>
-            </a:pPr>
-            <a:r>
-              <a:t>Evaluation</a:t>
-            </a:r>
-          </a:p>
-        </p:txBody>
-      </p:sp>
-      <p:sp>
-        <p:nvSpPr>
-          <p:cNvPr id="4" name="TextBox 3"/>
-          <p:cNvSpPr txBox="1"/>
-          <p:nvPr/>
-        </p:nvSpPr>
-        <p:spPr>
-          <a:xfrm>
-            <a:off x="6400800" y="1645920"/>
-            <a:ext cx="4754880" cy="3657600"/>
-          </a:xfrm>
-          <a:prstGeom prst="rect">
-            <a:avLst/>
-          </a:prstGeom>
-          <a:noFill/>
-        </p:spPr>
-        <p:txBody>
-          <a:bodyPr wrap="square">
-            <a:spAutoFit/>
-          </a:bodyPr>
-          <a:lstStyle/>
-          <a:p>
-            <a:pPr algn="l">
-              <a:defRPr sz="2200" b="1">
-                <a:solidFill>
-                  <a:srgbClr val="0E6E6E"/>
-                </a:solidFill>
-                <a:latin typeface="Palatino Linotype"/>
-              </a:defRPr>
-            </a:pPr>
-            <a:r>
-              <a:t>Part 2: Ethan</a:t>
-            </a:r>
-          </a:p>
-          <a:p>
-            <a:pPr>
-              <a:spcBef>
-                <a:spcPts val="1400"/>
-              </a:spcBef>
-              <a:defRPr sz="1700" b="0">
-                <a:solidFill>
-                  <a:srgbClr val="333333"/>
-                </a:solidFill>
-                <a:latin typeface="Palatino Linotype"/>
-              </a:defRPr>
-            </a:pPr>
-            <a:r>
-              <a:t>DistServe: goodput optimization</a:t>
-            </a:r>
-          </a:p>
-          <a:p>
-            <a:pPr>
-              <a:spcBef>
-                <a:spcPts val="600"/>
-              </a:spcBef>
-              <a:defRPr sz="1700" b="0">
-                <a:solidFill>
-                  <a:srgbClr val="333333"/>
-                </a:solidFill>
-                <a:latin typeface="Palatino Linotype"/>
-              </a:defRPr>
-            </a:pPr>
-            <a:r>
-              <a:t>Formal tradeoff analysis</a:t>
-            </a:r>
-          </a:p>
-          <a:p>
-            <a:pPr>
-              <a:spcBef>
-                <a:spcPts val="600"/>
-              </a:spcBef>
-              <a:defRPr sz="1700" b="0">
-                <a:solidFill>
-                  <a:srgbClr val="333333"/>
-                </a:solidFill>
-                <a:latin typeface="Palatino Linotype"/>
-              </a:defRPr>
-            </a:pPr>
-            <a:r>
-              <a:t>Placement algorithms</a:t>
-            </a:r>
-          </a:p>
-          <a:p>
-            <a:pPr>
-              <a:spcBef>
-                <a:spcPts val="600"/>
-              </a:spcBef>
-              <a:defRPr sz="1700" b="0">
-                <a:solidFill>
-                  <a:srgbClr val="333333"/>
-                </a:solidFill>
-                <a:latin typeface="Palatino Linotype"/>
-              </a:defRPr>
-            </a:pPr>
-            <a:r>
-              <a:t>Online scheduling</a:t>
-            </a:r>
-          </a:p>
-          <a:p>
-            <a:pPr>
-              <a:spcBef>
-                <a:spcPts val="600"/>
-              </a:spcBef>
-              <a:defRPr sz="1700" b="0">
-                <a:solidFill>
-                  <a:srgbClr val="333333"/>
-                </a:solidFill>
-                <a:latin typeface="Palatino Linotype"/>
-              </a:defRPr>
-            </a:pPr>
-            <a:r>
-              <a:t>Evaluation</a:t>
-            </a:r>
-          </a:p>
-          <a:p>
-            <a:pPr>
-              <a:spcBef>
-                <a:spcPts val="600"/>
-              </a:spcBef>
-              <a:defRPr sz="1700" b="0">
-                <a:solidFill>
-                  <a:srgbClr val="333333"/>
-                </a:solidFill>
-                <a:latin typeface="Palatino Linotype"/>
-              </a:defRPr>
-            </a:pPr>
-            <a:r>
-              <a:t>Comparison and future directions</a:t>
-            </a:r>
-          </a:p>
-        </p:txBody>
-      </p:sp>
-      <p:sp>
-        <p:nvSpPr>
-          <p:cNvPr id="5" name="TextBox 4"/>
-          <p:cNvSpPr txBox="1"/>
-          <p:nvPr/>
-        </p:nvSpPr>
-        <p:spPr>
-          <a:xfrm>
-            <a:off x="11338560" y="6446520"/>
-            <a:ext cx="640080" cy="320040"/>
-          </a:xfrm>
-          <a:prstGeom prst="rect">
-            <a:avLst/>
-          </a:prstGeom>
-          <a:noFill/>
-        </p:spPr>
-        <p:txBody>
-          <a:bodyPr wrap="square">
-            <a:spAutoFit/>
-          </a:bodyPr>
-          <a:lstStyle/>
-          <a:p>
-            <a:pPr algn="r">
-              <a:defRPr sz="1000" b="0">
-                <a:solidFill>
-                  <a:srgbClr val="AAAAAA"/>
-                </a:solidFill>
-                <a:latin typeface="Palatino Linotype"/>
-              </a:defRPr>
-            </a:pPr>
-            <a:r>
-              <a:t>2</a:t>
+              <a:t>18</a:t>
             </a:r>
           </a:p>
         </p:txBody>
@@ -7827,7 +7438,7 @@
         <p:spPr>
           <a:xfrm>
             <a:off x="1097280" y="457200"/>
-            <a:ext cx="10058400" cy="640080"/>
+            <a:ext cx="10058400" cy="615553"/>
           </a:xfrm>
           <a:prstGeom prst="rect">
             <a:avLst/>
@@ -7849,8 +7460,22 @@
               </a:defRPr>
             </a:pPr>
             <a:r>
-              <a:t>Goodput: The Right Optimization Target</a:t>
-            </a:r>
+              <a:rPr dirty="0"/>
+              <a:t>Goodput</a:t>
+            </a:r>
+            <a:r>
+              <a:rPr lang="en-US" dirty="0"/>
+              <a:t> / How </a:t>
+            </a:r>
+            <a:r>
+              <a:rPr lang="en-US" dirty="0" err="1"/>
+              <a:t>DistServe</a:t>
+            </a:r>
+            <a:r>
+              <a:rPr lang="en-US" dirty="0"/>
+              <a:t> Works </a:t>
+            </a:r>
+            <a:endParaRPr dirty="0"/>
           </a:p>
         </p:txBody>
       </p:sp>
@@ -7862,8 +7487,8 @@
         </p:nvSpPr>
         <p:spPr>
           <a:xfrm>
-            <a:off x="1097280" y="1554480"/>
-            <a:ext cx="10058400" cy="1097280"/>
+            <a:off x="1097280" y="1179879"/>
+            <a:ext cx="10058400" cy="466041"/>
           </a:xfrm>
           <a:prstGeom prst="rect">
             <a:avLst/>
@@ -7906,8 +7531,8 @@
         </p:nvSpPr>
         <p:spPr>
           <a:xfrm>
-            <a:off x="1371600" y="1645920"/>
-            <a:ext cx="9418320" cy="914400"/>
+            <a:off x="1386840" y="1245810"/>
+            <a:ext cx="9418320" cy="400110"/>
           </a:xfrm>
           <a:prstGeom prst="rect">
             <a:avLst/>
@@ -7929,37 +7554,63 @@
               </a:defRPr>
             </a:pPr>
             <a:r>
-              <a:t>Per-GPU Goodput = max request rate while meeting SLO targets</a:t>
-            </a:r>
-          </a:p>
-          <a:p>
-            <a:pPr algn="ctr">
-              <a:spcBef>
-                <a:spcPts val="800"/>
-              </a:spcBef>
-              <a:defRPr sz="1600" b="0">
-                <a:solidFill>
-                  <a:srgbClr val="666666"/>
-                </a:solidFill>
-                <a:latin typeface="Palatino Linotype"/>
-              </a:defRPr>
-            </a:pPr>
-            <a:r>
-              <a:t>Higher goodput = lower cost per query = what production systems actually optimize for</a:t>
-            </a:r>
-          </a:p>
-        </p:txBody>
-      </p:sp>
-      <p:sp>
-        <p:nvSpPr>
-          <p:cNvPr id="5" name="TextBox 4"/>
+              <a:rPr dirty="0"/>
+              <a:t>Goodput = max request rate while meeting </a:t>
+            </a:r>
+            <a:r>
+              <a:rPr lang="en-US" dirty="0"/>
+              <a:t>Service Level Objective (SLO)</a:t>
+            </a:r>
+            <a:endParaRPr dirty="0"/>
+          </a:p>
+        </p:txBody>
+      </p:sp>
+      <p:pic>
+        <p:nvPicPr>
+          <p:cNvPr id="8" name="Picture 7">
+            <a:extLst>
+              <a:ext uri="{FF2B5EF4-FFF2-40B4-BE49-F238E27FC236}">
+                <a16:creationId xmlns:a16="http://schemas.microsoft.com/office/drawing/2014/main" id="{111C0D56-4419-AACE-3174-F9AEB95A6CAE}"/>
+              </a:ext>
+            </a:extLst>
+          </p:cNvPr>
+          <p:cNvPicPr>
+            <a:picLocks noChangeAspect="1"/>
+          </p:cNvPicPr>
+          <p:nvPr/>
+        </p:nvPicPr>
+        <p:blipFill>
+          <a:blip r:embed="rId2"/>
+          <a:stretch>
+            <a:fillRect/>
+          </a:stretch>
+        </p:blipFill>
+        <p:spPr>
+          <a:xfrm>
+            <a:off x="3291575" y="1839543"/>
+            <a:ext cx="5608850" cy="4382275"/>
+          </a:xfrm>
+          <a:prstGeom prst="rect">
+            <a:avLst/>
+          </a:prstGeom>
+        </p:spPr>
+      </p:pic>
+      <p:sp>
+        <p:nvSpPr>
+          <p:cNvPr id="9" name="TextBox 8">
+            <a:extLst>
+              <a:ext uri="{FF2B5EF4-FFF2-40B4-BE49-F238E27FC236}">
+                <a16:creationId xmlns:a16="http://schemas.microsoft.com/office/drawing/2014/main" id="{904F7AF3-E777-5A03-3812-B9CDF52995A8}"/>
+              </a:ext>
+            </a:extLst>
+          </p:cNvPr>
           <p:cNvSpPr txBox="1"/>
           <p:nvPr/>
         </p:nvSpPr>
         <p:spPr>
           <a:xfrm>
-            <a:off x="1097280" y="3017520"/>
-            <a:ext cx="10058400" cy="2743200"/>
+            <a:off x="1762298" y="6415441"/>
+            <a:ext cx="8728364" cy="646331"/>
           </a:xfrm>
           <a:prstGeom prst="rect">
             <a:avLst/>
@@ -7967,92 +7618,24 @@
           <a:noFill/>
         </p:spPr>
         <p:txBody>
-          <a:bodyPr wrap="square">
+          <a:bodyPr wrap="square" rtlCol="0">
             <a:spAutoFit/>
           </a:bodyPr>
           <a:lstStyle/>
           <a:p>
-            <a:pPr algn="l">
-              <a:defRPr sz="2000" b="1">
-                <a:solidFill>
-                  <a:srgbClr val="1A1A1A"/>
-                </a:solidFill>
-                <a:latin typeface="Palatino Linotype"/>
-              </a:defRPr>
-            </a:pPr>
-            <a:r>
-              <a:t>DistServe's approach:</a:t>
-            </a:r>
-          </a:p>
-          <a:p>
-            <a:pPr>
-              <a:spcBef>
-                <a:spcPts val="1400"/>
-              </a:spcBef>
-              <a:defRPr sz="1700" b="0">
-                <a:solidFill>
-                  <a:srgbClr val="333333"/>
-                </a:solidFill>
-                <a:latin typeface="Palatino Linotype"/>
-              </a:defRPr>
-            </a:pPr>
-            <a:r>
-              <a:t>Separate prefill and decoding onto different GPU instances</a:t>
-            </a:r>
-          </a:p>
-          <a:p>
-            <a:pPr>
-              <a:spcBef>
-                <a:spcPts val="600"/>
-              </a:spcBef>
-              <a:defRPr sz="1700" b="0">
-                <a:solidFill>
-                  <a:srgbClr val="333333"/>
-                </a:solidFill>
-                <a:latin typeface="Palatino Linotype"/>
-              </a:defRPr>
-            </a:pPr>
-            <a:r>
-              <a:t>Optimize parallelism strategy for each phase independently</a:t>
-            </a:r>
-          </a:p>
-          <a:p>
-            <a:pPr>
-              <a:spcBef>
-                <a:spcPts val="600"/>
-              </a:spcBef>
-              <a:defRPr sz="1700" b="0">
-                <a:solidFill>
-                  <a:srgbClr val="333333"/>
-                </a:solidFill>
-                <a:latin typeface="Palatino Linotype"/>
-              </a:defRPr>
-            </a:pPr>
-            <a:r>
-              <a:t>Automatically find the best placement on the cluster</a:t>
-            </a:r>
-          </a:p>
-          <a:p>
-            <a:pPr>
-              <a:spcBef>
-                <a:spcPts val="600"/>
-              </a:spcBef>
-              <a:defRPr sz="1700" b="0">
-                <a:solidFill>
-                  <a:srgbClr val="333333"/>
-                </a:solidFill>
-                <a:latin typeface="Palatino Linotype"/>
-              </a:defRPr>
-            </a:pPr>
-            <a:r>
-              <a:t>Use simulation to evaluate configurations (under 2% error)</a:t>
-            </a:r>
-          </a:p>
-        </p:txBody>
-      </p:sp>
-      <p:sp>
-        <p:nvSpPr>
-          <p:cNvPr id="6" name="TextBox 5"/>
+            <a:r>
+              <a:rPr lang="en-US" dirty="0"/>
+              <a:t>1 A100, 13B LLM, 512 prompt and 64 output tokens to simulate an article summary task.</a:t>
+            </a:r>
+          </a:p>
+          <a:p>
+            <a:endParaRPr lang="en-US" dirty="0"/>
+          </a:p>
+        </p:txBody>
+      </p:sp>
+      <p:sp>
+        <p:nvSpPr>
+          <p:cNvPr id="10" name="TextBox 9"/>
           <p:cNvSpPr txBox="1"/>
           <p:nvPr/>
         </p:nvSpPr>
@@ -8067,13 +7650,13 @@
           <a:noFill/>
         </p:spPr>
         <p:txBody>
-          <a:bodyPr wrap="square">
+          <a:bodyPr wrap="none">
             <a:spAutoFit/>
           </a:bodyPr>
           <a:lstStyle/>
           <a:p>
             <a:pPr algn="r">
-              <a:defRPr sz="1000" b="0">
+              <a:defRPr sz="1000">
                 <a:solidFill>
                   <a:srgbClr val="AAAAAA"/>
                 </a:solidFill>
@@ -8081,7 +7664,7 @@
               </a:defRPr>
             </a:pPr>
             <a:r>
-              <a:t>20</a:t>
+              <a:t>19</a:t>
             </a:r>
           </a:p>
         </p:txBody>
@@ -8107,7 +7690,13 @@
     </p:bg>
     <p:spTree>
       <p:nvGrpSpPr>
-        <p:cNvPr id="1" name=""/>
+        <p:cNvPr id="1" name="">
+          <a:extLst>
+            <a:ext uri="{FF2B5EF4-FFF2-40B4-BE49-F238E27FC236}">
+              <a16:creationId xmlns:a16="http://schemas.microsoft.com/office/drawing/2014/main" id="{F9EE8FFB-4DC0-B5EB-8BEE-52B1D53C27DE}"/>
+            </a:ext>
+          </a:extLst>
+        </p:cNvPr>
         <p:cNvGrpSpPr/>
         <p:nvPr/>
       </p:nvGrpSpPr>
@@ -8121,14 +7710,20 @@
       </p:grpSpPr>
       <p:sp>
         <p:nvSpPr>
-          <p:cNvPr id="2" name="TextBox 1"/>
+          <p:cNvPr id="2" name="TextBox 1">
+            <a:extLst>
+              <a:ext uri="{FF2B5EF4-FFF2-40B4-BE49-F238E27FC236}">
+                <a16:creationId xmlns:a16="http://schemas.microsoft.com/office/drawing/2014/main" id="{178C92EF-7CEA-61CE-77C4-23C5D92AAB14}"/>
+              </a:ext>
+            </a:extLst>
+          </p:cNvPr>
           <p:cNvSpPr txBox="1"/>
           <p:nvPr/>
         </p:nvSpPr>
         <p:spPr>
           <a:xfrm>
             <a:off x="1097280" y="457200"/>
-            <a:ext cx="10058400" cy="640080"/>
+            <a:ext cx="10058400" cy="615553"/>
           </a:xfrm>
           <a:prstGeom prst="rect">
             <a:avLst/>
@@ -8150,65 +7745,29 @@
               </a:defRPr>
             </a:pPr>
             <a:r>
-              <a:t>Tradeoff Analysis After Disaggregation</a:t>
-            </a:r>
-          </a:p>
-        </p:txBody>
-      </p:sp>
-      <p:sp>
-        <p:nvSpPr>
-          <p:cNvPr id="3" name="Rectangle 2"/>
-          <p:cNvSpPr/>
-          <p:nvPr/>
-        </p:nvSpPr>
-        <p:spPr>
-          <a:xfrm>
-            <a:off x="1097280" y="1554480"/>
-            <a:ext cx="4754880" cy="3474720"/>
-          </a:xfrm>
-          <a:prstGeom prst="rect">
-            <a:avLst/>
-          </a:prstGeom>
-          <a:solidFill>
-            <a:srgbClr val="E8EEF8"/>
-          </a:solidFill>
-          <a:ln>
-            <a:noFill/>
-          </a:ln>
-        </p:spPr>
-        <p:style>
-          <a:lnRef idx="1">
-            <a:schemeClr val="accent1"/>
-          </a:lnRef>
-          <a:fillRef idx="3">
-            <a:schemeClr val="accent1"/>
-          </a:fillRef>
-          <a:effectRef idx="2">
-            <a:schemeClr val="accent1"/>
-          </a:effectRef>
-          <a:fontRef idx="minor">
-            <a:schemeClr val="lt1"/>
-          </a:fontRef>
-        </p:style>
-        <p:txBody>
-          <a:bodyPr rtlCol="0" anchor="ctr"/>
-          <a:lstStyle/>
-          <a:p>
-            <a:pPr algn="ctr"/>
-            <a:endParaRPr/>
-          </a:p>
-        </p:txBody>
-      </p:sp>
-      <p:sp>
-        <p:nvSpPr>
-          <p:cNvPr id="4" name="TextBox 3"/>
+              <a:rPr lang="en-US" dirty="0"/>
+              <a:t>Why Not Chunked Prefill?</a:t>
+            </a:r>
+            <a:endParaRPr dirty="0"/>
+          </a:p>
+        </p:txBody>
+      </p:sp>
+      <p:sp>
+        <p:nvSpPr>
+          <p:cNvPr id="9" name="TextBox 8">
+            <a:extLst>
+              <a:ext uri="{FF2B5EF4-FFF2-40B4-BE49-F238E27FC236}">
+                <a16:creationId xmlns:a16="http://schemas.microsoft.com/office/drawing/2014/main" id="{F90A6AC1-50AF-A7C2-B843-0D4947AC269D}"/>
+              </a:ext>
+            </a:extLst>
+          </p:cNvPr>
           <p:cNvSpPr txBox="1"/>
           <p:nvPr/>
         </p:nvSpPr>
         <p:spPr>
           <a:xfrm>
-            <a:off x="1371600" y="1645920"/>
-            <a:ext cx="4206240" cy="3291840"/>
+            <a:off x="3929148" y="5960209"/>
+            <a:ext cx="4333702" cy="646331"/>
           </a:xfrm>
           <a:prstGeom prst="rect">
             <a:avLst/>
@@ -8216,175 +7775,78 @@
           <a:noFill/>
         </p:spPr>
         <p:txBody>
-          <a:bodyPr wrap="square">
+          <a:bodyPr wrap="square" rtlCol="0">
             <a:spAutoFit/>
           </a:bodyPr>
           <a:lstStyle/>
           <a:p>
-            <a:pPr algn="l">
-              <a:defRPr sz="2000" b="1">
-                <a:solidFill>
-                  <a:srgbClr val="1A56DB"/>
-                </a:solidFill>
-                <a:latin typeface="Palatino Linotype"/>
-              </a:defRPr>
-            </a:pPr>
-            <a:r>
-              <a:t>Prefill Instances</a:t>
-            </a:r>
-          </a:p>
-          <a:p>
-            <a:pPr>
-              <a:spcBef>
-                <a:spcPts val="1000"/>
-              </a:spcBef>
-              <a:defRPr sz="1500" b="0">
-                <a:solidFill>
-                  <a:srgbClr val="333333"/>
-                </a:solidFill>
-                <a:latin typeface="Palatino Linotype"/>
-              </a:defRPr>
-            </a:pPr>
-            <a:r>
-              <a:t>Modeled as M/D/1 queue</a:t>
-            </a:r>
-          </a:p>
-          <a:p>
-            <a:pPr>
-              <a:spcBef>
-                <a:spcPts val="600"/>
-              </a:spcBef>
-              <a:defRPr sz="1500" b="0">
-                <a:solidFill>
-                  <a:srgbClr val="333333"/>
-                </a:solidFill>
-                <a:latin typeface="Palatino Linotype"/>
-              </a:defRPr>
-            </a:pPr>
-            <a:r>
-              <a:t>Avg TTFT = execution time + queuing delay</a:t>
-            </a:r>
-          </a:p>
-          <a:p>
-            <a:pPr>
-              <a:spcBef>
-                <a:spcPts val="1000"/>
-              </a:spcBef>
-              <a:defRPr sz="1500" b="0">
-                <a:solidFill>
-                  <a:srgbClr val="333333"/>
-                </a:solidFill>
-                <a:latin typeface="Palatino Linotype"/>
-              </a:defRPr>
-            </a:pPr>
-            <a:r>
-              <a:t>Low request rates:</a:t>
-            </a:r>
-          </a:p>
-          <a:p>
-            <a:pPr lvl="1">
-              <a:spcBef>
-                <a:spcPts val="600"/>
-              </a:spcBef>
-              <a:defRPr sz="1300" b="0">
-                <a:solidFill>
-                  <a:srgbClr val="666666"/>
-                </a:solidFill>
-                <a:latin typeface="Palatino Linotype"/>
-              </a:defRPr>
-            </a:pPr>
-            <a:r>
-              <a:t>Tensor parallelism better (cuts execution time)</a:t>
-            </a:r>
-          </a:p>
-          <a:p>
-            <a:pPr>
-              <a:spcBef>
-                <a:spcPts val="600"/>
-              </a:spcBef>
-              <a:defRPr sz="1500" b="0">
-                <a:solidFill>
-                  <a:srgbClr val="333333"/>
-                </a:solidFill>
-                <a:latin typeface="Palatino Linotype"/>
-              </a:defRPr>
-            </a:pPr>
-            <a:r>
-              <a:t>High request rates:</a:t>
-            </a:r>
-          </a:p>
-          <a:p>
-            <a:pPr lvl="1">
-              <a:spcBef>
-                <a:spcPts val="600"/>
-              </a:spcBef>
-              <a:defRPr sz="1300" b="0">
-                <a:solidFill>
-                  <a:srgbClr val="666666"/>
-                </a:solidFill>
-                <a:latin typeface="Palatino Linotype"/>
-              </a:defRPr>
-            </a:pPr>
-            <a:r>
-              <a:t>Pipeline parallelism better (handles queuing)</a:t>
-            </a:r>
-          </a:p>
-        </p:txBody>
-      </p:sp>
-      <p:sp>
-        <p:nvSpPr>
-          <p:cNvPr id="5" name="Rectangle 4"/>
-          <p:cNvSpPr/>
-          <p:nvPr/>
-        </p:nvSpPr>
-        <p:spPr>
-          <a:xfrm>
-            <a:off x="6309360" y="1554480"/>
-            <a:ext cx="4754880" cy="3474720"/>
-          </a:xfrm>
-          <a:prstGeom prst="rect">
-            <a:avLst/>
-          </a:prstGeom>
-          <a:solidFill>
-            <a:srgbClr val="E8F5F0"/>
-          </a:solidFill>
-          <a:ln>
-            <a:noFill/>
-          </a:ln>
-        </p:spPr>
-        <p:style>
-          <a:lnRef idx="1">
-            <a:schemeClr val="accent1"/>
-          </a:lnRef>
-          <a:fillRef idx="3">
-            <a:schemeClr val="accent1"/>
-          </a:fillRef>
-          <a:effectRef idx="2">
-            <a:schemeClr val="accent1"/>
-          </a:effectRef>
-          <a:fontRef idx="minor">
-            <a:schemeClr val="lt1"/>
-          </a:fontRef>
-        </p:style>
-        <p:txBody>
-          <a:bodyPr rtlCol="0" anchor="ctr"/>
-          <a:lstStyle/>
-          <a:p>
-            <a:pPr algn="ctr"/>
-            <a:endParaRPr/>
-          </a:p>
-        </p:txBody>
-      </p:sp>
-      <p:sp>
-        <p:nvSpPr>
-          <p:cNvPr id="6" name="TextBox 5"/>
+            <a:r>
+              <a:rPr lang="en-US" dirty="0"/>
+              <a:t>Mixed Chunk / Chunked Prefill: Sarathi Serve</a:t>
+            </a:r>
+          </a:p>
+          <a:p>
+            <a:endParaRPr lang="en-US" dirty="0"/>
+          </a:p>
+        </p:txBody>
+      </p:sp>
+      <p:pic>
+        <p:nvPicPr>
+          <p:cNvPr id="1026" name="Picture 2" descr="Summary: Taming Throughput-Latency Tradeoff in LLM Inference with Sarathi- Serve - Wentao's Blog">
+            <a:extLst>
+              <a:ext uri="{FF2B5EF4-FFF2-40B4-BE49-F238E27FC236}">
+                <a16:creationId xmlns:a16="http://schemas.microsoft.com/office/drawing/2014/main" id="{3DFF7814-A917-5D82-84E6-995F73367429}"/>
+              </a:ext>
+            </a:extLst>
+          </p:cNvPr>
+          <p:cNvPicPr>
+            <a:picLocks noChangeAspect="1" noChangeArrowheads="1"/>
+          </p:cNvPicPr>
+          <p:nvPr/>
+        </p:nvPicPr>
+        <p:blipFill>
+          <a:blip r:embed="rId2">
+            <a:extLst>
+              <a:ext uri="{28A0092B-C50C-407E-A947-70E740481C1C}">
+                <a14:useLocalDpi xmlns:a14="http://schemas.microsoft.com/office/drawing/2010/main" val="0"/>
+              </a:ext>
+            </a:extLst>
+          </a:blip>
+          <a:srcRect/>
+          <a:stretch>
+            <a:fillRect/>
+          </a:stretch>
+        </p:blipFill>
+        <p:spPr bwMode="auto">
+          <a:xfrm>
+            <a:off x="2928818" y="1656475"/>
+            <a:ext cx="6334363" cy="3805904"/>
+          </a:xfrm>
+          <a:prstGeom prst="rect">
+            <a:avLst/>
+          </a:prstGeom>
+          <a:noFill/>
+          <a:extLst>
+            <a:ext uri="{909E8E84-426E-40DD-AFC4-6F175D3DCCD1}">
+              <a14:hiddenFill xmlns:a14="http://schemas.microsoft.com/office/drawing/2010/main">
+                <a:solidFill>
+                  <a:srgbClr val="FFFFFF"/>
+                </a:solidFill>
+              </a14:hiddenFill>
+            </a:ext>
+          </a:extLst>
+        </p:spPr>
+      </p:pic>
+      <p:sp>
+        <p:nvSpPr>
+          <p:cNvPr id="1027" name="TextBox 1026"/>
           <p:cNvSpPr txBox="1"/>
           <p:nvPr/>
         </p:nvSpPr>
         <p:spPr>
           <a:xfrm>
-            <a:off x="6583680" y="1645920"/>
-            <a:ext cx="4206240" cy="3291840"/>
+            <a:off x="11338560" y="6446520"/>
+            <a:ext cx="640080" cy="320040"/>
           </a:xfrm>
           <a:prstGeom prst="rect">
             <a:avLst/>
@@ -8392,225 +7854,13 @@
           <a:noFill/>
         </p:spPr>
         <p:txBody>
-          <a:bodyPr wrap="square">
+          <a:bodyPr wrap="none">
             <a:spAutoFit/>
           </a:bodyPr>
           <a:lstStyle/>
           <a:p>
-            <a:pPr algn="l">
-              <a:defRPr sz="2000" b="1">
-                <a:solidFill>
-                  <a:srgbClr val="0E6E6E"/>
-                </a:solidFill>
-                <a:latin typeface="Palatino Linotype"/>
-              </a:defRPr>
-            </a:pPr>
-            <a:r>
-              <a:t>Decoding Instances</a:t>
-            </a:r>
-          </a:p>
-          <a:p>
-            <a:pPr>
-              <a:spcBef>
-                <a:spcPts val="1000"/>
-              </a:spcBef>
-              <a:defRPr sz="1500" b="0">
-                <a:solidFill>
-                  <a:srgbClr val="333333"/>
-                </a:solidFill>
-                <a:latin typeface="Palatino Linotype"/>
-              </a:defRPr>
-            </a:pPr>
-            <a:r>
-              <a:t>Single job is bandwidth-bound</a:t>
-            </a:r>
-          </a:p>
-          <a:p>
-            <a:pPr>
-              <a:spcBef>
-                <a:spcPts val="600"/>
-              </a:spcBef>
-              <a:defRPr sz="1500" b="0">
-                <a:solidFill>
-                  <a:srgbClr val="333333"/>
-                </a:solidFill>
-                <a:latin typeface="Palatino Linotype"/>
-              </a:defRPr>
-            </a:pPr>
-            <a:r>
-              <a:t>Batching is essential for utilization</a:t>
-            </a:r>
-          </a:p>
-          <a:p>
-            <a:pPr>
-              <a:spcBef>
-                <a:spcPts val="1000"/>
-              </a:spcBef>
-              <a:defRPr sz="1500" b="0">
-                <a:solidFill>
-                  <a:srgbClr val="333333"/>
-                </a:solidFill>
-                <a:latin typeface="Palatino Linotype"/>
-              </a:defRPr>
-            </a:pPr>
-            <a:r>
-              <a:t>Disaggregation helps:</a:t>
-            </a:r>
-          </a:p>
-          <a:p>
-            <a:pPr lvl="1">
-              <a:spcBef>
-                <a:spcPts val="600"/>
-              </a:spcBef>
-              <a:defRPr sz="1300" b="0">
-                <a:solidFill>
-                  <a:srgbClr val="666666"/>
-                </a:solidFill>
-                <a:latin typeface="Palatino Linotype"/>
-              </a:defRPr>
-            </a:pPr>
-            <a:r>
-              <a:t>Multiple prefill instances feed one decoder</a:t>
-            </a:r>
-          </a:p>
-          <a:p>
-            <a:pPr lvl="1">
-              <a:spcBef>
-                <a:spcPts val="600"/>
-              </a:spcBef>
-              <a:defRPr sz="1300" b="0">
-                <a:solidFill>
-                  <a:srgbClr val="666666"/>
-                </a:solidFill>
-                <a:latin typeface="Palatino Linotype"/>
-              </a:defRPr>
-            </a:pPr>
-            <a:r>
-              <a:t>Naturally larger batches, better GPU use</a:t>
-            </a:r>
-          </a:p>
-          <a:p>
-            <a:pPr>
-              <a:spcBef>
-                <a:spcPts val="600"/>
-              </a:spcBef>
-              <a:defRPr sz="1500" b="0">
-                <a:solidFill>
-                  <a:srgbClr val="333333"/>
-                </a:solidFill>
-                <a:latin typeface="Palatino Linotype"/>
-              </a:defRPr>
-            </a:pPr>
-            <a:r>
-              <a:t>Large batches approach compute-bound</a:t>
-            </a:r>
-          </a:p>
-        </p:txBody>
-      </p:sp>
-      <p:sp>
-        <p:nvSpPr>
-          <p:cNvPr id="7" name="Rectangle 6"/>
-          <p:cNvSpPr/>
-          <p:nvPr/>
-        </p:nvSpPr>
-        <p:spPr>
-          <a:xfrm>
-            <a:off x="1097280" y="5303520"/>
-            <a:ext cx="10058400" cy="640080"/>
-          </a:xfrm>
-          <a:prstGeom prst="rect">
-            <a:avLst/>
-          </a:prstGeom>
-          <a:solidFill>
-            <a:srgbClr val="F8F9FA"/>
-          </a:solidFill>
-          <a:ln>
-            <a:noFill/>
-          </a:ln>
-        </p:spPr>
-        <p:style>
-          <a:lnRef idx="1">
-            <a:schemeClr val="accent1"/>
-          </a:lnRef>
-          <a:fillRef idx="3">
-            <a:schemeClr val="accent1"/>
-          </a:fillRef>
-          <a:effectRef idx="2">
-            <a:schemeClr val="accent1"/>
-          </a:effectRef>
-          <a:fontRef idx="minor">
-            <a:schemeClr val="lt1"/>
-          </a:fontRef>
-        </p:style>
-        <p:txBody>
-          <a:bodyPr rtlCol="0" anchor="ctr"/>
-          <a:lstStyle/>
-          <a:p>
-            <a:pPr algn="ctr"/>
-            <a:endParaRPr/>
-          </a:p>
-        </p:txBody>
-      </p:sp>
-      <p:sp>
-        <p:nvSpPr>
-          <p:cNvPr id="8" name="TextBox 7"/>
-          <p:cNvSpPr txBox="1"/>
-          <p:nvPr/>
-        </p:nvSpPr>
-        <p:spPr>
-          <a:xfrm>
-            <a:off x="1371600" y="5349240"/>
-            <a:ext cx="9418320" cy="548640"/>
-          </a:xfrm>
-          <a:prstGeom prst="rect">
-            <a:avLst/>
-          </a:prstGeom>
-          <a:noFill/>
-        </p:spPr>
-        <p:txBody>
-          <a:bodyPr wrap="square">
-            <a:spAutoFit/>
-          </a:bodyPr>
-          <a:lstStyle/>
-          <a:p>
-            <a:pPr algn="ctr">
-              <a:defRPr sz="1700" b="1">
-                <a:solidFill>
-                  <a:srgbClr val="1A56DB"/>
-                </a:solidFill>
-                <a:latin typeface="Palatino Linotype"/>
-              </a:defRPr>
-            </a:pPr>
-            <a:r>
-              <a:t>After disaggregation, each phase has independent knobs. Impossible when sharing GPUs.</a:t>
-            </a:r>
-          </a:p>
-        </p:txBody>
-      </p:sp>
-      <p:sp>
-        <p:nvSpPr>
-          <p:cNvPr id="9" name="TextBox 8"/>
-          <p:cNvSpPr txBox="1"/>
-          <p:nvPr/>
-        </p:nvSpPr>
-        <p:spPr>
-          <a:xfrm>
-            <a:off x="11338560" y="6446520"/>
-            <a:ext cx="640080" cy="320040"/>
-          </a:xfrm>
-          <a:prstGeom prst="rect">
-            <a:avLst/>
-          </a:prstGeom>
-          <a:noFill/>
-        </p:spPr>
-        <p:txBody>
-          <a:bodyPr wrap="square">
-            <a:spAutoFit/>
-          </a:bodyPr>
-          <a:lstStyle/>
-          <a:p>
             <a:pPr algn="r">
-              <a:defRPr sz="1000" b="0">
+              <a:defRPr sz="1000">
                 <a:solidFill>
                   <a:srgbClr val="AAAAAA"/>
                 </a:solidFill>
@@ -8618,12 +7868,17 @@
               </a:defRPr>
             </a:pPr>
             <a:r>
-              <a:t>21</a:t>
+              <a:t>20</a:t>
             </a:r>
           </a:p>
         </p:txBody>
       </p:sp>
     </p:spTree>
+    <p:extLst>
+      <p:ext uri="{BB962C8B-B14F-4D97-AF65-F5344CB8AC3E}">
+        <p14:creationId xmlns:p14="http://schemas.microsoft.com/office/powerpoint/2010/main" val="472012369"/>
+      </p:ext>
+    </p:extLst>
   </p:cSld>
   <p:clrMapOvr>
     <a:masterClrMapping/>
@@ -8664,8 +7919,8 @@
         </p:nvSpPr>
         <p:spPr>
           <a:xfrm>
-            <a:off x="1097280" y="274320"/>
-            <a:ext cx="10058400" cy="548640"/>
+            <a:off x="1097280" y="457200"/>
+            <a:ext cx="10058400" cy="640080"/>
           </a:xfrm>
           <a:prstGeom prst="rect">
             <a:avLst/>
@@ -8679,7 +7934,7 @@
           <a:lstStyle/>
           <a:p>
             <a:pPr algn="l">
-              <a:defRPr sz="2400" b="1">
+              <a:defRPr sz="3400" b="1">
                 <a:solidFill>
                   <a:srgbClr val="1A1A1A"/>
                 </a:solidFill>
@@ -8687,14 +7942,388 @@
               </a:defRPr>
             </a:pPr>
             <a:r>
-              <a:t>DistServe System Architecture</a:t>
+              <a:rPr lang="en-US" dirty="0"/>
+              <a:t>Formal Analysis / Parallelism Tradeoff </a:t>
+            </a:r>
+            <a:endParaRPr dirty="0"/>
+          </a:p>
+        </p:txBody>
+      </p:sp>
+      <p:sp>
+        <p:nvSpPr>
+          <p:cNvPr id="3" name="Rectangle 2"/>
+          <p:cNvSpPr/>
+          <p:nvPr/>
+        </p:nvSpPr>
+        <p:spPr>
+          <a:xfrm>
+            <a:off x="1097280" y="1554480"/>
+            <a:ext cx="4754880" cy="2571471"/>
+          </a:xfrm>
+          <a:prstGeom prst="rect">
+            <a:avLst/>
+          </a:prstGeom>
+          <a:solidFill>
+            <a:srgbClr val="E8EEF8"/>
+          </a:solidFill>
+          <a:ln>
+            <a:noFill/>
+          </a:ln>
+        </p:spPr>
+        <p:style>
+          <a:lnRef idx="1">
+            <a:schemeClr val="accent1"/>
+          </a:lnRef>
+          <a:fillRef idx="3">
+            <a:schemeClr val="accent1"/>
+          </a:fillRef>
+          <a:effectRef idx="2">
+            <a:schemeClr val="accent1"/>
+          </a:effectRef>
+          <a:fontRef idx="minor">
+            <a:schemeClr val="lt1"/>
+          </a:fontRef>
+        </p:style>
+        <p:txBody>
+          <a:bodyPr rtlCol="0" anchor="ctr"/>
+          <a:lstStyle/>
+          <a:p>
+            <a:pPr algn="ctr"/>
+            <a:endParaRPr/>
+          </a:p>
+        </p:txBody>
+      </p:sp>
+      <p:sp>
+        <p:nvSpPr>
+          <p:cNvPr id="4" name="TextBox 3"/>
+          <p:cNvSpPr txBox="1"/>
+          <p:nvPr/>
+        </p:nvSpPr>
+        <p:spPr>
+          <a:xfrm>
+            <a:off x="1371600" y="1645920"/>
+            <a:ext cx="4206240" cy="3291840"/>
+          </a:xfrm>
+          <a:prstGeom prst="rect">
+            <a:avLst/>
+          </a:prstGeom>
+          <a:noFill/>
+        </p:spPr>
+        <p:txBody>
+          <a:bodyPr wrap="square">
+            <a:spAutoFit/>
+          </a:bodyPr>
+          <a:lstStyle/>
+          <a:p>
+            <a:pPr algn="l">
+              <a:defRPr sz="2000" b="1">
+                <a:solidFill>
+                  <a:srgbClr val="1A56DB"/>
+                </a:solidFill>
+                <a:latin typeface="Palatino Linotype"/>
+              </a:defRPr>
+            </a:pPr>
+            <a:r>
+              <a:rPr dirty="0"/>
+              <a:t>Prefill Instances</a:t>
+            </a:r>
+          </a:p>
+          <a:p>
+            <a:pPr>
+              <a:spcBef>
+                <a:spcPts val="1000"/>
+              </a:spcBef>
+              <a:defRPr sz="1500" b="0">
+                <a:solidFill>
+                  <a:srgbClr val="333333"/>
+                </a:solidFill>
+                <a:latin typeface="Palatino Linotype"/>
+              </a:defRPr>
+            </a:pPr>
+            <a:r>
+              <a:rPr dirty="0"/>
+              <a:t>Modeled as M/D/1 queue</a:t>
+            </a:r>
+          </a:p>
+          <a:p>
+            <a:pPr>
+              <a:spcBef>
+                <a:spcPts val="600"/>
+              </a:spcBef>
+              <a:defRPr sz="1500" b="0">
+                <a:solidFill>
+                  <a:srgbClr val="333333"/>
+                </a:solidFill>
+                <a:latin typeface="Palatino Linotype"/>
+              </a:defRPr>
+            </a:pPr>
+            <a:r>
+              <a:rPr dirty="0"/>
+              <a:t>Avg TTFT = execution time + queuing delay</a:t>
+            </a:r>
+          </a:p>
+          <a:p>
+            <a:pPr>
+              <a:spcBef>
+                <a:spcPts val="1000"/>
+              </a:spcBef>
+              <a:defRPr sz="1500" b="0">
+                <a:solidFill>
+                  <a:srgbClr val="333333"/>
+                </a:solidFill>
+                <a:latin typeface="Palatino Linotype"/>
+              </a:defRPr>
+            </a:pPr>
+            <a:r>
+              <a:rPr dirty="0"/>
+              <a:t>Low request rates:</a:t>
+            </a:r>
+          </a:p>
+          <a:p>
+            <a:pPr lvl="1">
+              <a:spcBef>
+                <a:spcPts val="600"/>
+              </a:spcBef>
+              <a:defRPr sz="1300" b="0">
+                <a:solidFill>
+                  <a:srgbClr val="666666"/>
+                </a:solidFill>
+                <a:latin typeface="Palatino Linotype"/>
+              </a:defRPr>
+            </a:pPr>
+            <a:r>
+              <a:rPr dirty="0"/>
+              <a:t>Tensor parallelism better (cuts execution time)</a:t>
+            </a:r>
+          </a:p>
+          <a:p>
+            <a:pPr>
+              <a:spcBef>
+                <a:spcPts val="600"/>
+              </a:spcBef>
+              <a:defRPr sz="1500" b="0">
+                <a:solidFill>
+                  <a:srgbClr val="333333"/>
+                </a:solidFill>
+                <a:latin typeface="Palatino Linotype"/>
+              </a:defRPr>
+            </a:pPr>
+            <a:r>
+              <a:rPr dirty="0"/>
+              <a:t>High request rates:</a:t>
+            </a:r>
+          </a:p>
+          <a:p>
+            <a:pPr lvl="1">
+              <a:spcBef>
+                <a:spcPts val="600"/>
+              </a:spcBef>
+              <a:defRPr sz="1300" b="0">
+                <a:solidFill>
+                  <a:srgbClr val="666666"/>
+                </a:solidFill>
+                <a:latin typeface="Palatino Linotype"/>
+              </a:defRPr>
+            </a:pPr>
+            <a:r>
+              <a:rPr dirty="0"/>
+              <a:t>Pipeline parallelism better (handles queuing)</a:t>
+            </a:r>
+          </a:p>
+        </p:txBody>
+      </p:sp>
+      <p:sp>
+        <p:nvSpPr>
+          <p:cNvPr id="5" name="Rectangle 4"/>
+          <p:cNvSpPr/>
+          <p:nvPr/>
+        </p:nvSpPr>
+        <p:spPr>
+          <a:xfrm>
+            <a:off x="6309360" y="1554480"/>
+            <a:ext cx="4754880" cy="2571471"/>
+          </a:xfrm>
+          <a:prstGeom prst="rect">
+            <a:avLst/>
+          </a:prstGeom>
+          <a:solidFill>
+            <a:srgbClr val="E8F5F0"/>
+          </a:solidFill>
+          <a:ln>
+            <a:noFill/>
+          </a:ln>
+        </p:spPr>
+        <p:style>
+          <a:lnRef idx="1">
+            <a:schemeClr val="accent1"/>
+          </a:lnRef>
+          <a:fillRef idx="3">
+            <a:schemeClr val="accent1"/>
+          </a:fillRef>
+          <a:effectRef idx="2">
+            <a:schemeClr val="accent1"/>
+          </a:effectRef>
+          <a:fontRef idx="minor">
+            <a:schemeClr val="lt1"/>
+          </a:fontRef>
+        </p:style>
+        <p:txBody>
+          <a:bodyPr rtlCol="0" anchor="ctr"/>
+          <a:lstStyle/>
+          <a:p>
+            <a:pPr algn="ctr"/>
+            <a:endParaRPr/>
+          </a:p>
+        </p:txBody>
+      </p:sp>
+      <p:sp>
+        <p:nvSpPr>
+          <p:cNvPr id="6" name="TextBox 5"/>
+          <p:cNvSpPr txBox="1"/>
+          <p:nvPr/>
+        </p:nvSpPr>
+        <p:spPr>
+          <a:xfrm>
+            <a:off x="6583680" y="1630930"/>
+            <a:ext cx="4206240" cy="3291840"/>
+          </a:xfrm>
+          <a:prstGeom prst="rect">
+            <a:avLst/>
+          </a:prstGeom>
+          <a:noFill/>
+        </p:spPr>
+        <p:txBody>
+          <a:bodyPr wrap="square">
+            <a:spAutoFit/>
+          </a:bodyPr>
+          <a:lstStyle/>
+          <a:p>
+            <a:pPr algn="l">
+              <a:defRPr sz="2000" b="1">
+                <a:solidFill>
+                  <a:srgbClr val="0E6E6E"/>
+                </a:solidFill>
+                <a:latin typeface="Palatino Linotype"/>
+              </a:defRPr>
+            </a:pPr>
+            <a:r>
+              <a:rPr dirty="0"/>
+              <a:t>Decoding Instances</a:t>
+            </a:r>
+          </a:p>
+          <a:p>
+            <a:pPr>
+              <a:spcBef>
+                <a:spcPts val="1000"/>
+              </a:spcBef>
+              <a:defRPr sz="1500" b="0">
+                <a:solidFill>
+                  <a:srgbClr val="333333"/>
+                </a:solidFill>
+                <a:latin typeface="Palatino Linotype"/>
+              </a:defRPr>
+            </a:pPr>
+            <a:r>
+              <a:rPr dirty="0"/>
+              <a:t>Single job is bandwidth-bound</a:t>
+            </a:r>
+          </a:p>
+          <a:p>
+            <a:pPr>
+              <a:spcBef>
+                <a:spcPts val="600"/>
+              </a:spcBef>
+              <a:defRPr sz="1500" b="0">
+                <a:solidFill>
+                  <a:srgbClr val="333333"/>
+                </a:solidFill>
+                <a:latin typeface="Palatino Linotype"/>
+              </a:defRPr>
+            </a:pPr>
+            <a:r>
+              <a:rPr dirty="0"/>
+              <a:t>Batching is essential for utilization</a:t>
+            </a:r>
+          </a:p>
+          <a:p>
+            <a:pPr>
+              <a:spcBef>
+                <a:spcPts val="1000"/>
+              </a:spcBef>
+              <a:defRPr sz="1500" b="0">
+                <a:solidFill>
+                  <a:srgbClr val="333333"/>
+                </a:solidFill>
+                <a:latin typeface="Palatino Linotype"/>
+              </a:defRPr>
+            </a:pPr>
+            <a:r>
+              <a:rPr dirty="0"/>
+              <a:t>Disaggregation helps:</a:t>
+            </a:r>
+          </a:p>
+          <a:p>
+            <a:pPr lvl="1">
+              <a:spcBef>
+                <a:spcPts val="600"/>
+              </a:spcBef>
+              <a:defRPr sz="1300" b="0">
+                <a:solidFill>
+                  <a:srgbClr val="666666"/>
+                </a:solidFill>
+                <a:latin typeface="Palatino Linotype"/>
+              </a:defRPr>
+            </a:pPr>
+            <a:r>
+              <a:rPr dirty="0"/>
+              <a:t>Multiple prefill instances feed one decoder</a:t>
+            </a:r>
+          </a:p>
+          <a:p>
+            <a:pPr lvl="1">
+              <a:spcBef>
+                <a:spcPts val="600"/>
+              </a:spcBef>
+              <a:defRPr sz="1300" b="0">
+                <a:solidFill>
+                  <a:srgbClr val="666666"/>
+                </a:solidFill>
+                <a:latin typeface="Palatino Linotype"/>
+              </a:defRPr>
+            </a:pPr>
+            <a:r>
+              <a:rPr dirty="0"/>
+              <a:t>Naturally larger batches, better GPU use</a:t>
+            </a:r>
+          </a:p>
+          <a:p>
+            <a:pPr>
+              <a:spcBef>
+                <a:spcPts val="600"/>
+              </a:spcBef>
+              <a:defRPr sz="1500" b="0">
+                <a:solidFill>
+                  <a:srgbClr val="333333"/>
+                </a:solidFill>
+                <a:latin typeface="Palatino Linotype"/>
+              </a:defRPr>
+            </a:pPr>
+            <a:r>
+              <a:rPr dirty="0"/>
+              <a:t>Large batches approach compute-bound</a:t>
             </a:r>
           </a:p>
         </p:txBody>
       </p:sp>
       <p:pic>
         <p:nvPicPr>
-          <p:cNvPr id="3" name="Picture 2" descr="ds_fig6_architecture.png"/>
+          <p:cNvPr id="11" name="Picture 10">
+            <a:extLst>
+              <a:ext uri="{FF2B5EF4-FFF2-40B4-BE49-F238E27FC236}">
+                <a16:creationId xmlns:a16="http://schemas.microsoft.com/office/drawing/2014/main" id="{E4F45936-2D6A-E4EC-B2DA-C595E4AABDA8}"/>
+              </a:ext>
+            </a:extLst>
+          </p:cNvPr>
           <p:cNvPicPr>
             <a:picLocks noChangeAspect="1"/>
           </p:cNvPicPr>
@@ -8708,24 +8337,54 @@
         </p:blipFill>
         <p:spPr>
           <a:xfrm>
-            <a:off x="1737360" y="1097280"/>
-            <a:ext cx="8686800" cy="4711219"/>
+            <a:off x="6309360" y="4399001"/>
+            <a:ext cx="4998720" cy="1168400"/>
           </a:xfrm>
           <a:prstGeom prst="rect">
             <a:avLst/>
           </a:prstGeom>
         </p:spPr>
       </p:pic>
-      <p:sp>
-        <p:nvSpPr>
-          <p:cNvPr id="4" name="TextBox 3"/>
+      <p:pic>
+        <p:nvPicPr>
+          <p:cNvPr id="13" name="Picture 12">
+            <a:extLst>
+              <a:ext uri="{FF2B5EF4-FFF2-40B4-BE49-F238E27FC236}">
+                <a16:creationId xmlns:a16="http://schemas.microsoft.com/office/drawing/2014/main" id="{A984CFE4-7676-2D3F-3C44-DF1C1E1745B9}"/>
+              </a:ext>
+            </a:extLst>
+          </p:cNvPr>
+          <p:cNvPicPr>
+            <a:picLocks noChangeAspect="1"/>
+          </p:cNvPicPr>
+          <p:nvPr/>
+        </p:nvPicPr>
+        <p:blipFill>
+          <a:blip r:embed="rId3"/>
+          <a:stretch>
+            <a:fillRect/>
+          </a:stretch>
+        </p:blipFill>
+        <p:spPr>
+          <a:xfrm>
+            <a:off x="1097280" y="4583151"/>
+            <a:ext cx="4051300" cy="800100"/>
+          </a:xfrm>
+          <a:prstGeom prst="rect">
+            <a:avLst/>
+          </a:prstGeom>
+        </p:spPr>
+      </p:pic>
+      <p:sp>
+        <p:nvSpPr>
+          <p:cNvPr id="14" name="TextBox 13"/>
           <p:cNvSpPr txBox="1"/>
           <p:nvPr/>
         </p:nvSpPr>
         <p:spPr>
           <a:xfrm>
-            <a:off x="1737360" y="5945659"/>
-            <a:ext cx="8686800" cy="365760"/>
+            <a:off x="11338560" y="6446520"/>
+            <a:ext cx="640080" cy="320040"/>
           </a:xfrm>
           <a:prstGeom prst="rect">
             <a:avLst/>
@@ -8733,13 +8392,13 @@
           <a:noFill/>
         </p:spPr>
         <p:txBody>
-          <a:bodyPr wrap="square">
+          <a:bodyPr wrap="none">
             <a:spAutoFit/>
           </a:bodyPr>
           <a:lstStyle/>
           <a:p>
-            <a:pPr algn="ctr">
-              <a:defRPr sz="1100" b="0">
+            <a:pPr algn="r">
+              <a:defRPr sz="1000">
                 <a:solidFill>
                   <a:srgbClr val="AAAAAA"/>
                 </a:solidFill>
@@ -8747,43 +8406,7 @@
               </a:defRPr>
             </a:pPr>
             <a:r>
-              <a:t>Source: Zhong et al., OSDI 2024, Figure 6</a:t>
-            </a:r>
-          </a:p>
-        </p:txBody>
-      </p:sp>
-      <p:sp>
-        <p:nvSpPr>
-          <p:cNvPr id="5" name="TextBox 4"/>
-          <p:cNvSpPr txBox="1"/>
-          <p:nvPr/>
-        </p:nvSpPr>
-        <p:spPr>
-          <a:xfrm>
-            <a:off x="11338560" y="6446520"/>
-            <a:ext cx="640080" cy="320040"/>
-          </a:xfrm>
-          <a:prstGeom prst="rect">
-            <a:avLst/>
-          </a:prstGeom>
-          <a:noFill/>
-        </p:spPr>
-        <p:txBody>
-          <a:bodyPr wrap="square">
-            <a:spAutoFit/>
-          </a:bodyPr>
-          <a:lstStyle/>
-          <a:p>
-            <a:pPr algn="r">
-              <a:defRPr sz="1000" b="0">
-                <a:solidFill>
-                  <a:srgbClr val="AAAAAA"/>
-                </a:solidFill>
-                <a:latin typeface="Palatino Linotype"/>
-              </a:defRPr>
-            </a:pPr>
-            <a:r>
-              <a:t>22</a:t>
+              <a:t>21</a:t>
             </a:r>
           </a:p>
         </p:txBody>
@@ -8829,8 +8452,8 @@
         </p:nvSpPr>
         <p:spPr>
           <a:xfrm>
-            <a:off x="1097280" y="457200"/>
-            <a:ext cx="10058400" cy="640080"/>
+            <a:off x="1097280" y="274320"/>
+            <a:ext cx="10058400" cy="548640"/>
           </a:xfrm>
           <a:prstGeom prst="rect">
             <a:avLst/>
@@ -8844,7 +8467,7 @@
           <a:lstStyle/>
           <a:p>
             <a:pPr algn="l">
-              <a:defRPr sz="3400" b="1">
+              <a:defRPr sz="2400" b="1">
                 <a:solidFill>
                   <a:srgbClr val="1A1A1A"/>
                 </a:solidFill>
@@ -8852,21 +8475,45 @@
               </a:defRPr>
             </a:pPr>
             <a:r>
-              <a:t>Placement Algorithms</a:t>
-            </a:r>
-          </a:p>
-        </p:txBody>
-      </p:sp>
-      <p:sp>
-        <p:nvSpPr>
-          <p:cNvPr id="3" name="TextBox 2"/>
+              <a:t>DistServe System Architecture</a:t>
+            </a:r>
+          </a:p>
+        </p:txBody>
+      </p:sp>
+      <p:pic>
+        <p:nvPicPr>
+          <p:cNvPr id="3" name="Picture 2" descr="ds_fig6_architecture.png"/>
+          <p:cNvPicPr>
+            <a:picLocks noChangeAspect="1"/>
+          </p:cNvPicPr>
+          <p:nvPr/>
+        </p:nvPicPr>
+        <p:blipFill>
+          <a:blip r:embed="rId2"/>
+          <a:stretch>
+            <a:fillRect/>
+          </a:stretch>
+        </p:blipFill>
+        <p:spPr>
+          <a:xfrm>
+            <a:off x="1737360" y="1097280"/>
+            <a:ext cx="8686800" cy="4711219"/>
+          </a:xfrm>
+          <a:prstGeom prst="rect">
+            <a:avLst/>
+          </a:prstGeom>
+        </p:spPr>
+      </p:pic>
+      <p:sp>
+        <p:nvSpPr>
+          <p:cNvPr id="4" name="TextBox 3"/>
           <p:cNvSpPr txBox="1"/>
           <p:nvPr/>
         </p:nvSpPr>
         <p:spPr>
           <a:xfrm>
-            <a:off x="1097280" y="1280160"/>
-            <a:ext cx="10058400" cy="457200"/>
+            <a:off x="1737360" y="5945659"/>
+            <a:ext cx="8686800" cy="365760"/>
           </a:xfrm>
           <a:prstGeom prst="rect">
             <a:avLst/>
@@ -8879,6 +8526,147 @@
           </a:bodyPr>
           <a:lstStyle/>
           <a:p>
+            <a:pPr algn="ctr">
+              <a:defRPr sz="1100" b="0">
+                <a:solidFill>
+                  <a:srgbClr val="AAAAAA"/>
+                </a:solidFill>
+                <a:latin typeface="Palatino Linotype"/>
+              </a:defRPr>
+            </a:pPr>
+            <a:r>
+              <a:t>Source: Zhong et al., OSDI 2024, Figure 6</a:t>
+            </a:r>
+          </a:p>
+        </p:txBody>
+      </p:sp>
+      <p:sp>
+        <p:nvSpPr>
+          <p:cNvPr id="5" name="TextBox 4"/>
+          <p:cNvSpPr txBox="1"/>
+          <p:nvPr/>
+        </p:nvSpPr>
+        <p:spPr>
+          <a:xfrm>
+            <a:off x="11338560" y="6446520"/>
+            <a:ext cx="640080" cy="320040"/>
+          </a:xfrm>
+          <a:prstGeom prst="rect">
+            <a:avLst/>
+          </a:prstGeom>
+          <a:noFill/>
+        </p:spPr>
+        <p:txBody>
+          <a:bodyPr wrap="none">
+            <a:spAutoFit/>
+          </a:bodyPr>
+          <a:lstStyle/>
+          <a:p>
+            <a:pPr algn="r">
+              <a:defRPr sz="1000">
+                <a:solidFill>
+                  <a:srgbClr val="AAAAAA"/>
+                </a:solidFill>
+                <a:latin typeface="Palatino Linotype"/>
+              </a:defRPr>
+            </a:pPr>
+            <a:r>
+              <a:t>22</a:t>
+            </a:r>
+          </a:p>
+        </p:txBody>
+      </p:sp>
+    </p:spTree>
+  </p:cSld>
+  <p:clrMapOvr>
+    <a:masterClrMapping/>
+  </p:clrMapOvr>
+</p:sld>
+</file>
+
+<file path=ppt/slides/slide24.xml><?xml version="1.0" encoding="utf-8"?>
+<p:sld xmlns:a="http://schemas.openxmlformats.org/drawingml/2006/main" xmlns:r="http://schemas.openxmlformats.org/officeDocument/2006/relationships" xmlns:p="http://schemas.openxmlformats.org/presentationml/2006/main">
+  <p:cSld>
+    <p:bg>
+      <p:bgPr>
+        <a:solidFill>
+          <a:srgbClr val="FFFFFF"/>
+        </a:solidFill>
+        <a:effectLst/>
+      </p:bgPr>
+    </p:bg>
+    <p:spTree>
+      <p:nvGrpSpPr>
+        <p:cNvPr id="1" name=""/>
+        <p:cNvGrpSpPr/>
+        <p:nvPr/>
+      </p:nvGrpSpPr>
+      <p:grpSpPr>
+        <a:xfrm>
+          <a:off x="0" y="0"/>
+          <a:ext cx="0" cy="0"/>
+          <a:chOff x="0" y="0"/>
+          <a:chExt cx="0" cy="0"/>
+        </a:xfrm>
+      </p:grpSpPr>
+      <p:sp>
+        <p:nvSpPr>
+          <p:cNvPr id="2" name="TextBox 1"/>
+          <p:cNvSpPr txBox="1"/>
+          <p:nvPr/>
+        </p:nvSpPr>
+        <p:spPr>
+          <a:xfrm>
+            <a:off x="1097280" y="457200"/>
+            <a:ext cx="10058400" cy="640080"/>
+          </a:xfrm>
+          <a:prstGeom prst="rect">
+            <a:avLst/>
+          </a:prstGeom>
+          <a:noFill/>
+        </p:spPr>
+        <p:txBody>
+          <a:bodyPr wrap="square">
+            <a:spAutoFit/>
+          </a:bodyPr>
+          <a:lstStyle/>
+          <a:p>
+            <a:pPr algn="l">
+              <a:defRPr sz="3400" b="1">
+                <a:solidFill>
+                  <a:srgbClr val="1A1A1A"/>
+                </a:solidFill>
+                <a:latin typeface="Palatino Linotype"/>
+              </a:defRPr>
+            </a:pPr>
+            <a:r>
+              <a:t>Placement Algorithms</a:t>
+            </a:r>
+          </a:p>
+        </p:txBody>
+      </p:sp>
+      <p:sp>
+        <p:nvSpPr>
+          <p:cNvPr id="3" name="TextBox 2"/>
+          <p:cNvSpPr txBox="1"/>
+          <p:nvPr/>
+        </p:nvSpPr>
+        <p:spPr>
+          <a:xfrm>
+            <a:off x="1097280" y="1280160"/>
+            <a:ext cx="10058400" cy="323165"/>
+          </a:xfrm>
+          <a:prstGeom prst="rect">
+            <a:avLst/>
+          </a:prstGeom>
+          <a:noFill/>
+        </p:spPr>
+        <p:txBody>
+          <a:bodyPr wrap="square">
+            <a:spAutoFit/>
+          </a:bodyPr>
+          <a:lstStyle/>
+          <a:p>
             <a:pPr algn="l">
               <a:defRPr sz="1500" b="0">
                 <a:solidFill>
@@ -8888,7 +8676,16 @@
               </a:defRPr>
             </a:pPr>
             <a:r>
-              <a:t>Input: model, workload, SLOs, cluster hardware.    Output: optimal parallelism + instance counts + placement.</a:t>
+              <a:rPr dirty="0"/>
+              <a:t>Input: model, workload, SLOs.    </a:t>
+            </a:r>
+            <a:r>
+              <a:rPr lang="en-US" dirty="0"/>
+              <a:t>                                                 </a:t>
+            </a:r>
+            <a:r>
+              <a:rPr dirty="0"/>
+              <a:t>Output: optimal parallelism + instance counts.</a:t>
             </a:r>
           </a:p>
         </p:txBody>
@@ -8946,7 +8743,7 @@
         <p:spPr>
           <a:xfrm>
             <a:off x="1371600" y="2103120"/>
-            <a:ext cx="4206240" cy="2560320"/>
+            <a:ext cx="4206240" cy="2103140"/>
           </a:xfrm>
           <a:prstGeom prst="rect">
             <a:avLst/>
@@ -8968,7 +8765,16 @@
               </a:defRPr>
             </a:pPr>
             <a:r>
-              <a:t>Algorithm 1: Fast cross-node network</a:t>
+              <a:rPr dirty="0"/>
+              <a:t>Algorithm 1: </a:t>
+            </a:r>
+            <a:r>
+              <a:rPr lang="en-US" dirty="0"/>
+              <a:t>for high speed</a:t>
+            </a:r>
+            <a:r>
+              <a:rPr dirty="0"/>
+              <a:t> cross-node network</a:t>
             </a:r>
           </a:p>
           <a:p>
@@ -8984,6 +8790,7 @@
               </a:defRPr>
             </a:pPr>
             <a:r>
+              <a:rPr dirty="0"/>
               <a:t>Enumerate parallelism configs</a:t>
             </a:r>
           </a:p>
@@ -9000,6 +8807,7 @@
               </a:defRPr>
             </a:pPr>
             <a:r>
+              <a:rPr dirty="0"/>
               <a:t>Simulate goodput for each</a:t>
             </a:r>
           </a:p>
@@ -9016,6 +8824,7 @@
               </a:defRPr>
             </a:pPr>
             <a:r>
+              <a:rPr dirty="0"/>
               <a:t>Pick best config per phase</a:t>
             </a:r>
           </a:p>
@@ -9032,6 +8841,7 @@
               </a:defRPr>
             </a:pPr>
             <a:r>
+              <a:rPr dirty="0"/>
               <a:t>Replicate to meet target rate</a:t>
             </a:r>
           </a:p>
@@ -9048,6 +8858,7 @@
               </a:defRPr>
             </a:pPr>
             <a:r>
+              <a:rPr dirty="0"/>
               <a:t>Runs in under 1.3 minutes</a:t>
             </a:r>
           </a:p>
@@ -9106,7 +8917,7 @@
         <p:spPr>
           <a:xfrm>
             <a:off x="6583680" y="2103120"/>
-            <a:ext cx="4206240" cy="2560320"/>
+            <a:ext cx="4206240" cy="1810752"/>
           </a:xfrm>
           <a:prstGeom prst="rect">
             <a:avLst/>
@@ -9128,8 +8939,22 @@
               </a:defRPr>
             </a:pPr>
             <a:r>
-              <a:t>Algorithm 2: Limited bandwidth</a:t>
-            </a:r>
+              <a:rPr dirty="0"/>
+              <a:t>Algorithm 2: </a:t>
+            </a:r>
+            <a:r>
+              <a:rPr lang="en-US" dirty="0"/>
+              <a:t>For l</a:t>
+            </a:r>
+            <a:r>
+              <a:rPr dirty="0"/>
+              <a:t>imited bandwidth</a:t>
+            </a:r>
+            <a:r>
+              <a:rPr lang="en-US" dirty="0"/>
+              <a:t> network</a:t>
+            </a:r>
+            <a:endParaRPr dirty="0"/>
           </a:p>
           <a:p>
             <a:pPr>
@@ -9144,6 +8969,7 @@
               </a:defRPr>
             </a:pPr>
             <a:r>
+              <a:rPr dirty="0"/>
               <a:t>Prefill + decode on same node</a:t>
             </a:r>
           </a:p>
@@ -9160,6 +8986,7 @@
               </a:defRPr>
             </a:pPr>
             <a:r>
+              <a:rPr dirty="0"/>
               <a:t>Use NVLINK for KV transfer</a:t>
             </a:r>
           </a:p>
@@ -9176,6 +9003,7 @@
               </a:defRPr>
             </a:pPr>
             <a:r>
+              <a:rPr dirty="0"/>
               <a:t>Co-optimize within node budget</a:t>
             </a:r>
           </a:p>
@@ -9192,6 +9020,7 @@
               </a:defRPr>
             </a:pPr>
             <a:r>
+              <a:rPr dirty="0"/>
               <a:t>Group layers into segments</a:t>
             </a:r>
           </a:p>
@@ -9294,13 +9123,13 @@
           <a:noFill/>
         </p:spPr>
         <p:txBody>
-          <a:bodyPr wrap="square">
+          <a:bodyPr wrap="none">
             <a:spAutoFit/>
           </a:bodyPr>
           <a:lstStyle/>
           <a:p>
             <a:pPr algn="r">
-              <a:defRPr sz="1000" b="0">
+              <a:defRPr sz="1000">
                 <a:solidFill>
                   <a:srgbClr val="AAAAAA"/>
                 </a:solidFill>
@@ -9321,7 +9150,7 @@
 </p:sld>
 </file>
 
-<file path=ppt/slides/slide24.xml><?xml version="1.0" encoding="utf-8"?>
+<file path=ppt/slides/slide25.xml><?xml version="1.0" encoding="utf-8"?>
 <p:sld xmlns:a="http://schemas.openxmlformats.org/drawingml/2006/main" xmlns:r="http://schemas.openxmlformats.org/officeDocument/2006/relationships" xmlns:p="http://schemas.openxmlformats.org/presentationml/2006/main">
   <p:cSld>
     <p:bg>
@@ -9608,6 +9437,7 @@
                         </a:defRPr>
                       </a:pPr>
                       <a:r>
+                        <a:rPr dirty="0"/>
                         <a:t>2.0x to 4.6x higher</a:t>
                       </a:r>
                     </a:p>
@@ -9656,6 +9486,7 @@
                         </a:defRPr>
                       </a:pPr>
                       <a:r>
+                        <a:rPr dirty="0"/>
                         <a:t>1.6x to 7.4x higher</a:t>
                       </a:r>
                     </a:p>
@@ -9862,6 +9693,7 @@
                         </a:defRPr>
                       </a:pPr>
                       <a:r>
+                        <a:rPr dirty="0"/>
                         <a:t>1.8x higher</a:t>
                       </a:r>
                     </a:p>
@@ -9913,6 +9745,7 @@
               </a:defRPr>
             </a:pPr>
             <a:r>
+              <a:rPr dirty="0"/>
               <a:t>Parallelism strategies chosen (different per phase):</a:t>
             </a:r>
           </a:p>
@@ -10235,6 +10068,7 @@
                         </a:defRPr>
                       </a:pPr>
                       <a:r>
+                        <a:rPr dirty="0"/>
                         <a:t>(3, 3)</a:t>
                       </a:r>
                     </a:p>
@@ -10259,6 +10093,7 @@
                         </a:defRPr>
                       </a:pPr>
                       <a:r>
+                        <a:rPr dirty="0"/>
                         <a:t>(4, 3)</a:t>
                       </a:r>
                     </a:p>
@@ -10296,13 +10131,13 @@
           <a:noFill/>
         </p:spPr>
         <p:txBody>
-          <a:bodyPr wrap="square">
+          <a:bodyPr wrap="none">
             <a:spAutoFit/>
           </a:bodyPr>
           <a:lstStyle/>
           <a:p>
             <a:pPr algn="r">
-              <a:defRPr sz="1000" b="0">
+              <a:defRPr sz="1000">
                 <a:solidFill>
                   <a:srgbClr val="AAAAAA"/>
                 </a:solidFill>
@@ -10311,171 +10146,6 @@
             </a:pPr>
             <a:r>
               <a:t>24</a:t>
-            </a:r>
-          </a:p>
-        </p:txBody>
-      </p:sp>
-    </p:spTree>
-  </p:cSld>
-  <p:clrMapOvr>
-    <a:masterClrMapping/>
-  </p:clrMapOvr>
-</p:sld>
-</file>
-
-<file path=ppt/slides/slide25.xml><?xml version="1.0" encoding="utf-8"?>
-<p:sld xmlns:a="http://schemas.openxmlformats.org/drawingml/2006/main" xmlns:r="http://schemas.openxmlformats.org/officeDocument/2006/relationships" xmlns:p="http://schemas.openxmlformats.org/presentationml/2006/main">
-  <p:cSld>
-    <p:bg>
-      <p:bgPr>
-        <a:solidFill>
-          <a:srgbClr val="FFFFFF"/>
-        </a:solidFill>
-        <a:effectLst/>
-      </p:bgPr>
-    </p:bg>
-    <p:spTree>
-      <p:nvGrpSpPr>
-        <p:cNvPr id="1" name=""/>
-        <p:cNvGrpSpPr/>
-        <p:nvPr/>
-      </p:nvGrpSpPr>
-      <p:grpSpPr>
-        <a:xfrm>
-          <a:off x="0" y="0"/>
-          <a:ext cx="0" cy="0"/>
-          <a:chOff x="0" y="0"/>
-          <a:chExt cx="0" cy="0"/>
-        </a:xfrm>
-      </p:grpSpPr>
-      <p:sp>
-        <p:nvSpPr>
-          <p:cNvPr id="2" name="TextBox 1"/>
-          <p:cNvSpPr txBox="1"/>
-          <p:nvPr/>
-        </p:nvSpPr>
-        <p:spPr>
-          <a:xfrm>
-            <a:off x="1097280" y="274320"/>
-            <a:ext cx="10058400" cy="548640"/>
-          </a:xfrm>
-          <a:prstGeom prst="rect">
-            <a:avLst/>
-          </a:prstGeom>
-          <a:noFill/>
-        </p:spPr>
-        <p:txBody>
-          <a:bodyPr wrap="square">
-            <a:spAutoFit/>
-          </a:bodyPr>
-          <a:lstStyle/>
-          <a:p>
-            <a:pPr algn="l">
-              <a:defRPr sz="2400" b="1">
-                <a:solidFill>
-                  <a:srgbClr val="1A1A1A"/>
-                </a:solidFill>
-                <a:latin typeface="Palatino Linotype"/>
-              </a:defRPr>
-            </a:pPr>
-            <a:r>
-              <a:t>DistServe Evaluation: Chatbot and Workloads</a:t>
-            </a:r>
-          </a:p>
-        </p:txBody>
-      </p:sp>
-      <p:pic>
-        <p:nvPicPr>
-          <p:cNvPr id="3" name="Picture 2" descr="ds_fig8_chatbot.png"/>
-          <p:cNvPicPr>
-            <a:picLocks noChangeAspect="1"/>
-          </p:cNvPicPr>
-          <p:nvPr/>
-        </p:nvPicPr>
-        <p:blipFill>
-          <a:blip r:embed="rId2"/>
-          <a:stretch>
-            <a:fillRect/>
-          </a:stretch>
-        </p:blipFill>
-        <p:spPr>
-          <a:xfrm>
-            <a:off x="1737360" y="1097280"/>
-            <a:ext cx="8686800" cy="4175268"/>
-          </a:xfrm>
-          <a:prstGeom prst="rect">
-            <a:avLst/>
-          </a:prstGeom>
-        </p:spPr>
-      </p:pic>
-      <p:sp>
-        <p:nvSpPr>
-          <p:cNvPr id="4" name="TextBox 3"/>
-          <p:cNvSpPr txBox="1"/>
-          <p:nvPr/>
-        </p:nvSpPr>
-        <p:spPr>
-          <a:xfrm>
-            <a:off x="1737360" y="5409708"/>
-            <a:ext cx="8686800" cy="365760"/>
-          </a:xfrm>
-          <a:prstGeom prst="rect">
-            <a:avLst/>
-          </a:prstGeom>
-          <a:noFill/>
-        </p:spPr>
-        <p:txBody>
-          <a:bodyPr wrap="square">
-            <a:spAutoFit/>
-          </a:bodyPr>
-          <a:lstStyle/>
-          <a:p>
-            <a:pPr algn="ctr">
-              <a:defRPr sz="1100" b="0">
-                <a:solidFill>
-                  <a:srgbClr val="AAAAAA"/>
-                </a:solidFill>
-                <a:latin typeface="Palatino Linotype"/>
-              </a:defRPr>
-            </a:pPr>
-            <a:r>
-              <a:t>Source: Zhong et al., OSDI 2024, Figure 8</a:t>
-            </a:r>
-          </a:p>
-        </p:txBody>
-      </p:sp>
-      <p:sp>
-        <p:nvSpPr>
-          <p:cNvPr id="5" name="TextBox 4"/>
-          <p:cNvSpPr txBox="1"/>
-          <p:nvPr/>
-        </p:nvSpPr>
-        <p:spPr>
-          <a:xfrm>
-            <a:off x="11338560" y="6446520"/>
-            <a:ext cx="640080" cy="320040"/>
-          </a:xfrm>
-          <a:prstGeom prst="rect">
-            <a:avLst/>
-          </a:prstGeom>
-          <a:noFill/>
-        </p:spPr>
-        <p:txBody>
-          <a:bodyPr wrap="square">
-            <a:spAutoFit/>
-          </a:bodyPr>
-          <a:lstStyle/>
-          <a:p>
-            <a:pPr algn="r">
-              <a:defRPr sz="1000" b="0">
-                <a:solidFill>
-                  <a:srgbClr val="AAAAAA"/>
-                </a:solidFill>
-                <a:latin typeface="Palatino Linotype"/>
-              </a:defRPr>
-            </a:pPr>
-            <a:r>
-              <a:t>25</a:t>
             </a:r>
           </a:p>
         </p:txBody>
@@ -10544,14 +10214,14 @@
               </a:defRPr>
             </a:pPr>
             <a:r>
-              <a:t>DistServe Evaluation: Code and Summarization</a:t>
+              <a:t>DistServe Evaluation: Chatbot and Workloads</a:t>
             </a:r>
           </a:p>
         </p:txBody>
       </p:sp>
       <p:pic>
         <p:nvPicPr>
-          <p:cNvPr id="3" name="Picture 2" descr="ds_fig9_code_summ.png"/>
+          <p:cNvPr id="3" name="Picture 2" descr="ds_fig8_chatbot.png"/>
           <p:cNvPicPr>
             <a:picLocks noChangeAspect="1"/>
           </p:cNvPicPr>
@@ -10566,7 +10236,7 @@
         <p:spPr>
           <a:xfrm>
             <a:off x="1737360" y="1097280"/>
-            <a:ext cx="8686800" cy="2705004"/>
+            <a:ext cx="8686800" cy="4175268"/>
           </a:xfrm>
           <a:prstGeom prst="rect">
             <a:avLst/>
@@ -10581,7 +10251,7 @@
         </p:nvSpPr>
         <p:spPr>
           <a:xfrm>
-            <a:off x="1737360" y="3939444"/>
+            <a:off x="1737360" y="5409708"/>
             <a:ext cx="8686800" cy="365760"/>
           </a:xfrm>
           <a:prstGeom prst="rect">
@@ -10604,7 +10274,7 @@
               </a:defRPr>
             </a:pPr>
             <a:r>
-              <a:t>Source: Zhong et al., OSDI 2024, Figure 9</a:t>
+              <a:t>Source: Zhong et al., OSDI 2024, Figure 8</a:t>
             </a:r>
           </a:p>
         </p:txBody>
@@ -10626,13 +10296,13 @@
           <a:noFill/>
         </p:spPr>
         <p:txBody>
-          <a:bodyPr wrap="square">
+          <a:bodyPr wrap="none">
             <a:spAutoFit/>
           </a:bodyPr>
           <a:lstStyle/>
           <a:p>
             <a:pPr algn="r">
-              <a:defRPr sz="1000" b="0">
+              <a:defRPr sz="1000">
                 <a:solidFill>
                   <a:srgbClr val="AAAAAA"/>
                 </a:solidFill>
@@ -10640,7 +10310,7 @@
               </a:defRPr>
             </a:pPr>
             <a:r>
-              <a:t>26</a:t>
+              <a:t>25</a:t>
             </a:r>
           </a:p>
         </p:txBody>
@@ -10686,8 +10356,8 @@
         </p:nvSpPr>
         <p:spPr>
           <a:xfrm>
-            <a:off x="1097280" y="457200"/>
-            <a:ext cx="10058400" cy="640080"/>
+            <a:off x="1097280" y="274320"/>
+            <a:ext cx="10058400" cy="548640"/>
           </a:xfrm>
           <a:prstGeom prst="rect">
             <a:avLst/>
@@ -10701,7 +10371,7 @@
           <a:lstStyle/>
           <a:p>
             <a:pPr algn="l">
-              <a:defRPr sz="3400" b="1">
+              <a:defRPr sz="2400" b="1">
                 <a:solidFill>
                   <a:srgbClr val="1A1A1A"/>
                 </a:solidFill>
@@ -10709,55 +10379,35 @@
               </a:defRPr>
             </a:pPr>
             <a:r>
-              <a:t>What Actually Matters?</a:t>
-            </a:r>
-          </a:p>
-        </p:txBody>
-      </p:sp>
-      <p:sp>
-        <p:nvSpPr>
-          <p:cNvPr id="3" name="Rectangle 2"/>
-          <p:cNvSpPr/>
-          <p:nvPr/>
-        </p:nvSpPr>
-        <p:spPr>
-          <a:xfrm>
-            <a:off x="1097280" y="1554480"/>
-            <a:ext cx="4754880" cy="2560320"/>
-          </a:xfrm>
-          <a:prstGeom prst="rect">
-            <a:avLst/>
-          </a:prstGeom>
-          <a:solidFill>
-            <a:srgbClr val="EFFAF4"/>
-          </a:solidFill>
-          <a:ln>
-            <a:noFill/>
-          </a:ln>
-        </p:spPr>
-        <p:style>
-          <a:lnRef idx="1">
-            <a:schemeClr val="accent1"/>
-          </a:lnRef>
-          <a:fillRef idx="3">
-            <a:schemeClr val="accent1"/>
-          </a:fillRef>
-          <a:effectRef idx="2">
-            <a:schemeClr val="accent1"/>
-          </a:effectRef>
-          <a:fontRef idx="minor">
-            <a:schemeClr val="lt1"/>
-          </a:fontRef>
-        </p:style>
-        <p:txBody>
-          <a:bodyPr rtlCol="0" anchor="ctr"/>
-          <a:lstStyle/>
-          <a:p>
-            <a:pPr algn="ctr"/>
-            <a:endParaRPr/>
-          </a:p>
-        </p:txBody>
-      </p:sp>
+              <a:t>DistServe Evaluation: Code and Summarization</a:t>
+            </a:r>
+          </a:p>
+        </p:txBody>
+      </p:sp>
+      <p:pic>
+        <p:nvPicPr>
+          <p:cNvPr id="3" name="Picture 2" descr="ds_fig9_code_summ.png"/>
+          <p:cNvPicPr>
+            <a:picLocks noChangeAspect="1"/>
+          </p:cNvPicPr>
+          <p:nvPr/>
+        </p:nvPicPr>
+        <p:blipFill>
+          <a:blip r:embed="rId2"/>
+          <a:stretch>
+            <a:fillRect/>
+          </a:stretch>
+        </p:blipFill>
+        <p:spPr>
+          <a:xfrm>
+            <a:off x="1737360" y="1097280"/>
+            <a:ext cx="8686800" cy="2705004"/>
+          </a:xfrm>
+          <a:prstGeom prst="rect">
+            <a:avLst/>
+          </a:prstGeom>
+        </p:spPr>
+      </p:pic>
       <p:sp>
         <p:nvSpPr>
           <p:cNvPr id="4" name="TextBox 3"/>
@@ -10766,8 +10416,8 @@
         </p:nvSpPr>
         <p:spPr>
           <a:xfrm>
-            <a:off x="1371600" y="1645920"/>
-            <a:ext cx="4206240" cy="2377440"/>
+            <a:off x="1737360" y="3939444"/>
+            <a:ext cx="8686800" cy="365760"/>
           </a:xfrm>
           <a:prstGeom prst="rect">
             <a:avLst/>
@@ -10780,138 +10430,30 @@
           </a:bodyPr>
           <a:lstStyle/>
           <a:p>
-            <a:pPr algn="l">
-              <a:defRPr sz="2000" b="1">
-                <a:solidFill>
-                  <a:srgbClr val="1E8A4C"/>
-                </a:solidFill>
-                <a:latin typeface="Palatino Linotype"/>
-              </a:defRPr>
-            </a:pPr>
-            <a:r>
-              <a:t>KV-Cache Transfer Cost</a:t>
-            </a:r>
-          </a:p>
-          <a:p>
-            <a:pPr>
-              <a:spcBef>
-                <a:spcPts val="1000"/>
-              </a:spcBef>
-              <a:defRPr sz="1500" b="0">
-                <a:solidFill>
-                  <a:srgbClr val="333333"/>
-                </a:solidFill>
-                <a:latin typeface="Palatino Linotype"/>
-              </a:defRPr>
-            </a:pPr>
-            <a:r>
-              <a:t>OPT-175B: under 0.1% of total latency</a:t>
-            </a:r>
-          </a:p>
-          <a:p>
-            <a:pPr>
-              <a:spcBef>
-                <a:spcPts val="600"/>
-              </a:spcBef>
-              <a:defRPr sz="1500" b="0">
-                <a:solidFill>
-                  <a:srgbClr val="333333"/>
-                </a:solidFill>
-                <a:latin typeface="Palatino Linotype"/>
-              </a:defRPr>
-            </a:pPr>
-            <a:r>
-              <a:t>95% of requests: under 30ms delay</a:t>
-            </a:r>
-          </a:p>
-          <a:p>
-            <a:pPr algn="l">
-              <a:spcBef>
-                <a:spcPts val="1200"/>
-              </a:spcBef>
-              <a:defRPr sz="1600" b="1">
-                <a:solidFill>
-                  <a:srgbClr val="1E8A4C"/>
-                </a:solidFill>
-                <a:latin typeface="Palatino Linotype"/>
-              </a:defRPr>
-            </a:pPr>
-            <a:r>
-              <a:t>Transfer is not the bottleneck.</a:t>
-            </a:r>
-          </a:p>
-          <a:p>
-            <a:pPr algn="l">
-              <a:spcBef>
-                <a:spcPts val="400"/>
-              </a:spcBef>
-              <a:defRPr sz="1400" b="0">
-                <a:solidFill>
-                  <a:srgbClr val="666666"/>
-                </a:solidFill>
-                <a:latin typeface="Palatino Linotype"/>
-              </a:defRPr>
-            </a:pPr>
-            <a:r>
-              <a:t>Confirms Splitwise's findings.</a:t>
-            </a:r>
-          </a:p>
-        </p:txBody>
-      </p:sp>
-      <p:sp>
-        <p:nvSpPr>
-          <p:cNvPr id="5" name="Rectangle 4"/>
-          <p:cNvSpPr/>
-          <p:nvPr/>
-        </p:nvSpPr>
-        <p:spPr>
-          <a:xfrm>
-            <a:off x="6309360" y="1554480"/>
-            <a:ext cx="4754880" cy="2560320"/>
-          </a:xfrm>
-          <a:prstGeom prst="rect">
-            <a:avLst/>
-          </a:prstGeom>
-          <a:solidFill>
-            <a:srgbClr val="FDF0EF"/>
-          </a:solidFill>
-          <a:ln>
-            <a:noFill/>
-          </a:ln>
-        </p:spPr>
-        <p:style>
-          <a:lnRef idx="1">
-            <a:schemeClr val="accent1"/>
-          </a:lnRef>
-          <a:fillRef idx="3">
-            <a:schemeClr val="accent1"/>
-          </a:fillRef>
-          <a:effectRef idx="2">
-            <a:schemeClr val="accent1"/>
-          </a:effectRef>
-          <a:fontRef idx="minor">
-            <a:schemeClr val="lt1"/>
-          </a:fontRef>
-        </p:style>
-        <p:txBody>
-          <a:bodyPr rtlCol="0" anchor="ctr"/>
-          <a:lstStyle/>
-          <a:p>
-            <a:pPr algn="ctr"/>
-            <a:endParaRPr/>
-          </a:p>
-        </p:txBody>
-      </p:sp>
-      <p:sp>
-        <p:nvSpPr>
-          <p:cNvPr id="6" name="TextBox 5"/>
+            <a:pPr algn="ctr">
+              <a:defRPr sz="1100" b="0">
+                <a:solidFill>
+                  <a:srgbClr val="AAAAAA"/>
+                </a:solidFill>
+                <a:latin typeface="Palatino Linotype"/>
+              </a:defRPr>
+            </a:pPr>
+            <a:r>
+              <a:t>Source: Zhong et al., OSDI 2024, Figure 9</a:t>
+            </a:r>
+          </a:p>
+        </p:txBody>
+      </p:sp>
+      <p:sp>
+        <p:nvSpPr>
+          <p:cNvPr id="5" name="TextBox 4"/>
           <p:cNvSpPr txBox="1"/>
           <p:nvPr/>
         </p:nvSpPr>
         <p:spPr>
           <a:xfrm>
-            <a:off x="6583680" y="1645920"/>
-            <a:ext cx="4206240" cy="2377440"/>
+            <a:off x="11338560" y="6446520"/>
+            <a:ext cx="640080" cy="320040"/>
           </a:xfrm>
           <a:prstGeom prst="rect">
             <a:avLst/>
@@ -10919,113 +10461,13 @@
           <a:noFill/>
         </p:spPr>
         <p:txBody>
-          <a:bodyPr wrap="square">
+          <a:bodyPr wrap="none">
             <a:spAutoFit/>
           </a:bodyPr>
           <a:lstStyle/>
           <a:p>
-            <a:pPr algn="l">
-              <a:defRPr sz="2000" b="1">
-                <a:solidFill>
-                  <a:srgbClr val="C0392B"/>
-                </a:solidFill>
-                <a:latin typeface="Palatino Linotype"/>
-              </a:defRPr>
-            </a:pPr>
-            <a:r>
-              <a:t>Ablation: Parallelism Search</a:t>
-            </a:r>
-          </a:p>
-          <a:p>
-            <a:pPr>
-              <a:spcBef>
-                <a:spcPts val="1000"/>
-              </a:spcBef>
-              <a:defRPr sz="1500" b="0">
-                <a:solidFill>
-                  <a:srgbClr val="333333"/>
-                </a:solidFill>
-                <a:latin typeface="Palatino Linotype"/>
-              </a:defRPr>
-            </a:pPr>
-            <a:r>
-              <a:t>vLLM++ (exhaustive parallelism search)</a:t>
-            </a:r>
-          </a:p>
-          <a:p>
-            <a:pPr>
-              <a:spcBef>
-                <a:spcPts val="600"/>
-              </a:spcBef>
-              <a:defRPr sz="1500" b="1">
-                <a:solidFill>
-                  <a:srgbClr val="C0392B"/>
-                </a:solidFill>
-                <a:latin typeface="Palatino Linotype"/>
-              </a:defRPr>
-            </a:pPr>
-            <a:r>
-              <a:t>Same performance as default vLLM</a:t>
-            </a:r>
-          </a:p>
-          <a:p>
-            <a:pPr algn="l">
-              <a:spcBef>
-                <a:spcPts val="1200"/>
-              </a:spcBef>
-              <a:defRPr sz="1500" b="0">
-                <a:solidFill>
-                  <a:srgbClr val="333333"/>
-                </a:solidFill>
-                <a:latin typeface="Palatino Linotype"/>
-              </a:defRPr>
-            </a:pPr>
-            <a:r>
-              <a:t>Interference cancels parallelism gains.</a:t>
-            </a:r>
-          </a:p>
-          <a:p>
-            <a:pPr algn="l">
-              <a:spcBef>
-                <a:spcPts val="400"/>
-              </a:spcBef>
-              <a:defRPr sz="1600" b="1">
-                <a:solidFill>
-                  <a:srgbClr val="1A56DB"/>
-                </a:solidFill>
-                <a:latin typeface="Palatino Linotype"/>
-              </a:defRPr>
-            </a:pPr>
-            <a:r>
-              <a:t>Must disaggregate first.</a:t>
-            </a:r>
-          </a:p>
-        </p:txBody>
-      </p:sp>
-      <p:sp>
-        <p:nvSpPr>
-          <p:cNvPr id="7" name="TextBox 6"/>
-          <p:cNvSpPr txBox="1"/>
-          <p:nvPr/>
-        </p:nvSpPr>
-        <p:spPr>
-          <a:xfrm>
-            <a:off x="11338560" y="6446520"/>
-            <a:ext cx="640080" cy="320040"/>
-          </a:xfrm>
-          <a:prstGeom prst="rect">
-            <a:avLst/>
-          </a:prstGeom>
-          <a:noFill/>
-        </p:spPr>
-        <p:txBody>
-          <a:bodyPr wrap="square">
-            <a:spAutoFit/>
-          </a:bodyPr>
-          <a:lstStyle/>
-          <a:p>
             <a:pPr algn="r">
-              <a:defRPr sz="1000" b="0">
+              <a:defRPr sz="1000">
                 <a:solidFill>
                   <a:srgbClr val="AAAAAA"/>
                 </a:solidFill>
@@ -11033,7 +10475,7 @@
               </a:defRPr>
             </a:pPr>
             <a:r>
-              <a:t>27</a:t>
+              <a:t>26</a:t>
             </a:r>
           </a:p>
         </p:txBody>
@@ -11047,171 +10489,6 @@
 </file>
 
 <file path=ppt/slides/slide28.xml><?xml version="1.0" encoding="utf-8"?>
-<p:sld xmlns:a="http://schemas.openxmlformats.org/drawingml/2006/main" xmlns:r="http://schemas.openxmlformats.org/officeDocument/2006/relationships" xmlns:p="http://schemas.openxmlformats.org/presentationml/2006/main">
-  <p:cSld>
-    <p:bg>
-      <p:bgPr>
-        <a:solidFill>
-          <a:srgbClr val="FFFFFF"/>
-        </a:solidFill>
-        <a:effectLst/>
-      </p:bgPr>
-    </p:bg>
-    <p:spTree>
-      <p:nvGrpSpPr>
-        <p:cNvPr id="1" name=""/>
-        <p:cNvGrpSpPr/>
-        <p:nvPr/>
-      </p:nvGrpSpPr>
-      <p:grpSpPr>
-        <a:xfrm>
-          <a:off x="0" y="0"/>
-          <a:ext cx="0" cy="0"/>
-          <a:chOff x="0" y="0"/>
-          <a:chExt cx="0" cy="0"/>
-        </a:xfrm>
-      </p:grpSpPr>
-      <p:sp>
-        <p:nvSpPr>
-          <p:cNvPr id="2" name="TextBox 1"/>
-          <p:cNvSpPr txBox="1"/>
-          <p:nvPr/>
-        </p:nvSpPr>
-        <p:spPr>
-          <a:xfrm>
-            <a:off x="1097280" y="274320"/>
-            <a:ext cx="10058400" cy="548640"/>
-          </a:xfrm>
-          <a:prstGeom prst="rect">
-            <a:avLst/>
-          </a:prstGeom>
-          <a:noFill/>
-        </p:spPr>
-        <p:txBody>
-          <a:bodyPr wrap="square">
-            <a:spAutoFit/>
-          </a:bodyPr>
-          <a:lstStyle/>
-          <a:p>
-            <a:pPr algn="l">
-              <a:defRPr sz="2400" b="1">
-                <a:solidFill>
-                  <a:srgbClr val="1A1A1A"/>
-                </a:solidFill>
-                <a:latin typeface="Palatino Linotype"/>
-              </a:defRPr>
-            </a:pPr>
-            <a:r>
-              <a:t>Per-Request Latency Distribution</a:t>
-            </a:r>
-          </a:p>
-        </p:txBody>
-      </p:sp>
-      <p:pic>
-        <p:nvPicPr>
-          <p:cNvPr id="3" name="Picture 2" descr="ds_fig10_latency.png"/>
-          <p:cNvPicPr>
-            <a:picLocks noChangeAspect="1"/>
-          </p:cNvPicPr>
-          <p:nvPr/>
-        </p:nvPicPr>
-        <p:blipFill>
-          <a:blip r:embed="rId2"/>
-          <a:stretch>
-            <a:fillRect/>
-          </a:stretch>
-        </p:blipFill>
-        <p:spPr>
-          <a:xfrm>
-            <a:off x="1737360" y="1097280"/>
-            <a:ext cx="8686800" cy="5376920"/>
-          </a:xfrm>
-          <a:prstGeom prst="rect">
-            <a:avLst/>
-          </a:prstGeom>
-        </p:spPr>
-      </p:pic>
-      <p:sp>
-        <p:nvSpPr>
-          <p:cNvPr id="4" name="TextBox 3"/>
-          <p:cNvSpPr txBox="1"/>
-          <p:nvPr/>
-        </p:nvSpPr>
-        <p:spPr>
-          <a:xfrm>
-            <a:off x="1737360" y="6611360"/>
-            <a:ext cx="8686800" cy="365760"/>
-          </a:xfrm>
-          <a:prstGeom prst="rect">
-            <a:avLst/>
-          </a:prstGeom>
-          <a:noFill/>
-        </p:spPr>
-        <p:txBody>
-          <a:bodyPr wrap="square">
-            <a:spAutoFit/>
-          </a:bodyPr>
-          <a:lstStyle/>
-          <a:p>
-            <a:pPr algn="ctr">
-              <a:defRPr sz="1100" b="0">
-                <a:solidFill>
-                  <a:srgbClr val="AAAAAA"/>
-                </a:solidFill>
-                <a:latin typeface="Palatino Linotype"/>
-              </a:defRPr>
-            </a:pPr>
-            <a:r>
-              <a:t>Source: Zhong et al., OSDI 2024, Figure 10</a:t>
-            </a:r>
-          </a:p>
-        </p:txBody>
-      </p:sp>
-      <p:sp>
-        <p:nvSpPr>
-          <p:cNvPr id="5" name="TextBox 4"/>
-          <p:cNvSpPr txBox="1"/>
-          <p:nvPr/>
-        </p:nvSpPr>
-        <p:spPr>
-          <a:xfrm>
-            <a:off x="11338560" y="6446520"/>
-            <a:ext cx="640080" cy="320040"/>
-          </a:xfrm>
-          <a:prstGeom prst="rect">
-            <a:avLst/>
-          </a:prstGeom>
-          <a:noFill/>
-        </p:spPr>
-        <p:txBody>
-          <a:bodyPr wrap="square">
-            <a:spAutoFit/>
-          </a:bodyPr>
-          <a:lstStyle/>
-          <a:p>
-            <a:pPr algn="r">
-              <a:defRPr sz="1000" b="0">
-                <a:solidFill>
-                  <a:srgbClr val="AAAAAA"/>
-                </a:solidFill>
-                <a:latin typeface="Palatino Linotype"/>
-              </a:defRPr>
-            </a:pPr>
-            <a:r>
-              <a:t>28</a:t>
-            </a:r>
-          </a:p>
-        </p:txBody>
-      </p:sp>
-    </p:spTree>
-  </p:cSld>
-  <p:clrMapOvr>
-    <a:masterClrMapping/>
-  </p:clrMapOvr>
-</p:sld>
-</file>
-
-<file path=ppt/slides/slide29.xml><?xml version="1.0" encoding="utf-8"?>
 <p:sld xmlns:a="http://schemas.openxmlformats.org/drawingml/2006/main" xmlns:r="http://schemas.openxmlformats.org/officeDocument/2006/relationships" xmlns:p="http://schemas.openxmlformats.org/presentationml/2006/main">
   <p:cSld>
     <p:bg>
@@ -12000,13 +11277,386 @@
           <a:noFill/>
         </p:spPr>
         <p:txBody>
+          <a:bodyPr wrap="none">
+            <a:spAutoFit/>
+          </a:bodyPr>
+          <a:lstStyle/>
+          <a:p>
+            <a:pPr algn="r">
+              <a:defRPr sz="1000">
+                <a:solidFill>
+                  <a:srgbClr val="AAAAAA"/>
+                </a:solidFill>
+                <a:latin typeface="Palatino Linotype"/>
+              </a:defRPr>
+            </a:pPr>
+            <a:r>
+              <a:t>27</a:t>
+            </a:r>
+          </a:p>
+        </p:txBody>
+      </p:sp>
+    </p:spTree>
+  </p:cSld>
+  <p:clrMapOvr>
+    <a:masterClrMapping/>
+  </p:clrMapOvr>
+</p:sld>
+</file>
+
+<file path=ppt/slides/slide29.xml><?xml version="1.0" encoding="utf-8"?>
+<p:sld xmlns:a="http://schemas.openxmlformats.org/drawingml/2006/main" xmlns:r="http://schemas.openxmlformats.org/officeDocument/2006/relationships" xmlns:p="http://schemas.openxmlformats.org/presentationml/2006/main">
+  <p:cSld>
+    <p:bg>
+      <p:bgPr>
+        <a:solidFill>
+          <a:srgbClr val="FFFFFF"/>
+        </a:solidFill>
+        <a:effectLst/>
+      </p:bgPr>
+    </p:bg>
+    <p:spTree>
+      <p:nvGrpSpPr>
+        <p:cNvPr id="1" name=""/>
+        <p:cNvGrpSpPr/>
+        <p:nvPr/>
+      </p:nvGrpSpPr>
+      <p:grpSpPr>
+        <a:xfrm>
+          <a:off x="0" y="0"/>
+          <a:ext cx="0" cy="0"/>
+          <a:chOff x="0" y="0"/>
+          <a:chExt cx="0" cy="0"/>
+        </a:xfrm>
+      </p:grpSpPr>
+      <p:sp>
+        <p:nvSpPr>
+          <p:cNvPr id="2" name="TextBox 1"/>
+          <p:cNvSpPr txBox="1"/>
+          <p:nvPr/>
+        </p:nvSpPr>
+        <p:spPr>
+          <a:xfrm>
+            <a:off x="1097280" y="457200"/>
+            <a:ext cx="10058400" cy="640080"/>
+          </a:xfrm>
+          <a:prstGeom prst="rect">
+            <a:avLst/>
+          </a:prstGeom>
+          <a:noFill/>
+        </p:spPr>
+        <p:txBody>
           <a:bodyPr wrap="square">
             <a:spAutoFit/>
           </a:bodyPr>
           <a:lstStyle/>
           <a:p>
+            <a:pPr algn="l">
+              <a:defRPr sz="3400" b="1">
+                <a:solidFill>
+                  <a:srgbClr val="1A1A1A"/>
+                </a:solidFill>
+                <a:latin typeface="Palatino Linotype"/>
+              </a:defRPr>
+            </a:pPr>
+            <a:r>
+              <a:t>References</a:t>
+            </a:r>
+          </a:p>
+        </p:txBody>
+      </p:sp>
+      <p:sp>
+        <p:nvSpPr>
+          <p:cNvPr id="3" name="TextBox 2"/>
+          <p:cNvSpPr txBox="1"/>
+          <p:nvPr/>
+        </p:nvSpPr>
+        <p:spPr>
+          <a:xfrm>
+            <a:off x="1097280" y="1371600"/>
+            <a:ext cx="9601200" cy="5029200"/>
+          </a:xfrm>
+          <a:prstGeom prst="rect">
+            <a:avLst/>
+          </a:prstGeom>
+          <a:noFill/>
+        </p:spPr>
+        <p:txBody>
+          <a:bodyPr wrap="square">
+            <a:spAutoFit/>
+          </a:bodyPr>
+          <a:lstStyle/>
+          <a:p>
+            <a:pPr algn="l">
+              <a:defRPr sz="1300" b="0">
+                <a:solidFill>
+                  <a:srgbClr val="333333"/>
+                </a:solidFill>
+                <a:latin typeface="Palatino Linotype"/>
+              </a:defRPr>
+            </a:pPr>
+            <a:r>
+              <a:t>[1]  P. Patel, E. Choukse, C. Zhang, A. Shah, I. Goiri, S. Maleki, R. Bianchini.</a:t>
+            </a:r>
+          </a:p>
+          <a:p>
+            <a:pPr algn="l">
+              <a:spcBef>
+                <a:spcPts val="100"/>
+              </a:spcBef>
+              <a:defRPr sz="1300" b="0">
+                <a:solidFill>
+                  <a:srgbClr val="333333"/>
+                </a:solidFill>
+                <a:latin typeface="Palatino Linotype"/>
+              </a:defRPr>
+            </a:pPr>
+            <a:r>
+              <a:t>     "Splitwise: Efficient Generative LLM Inference Using Phase Splitting."</a:t>
+            </a:r>
+          </a:p>
+          <a:p>
+            <a:pPr algn="l">
+              <a:spcBef>
+                <a:spcPts val="100"/>
+              </a:spcBef>
+              <a:defRPr sz="1300" b="0">
+                <a:solidFill>
+                  <a:srgbClr val="333333"/>
+                </a:solidFill>
+                <a:latin typeface="Palatino Linotype"/>
+              </a:defRPr>
+            </a:pPr>
+            <a:r>
+              <a:t>     ISCA 2024. arXiv:2311.18677</a:t>
+            </a:r>
+          </a:p>
+          <a:p>
+            <a:pPr algn="l">
+              <a:spcBef>
+                <a:spcPts val="100"/>
+              </a:spcBef>
+              <a:defRPr sz="1300" b="0">
+                <a:solidFill>
+                  <a:srgbClr val="333333"/>
+                </a:solidFill>
+                <a:latin typeface="Palatino Linotype"/>
+              </a:defRPr>
+            </a:pPr>
+            <a:endParaRPr/>
+          </a:p>
+          <a:p>
+            <a:pPr algn="l">
+              <a:spcBef>
+                <a:spcPts val="100"/>
+              </a:spcBef>
+              <a:defRPr sz="1300" b="0">
+                <a:solidFill>
+                  <a:srgbClr val="333333"/>
+                </a:solidFill>
+                <a:latin typeface="Palatino Linotype"/>
+              </a:defRPr>
+            </a:pPr>
+            <a:r>
+              <a:t>[2]  Y. Zhong, S. Liu, J. Chen, J. Hu, Y. Zhu, X. Liu, X. Jin, H. Zhang.</a:t>
+            </a:r>
+          </a:p>
+          <a:p>
+            <a:pPr algn="l">
+              <a:spcBef>
+                <a:spcPts val="100"/>
+              </a:spcBef>
+              <a:defRPr sz="1300" b="0">
+                <a:solidFill>
+                  <a:srgbClr val="333333"/>
+                </a:solidFill>
+                <a:latin typeface="Palatino Linotype"/>
+              </a:defRPr>
+            </a:pPr>
+            <a:r>
+              <a:t>     "DistServe: Disaggregating Prefill and Decoding for Goodput-optimized</a:t>
+            </a:r>
+          </a:p>
+          <a:p>
+            <a:pPr algn="l">
+              <a:spcBef>
+                <a:spcPts val="100"/>
+              </a:spcBef>
+              <a:defRPr sz="1300" b="0">
+                <a:solidFill>
+                  <a:srgbClr val="333333"/>
+                </a:solidFill>
+                <a:latin typeface="Palatino Linotype"/>
+              </a:defRPr>
+            </a:pPr>
+            <a:r>
+              <a:t>     Large Language Model Serving."  OSDI 2024. arXiv:2401.09670</a:t>
+            </a:r>
+          </a:p>
+          <a:p>
+            <a:pPr algn="l">
+              <a:spcBef>
+                <a:spcPts val="100"/>
+              </a:spcBef>
+              <a:defRPr sz="1300" b="0">
+                <a:solidFill>
+                  <a:srgbClr val="333333"/>
+                </a:solidFill>
+                <a:latin typeface="Palatino Linotype"/>
+              </a:defRPr>
+            </a:pPr>
+            <a:endParaRPr/>
+          </a:p>
+          <a:p>
+            <a:pPr algn="l">
+              <a:spcBef>
+                <a:spcPts val="100"/>
+              </a:spcBef>
+              <a:defRPr sz="1300" b="0">
+                <a:solidFill>
+                  <a:srgbClr val="333333"/>
+                </a:solidFill>
+                <a:latin typeface="Palatino Linotype"/>
+              </a:defRPr>
+            </a:pPr>
+            <a:r>
+              <a:t>[3]  A. Agrawal et al. Sarathi: Efficient LLM Inference by Piggybacking Decodes</a:t>
+            </a:r>
+          </a:p>
+          <a:p>
+            <a:pPr algn="l">
+              <a:spcBef>
+                <a:spcPts val="100"/>
+              </a:spcBef>
+              <a:defRPr sz="1300" b="0">
+                <a:solidFill>
+                  <a:srgbClr val="333333"/>
+                </a:solidFill>
+                <a:latin typeface="Palatino Linotype"/>
+              </a:defRPr>
+            </a:pPr>
+            <a:r>
+              <a:t>     with Chunked Prefills. arXiv:2308.16369, 2023.</a:t>
+            </a:r>
+          </a:p>
+          <a:p>
+            <a:pPr algn="l">
+              <a:spcBef>
+                <a:spcPts val="100"/>
+              </a:spcBef>
+              <a:defRPr sz="1300" b="0">
+                <a:solidFill>
+                  <a:srgbClr val="333333"/>
+                </a:solidFill>
+                <a:latin typeface="Palatino Linotype"/>
+              </a:defRPr>
+            </a:pPr>
+            <a:endParaRPr/>
+          </a:p>
+          <a:p>
+            <a:pPr algn="l">
+              <a:spcBef>
+                <a:spcPts val="100"/>
+              </a:spcBef>
+              <a:defRPr sz="1300" b="0">
+                <a:solidFill>
+                  <a:srgbClr val="333333"/>
+                </a:solidFill>
+                <a:latin typeface="Palatino Linotype"/>
+              </a:defRPr>
+            </a:pPr>
+            <a:r>
+              <a:t>[4]  W. Kwon et al. Efficient Memory Management for Large Language Model Serving</a:t>
+            </a:r>
+          </a:p>
+          <a:p>
+            <a:pPr algn="l">
+              <a:spcBef>
+                <a:spcPts val="100"/>
+              </a:spcBef>
+              <a:defRPr sz="1300" b="0">
+                <a:solidFill>
+                  <a:srgbClr val="333333"/>
+                </a:solidFill>
+                <a:latin typeface="Palatino Linotype"/>
+              </a:defRPr>
+            </a:pPr>
+            <a:r>
+              <a:t>     with PagedAttention (vLLM). SOSP 2023.</a:t>
+            </a:r>
+          </a:p>
+          <a:p>
+            <a:pPr algn="l">
+              <a:spcBef>
+                <a:spcPts val="100"/>
+              </a:spcBef>
+              <a:defRPr sz="1300" b="0">
+                <a:solidFill>
+                  <a:srgbClr val="333333"/>
+                </a:solidFill>
+                <a:latin typeface="Palatino Linotype"/>
+              </a:defRPr>
+            </a:pPr>
+            <a:endParaRPr/>
+          </a:p>
+          <a:p>
+            <a:pPr algn="l">
+              <a:spcBef>
+                <a:spcPts val="100"/>
+              </a:spcBef>
+              <a:defRPr sz="1300" b="0">
+                <a:solidFill>
+                  <a:srgbClr val="333333"/>
+                </a:solidFill>
+                <a:latin typeface="Palatino Linotype"/>
+              </a:defRPr>
+            </a:pPr>
+            <a:r>
+              <a:t>[5]  Y. Sheng et al. FlexGen: High-Throughput Generative Inference of Large Language</a:t>
+            </a:r>
+          </a:p>
+          <a:p>
+            <a:pPr algn="l">
+              <a:spcBef>
+                <a:spcPts val="100"/>
+              </a:spcBef>
+              <a:defRPr sz="1300" b="0">
+                <a:solidFill>
+                  <a:srgbClr val="333333"/>
+                </a:solidFill>
+                <a:latin typeface="Palatino Linotype"/>
+              </a:defRPr>
+            </a:pPr>
+            <a:r>
+              <a:t>     Models with a Single GPU. ICML 2023.</a:t>
+            </a:r>
+          </a:p>
+        </p:txBody>
+      </p:sp>
+      <p:sp>
+        <p:nvSpPr>
+          <p:cNvPr id="4" name="TextBox 3"/>
+          <p:cNvSpPr txBox="1"/>
+          <p:nvPr/>
+        </p:nvSpPr>
+        <p:spPr>
+          <a:xfrm>
+            <a:off x="11338560" y="6446520"/>
+            <a:ext cx="640080" cy="320040"/>
+          </a:xfrm>
+          <a:prstGeom prst="rect">
+            <a:avLst/>
+          </a:prstGeom>
+          <a:noFill/>
+        </p:spPr>
+        <p:txBody>
+          <a:bodyPr wrap="none">
+            <a:spAutoFit/>
+          </a:bodyPr>
+          <a:lstStyle/>
+          <a:p>
             <a:pPr algn="r">
-              <a:defRPr sz="1000" b="0">
+              <a:defRPr sz="1000">
                 <a:solidFill>
                   <a:srgbClr val="AAAAAA"/>
                 </a:solidFill>
@@ -12014,7 +11664,7 @@
               </a:defRPr>
             </a:pPr>
             <a:r>
-              <a:t>29</a:t>
+              <a:t>28</a:t>
             </a:r>
           </a:p>
         </p:txBody>
@@ -12557,13 +12207,13 @@
           <a:noFill/>
         </p:spPr>
         <p:txBody>
-          <a:bodyPr wrap="square">
+          <a:bodyPr wrap="none">
             <a:spAutoFit/>
           </a:bodyPr>
           <a:lstStyle/>
           <a:p>
             <a:pPr algn="r">
-              <a:defRPr sz="1000" b="0">
+              <a:defRPr sz="1000">
                 <a:solidFill>
                   <a:srgbClr val="AAAAAA"/>
                 </a:solidFill>
@@ -12571,7 +12221,7 @@
               </a:defRPr>
             </a:pPr>
             <a:r>
-              <a:t>3</a:t>
+              <a:t>2</a:t>
             </a:r>
           </a:p>
         </p:txBody>
@@ -12585,1357 +12235,6 @@
 </file>
 
 <file path=ppt/slides/slide30.xml><?xml version="1.0" encoding="utf-8"?>
-<p:sld xmlns:a="http://schemas.openxmlformats.org/drawingml/2006/main" xmlns:r="http://schemas.openxmlformats.org/officeDocument/2006/relationships" xmlns:p="http://schemas.openxmlformats.org/presentationml/2006/main">
-  <p:cSld>
-    <p:bg>
-      <p:bgPr>
-        <a:solidFill>
-          <a:srgbClr val="FFFFFF"/>
-        </a:solidFill>
-        <a:effectLst/>
-      </p:bgPr>
-    </p:bg>
-    <p:spTree>
-      <p:nvGrpSpPr>
-        <p:cNvPr id="1" name=""/>
-        <p:cNvGrpSpPr/>
-        <p:nvPr/>
-      </p:nvGrpSpPr>
-      <p:grpSpPr>
-        <a:xfrm>
-          <a:off x="0" y="0"/>
-          <a:ext cx="0" cy="0"/>
-          <a:chOff x="0" y="0"/>
-          <a:chExt cx="0" cy="0"/>
-        </a:xfrm>
-      </p:grpSpPr>
-      <p:sp>
-        <p:nvSpPr>
-          <p:cNvPr id="2" name="TextBox 1"/>
-          <p:cNvSpPr txBox="1"/>
-          <p:nvPr/>
-        </p:nvSpPr>
-        <p:spPr>
-          <a:xfrm>
-            <a:off x="1097280" y="457200"/>
-            <a:ext cx="10058400" cy="640080"/>
-          </a:xfrm>
-          <a:prstGeom prst="rect">
-            <a:avLst/>
-          </a:prstGeom>
-          <a:noFill/>
-        </p:spPr>
-        <p:txBody>
-          <a:bodyPr wrap="square">
-            <a:spAutoFit/>
-          </a:bodyPr>
-          <a:lstStyle/>
-          <a:p>
-            <a:pPr algn="l">
-              <a:defRPr sz="3400" b="1">
-                <a:solidFill>
-                  <a:srgbClr val="1A1A1A"/>
-                </a:solidFill>
-                <a:latin typeface="Palatino Linotype"/>
-              </a:defRPr>
-            </a:pPr>
-            <a:r>
-              <a:t>Limitations and Open Questions</a:t>
-            </a:r>
-          </a:p>
-        </p:txBody>
-      </p:sp>
-      <p:sp>
-        <p:nvSpPr>
-          <p:cNvPr id="3" name="Rectangle 2"/>
-          <p:cNvSpPr/>
-          <p:nvPr/>
-        </p:nvSpPr>
-        <p:spPr>
-          <a:xfrm>
-            <a:off x="1097280" y="1554480"/>
-            <a:ext cx="4754880" cy="2560320"/>
-          </a:xfrm>
-          <a:prstGeom prst="rect">
-            <a:avLst/>
-          </a:prstGeom>
-          <a:solidFill>
-            <a:srgbClr val="FDF0EF"/>
-          </a:solidFill>
-          <a:ln>
-            <a:noFill/>
-          </a:ln>
-        </p:spPr>
-        <p:style>
-          <a:lnRef idx="1">
-            <a:schemeClr val="accent1"/>
-          </a:lnRef>
-          <a:fillRef idx="3">
-            <a:schemeClr val="accent1"/>
-          </a:fillRef>
-          <a:effectRef idx="2">
-            <a:schemeClr val="accent1"/>
-          </a:effectRef>
-          <a:fontRef idx="minor">
-            <a:schemeClr val="lt1"/>
-          </a:fontRef>
-        </p:style>
-        <p:txBody>
-          <a:bodyPr rtlCol="0" anchor="ctr"/>
-          <a:lstStyle/>
-          <a:p>
-            <a:pPr algn="ctr"/>
-            <a:endParaRPr/>
-          </a:p>
-        </p:txBody>
-      </p:sp>
-      <p:sp>
-        <p:nvSpPr>
-          <p:cNvPr id="4" name="TextBox 3"/>
-          <p:cNvSpPr txBox="1"/>
-          <p:nvPr/>
-        </p:nvSpPr>
-        <p:spPr>
-          <a:xfrm>
-            <a:off x="1371600" y="1645920"/>
-            <a:ext cx="4206240" cy="2377440"/>
-          </a:xfrm>
-          <a:prstGeom prst="rect">
-            <a:avLst/>
-          </a:prstGeom>
-          <a:noFill/>
-        </p:spPr>
-        <p:txBody>
-          <a:bodyPr wrap="square">
-            <a:spAutoFit/>
-          </a:bodyPr>
-          <a:lstStyle/>
-          <a:p>
-            <a:pPr algn="l">
-              <a:defRPr sz="1800" b="1">
-                <a:solidFill>
-                  <a:srgbClr val="C0392B"/>
-                </a:solidFill>
-                <a:latin typeface="Palatino Linotype"/>
-              </a:defRPr>
-            </a:pPr>
-            <a:r>
-              <a:t>Shared limitations</a:t>
-            </a:r>
-          </a:p>
-          <a:p>
-            <a:pPr>
-              <a:spcBef>
-                <a:spcPts val="1000"/>
-              </a:spcBef>
-              <a:defRPr sz="1500" b="0">
-                <a:solidFill>
-                  <a:srgbClr val="333333"/>
-                </a:solidFill>
-                <a:latin typeface="Palatino Linotype"/>
-              </a:defRPr>
-            </a:pPr>
-            <a:r>
-              <a:t>Less beneficial with few GPUs</a:t>
-            </a:r>
-          </a:p>
-          <a:p>
-            <a:pPr>
-              <a:spcBef>
-                <a:spcPts val="600"/>
-              </a:spcBef>
-              <a:defRPr sz="1500" b="0">
-                <a:solidFill>
-                  <a:srgbClr val="333333"/>
-                </a:solidFill>
-                <a:latin typeface="Palatino Linotype"/>
-              </a:defRPr>
-            </a:pPr>
-            <a:r>
-              <a:t>Basic fault tolerance</a:t>
-            </a:r>
-          </a:p>
-          <a:p>
-            <a:pPr>
-              <a:spcBef>
-                <a:spcPts val="600"/>
-              </a:spcBef>
-              <a:defRPr sz="1500" b="0">
-                <a:solidFill>
-                  <a:srgbClr val="333333"/>
-                </a:solidFill>
-                <a:latin typeface="Palatino Linotype"/>
-              </a:defRPr>
-            </a:pPr>
-            <a:r>
-              <a:t>FCFS can cause convoy effects</a:t>
-            </a:r>
-          </a:p>
-          <a:p>
-            <a:pPr>
-              <a:spcBef>
-                <a:spcPts val="600"/>
-              </a:spcBef>
-              <a:defRPr sz="1500" b="0">
-                <a:solidFill>
-                  <a:srgbClr val="333333"/>
-                </a:solidFill>
-                <a:latin typeface="Palatino Linotype"/>
-              </a:defRPr>
-            </a:pPr>
-            <a:r>
-              <a:t>Batch workloads may prefer colocation</a:t>
-            </a:r>
-          </a:p>
-        </p:txBody>
-      </p:sp>
-      <p:sp>
-        <p:nvSpPr>
-          <p:cNvPr id="5" name="Rectangle 4"/>
-          <p:cNvSpPr/>
-          <p:nvPr/>
-        </p:nvSpPr>
-        <p:spPr>
-          <a:xfrm>
-            <a:off x="6309360" y="1554480"/>
-            <a:ext cx="4754880" cy="2560320"/>
-          </a:xfrm>
-          <a:prstGeom prst="rect">
-            <a:avLst/>
-          </a:prstGeom>
-          <a:solidFill>
-            <a:srgbClr val="E8EEF8"/>
-          </a:solidFill>
-          <a:ln>
-            <a:noFill/>
-          </a:ln>
-        </p:spPr>
-        <p:style>
-          <a:lnRef idx="1">
-            <a:schemeClr val="accent1"/>
-          </a:lnRef>
-          <a:fillRef idx="3">
-            <a:schemeClr val="accent1"/>
-          </a:fillRef>
-          <a:effectRef idx="2">
-            <a:schemeClr val="accent1"/>
-          </a:effectRef>
-          <a:fontRef idx="minor">
-            <a:schemeClr val="lt1"/>
-          </a:fontRef>
-        </p:style>
-        <p:txBody>
-          <a:bodyPr rtlCol="0" anchor="ctr"/>
-          <a:lstStyle/>
-          <a:p>
-            <a:pPr algn="ctr"/>
-            <a:endParaRPr/>
-          </a:p>
-        </p:txBody>
-      </p:sp>
-      <p:sp>
-        <p:nvSpPr>
-          <p:cNvPr id="6" name="TextBox 5"/>
-          <p:cNvSpPr txBox="1"/>
-          <p:nvPr/>
-        </p:nvSpPr>
-        <p:spPr>
-          <a:xfrm>
-            <a:off x="6583680" y="1645920"/>
-            <a:ext cx="4206240" cy="2377440"/>
-          </a:xfrm>
-          <a:prstGeom prst="rect">
-            <a:avLst/>
-          </a:prstGeom>
-          <a:noFill/>
-        </p:spPr>
-        <p:txBody>
-          <a:bodyPr wrap="square">
-            <a:spAutoFit/>
-          </a:bodyPr>
-          <a:lstStyle/>
-          <a:p>
-            <a:pPr algn="l">
-              <a:defRPr sz="1800" b="1">
-                <a:solidFill>
-                  <a:srgbClr val="1A56DB"/>
-                </a:solidFill>
-                <a:latin typeface="Palatino Linotype"/>
-              </a:defRPr>
-            </a:pPr>
-            <a:r>
-              <a:t>Open questions</a:t>
-            </a:r>
-          </a:p>
-          <a:p>
-            <a:pPr>
-              <a:spcBef>
-                <a:spcPts val="1000"/>
-              </a:spcBef>
-              <a:defRPr sz="1500" b="0">
-                <a:solidFill>
-                  <a:srgbClr val="333333"/>
-                </a:solidFill>
-                <a:latin typeface="Palatino Linotype"/>
-              </a:defRPr>
-            </a:pPr>
-            <a:r>
-              <a:t>Preemptive scheduling</a:t>
-            </a:r>
-          </a:p>
-          <a:p>
-            <a:pPr>
-              <a:spcBef>
-                <a:spcPts val="600"/>
-              </a:spcBef>
-              <a:defRPr sz="1500" b="0">
-                <a:solidFill>
-                  <a:srgbClr val="333333"/>
-                </a:solidFill>
-                <a:latin typeface="Palatino Linotype"/>
-              </a:defRPr>
-            </a:pPr>
-            <a:r>
-              <a:t>Combining heterogeneous HW + placement</a:t>
-            </a:r>
-          </a:p>
-          <a:p>
-            <a:pPr>
-              <a:spcBef>
-                <a:spcPts val="600"/>
-              </a:spcBef>
-              <a:defRPr sz="1500" b="0">
-                <a:solidFill>
-                  <a:srgbClr val="333333"/>
-                </a:solidFill>
-                <a:latin typeface="Palatino Linotype"/>
-              </a:defRPr>
-            </a:pPr>
-            <a:r>
-              <a:t>Million-token contexts</a:t>
-            </a:r>
-          </a:p>
-          <a:p>
-            <a:pPr>
-              <a:spcBef>
-                <a:spcPts val="600"/>
-              </a:spcBef>
-              <a:defRPr sz="1500" b="0">
-                <a:solidFill>
-                  <a:srgbClr val="333333"/>
-                </a:solidFill>
-                <a:latin typeface="Palatino Linotype"/>
-              </a:defRPr>
-            </a:pPr>
-            <a:r>
-              <a:t>Interaction with MoE models</a:t>
-            </a:r>
-          </a:p>
-        </p:txBody>
-      </p:sp>
-      <p:sp>
-        <p:nvSpPr>
-          <p:cNvPr id="7" name="Rectangle 6"/>
-          <p:cNvSpPr/>
-          <p:nvPr/>
-        </p:nvSpPr>
-        <p:spPr>
-          <a:xfrm>
-            <a:off x="1097280" y="4480560"/>
-            <a:ext cx="10058400" cy="914400"/>
-          </a:xfrm>
-          <a:prstGeom prst="rect">
-            <a:avLst/>
-          </a:prstGeom>
-          <a:solidFill>
-            <a:srgbClr val="F8F9FA"/>
-          </a:solidFill>
-          <a:ln>
-            <a:noFill/>
-          </a:ln>
-        </p:spPr>
-        <p:style>
-          <a:lnRef idx="1">
-            <a:schemeClr val="accent1"/>
-          </a:lnRef>
-          <a:fillRef idx="3">
-            <a:schemeClr val="accent1"/>
-          </a:fillRef>
-          <a:effectRef idx="2">
-            <a:schemeClr val="accent1"/>
-          </a:effectRef>
-          <a:fontRef idx="minor">
-            <a:schemeClr val="lt1"/>
-          </a:fontRef>
-        </p:style>
-        <p:txBody>
-          <a:bodyPr rtlCol="0" anchor="ctr"/>
-          <a:lstStyle/>
-          <a:p>
-            <a:pPr algn="ctr"/>
-            <a:endParaRPr/>
-          </a:p>
-        </p:txBody>
-      </p:sp>
-      <p:sp>
-        <p:nvSpPr>
-          <p:cNvPr id="8" name="TextBox 7"/>
-          <p:cNvSpPr txBox="1"/>
-          <p:nvPr/>
-        </p:nvSpPr>
-        <p:spPr>
-          <a:xfrm>
-            <a:off x="1371600" y="4572000"/>
-            <a:ext cx="9418320" cy="731520"/>
-          </a:xfrm>
-          <a:prstGeom prst="rect">
-            <a:avLst/>
-          </a:prstGeom>
-          <a:noFill/>
-        </p:spPr>
-        <p:txBody>
-          <a:bodyPr wrap="square">
-            <a:spAutoFit/>
-          </a:bodyPr>
-          <a:lstStyle/>
-          <a:p>
-            <a:pPr algn="ctr">
-              <a:defRPr sz="1700" b="1">
-                <a:solidFill>
-                  <a:srgbClr val="1A1A1A"/>
-                </a:solidFill>
-                <a:latin typeface="Palatino Linotype"/>
-              </a:defRPr>
-            </a:pPr>
-            <a:r>
-              <a:t>Already adopted by SGLang, vLLM, and Mooncake.</a:t>
-            </a:r>
-          </a:p>
-          <a:p>
-            <a:pPr algn="ctr">
-              <a:spcBef>
-                <a:spcPts val="400"/>
-              </a:spcBef>
-              <a:defRPr sz="1600" b="0">
-                <a:solidFill>
-                  <a:srgbClr val="666666"/>
-                </a:solidFill>
-                <a:latin typeface="Palatino Linotype"/>
-              </a:defRPr>
-            </a:pPr>
-            <a:r>
-              <a:t>Phase disaggregation is becoming the standard for production LLM serving.</a:t>
-            </a:r>
-          </a:p>
-        </p:txBody>
-      </p:sp>
-      <p:sp>
-        <p:nvSpPr>
-          <p:cNvPr id="9" name="TextBox 8"/>
-          <p:cNvSpPr txBox="1"/>
-          <p:nvPr/>
-        </p:nvSpPr>
-        <p:spPr>
-          <a:xfrm>
-            <a:off x="11338560" y="6446520"/>
-            <a:ext cx="640080" cy="320040"/>
-          </a:xfrm>
-          <a:prstGeom prst="rect">
-            <a:avLst/>
-          </a:prstGeom>
-          <a:noFill/>
-        </p:spPr>
-        <p:txBody>
-          <a:bodyPr wrap="square">
-            <a:spAutoFit/>
-          </a:bodyPr>
-          <a:lstStyle/>
-          <a:p>
-            <a:pPr algn="r">
-              <a:defRPr sz="1000" b="0">
-                <a:solidFill>
-                  <a:srgbClr val="AAAAAA"/>
-                </a:solidFill>
-                <a:latin typeface="Palatino Linotype"/>
-              </a:defRPr>
-            </a:pPr>
-            <a:r>
-              <a:t>30</a:t>
-            </a:r>
-          </a:p>
-        </p:txBody>
-      </p:sp>
-    </p:spTree>
-  </p:cSld>
-  <p:clrMapOvr>
-    <a:masterClrMapping/>
-  </p:clrMapOvr>
-</p:sld>
-</file>
-
-<file path=ppt/slides/slide31.xml><?xml version="1.0" encoding="utf-8"?>
-<p:sld xmlns:a="http://schemas.openxmlformats.org/drawingml/2006/main" xmlns:r="http://schemas.openxmlformats.org/officeDocument/2006/relationships" xmlns:p="http://schemas.openxmlformats.org/presentationml/2006/main">
-  <p:cSld>
-    <p:bg>
-      <p:bgPr>
-        <a:solidFill>
-          <a:srgbClr val="FFFFFF"/>
-        </a:solidFill>
-        <a:effectLst/>
-      </p:bgPr>
-    </p:bg>
-    <p:spTree>
-      <p:nvGrpSpPr>
-        <p:cNvPr id="1" name=""/>
-        <p:cNvGrpSpPr/>
-        <p:nvPr/>
-      </p:nvGrpSpPr>
-      <p:grpSpPr>
-        <a:xfrm>
-          <a:off x="0" y="0"/>
-          <a:ext cx="0" cy="0"/>
-          <a:chOff x="0" y="0"/>
-          <a:chExt cx="0" cy="0"/>
-        </a:xfrm>
-      </p:grpSpPr>
-      <p:sp>
-        <p:nvSpPr>
-          <p:cNvPr id="2" name="TextBox 1"/>
-          <p:cNvSpPr txBox="1"/>
-          <p:nvPr/>
-        </p:nvSpPr>
-        <p:spPr>
-          <a:xfrm>
-            <a:off x="1097280" y="457200"/>
-            <a:ext cx="10058400" cy="640080"/>
-          </a:xfrm>
-          <a:prstGeom prst="rect">
-            <a:avLst/>
-          </a:prstGeom>
-          <a:noFill/>
-        </p:spPr>
-        <p:txBody>
-          <a:bodyPr wrap="square">
-            <a:spAutoFit/>
-          </a:bodyPr>
-          <a:lstStyle/>
-          <a:p>
-            <a:pPr algn="l">
-              <a:defRPr sz="3600" b="1">
-                <a:solidFill>
-                  <a:srgbClr val="1A1A1A"/>
-                </a:solidFill>
-                <a:latin typeface="Palatino Linotype"/>
-              </a:defRPr>
-            </a:pPr>
-            <a:r>
-              <a:t>Summary</a:t>
-            </a:r>
-          </a:p>
-        </p:txBody>
-      </p:sp>
-      <p:sp>
-        <p:nvSpPr>
-          <p:cNvPr id="3" name="Rectangle 2"/>
-          <p:cNvSpPr/>
-          <p:nvPr/>
-        </p:nvSpPr>
-        <p:spPr>
-          <a:xfrm>
-            <a:off x="1097280" y="1554480"/>
-            <a:ext cx="4754880" cy="2286000"/>
-          </a:xfrm>
-          <a:prstGeom prst="rect">
-            <a:avLst/>
-          </a:prstGeom>
-          <a:solidFill>
-            <a:srgbClr val="E8EEF8"/>
-          </a:solidFill>
-          <a:ln>
-            <a:noFill/>
-          </a:ln>
-        </p:spPr>
-        <p:style>
-          <a:lnRef idx="1">
-            <a:schemeClr val="accent1"/>
-          </a:lnRef>
-          <a:fillRef idx="3">
-            <a:schemeClr val="accent1"/>
-          </a:fillRef>
-          <a:effectRef idx="2">
-            <a:schemeClr val="accent1"/>
-          </a:effectRef>
-          <a:fontRef idx="minor">
-            <a:schemeClr val="lt1"/>
-          </a:fontRef>
-        </p:style>
-        <p:txBody>
-          <a:bodyPr rtlCol="0" anchor="ctr"/>
-          <a:lstStyle/>
-          <a:p>
-            <a:pPr algn="ctr"/>
-            <a:endParaRPr/>
-          </a:p>
-        </p:txBody>
-      </p:sp>
-      <p:sp>
-        <p:nvSpPr>
-          <p:cNvPr id="4" name="TextBox 3"/>
-          <p:cNvSpPr txBox="1"/>
-          <p:nvPr/>
-        </p:nvSpPr>
-        <p:spPr>
-          <a:xfrm>
-            <a:off x="1371600" y="1645920"/>
-            <a:ext cx="4206240" cy="2103120"/>
-          </a:xfrm>
-          <a:prstGeom prst="rect">
-            <a:avLst/>
-          </a:prstGeom>
-          <a:noFill/>
-        </p:spPr>
-        <p:txBody>
-          <a:bodyPr wrap="square">
-            <a:spAutoFit/>
-          </a:bodyPr>
-          <a:lstStyle/>
-          <a:p>
-            <a:pPr algn="l">
-              <a:defRPr sz="2000" b="1">
-                <a:solidFill>
-                  <a:srgbClr val="1A56DB"/>
-                </a:solidFill>
-                <a:latin typeface="Palatino Linotype"/>
-              </a:defRPr>
-            </a:pPr>
-            <a:r>
-              <a:t>Splitwise (ISCA 2024)</a:t>
-            </a:r>
-          </a:p>
-          <a:p>
-            <a:pPr>
-              <a:spcBef>
-                <a:spcPts val="800"/>
-              </a:spcBef>
-              <a:defRPr sz="1500" b="0">
-                <a:solidFill>
-                  <a:srgbClr val="333333"/>
-                </a:solidFill>
-                <a:latin typeface="Palatino Linotype"/>
-              </a:defRPr>
-            </a:pPr>
-            <a:r>
-              <a:t>Production workload characterization</a:t>
-            </a:r>
-          </a:p>
-          <a:p>
-            <a:pPr>
-              <a:spcBef>
-                <a:spcPts val="600"/>
-              </a:spcBef>
-              <a:defRPr sz="1500" b="0">
-                <a:solidFill>
-                  <a:srgbClr val="333333"/>
-                </a:solidFill>
-                <a:latin typeface="Palatino Linotype"/>
-              </a:defRPr>
-            </a:pPr>
-            <a:r>
-              <a:t>Heterogeneous hardware per phase</a:t>
-            </a:r>
-          </a:p>
-          <a:p>
-            <a:pPr>
-              <a:spcBef>
-                <a:spcPts val="600"/>
-              </a:spcBef>
-              <a:defRPr sz="1500" b="1">
-                <a:solidFill>
-                  <a:srgbClr val="1E8A4C"/>
-                </a:solidFill>
-                <a:latin typeface="Palatino Linotype"/>
-              </a:defRPr>
-            </a:pPr>
-            <a:r>
-              <a:t>1.4x throughput at 20% lower cost</a:t>
-            </a:r>
-          </a:p>
-          <a:p>
-            <a:pPr>
-              <a:spcBef>
-                <a:spcPts val="600"/>
-              </a:spcBef>
-              <a:defRPr sz="1500" b="1">
-                <a:solidFill>
-                  <a:srgbClr val="1E8A4C"/>
-                </a:solidFill>
-                <a:latin typeface="Palatino Linotype"/>
-              </a:defRPr>
-            </a:pPr>
-            <a:r>
-              <a:t>or 2.35x throughput, same budget</a:t>
-            </a:r>
-          </a:p>
-        </p:txBody>
-      </p:sp>
-      <p:sp>
-        <p:nvSpPr>
-          <p:cNvPr id="5" name="Rectangle 4"/>
-          <p:cNvSpPr/>
-          <p:nvPr/>
-        </p:nvSpPr>
-        <p:spPr>
-          <a:xfrm>
-            <a:off x="6309360" y="1554480"/>
-            <a:ext cx="4754880" cy="2286000"/>
-          </a:xfrm>
-          <a:prstGeom prst="rect">
-            <a:avLst/>
-          </a:prstGeom>
-          <a:solidFill>
-            <a:srgbClr val="E8F5F0"/>
-          </a:solidFill>
-          <a:ln>
-            <a:noFill/>
-          </a:ln>
-        </p:spPr>
-        <p:style>
-          <a:lnRef idx="1">
-            <a:schemeClr val="accent1"/>
-          </a:lnRef>
-          <a:fillRef idx="3">
-            <a:schemeClr val="accent1"/>
-          </a:fillRef>
-          <a:effectRef idx="2">
-            <a:schemeClr val="accent1"/>
-          </a:effectRef>
-          <a:fontRef idx="minor">
-            <a:schemeClr val="lt1"/>
-          </a:fontRef>
-        </p:style>
-        <p:txBody>
-          <a:bodyPr rtlCol="0" anchor="ctr"/>
-          <a:lstStyle/>
-          <a:p>
-            <a:pPr algn="ctr"/>
-            <a:endParaRPr/>
-          </a:p>
-        </p:txBody>
-      </p:sp>
-      <p:sp>
-        <p:nvSpPr>
-          <p:cNvPr id="6" name="TextBox 5"/>
-          <p:cNvSpPr txBox="1"/>
-          <p:nvPr/>
-        </p:nvSpPr>
-        <p:spPr>
-          <a:xfrm>
-            <a:off x="6583680" y="1645920"/>
-            <a:ext cx="4206240" cy="2103120"/>
-          </a:xfrm>
-          <a:prstGeom prst="rect">
-            <a:avLst/>
-          </a:prstGeom>
-          <a:noFill/>
-        </p:spPr>
-        <p:txBody>
-          <a:bodyPr wrap="square">
-            <a:spAutoFit/>
-          </a:bodyPr>
-          <a:lstStyle/>
-          <a:p>
-            <a:pPr algn="l">
-              <a:defRPr sz="2000" b="1">
-                <a:solidFill>
-                  <a:srgbClr val="0E6E6E"/>
-                </a:solidFill>
-                <a:latin typeface="Palatino Linotype"/>
-              </a:defRPr>
-            </a:pPr>
-            <a:r>
-              <a:t>DistServe (OSDI 2024)</a:t>
-            </a:r>
-          </a:p>
-          <a:p>
-            <a:pPr>
-              <a:spcBef>
-                <a:spcPts val="800"/>
-              </a:spcBef>
-              <a:defRPr sz="1500" b="0">
-                <a:solidFill>
-                  <a:srgbClr val="333333"/>
-                </a:solidFill>
-                <a:latin typeface="Palatino Linotype"/>
-              </a:defRPr>
-            </a:pPr>
-            <a:r>
-              <a:t>Goodput-optimal placement</a:t>
-            </a:r>
-          </a:p>
-          <a:p>
-            <a:pPr>
-              <a:spcBef>
-                <a:spcPts val="600"/>
-              </a:spcBef>
-              <a:defRPr sz="1500" b="0">
-                <a:solidFill>
-                  <a:srgbClr val="333333"/>
-                </a:solidFill>
-                <a:latin typeface="Palatino Linotype"/>
-              </a:defRPr>
-            </a:pPr>
-            <a:r>
-              <a:t>Automatic parallelism optimization</a:t>
-            </a:r>
-          </a:p>
-          <a:p>
-            <a:pPr>
-              <a:spcBef>
-                <a:spcPts val="600"/>
-              </a:spcBef>
-              <a:defRPr sz="1500" b="1">
-                <a:solidFill>
-                  <a:srgbClr val="1E8A4C"/>
-                </a:solidFill>
-                <a:latin typeface="Palatino Linotype"/>
-              </a:defRPr>
-            </a:pPr>
-            <a:r>
-              <a:t>Up to 7.4x higher request rate</a:t>
-            </a:r>
-          </a:p>
-          <a:p>
-            <a:pPr>
-              <a:spcBef>
-                <a:spcPts val="600"/>
-              </a:spcBef>
-              <a:defRPr sz="1500" b="1">
-                <a:solidFill>
-                  <a:srgbClr val="1E8A4C"/>
-                </a:solidFill>
-                <a:latin typeface="Palatino Linotype"/>
-              </a:defRPr>
-            </a:pPr>
-            <a:r>
-              <a:t>Up to 12.6x tighter SLO</a:t>
-            </a:r>
-          </a:p>
-        </p:txBody>
-      </p:sp>
-      <p:sp>
-        <p:nvSpPr>
-          <p:cNvPr id="7" name="Rectangle 6"/>
-          <p:cNvSpPr/>
-          <p:nvPr/>
-        </p:nvSpPr>
-        <p:spPr>
-          <a:xfrm>
-            <a:off x="1097280" y="4206240"/>
-            <a:ext cx="10058400" cy="1097280"/>
-          </a:xfrm>
-          <a:prstGeom prst="rect">
-            <a:avLst/>
-          </a:prstGeom>
-          <a:solidFill>
-            <a:srgbClr val="F8F9FA"/>
-          </a:solidFill>
-          <a:ln>
-            <a:noFill/>
-          </a:ln>
-        </p:spPr>
-        <p:style>
-          <a:lnRef idx="1">
-            <a:schemeClr val="accent1"/>
-          </a:lnRef>
-          <a:fillRef idx="3">
-            <a:schemeClr val="accent1"/>
-          </a:fillRef>
-          <a:effectRef idx="2">
-            <a:schemeClr val="accent1"/>
-          </a:effectRef>
-          <a:fontRef idx="minor">
-            <a:schemeClr val="lt1"/>
-          </a:fontRef>
-        </p:style>
-        <p:txBody>
-          <a:bodyPr rtlCol="0" anchor="ctr"/>
-          <a:lstStyle/>
-          <a:p>
-            <a:pPr algn="ctr"/>
-            <a:endParaRPr/>
-          </a:p>
-        </p:txBody>
-      </p:sp>
-      <p:sp>
-        <p:nvSpPr>
-          <p:cNvPr id="8" name="TextBox 7"/>
-          <p:cNvSpPr txBox="1"/>
-          <p:nvPr/>
-        </p:nvSpPr>
-        <p:spPr>
-          <a:xfrm>
-            <a:off x="1371600" y="4297680"/>
-            <a:ext cx="9418320" cy="914400"/>
-          </a:xfrm>
-          <a:prstGeom prst="rect">
-            <a:avLst/>
-          </a:prstGeom>
-          <a:noFill/>
-        </p:spPr>
-        <p:txBody>
-          <a:bodyPr wrap="square">
-            <a:spAutoFit/>
-          </a:bodyPr>
-          <a:lstStyle/>
-          <a:p>
-            <a:pPr algn="ctr">
-              <a:defRPr sz="2000" b="0">
-                <a:solidFill>
-                  <a:srgbClr val="1A1A1A"/>
-                </a:solidFill>
-                <a:latin typeface="Palatino Linotype"/>
-              </a:defRPr>
-            </a:pPr>
-            <a:r>
-              <a:t>Prefill and decoding are different workloads.</a:t>
-            </a:r>
-          </a:p>
-          <a:p>
-            <a:pPr algn="ctr">
-              <a:spcBef>
-                <a:spcPts val="400"/>
-              </a:spcBef>
-              <a:defRPr sz="2000" b="1">
-                <a:solidFill>
-                  <a:srgbClr val="1A56DB"/>
-                </a:solidFill>
-                <a:latin typeface="Palatino Linotype"/>
-              </a:defRPr>
-            </a:pPr>
-            <a:r>
-              <a:t>Treating them as one wastes hardware, power, and money.</a:t>
-            </a:r>
-          </a:p>
-        </p:txBody>
-      </p:sp>
-      <p:sp>
-        <p:nvSpPr>
-          <p:cNvPr id="9" name="TextBox 8"/>
-          <p:cNvSpPr txBox="1"/>
-          <p:nvPr/>
-        </p:nvSpPr>
-        <p:spPr>
-          <a:xfrm>
-            <a:off x="11338560" y="6446520"/>
-            <a:ext cx="640080" cy="320040"/>
-          </a:xfrm>
-          <a:prstGeom prst="rect">
-            <a:avLst/>
-          </a:prstGeom>
-          <a:noFill/>
-        </p:spPr>
-        <p:txBody>
-          <a:bodyPr wrap="square">
-            <a:spAutoFit/>
-          </a:bodyPr>
-          <a:lstStyle/>
-          <a:p>
-            <a:pPr algn="r">
-              <a:defRPr sz="1000" b="0">
-                <a:solidFill>
-                  <a:srgbClr val="AAAAAA"/>
-                </a:solidFill>
-                <a:latin typeface="Palatino Linotype"/>
-              </a:defRPr>
-            </a:pPr>
-            <a:r>
-              <a:t>31</a:t>
-            </a:r>
-          </a:p>
-        </p:txBody>
-      </p:sp>
-    </p:spTree>
-  </p:cSld>
-  <p:clrMapOvr>
-    <a:masterClrMapping/>
-  </p:clrMapOvr>
-</p:sld>
-</file>
-
-<file path=ppt/slides/slide32.xml><?xml version="1.0" encoding="utf-8"?>
-<p:sld xmlns:a="http://schemas.openxmlformats.org/drawingml/2006/main" xmlns:r="http://schemas.openxmlformats.org/officeDocument/2006/relationships" xmlns:p="http://schemas.openxmlformats.org/presentationml/2006/main">
-  <p:cSld>
-    <p:bg>
-      <p:bgPr>
-        <a:solidFill>
-          <a:srgbClr val="FFFFFF"/>
-        </a:solidFill>
-        <a:effectLst/>
-      </p:bgPr>
-    </p:bg>
-    <p:spTree>
-      <p:nvGrpSpPr>
-        <p:cNvPr id="1" name=""/>
-        <p:cNvGrpSpPr/>
-        <p:nvPr/>
-      </p:nvGrpSpPr>
-      <p:grpSpPr>
-        <a:xfrm>
-          <a:off x="0" y="0"/>
-          <a:ext cx="0" cy="0"/>
-          <a:chOff x="0" y="0"/>
-          <a:chExt cx="0" cy="0"/>
-        </a:xfrm>
-      </p:grpSpPr>
-      <p:sp>
-        <p:nvSpPr>
-          <p:cNvPr id="2" name="TextBox 1"/>
-          <p:cNvSpPr txBox="1"/>
-          <p:nvPr/>
-        </p:nvSpPr>
-        <p:spPr>
-          <a:xfrm>
-            <a:off x="1097280" y="457200"/>
-            <a:ext cx="10058400" cy="640080"/>
-          </a:xfrm>
-          <a:prstGeom prst="rect">
-            <a:avLst/>
-          </a:prstGeom>
-          <a:noFill/>
-        </p:spPr>
-        <p:txBody>
-          <a:bodyPr wrap="square">
-            <a:spAutoFit/>
-          </a:bodyPr>
-          <a:lstStyle/>
-          <a:p>
-            <a:pPr algn="l">
-              <a:defRPr sz="3400" b="1">
-                <a:solidFill>
-                  <a:srgbClr val="1A1A1A"/>
-                </a:solidFill>
-                <a:latin typeface="Palatino Linotype"/>
-              </a:defRPr>
-            </a:pPr>
-            <a:r>
-              <a:t>References</a:t>
-            </a:r>
-          </a:p>
-        </p:txBody>
-      </p:sp>
-      <p:sp>
-        <p:nvSpPr>
-          <p:cNvPr id="3" name="TextBox 2"/>
-          <p:cNvSpPr txBox="1"/>
-          <p:nvPr/>
-        </p:nvSpPr>
-        <p:spPr>
-          <a:xfrm>
-            <a:off x="1097280" y="1371600"/>
-            <a:ext cx="9601200" cy="5029200"/>
-          </a:xfrm>
-          <a:prstGeom prst="rect">
-            <a:avLst/>
-          </a:prstGeom>
-          <a:noFill/>
-        </p:spPr>
-        <p:txBody>
-          <a:bodyPr wrap="square">
-            <a:spAutoFit/>
-          </a:bodyPr>
-          <a:lstStyle/>
-          <a:p>
-            <a:pPr algn="l">
-              <a:defRPr sz="1300" b="0">
-                <a:solidFill>
-                  <a:srgbClr val="333333"/>
-                </a:solidFill>
-                <a:latin typeface="Palatino Linotype"/>
-              </a:defRPr>
-            </a:pPr>
-            <a:r>
-              <a:t>[1]  P. Patel, E. Choukse, C. Zhang, A. Shah, I. Goiri, S. Maleki, R. Bianchini.</a:t>
-            </a:r>
-          </a:p>
-          <a:p>
-            <a:pPr algn="l">
-              <a:spcBef>
-                <a:spcPts val="100"/>
-              </a:spcBef>
-              <a:defRPr sz="1300" b="0">
-                <a:solidFill>
-                  <a:srgbClr val="333333"/>
-                </a:solidFill>
-                <a:latin typeface="Palatino Linotype"/>
-              </a:defRPr>
-            </a:pPr>
-            <a:r>
-              <a:t>     "Splitwise: Efficient Generative LLM Inference Using Phase Splitting."</a:t>
-            </a:r>
-          </a:p>
-          <a:p>
-            <a:pPr algn="l">
-              <a:spcBef>
-                <a:spcPts val="100"/>
-              </a:spcBef>
-              <a:defRPr sz="1300" b="0">
-                <a:solidFill>
-                  <a:srgbClr val="333333"/>
-                </a:solidFill>
-                <a:latin typeface="Palatino Linotype"/>
-              </a:defRPr>
-            </a:pPr>
-            <a:r>
-              <a:t>     ISCA 2024. arXiv:2311.18677</a:t>
-            </a:r>
-          </a:p>
-          <a:p>
-            <a:pPr algn="l">
-              <a:spcBef>
-                <a:spcPts val="100"/>
-              </a:spcBef>
-              <a:defRPr sz="1300" b="0">
-                <a:solidFill>
-                  <a:srgbClr val="333333"/>
-                </a:solidFill>
-                <a:latin typeface="Palatino Linotype"/>
-              </a:defRPr>
-            </a:pPr>
-            <a:endParaRPr/>
-          </a:p>
-          <a:p>
-            <a:pPr algn="l">
-              <a:spcBef>
-                <a:spcPts val="100"/>
-              </a:spcBef>
-              <a:defRPr sz="1300" b="0">
-                <a:solidFill>
-                  <a:srgbClr val="333333"/>
-                </a:solidFill>
-                <a:latin typeface="Palatino Linotype"/>
-              </a:defRPr>
-            </a:pPr>
-            <a:r>
-              <a:t>[2]  Y. Zhong, S. Liu, J. Chen, J. Hu, Y. Zhu, X. Liu, X. Jin, H. Zhang.</a:t>
-            </a:r>
-          </a:p>
-          <a:p>
-            <a:pPr algn="l">
-              <a:spcBef>
-                <a:spcPts val="100"/>
-              </a:spcBef>
-              <a:defRPr sz="1300" b="0">
-                <a:solidFill>
-                  <a:srgbClr val="333333"/>
-                </a:solidFill>
-                <a:latin typeface="Palatino Linotype"/>
-              </a:defRPr>
-            </a:pPr>
-            <a:r>
-              <a:t>     "DistServe: Disaggregating Prefill and Decoding for Goodput-optimized</a:t>
-            </a:r>
-          </a:p>
-          <a:p>
-            <a:pPr algn="l">
-              <a:spcBef>
-                <a:spcPts val="100"/>
-              </a:spcBef>
-              <a:defRPr sz="1300" b="0">
-                <a:solidFill>
-                  <a:srgbClr val="333333"/>
-                </a:solidFill>
-                <a:latin typeface="Palatino Linotype"/>
-              </a:defRPr>
-            </a:pPr>
-            <a:r>
-              <a:t>     Large Language Model Serving."  OSDI 2024. arXiv:2401.09670</a:t>
-            </a:r>
-          </a:p>
-          <a:p>
-            <a:pPr algn="l">
-              <a:spcBef>
-                <a:spcPts val="100"/>
-              </a:spcBef>
-              <a:defRPr sz="1300" b="0">
-                <a:solidFill>
-                  <a:srgbClr val="333333"/>
-                </a:solidFill>
-                <a:latin typeface="Palatino Linotype"/>
-              </a:defRPr>
-            </a:pPr>
-            <a:endParaRPr/>
-          </a:p>
-          <a:p>
-            <a:pPr algn="l">
-              <a:spcBef>
-                <a:spcPts val="100"/>
-              </a:spcBef>
-              <a:defRPr sz="1300" b="0">
-                <a:solidFill>
-                  <a:srgbClr val="333333"/>
-                </a:solidFill>
-                <a:latin typeface="Palatino Linotype"/>
-              </a:defRPr>
-            </a:pPr>
-            <a:r>
-              <a:t>[3]  A. Agrawal et al. Sarathi: Efficient LLM Inference by Piggybacking Decodes</a:t>
-            </a:r>
-          </a:p>
-          <a:p>
-            <a:pPr algn="l">
-              <a:spcBef>
-                <a:spcPts val="100"/>
-              </a:spcBef>
-              <a:defRPr sz="1300" b="0">
-                <a:solidFill>
-                  <a:srgbClr val="333333"/>
-                </a:solidFill>
-                <a:latin typeface="Palatino Linotype"/>
-              </a:defRPr>
-            </a:pPr>
-            <a:r>
-              <a:t>     with Chunked Prefills. arXiv:2308.16369, 2023.</a:t>
-            </a:r>
-          </a:p>
-          <a:p>
-            <a:pPr algn="l">
-              <a:spcBef>
-                <a:spcPts val="100"/>
-              </a:spcBef>
-              <a:defRPr sz="1300" b="0">
-                <a:solidFill>
-                  <a:srgbClr val="333333"/>
-                </a:solidFill>
-                <a:latin typeface="Palatino Linotype"/>
-              </a:defRPr>
-            </a:pPr>
-            <a:endParaRPr/>
-          </a:p>
-          <a:p>
-            <a:pPr algn="l">
-              <a:spcBef>
-                <a:spcPts val="100"/>
-              </a:spcBef>
-              <a:defRPr sz="1300" b="0">
-                <a:solidFill>
-                  <a:srgbClr val="333333"/>
-                </a:solidFill>
-                <a:latin typeface="Palatino Linotype"/>
-              </a:defRPr>
-            </a:pPr>
-            <a:r>
-              <a:t>[4]  W. Kwon et al. Efficient Memory Management for Large Language Model Serving</a:t>
-            </a:r>
-          </a:p>
-          <a:p>
-            <a:pPr algn="l">
-              <a:spcBef>
-                <a:spcPts val="100"/>
-              </a:spcBef>
-              <a:defRPr sz="1300" b="0">
-                <a:solidFill>
-                  <a:srgbClr val="333333"/>
-                </a:solidFill>
-                <a:latin typeface="Palatino Linotype"/>
-              </a:defRPr>
-            </a:pPr>
-            <a:r>
-              <a:t>     with PagedAttention (vLLM). SOSP 2023.</a:t>
-            </a:r>
-          </a:p>
-          <a:p>
-            <a:pPr algn="l">
-              <a:spcBef>
-                <a:spcPts val="100"/>
-              </a:spcBef>
-              <a:defRPr sz="1300" b="0">
-                <a:solidFill>
-                  <a:srgbClr val="333333"/>
-                </a:solidFill>
-                <a:latin typeface="Palatino Linotype"/>
-              </a:defRPr>
-            </a:pPr>
-            <a:endParaRPr/>
-          </a:p>
-          <a:p>
-            <a:pPr algn="l">
-              <a:spcBef>
-                <a:spcPts val="100"/>
-              </a:spcBef>
-              <a:defRPr sz="1300" b="0">
-                <a:solidFill>
-                  <a:srgbClr val="333333"/>
-                </a:solidFill>
-                <a:latin typeface="Palatino Linotype"/>
-              </a:defRPr>
-            </a:pPr>
-            <a:r>
-              <a:t>[5]  Y. Sheng et al. FlexGen: High-Throughput Generative Inference of Large Language</a:t>
-            </a:r>
-          </a:p>
-          <a:p>
-            <a:pPr algn="l">
-              <a:spcBef>
-                <a:spcPts val="100"/>
-              </a:spcBef>
-              <a:defRPr sz="1300" b="0">
-                <a:solidFill>
-                  <a:srgbClr val="333333"/>
-                </a:solidFill>
-                <a:latin typeface="Palatino Linotype"/>
-              </a:defRPr>
-            </a:pPr>
-            <a:r>
-              <a:t>     Models with a Single GPU. ICML 2023.</a:t>
-            </a:r>
-          </a:p>
-        </p:txBody>
-      </p:sp>
-      <p:sp>
-        <p:nvSpPr>
-          <p:cNvPr id="4" name="TextBox 3"/>
-          <p:cNvSpPr txBox="1"/>
-          <p:nvPr/>
-        </p:nvSpPr>
-        <p:spPr>
-          <a:xfrm>
-            <a:off x="11338560" y="6446520"/>
-            <a:ext cx="640080" cy="320040"/>
-          </a:xfrm>
-          <a:prstGeom prst="rect">
-            <a:avLst/>
-          </a:prstGeom>
-          <a:noFill/>
-        </p:spPr>
-        <p:txBody>
-          <a:bodyPr wrap="square">
-            <a:spAutoFit/>
-          </a:bodyPr>
-          <a:lstStyle/>
-          <a:p>
-            <a:pPr algn="r">
-              <a:defRPr sz="1000" b="0">
-                <a:solidFill>
-                  <a:srgbClr val="AAAAAA"/>
-                </a:solidFill>
-                <a:latin typeface="Palatino Linotype"/>
-              </a:defRPr>
-            </a:pPr>
-            <a:r>
-              <a:t>32</a:t>
-            </a:r>
-          </a:p>
-        </p:txBody>
-      </p:sp>
-    </p:spTree>
-  </p:cSld>
-  <p:clrMapOvr>
-    <a:masterClrMapping/>
-  </p:clrMapOvr>
-</p:sld>
-</file>
-
-<file path=ppt/slides/slide33.xml><?xml version="1.0" encoding="utf-8"?>
 <p:sld xmlns:a="http://schemas.openxmlformats.org/drawingml/2006/main" xmlns:r="http://schemas.openxmlformats.org/officeDocument/2006/relationships" xmlns:p="http://schemas.openxmlformats.org/presentationml/2006/main">
   <p:cSld>
     <p:bg>
@@ -14191,13 +12490,13 @@
           <a:noFill/>
         </p:spPr>
         <p:txBody>
-          <a:bodyPr wrap="square">
+          <a:bodyPr wrap="none">
             <a:spAutoFit/>
           </a:bodyPr>
           <a:lstStyle/>
           <a:p>
             <a:pPr algn="r">
-              <a:defRPr sz="1000" b="0">
+              <a:defRPr sz="1000">
                 <a:solidFill>
                   <a:srgbClr val="556688"/>
                 </a:solidFill>
@@ -14205,7 +12504,7 @@
               </a:defRPr>
             </a:pPr>
             <a:r>
-              <a:t>33</a:t>
+              <a:t>29</a:t>
             </a:r>
           </a:p>
         </p:txBody>
@@ -15007,13 +13306,13 @@
           <a:noFill/>
         </p:spPr>
         <p:txBody>
-          <a:bodyPr wrap="square">
+          <a:bodyPr wrap="none">
             <a:spAutoFit/>
           </a:bodyPr>
           <a:lstStyle/>
           <a:p>
             <a:pPr algn="r">
-              <a:defRPr sz="1000" b="0">
+              <a:defRPr sz="1000">
                 <a:solidFill>
                   <a:srgbClr val="AAAAAA"/>
                 </a:solidFill>
@@ -15021,7 +13320,7 @@
               </a:defRPr>
             </a:pPr>
             <a:r>
-              <a:t>4</a:t>
+              <a:t>3</a:t>
             </a:r>
           </a:p>
         </p:txBody>
@@ -15790,13 +14089,13 @@
           <a:noFill/>
         </p:spPr>
         <p:txBody>
-          <a:bodyPr wrap="square">
+          <a:bodyPr wrap="none">
             <a:spAutoFit/>
           </a:bodyPr>
           <a:lstStyle/>
           <a:p>
             <a:pPr algn="r">
-              <a:defRPr sz="1000" b="0">
+              <a:defRPr sz="1000">
                 <a:solidFill>
                   <a:srgbClr val="AAAAAA"/>
                 </a:solidFill>
@@ -15804,7 +14103,7 @@
               </a:defRPr>
             </a:pPr>
             <a:r>
-              <a:t>5</a:t>
+              <a:t>4</a:t>
             </a:r>
           </a:p>
         </p:txBody>
@@ -16407,13 +14706,13 @@
           <a:noFill/>
         </p:spPr>
         <p:txBody>
-          <a:bodyPr wrap="square">
+          <a:bodyPr wrap="none">
             <a:spAutoFit/>
           </a:bodyPr>
           <a:lstStyle/>
           <a:p>
             <a:pPr algn="r">
-              <a:defRPr sz="1000" b="0">
+              <a:defRPr sz="1000">
                 <a:solidFill>
                   <a:srgbClr val="AAAAAA"/>
                 </a:solidFill>
@@ -16421,7 +14720,7 @@
               </a:defRPr>
             </a:pPr>
             <a:r>
-              <a:t>6</a:t>
+              <a:t>5</a:t>
             </a:r>
           </a:p>
         </p:txBody>
@@ -16572,13 +14871,13 @@
           <a:noFill/>
         </p:spPr>
         <p:txBody>
-          <a:bodyPr wrap="square">
+          <a:bodyPr wrap="none">
             <a:spAutoFit/>
           </a:bodyPr>
           <a:lstStyle/>
           <a:p>
             <a:pPr algn="r">
-              <a:defRPr sz="1000" b="0">
+              <a:defRPr sz="1000">
                 <a:solidFill>
                   <a:srgbClr val="AAAAAA"/>
                 </a:solidFill>
@@ -16586,7 +14885,7 @@
               </a:defRPr>
             </a:pPr>
             <a:r>
-              <a:t>7</a:t>
+              <a:t>6</a:t>
             </a:r>
           </a:p>
         </p:txBody>
@@ -16773,13 +15072,13 @@
           <a:noFill/>
         </p:spPr>
         <p:txBody>
-          <a:bodyPr wrap="square">
+          <a:bodyPr wrap="none">
             <a:spAutoFit/>
           </a:bodyPr>
           <a:lstStyle/>
           <a:p>
             <a:pPr algn="r">
-              <a:defRPr sz="1000" b="0">
+              <a:defRPr sz="1000">
                 <a:solidFill>
                   <a:srgbClr val="556688"/>
                 </a:solidFill>
@@ -16787,7 +15086,7 @@
               </a:defRPr>
             </a:pPr>
             <a:r>
-              <a:t>8</a:t>
+              <a:t>7</a:t>
             </a:r>
           </a:p>
         </p:txBody>
@@ -17462,13 +15761,13 @@
           <a:noFill/>
         </p:spPr>
         <p:txBody>
-          <a:bodyPr wrap="square">
+          <a:bodyPr wrap="none">
             <a:spAutoFit/>
           </a:bodyPr>
           <a:lstStyle/>
           <a:p>
             <a:pPr algn="r">
-              <a:defRPr sz="1000" b="0">
+              <a:defRPr sz="1000">
                 <a:solidFill>
                   <a:srgbClr val="AAAAAA"/>
                 </a:solidFill>
@@ -17476,7 +15775,7 @@
               </a:defRPr>
             </a:pPr>
             <a:r>
-              <a:t>9</a:t>
+              <a:t>8</a:t>
             </a:r>
           </a:p>
         </p:txBody>
